--- a/education playground/assets/executive copilot playbook/Copilot-Premium-Executive-Training.pptx
+++ b/education playground/assets/executive copilot playbook/Copilot-Premium-Executive-Training.pptx
@@ -18445,7 +18445,7 @@
                 <a:ea typeface="Aptos" pitchFamily="34" charset="-122"/>
                 <a:cs typeface="Aptos" pitchFamily="34" charset="-120"/>
               </a:rPr>
-              <a:t>Not used to train public models</a:t>
+              <a:t>Not used to train models</a:t>
             </a:r>
             <a:endParaRPr lang="en-US" sz="1550" dirty="0"/>
           </a:p>

--- a/education playground/assets/executive copilot playbook/Copilot-Premium-Executive-Training.pptx
+++ b/education playground/assets/executive copilot playbook/Copilot-Premium-Executive-Training.pptx
@@ -12,18 +12,24 @@
     <p:sldId id="260" r:id="rId6"/>
     <p:sldId id="261" r:id="rId7"/>
     <p:sldId id="262" r:id="rId8"/>
+    <p:sldId id="277" r:id="rId29"/>
     <p:sldId id="263" r:id="rId9"/>
     <p:sldId id="264" r:id="rId10"/>
     <p:sldId id="265" r:id="rId11"/>
     <p:sldId id="266" r:id="rId12"/>
+    <p:sldId id="278" r:id="rId32"/>
     <p:sldId id="267" r:id="rId13"/>
     <p:sldId id="268" r:id="rId14"/>
     <p:sldId id="269" r:id="rId15"/>
+    <p:sldId id="279" r:id="rId30"/>
     <p:sldId id="270" r:id="rId16"/>
     <p:sldId id="271" r:id="rId17"/>
     <p:sldId id="272" r:id="rId18"/>
+    <p:sldId id="280" r:id="rId31"/>
     <p:sldId id="273" r:id="rId19"/>
     <p:sldId id="274" r:id="rId20"/>
+    <p:sldId id="281" r:id="rId28"/>
+    <p:sldId id="282" r:id="rId33"/>
     <p:sldId id="275" r:id="rId21"/>
   </p:sldIdLst>
   <p:notesMasterIdLst>
@@ -2663,7 +2669,7 @@
                 <a:ea typeface="Aptos" pitchFamily="34" charset="-122"/>
                 <a:cs typeface="Aptos" pitchFamily="34" charset="-120"/>
               </a:rPr>
-              <a:t>EXECUTIVE WORKING SESSION · 30 MINUTES</a:t>
+              <a:t>EXECUTIVE ENABLEMENT PROGRAM · 3 TIERS · 9 SESSIONS</a:t>
             </a:r>
             <a:endParaRPr lang="en-US" sz="1200" dirty="0"/>
           </a:p>
@@ -3536,7 +3542,7 @@
       </p:sp>
       <p:pic>
         <p:nvPicPr>
-          <p:cNvPr id="9" name="Image 0" descr="preencoded.png">    </p:cNvPr>
+          <p:cNvPr id="9" name="Image 0" descr="preencoded.png"/>
           <p:cNvPicPr>
             <a:picLocks noChangeAspect="1"/>
           </p:cNvPicPr>
@@ -3701,7 +3707,7 @@
                 <a:ea typeface="Consolas" pitchFamily="34" charset="-122"/>
                 <a:cs typeface="Consolas" pitchFamily="34" charset="-120"/>
               </a:rPr>
-              <a:t>› </a:t>
+              <a:t xml:space="preserve">› </a:t>
             </a:r>
             <a:pPr algn="l" indent="0" marL="0">
               <a:buNone/>
@@ -3804,7 +3810,7 @@
       </p:sp>
       <p:pic>
         <p:nvPicPr>
-          <p:cNvPr id="17" name="Image 1" descr="preencoded.png">    </p:cNvPr>
+          <p:cNvPr id="17" name="Image 1" descr="preencoded.png"/>
           <p:cNvPicPr>
             <a:picLocks noChangeAspect="1"/>
           </p:cNvPicPr>
@@ -3962,7 +3968,7 @@
                 <a:ea typeface="Consolas" pitchFamily="34" charset="-122"/>
                 <a:cs typeface="Consolas" pitchFamily="34" charset="-120"/>
               </a:rPr>
-              <a:t>› </a:t>
+              <a:t xml:space="preserve">› </a:t>
             </a:r>
             <a:pPr algn="l" indent="0" marL="0">
               <a:buNone/>
@@ -4065,7 +4071,7 @@
       </p:sp>
       <p:pic>
         <p:nvPicPr>
-          <p:cNvPr id="25" name="Image 2" descr="preencoded.png">    </p:cNvPr>
+          <p:cNvPr id="25" name="Image 2" descr="preencoded.png"/>
           <p:cNvPicPr>
             <a:picLocks noChangeAspect="1"/>
           </p:cNvPicPr>
@@ -4230,7 +4236,7 @@
                 <a:ea typeface="Consolas" pitchFamily="34" charset="-122"/>
                 <a:cs typeface="Consolas" pitchFamily="34" charset="-120"/>
               </a:rPr>
-              <a:t>› </a:t>
+              <a:t xml:space="preserve">› </a:t>
             </a:r>
             <a:pPr algn="l" indent="0" marL="0">
               <a:buNone/>
@@ -4333,7 +4339,7 @@
       </p:sp>
       <p:pic>
         <p:nvPicPr>
-          <p:cNvPr id="33" name="Image 3" descr="preencoded.png">    </p:cNvPr>
+          <p:cNvPr id="33" name="Image 3" descr="preencoded.png"/>
           <p:cNvPicPr>
             <a:picLocks noChangeAspect="1"/>
           </p:cNvPicPr>
@@ -4491,7 +4497,7 @@
                 <a:ea typeface="Consolas" pitchFamily="34" charset="-122"/>
                 <a:cs typeface="Consolas" pitchFamily="34" charset="-120"/>
               </a:rPr>
-              <a:t>› </a:t>
+              <a:t xml:space="preserve">› </a:t>
             </a:r>
             <a:pPr algn="l" indent="0" marL="0">
               <a:buNone/>
@@ -4594,7 +4600,7 @@
       </p:sp>
       <p:pic>
         <p:nvPicPr>
-          <p:cNvPr id="41" name="Image 4" descr="preencoded.png">    </p:cNvPr>
+          <p:cNvPr id="41" name="Image 4" descr="preencoded.png"/>
           <p:cNvPicPr>
             <a:picLocks noChangeAspect="1"/>
           </p:cNvPicPr>
@@ -4759,7 +4765,7 @@
                 <a:ea typeface="Consolas" pitchFamily="34" charset="-122"/>
                 <a:cs typeface="Consolas" pitchFamily="34" charset="-120"/>
               </a:rPr>
-              <a:t>› </a:t>
+              <a:t xml:space="preserve">› </a:t>
             </a:r>
             <a:pPr algn="l" indent="0" marL="0">
               <a:buNone/>
@@ -4862,7 +4868,7 @@
       </p:sp>
       <p:pic>
         <p:nvPicPr>
-          <p:cNvPr id="49" name="Image 5" descr="preencoded.png">    </p:cNvPr>
+          <p:cNvPr id="49" name="Image 5" descr="preencoded.png"/>
           <p:cNvPicPr>
             <a:picLocks noChangeAspect="1"/>
           </p:cNvPicPr>
@@ -5027,7 +5033,7 @@
                 <a:ea typeface="Consolas" pitchFamily="34" charset="-122"/>
                 <a:cs typeface="Consolas" pitchFamily="34" charset="-120"/>
               </a:rPr>
-              <a:t>› </a:t>
+              <a:t xml:space="preserve">› </a:t>
             </a:r>
             <a:pPr algn="l" indent="0" marL="0">
               <a:buNone/>
@@ -5119,7 +5125,7 @@
                 <a:ea typeface="Aptos" pitchFamily="34" charset="-122"/>
                 <a:cs typeface="Aptos" pitchFamily="34" charset="-120"/>
               </a:rPr>
-              <a:t>9</a:t>
+              <a:t>11</a:t>
             </a:r>
             <a:endParaRPr lang="en-US" sz="900" dirty="0"/>
           </a:p>
@@ -5421,7 +5427,7 @@
       </p:sp>
       <p:pic>
         <p:nvPicPr>
-          <p:cNvPr id="10" name="Image 0" descr="preencoded.png">    </p:cNvPr>
+          <p:cNvPr id="10" name="Image 0" descr="preencoded.png"/>
           <p:cNvPicPr>
             <a:picLocks noChangeAspect="1"/>
           </p:cNvPicPr>
@@ -5653,7 +5659,7 @@
       </p:sp>
       <p:pic>
         <p:nvPicPr>
-          <p:cNvPr id="17" name="Image 1" descr="preencoded.png">    </p:cNvPr>
+          <p:cNvPr id="17" name="Image 1" descr="preencoded.png"/>
           <p:cNvPicPr>
             <a:picLocks noChangeAspect="1"/>
           </p:cNvPicPr>
@@ -5885,7 +5891,7 @@
       </p:sp>
       <p:pic>
         <p:nvPicPr>
-          <p:cNvPr id="24" name="Image 2" descr="preencoded.png">    </p:cNvPr>
+          <p:cNvPr id="24" name="Image 2" descr="preencoded.png"/>
           <p:cNvPicPr>
             <a:picLocks noChangeAspect="1"/>
           </p:cNvPicPr>
@@ -6121,7 +6127,7 @@
                 <a:ea typeface="Consolas" pitchFamily="34" charset="-122"/>
                 <a:cs typeface="Consolas" pitchFamily="34" charset="-120"/>
               </a:rPr>
-              <a:t>›_  </a:t>
+              <a:t xml:space="preserve">›_  </a:t>
             </a:r>
             <a:pPr algn="l" indent="0" marL="0">
               <a:buNone/>
@@ -6270,7 +6276,7 @@
                 <a:ea typeface="Consolas" pitchFamily="34" charset="-122"/>
                 <a:cs typeface="Consolas" pitchFamily="34" charset="-120"/>
               </a:rPr>
-              <a:t>›_  </a:t>
+              <a:t xml:space="preserve">›_  </a:t>
             </a:r>
             <a:pPr algn="l" indent="0" marL="0">
               <a:buNone/>
@@ -6365,7 +6371,7 @@
                 <a:ea typeface="Aptos" pitchFamily="34" charset="-122"/>
                 <a:cs typeface="Aptos" pitchFamily="34" charset="-120"/>
               </a:rPr>
-              <a:t>Curated set:  </a:t>
+              <a:t xml:space="preserve">Curated set:  </a:t>
             </a:r>
             <a:pPr algn="l" indent="0" marL="0">
               <a:buNone/>
@@ -6478,7 +6484,7 @@
                 <a:ea typeface="Aptos" pitchFamily="34" charset="-122"/>
                 <a:cs typeface="Aptos" pitchFamily="34" charset="-120"/>
               </a:rPr>
-              <a:t>10</a:t>
+              <a:t>12</a:t>
             </a:r>
             <a:endParaRPr lang="en-US" sz="900" dirty="0"/>
           </a:p>
@@ -7104,7 +7110,7 @@
       </p:sp>
       <p:pic>
         <p:nvPicPr>
-          <p:cNvPr id="10" name="Image 0" descr="preencoded.png">    </p:cNvPr>
+          <p:cNvPr id="10" name="Image 0" descr="preencoded.png"/>
           <p:cNvPicPr>
             <a:picLocks noChangeAspect="1"/>
           </p:cNvPicPr>
@@ -7506,7 +7512,7 @@
       </p:sp>
       <p:pic>
         <p:nvPicPr>
-          <p:cNvPr id="23" name="Image 1" descr="preencoded.png">    </p:cNvPr>
+          <p:cNvPr id="23" name="Image 1" descr="preencoded.png"/>
           <p:cNvPicPr>
             <a:picLocks noChangeAspect="1"/>
           </p:cNvPicPr>
@@ -7885,7 +7891,7 @@
                 <a:ea typeface="Aptos" pitchFamily="34" charset="-122"/>
                 <a:cs typeface="Aptos" pitchFamily="34" charset="-120"/>
               </a:rPr>
-              <a:t>The executive move:  </a:t>
+              <a:t xml:space="preserve">The executive move:  </a:t>
             </a:r>
             <a:pPr algn="l" indent="0" marL="0">
               <a:buNone/>
@@ -7977,7 +7983,7 @@
                 <a:ea typeface="Aptos" pitchFamily="34" charset="-122"/>
                 <a:cs typeface="Aptos" pitchFamily="34" charset="-120"/>
               </a:rPr>
-              <a:t>11</a:t>
+              <a:t>15</a:t>
             </a:r>
             <a:endParaRPr lang="en-US" sz="900" dirty="0"/>
           </a:p>
@@ -8225,7 +8231,7 @@
       </p:sp>
       <p:pic>
         <p:nvPicPr>
-          <p:cNvPr id="8" name="Image 0" descr="preencoded.png">    </p:cNvPr>
+          <p:cNvPr id="8" name="Image 0" descr="preencoded.png"/>
           <p:cNvPicPr>
             <a:picLocks noChangeAspect="1"/>
           </p:cNvPicPr>
@@ -8334,7 +8340,7 @@
                 <a:ea typeface="Consolas" pitchFamily="34" charset="-122"/>
                 <a:cs typeface="Consolas" pitchFamily="34" charset="-120"/>
               </a:rPr>
-              <a:t>›_  </a:t>
+              <a:t xml:space="preserve">›_  </a:t>
             </a:r>
             <a:pPr algn="l" indent="0" marL="0">
               <a:buNone/>
@@ -8390,7 +8396,7 @@
                 <a:ea typeface="Consolas" pitchFamily="34" charset="-122"/>
                 <a:cs typeface="Consolas" pitchFamily="34" charset="-120"/>
               </a:rPr>
-              <a:t>Act as my strategy analyst. Research how leading health systems are using AI to improve </a:t>
+              <a:t xml:space="preserve">Act as my strategy analyst. Research how leading health systems are using AI to improve </a:t>
             </a:r>
             <a:pPr algn="l" indent="0" marL="0">
               <a:lnSpc>
@@ -8424,7 +8430,7 @@
                 <a:ea typeface="Consolas" pitchFamily="34" charset="-122"/>
                 <a:cs typeface="Consolas" pitchFamily="34" charset="-120"/>
               </a:rPr>
-              <a:t>. Ground it in our own board and strategy materials where you can, then add the open web. Give me </a:t>
+              <a:t xml:space="preserve">. Ground it in our own board and strategy materials where you can, then add the open web. Give me </a:t>
             </a:r>
             <a:pPr algn="l" indent="0" marL="0">
               <a:lnSpc>
@@ -8534,7 +8540,7 @@
                 <a:ea typeface="Consolas" pitchFamily="34" charset="-122"/>
                 <a:cs typeface="Consolas" pitchFamily="34" charset="-120"/>
               </a:rPr>
-              <a:t>›_  </a:t>
+              <a:t xml:space="preserve">›_  </a:t>
             </a:r>
             <a:pPr algn="l" indent="0" marL="0">
               <a:buNone/>
@@ -8656,7 +8662,7 @@
                 <a:ea typeface="Aptos" pitchFamily="34" charset="-122"/>
                 <a:cs typeface="Aptos" pitchFamily="34" charset="-120"/>
               </a:rPr>
-              <a:t>What you'll see:  </a:t>
+              <a:t xml:space="preserve">What you'll see:  </a:t>
             </a:r>
             <a:pPr algn="l" indent="0" marL="0">
               <a:buNone/>
@@ -8748,7 +8754,7 @@
                 <a:ea typeface="Aptos" pitchFamily="34" charset="-122"/>
                 <a:cs typeface="Aptos" pitchFamily="34" charset="-120"/>
               </a:rPr>
-              <a:t>12</a:t>
+              <a:t>16</a:t>
             </a:r>
             <a:endParaRPr lang="en-US" sz="900" dirty="0"/>
           </a:p>
@@ -8988,7 +8994,7 @@
                 <a:ea typeface="Aptos" pitchFamily="34" charset="-122"/>
                 <a:cs typeface="Aptos" pitchFamily="34" charset="-120"/>
               </a:rPr>
-              <a:t>TIER 3 · MAKE IT YOURS</a:t>
+              <a:t>TIER 3 · BUILD YOUR OWN</a:t>
             </a:r>
             <a:endParaRPr lang="en-US" sz="1300" dirty="0"/>
           </a:p>
@@ -9204,7 +9210,7 @@
                 <a:ea typeface="Aptos" pitchFamily="34" charset="-122"/>
                 <a:cs typeface="Aptos" pitchFamily="34" charset="-120"/>
               </a:rPr>
-              <a:t>COPILOT AS YOUR CHIEF OF STAFF</a:t>
+              <a:t>BUILD YOUR CHIEF OF STAFF AGENT</a:t>
             </a:r>
             <a:endParaRPr lang="en-US" sz="1200" dirty="0"/>
           </a:p>
@@ -9243,7 +9249,7 @@
                 <a:ea typeface="Aptos" pitchFamily="34" charset="-122"/>
                 <a:cs typeface="Aptos" pitchFamily="34" charset="-120"/>
               </a:rPr>
-              <a:t>Set it up once, and it comes to you</a:t>
+              <a:t>Build it once, and it works at your altitude</a:t>
             </a:r>
             <a:endParaRPr lang="en-US" sz="2900" dirty="0"/>
           </a:p>
@@ -9332,7 +9338,7 @@
       </p:sp>
       <p:pic>
         <p:nvPicPr>
-          <p:cNvPr id="9" name="Image 0" descr="preencoded.png">    </p:cNvPr>
+          <p:cNvPr id="9" name="Image 0" descr="preencoded.png"/>
           <p:cNvPicPr>
             <a:picLocks noChangeAspect="1"/>
           </p:cNvPicPr>
@@ -9387,28 +9393,21 @@
                 <a:ea typeface="Aptos" pitchFamily="34" charset="-122"/>
                 <a:cs typeface="Aptos" pitchFamily="34" charset="-120"/>
               </a:rPr>
-              <a:t>1   </a:t>
+              <a:t xml:space="preserve">1   </a:t>
             </a:r>
             <a:pPr indent="0" marL="0">
               <a:buNone/>
             </a:pPr>
             <a:r>
-              <a:rPr lang="en-US" sz="1600" b="1" u="sng" dirty="0">
+              <a:rPr lang="en-US" sz="1600" b="1" dirty="0">
                 <a:solidFill>
                   <a:srgbClr val="0B1437"/>
                 </a:solidFill>
                 <a:latin typeface="Aptos" pitchFamily="34" charset="0"/>
                 <a:ea typeface="Aptos" pitchFamily="34" charset="-122"/>
                 <a:cs typeface="Aptos" pitchFamily="34" charset="-120"/>
-                <a:hlinkClick r:id="rId2" invalidUrl="" action="" tgtFrame="" tooltip="" history="1" highlightClick="0" endSnd="0">
-                  <a:extLst>
-                    <a:ext uri="{A12FA001-AC4F-418D-AE19-62706E023703}">
-                      <ahyp:hlinkClr xmlns:ahyp="http://schemas.microsoft.com/office/drawing/2018/hyperlinkcolor" val="tx"/>
-                    </a:ext>
-                  </a:extLst>
-                </a:hlinkClick>
-              </a:rPr>
-              <a:t>Tell it who you are</a:t>
+              </a:rPr>
+              <a:t>Start from the template</a:t>
             </a:r>
             <a:endParaRPr lang="en-US" sz="1600" dirty="0"/>
           </a:p>
@@ -9450,7 +9449,7 @@
                 <a:ea typeface="Aptos" pitchFamily="34" charset="-122"/>
                 <a:cs typeface="Aptos" pitchFamily="34" charset="-120"/>
               </a:rPr>
-              <a:t>A short profile: your role, priorities, and how you like things written.</a:t>
+              <a:t>The Chief of Staff agent comes with a copy-paste setup and two Word templates.</a:t>
             </a:r>
             <a:endParaRPr lang="en-US" sz="1250" dirty="0"/>
           </a:p>
@@ -9539,7 +9538,7 @@
       </p:sp>
       <p:pic>
         <p:nvPicPr>
-          <p:cNvPr id="15" name="Image 1" descr="preencoded.png">    </p:cNvPr>
+          <p:cNvPr id="15" name="Image 1" descr="preencoded.png"/>
           <p:cNvPicPr>
             <a:picLocks noChangeAspect="1"/>
           </p:cNvPicPr>
@@ -9594,28 +9593,21 @@
                 <a:ea typeface="Aptos" pitchFamily="34" charset="-122"/>
                 <a:cs typeface="Aptos" pitchFamily="34" charset="-120"/>
               </a:rPr>
-              <a:t>2   </a:t>
+              <a:t xml:space="preserve">2   </a:t>
             </a:r>
             <a:pPr indent="0" marL="0">
               <a:buNone/>
             </a:pPr>
             <a:r>
-              <a:rPr lang="en-US" sz="1600" b="1" u="sng" dirty="0">
+              <a:rPr lang="en-US" sz="1600" b="1" dirty="0">
                 <a:solidFill>
                   <a:srgbClr val="0B1437"/>
                 </a:solidFill>
                 <a:latin typeface="Aptos" pitchFamily="34" charset="0"/>
                 <a:ea typeface="Aptos" pitchFamily="34" charset="-122"/>
                 <a:cs typeface="Aptos" pitchFamily="34" charset="-120"/>
-                <a:hlinkClick r:id="rId4" invalidUrl="" action="" tgtFrame="" tooltip="" history="1" highlightClick="0" endSnd="0">
-                  <a:extLst>
-                    <a:ext uri="{A12FA001-AC4F-418D-AE19-62706E023703}">
-                      <ahyp:hlinkClr xmlns:ahyp="http://schemas.microsoft.com/office/drawing/2018/hyperlinkcolor" val="tx"/>
-                    </a:ext>
-                  </a:extLst>
-                </a:hlinkClick>
-              </a:rPr>
-              <a:t>Let it remember</a:t>
+              </a:rPr>
+              <a:t>Give it your role</a:t>
             </a:r>
             <a:endParaRPr lang="en-US" sz="1600" dirty="0"/>
           </a:p>
@@ -9657,7 +9649,7 @@
                 <a:ea typeface="Aptos" pitchFamily="34" charset="-122"/>
                 <a:cs typeface="Aptos" pitchFamily="34" charset="-120"/>
               </a:rPr>
-              <a:t>Copilot Memory keeps your context so you do not repeat yourself.</a:t>
+              <a:t>Your priorities, your voice, and what you want it to protect on your calendar.</a:t>
             </a:r>
             <a:endParaRPr lang="en-US" sz="1250" dirty="0"/>
           </a:p>
@@ -9746,7 +9738,7 @@
       </p:sp>
       <p:pic>
         <p:nvPicPr>
-          <p:cNvPr id="21" name="Image 2" descr="preencoded.png">    </p:cNvPr>
+          <p:cNvPr id="21" name="Image 2" descr="preencoded.png"/>
           <p:cNvPicPr>
             <a:picLocks noChangeAspect="1"/>
           </p:cNvPicPr>
@@ -9801,26 +9793,19 @@
                 <a:ea typeface="Aptos" pitchFamily="34" charset="-122"/>
                 <a:cs typeface="Aptos" pitchFamily="34" charset="-120"/>
               </a:rPr>
-              <a:t>3   </a:t>
+              <a:t xml:space="preserve">3   </a:t>
             </a:r>
             <a:pPr indent="0" marL="0">
               <a:buNone/>
             </a:pPr>
             <a:r>
-              <a:rPr lang="en-US" sz="1600" b="1" u="sng" dirty="0">
+              <a:rPr lang="en-US" sz="1600" b="1" dirty="0">
                 <a:solidFill>
                   <a:srgbClr val="0B1437"/>
                 </a:solidFill>
                 <a:latin typeface="Aptos" pitchFamily="34" charset="0"/>
                 <a:ea typeface="Aptos" pitchFamily="34" charset="-122"/>
                 <a:cs typeface="Aptos" pitchFamily="34" charset="-120"/>
-                <a:hlinkClick r:id="rId6" invalidUrl="" action="" tgtFrame="" tooltip="" history="1" highlightClick="0" endSnd="0">
-                  <a:extLst>
-                    <a:ext uri="{A12FA001-AC4F-418D-AE19-62706E023703}">
-                      <ahyp:hlinkClr xmlns:ahyp="http://schemas.microsoft.com/office/drawing/2018/hyperlinkcolor" val="tx"/>
-                    </a:ext>
-                  </a:extLst>
-                </a:hlinkClick>
               </a:rPr>
               <a:t>Give it a standing job</a:t>
             </a:r>
@@ -9864,7 +9849,7 @@
                 <a:ea typeface="Aptos" pitchFamily="34" charset="-122"/>
                 <a:cs typeface="Aptos" pitchFamily="34" charset="-120"/>
               </a:rPr>
-              <a:t>Build a reusable agent that protects your time and thinks at your altitude.</a:t>
+              <a:t>A reusable operator that thinks at your altitude and sounds like you.</a:t>
             </a:r>
             <a:endParaRPr lang="en-US" sz="1250" dirty="0"/>
           </a:p>
@@ -9953,7 +9938,7 @@
       </p:sp>
       <p:pic>
         <p:nvPicPr>
-          <p:cNvPr id="27" name="Image 3" descr="preencoded.png">    </p:cNvPr>
+          <p:cNvPr id="27" name="Image 3" descr="preencoded.png"/>
           <p:cNvPicPr>
             <a:picLocks noChangeAspect="1"/>
           </p:cNvPicPr>
@@ -10008,28 +9993,21 @@
                 <a:ea typeface="Aptos" pitchFamily="34" charset="-122"/>
                 <a:cs typeface="Aptos" pitchFamily="34" charset="-120"/>
               </a:rPr>
-              <a:t>4   </a:t>
+              <a:t xml:space="preserve">4   </a:t>
             </a:r>
             <a:pPr indent="0" marL="0">
               <a:buNone/>
             </a:pPr>
             <a:r>
-              <a:rPr lang="en-US" sz="1600" b="1" u="sng" dirty="0">
+              <a:rPr lang="en-US" sz="1600" b="1" dirty="0">
                 <a:solidFill>
                   <a:srgbClr val="0B1437"/>
                 </a:solidFill>
                 <a:latin typeface="Aptos" pitchFamily="34" charset="0"/>
                 <a:ea typeface="Aptos" pitchFamily="34" charset="-122"/>
                 <a:cs typeface="Aptos" pitchFamily="34" charset="-120"/>
-                <a:hlinkClick r:id="rId8" invalidUrl="" action="" tgtFrame="" tooltip="" history="1" highlightClick="0" endSnd="0">
-                  <a:extLst>
-                    <a:ext uri="{A12FA001-AC4F-418D-AE19-62706E023703}">
-                      <ahyp:hlinkClr xmlns:ahyp="http://schemas.microsoft.com/office/drawing/2018/hyperlinkcolor" val="tx"/>
-                    </a:ext>
-                  </a:extLst>
-                </a:hlinkClick>
-              </a:rPr>
-              <a:t>Put it on a schedule</a:t>
+              </a:rPr>
+              <a:t>Share it with your team</a:t>
             </a:r>
             <a:endParaRPr lang="en-US" sz="1600" dirty="0"/>
           </a:p>
@@ -10071,7 +10049,7 @@
                 <a:ea typeface="Aptos" pitchFamily="34" charset="-122"/>
                 <a:cs typeface="Aptos" pitchFamily="34" charset="-120"/>
               </a:rPr>
-              <a:t>A morning brief that runs on its own and reaches you before you open the laptop.</a:t>
+              <a:t>Publish it once so everyone gets the same quality, not a blank page.</a:t>
             </a:r>
             <a:endParaRPr lang="en-US" sz="1250" dirty="0"/>
           </a:p>
@@ -10157,7 +10135,7 @@
                 <a:ea typeface="Aptos" pitchFamily="34" charset="-122"/>
                 <a:cs typeface="Aptos" pitchFamily="34" charset="-120"/>
               </a:rPr>
-              <a:t>That is the chief-of-staff move:  </a:t>
+              <a:t xml:space="preserve">That is the chief-of-staff move:  </a:t>
             </a:r>
             <a:pPr algn="l" indent="0" marL="0">
               <a:buNone/>
@@ -10171,7 +10149,7 @@
                 <a:ea typeface="Aptos" pitchFamily="34" charset="-122"/>
                 <a:cs typeface="Aptos" pitchFamily="34" charset="-120"/>
               </a:rPr>
-              <a:t>the brief comes to you, before you ask for it.</a:t>
+              <a:t>if you type the same prompt twice a week, that is an agent waiting to happen.</a:t>
             </a:r>
             <a:endParaRPr lang="en-US" sz="1400" dirty="0"/>
           </a:p>
@@ -10210,7 +10188,7 @@
                 <a:ea typeface="Aptos" pitchFamily="34" charset="-122"/>
                 <a:cs typeface="Aptos" pitchFamily="34" charset="-120"/>
               </a:rPr>
-              <a:t>Tier 3 · Make it yours</a:t>
+              <a:t>Tier 3 · Build your own</a:t>
             </a:r>
             <a:endParaRPr lang="en-US" sz="900" dirty="0"/>
           </a:p>
@@ -10249,7 +10227,7 @@
                 <a:ea typeface="Aptos" pitchFamily="34" charset="-122"/>
                 <a:cs typeface="Aptos" pitchFamily="34" charset="-120"/>
               </a:rPr>
-              <a:t>13</a:t>
+              <a:t>19</a:t>
             </a:r>
             <a:endParaRPr lang="en-US" sz="900" dirty="0"/>
           </a:p>
@@ -10528,7 +10506,7 @@
       </p:sp>
       <p:pic>
         <p:nvPicPr>
-          <p:cNvPr id="9" name="Image 0" descr="preencoded.png">    </p:cNvPr>
+          <p:cNvPr id="9" name="Image 0" descr="preencoded.png"/>
           <p:cNvPicPr>
             <a:picLocks noChangeAspect="1"/>
           </p:cNvPicPr>
@@ -10701,7 +10679,7 @@
       </p:sp>
       <p:pic>
         <p:nvPicPr>
-          <p:cNvPr id="14" name="Image 1" descr="preencoded.png">    </p:cNvPr>
+          <p:cNvPr id="14" name="Image 1" descr="preencoded.png"/>
           <p:cNvPicPr>
             <a:picLocks noChangeAspect="1"/>
           </p:cNvPicPr>
@@ -10874,7 +10852,7 @@
       </p:sp>
       <p:pic>
         <p:nvPicPr>
-          <p:cNvPr id="19" name="Image 2" descr="preencoded.png">    </p:cNvPr>
+          <p:cNvPr id="19" name="Image 2" descr="preencoded.png"/>
           <p:cNvPicPr>
             <a:picLocks noChangeAspect="1"/>
           </p:cNvPicPr>
@@ -11047,7 +11025,7 @@
       </p:sp>
       <p:pic>
         <p:nvPicPr>
-          <p:cNvPr id="24" name="Image 3" descr="preencoded.png">    </p:cNvPr>
+          <p:cNvPr id="24" name="Image 3" descr="preencoded.png"/>
           <p:cNvPicPr>
             <a:picLocks noChangeAspect="1"/>
           </p:cNvPicPr>
@@ -11190,7 +11168,7 @@
                 <a:ea typeface="Aptos" pitchFamily="34" charset="-122"/>
                 <a:cs typeface="Aptos" pitchFamily="34" charset="-120"/>
               </a:rPr>
-              <a:t>Rule of thumb:  </a:t>
+              <a:t xml:space="preserve">Rule of thumb:  </a:t>
             </a:r>
             <a:pPr algn="l" indent="0" marL="0">
               <a:buNone/>
@@ -11243,7 +11221,7 @@
                 <a:ea typeface="Aptos" pitchFamily="34" charset="-122"/>
                 <a:cs typeface="Aptos" pitchFamily="34" charset="-120"/>
               </a:rPr>
-              <a:t>Tier 3 · Make it yours</a:t>
+              <a:t>Tier 3 · Build your own</a:t>
             </a:r>
             <a:endParaRPr lang="en-US" sz="900" dirty="0"/>
           </a:p>
@@ -11282,7 +11260,7 @@
                 <a:ea typeface="Aptos" pitchFamily="34" charset="-122"/>
                 <a:cs typeface="Aptos" pitchFamily="34" charset="-120"/>
               </a:rPr>
-              <a:t>14</a:t>
+              <a:t>20</a:t>
             </a:r>
             <a:endParaRPr lang="en-US" sz="900" dirty="0"/>
           </a:p>
@@ -11461,7 +11439,7 @@
       </p:sp>
       <p:pic>
         <p:nvPicPr>
-          <p:cNvPr id="6" name="Image 0" descr="preencoded.png">    </p:cNvPr>
+          <p:cNvPr id="6" name="Image 0" descr="preencoded.png"/>
           <p:cNvPicPr>
             <a:picLocks noChangeAspect="1"/>
           </p:cNvPicPr>
@@ -11627,7 +11605,7 @@
       </p:sp>
       <p:pic>
         <p:nvPicPr>
-          <p:cNvPr id="11" name="Image 1" descr="preencoded.png">    </p:cNvPr>
+          <p:cNvPr id="11" name="Image 1" descr="preencoded.png"/>
           <p:cNvPicPr>
             <a:picLocks noChangeAspect="1"/>
           </p:cNvPicPr>
@@ -11793,7 +11771,7 @@
       </p:sp>
       <p:pic>
         <p:nvPicPr>
-          <p:cNvPr id="16" name="Image 2" descr="preencoded.png">    </p:cNvPr>
+          <p:cNvPr id="16" name="Image 2" descr="preencoded.png"/>
           <p:cNvPicPr>
             <a:picLocks noChangeAspect="1"/>
           </p:cNvPicPr>
@@ -11959,7 +11937,7 @@
       </p:sp>
       <p:pic>
         <p:nvPicPr>
-          <p:cNvPr id="21" name="Image 3" descr="preencoded.png">    </p:cNvPr>
+          <p:cNvPr id="21" name="Image 3" descr="preencoded.png"/>
           <p:cNvPicPr>
             <a:picLocks noChangeAspect="1"/>
           </p:cNvPicPr>
@@ -12215,7 +12193,7 @@
                 <a:ea typeface="Aptos" pitchFamily="34" charset="-122"/>
                 <a:cs typeface="Aptos" pitchFamily="34" charset="-120"/>
               </a:rPr>
-              <a:t>15</a:t>
+              <a:t>22</a:t>
             </a:r>
             <a:endParaRPr lang="en-US" sz="900" dirty="0"/>
           </a:p>
@@ -13202,7 +13180,7 @@
       </p:sp>
       <p:pic>
         <p:nvPicPr>
-          <p:cNvPr id="31" name="Image 0" descr="preencoded.png">    </p:cNvPr>
+          <p:cNvPr id="31" name="Image 0" descr="preencoded.png"/>
           <p:cNvPicPr>
             <a:picLocks noChangeAspect="1"/>
           </p:cNvPicPr>
@@ -13271,7 +13249,7 @@
                 <a:ea typeface="Aptos" pitchFamily="34" charset="-122"/>
                 <a:cs typeface="Aptos" pitchFamily="34" charset="-120"/>
               </a:rPr>
-              <a:t>  and let them own the daily prep, so you get the summary, not the search.</a:t>
+              <a:t xml:space="preserve">  and let them own the daily prep, so you get the summary, not the search.</a:t>
             </a:r>
             <a:endParaRPr lang="en-US" sz="1300" dirty="0"/>
           </a:p>
@@ -13349,7 +13327,7 @@
                 <a:ea typeface="Aptos" pitchFamily="34" charset="-122"/>
                 <a:cs typeface="Aptos" pitchFamily="34" charset="-120"/>
               </a:rPr>
-              <a:t>16</a:t>
+              <a:t>23</a:t>
             </a:r>
             <a:endParaRPr lang="en-US" sz="900" dirty="0"/>
           </a:p>
@@ -13627,7 +13605,7 @@
       </p:sp>
       <p:pic>
         <p:nvPicPr>
-          <p:cNvPr id="10" name="Image 0" descr="preencoded.png">    </p:cNvPr>
+          <p:cNvPr id="10" name="Image 0" descr="preencoded.png"/>
           <p:cNvPicPr>
             <a:picLocks noChangeAspect="1"/>
           </p:cNvPicPr>
@@ -13783,7 +13761,7 @@
       </p:sp>
       <p:pic>
         <p:nvPicPr>
-          <p:cNvPr id="15" name="Image 1" descr="preencoded.png">    </p:cNvPr>
+          <p:cNvPr id="15" name="Image 1" descr="preencoded.png"/>
           <p:cNvPicPr>
             <a:picLocks noChangeAspect="1"/>
           </p:cNvPicPr>
@@ -13939,7 +13917,7 @@
       </p:sp>
       <p:pic>
         <p:nvPicPr>
-          <p:cNvPr id="20" name="Image 2" descr="preencoded.png">    </p:cNvPr>
+          <p:cNvPr id="20" name="Image 2" descr="preencoded.png"/>
           <p:cNvPicPr>
             <a:picLocks noChangeAspect="1"/>
           </p:cNvPicPr>
@@ -14099,7 +14077,7 @@
                 <a:ea typeface="Consolas" pitchFamily="34" charset="-122"/>
                 <a:cs typeface="Consolas" pitchFamily="34" charset="-120"/>
               </a:rPr>
-              <a:t>›_  </a:t>
+              <a:t xml:space="preserve">›_  </a:t>
             </a:r>
             <a:pPr algn="l" indent="0" marL="0">
               <a:buNone/>
@@ -14880,7 +14858,7 @@
       </p:sp>
       <p:pic>
         <p:nvPicPr>
-          <p:cNvPr id="23" name="Image 0" descr="preencoded.png">    </p:cNvPr>
+          <p:cNvPr id="23" name="Image 0" descr="preencoded.png"/>
           <p:cNvPicPr>
             <a:picLocks noChangeAspect="1"/>
           </p:cNvPicPr>
@@ -15030,7 +15008,7 @@
                 <a:ea typeface="Aptos" pitchFamily="34" charset="-122"/>
                 <a:cs typeface="Aptos" pitchFamily="34" charset="-120"/>
               </a:rPr>
-              <a:t>   ·   </a:t>
+              <a:t xml:space="preserve">   ·   </a:t>
             </a:r>
             <a:pPr indent="0" marL="0">
               <a:buNone/>
@@ -15195,7 +15173,7 @@
                 <a:ea typeface="Aptos" pitchFamily="34" charset="-122"/>
                 <a:cs typeface="Aptos" pitchFamily="34" charset="-120"/>
               </a:rPr>
-              <a:t>Companion to your Executive Playbook   ·   Resources from the </a:t>
+              <a:t xml:space="preserve">Companion to your Executive Playbook   ·   Resources from the </a:t>
             </a:r>
             <a:pPr algn="l" indent="0" marL="0">
               <a:buNone/>
@@ -15230,9 +15208,7765 @@
                 <a:ea typeface="Aptos" pitchFamily="34" charset="-122"/>
                 <a:cs typeface="Aptos" pitchFamily="34" charset="-120"/>
               </a:rPr>
-              <a:t> (github.com/heyitsgoad/copilot-playground)</a:t>
+              <a:t xml:space="preserve"> (github.com/heyitsgoad/copilot-playground)</a:t>
             </a:r>
             <a:endParaRPr lang="en-US" sz="950" dirty="0"/>
+          </a:p>
+        </p:txBody>
+      </p:sp>
+    </p:spTree>
+  </p:cSld>
+  <p:clrMapOvr>
+    <a:masterClrMapping/>
+  </p:clrMapOvr>
+</p:sld>
+</file>
+
+<file path=ppt/slides/slide22.xml><?xml version="1.0" encoding="utf-8"?>
+<p:sld xmlns:a="http://schemas.openxmlformats.org/drawingml/2006/main" xmlns:r="http://schemas.openxmlformats.org/officeDocument/2006/relationships" xmlns:p="http://schemas.openxmlformats.org/presentationml/2006/main">
+  <p:cSld name="Slide 3">
+    <p:bg>
+      <p:bgPr>
+        <a:solidFill>
+          <a:srgbClr val="F4F7FE"/>
+        </a:solidFill>
+      </p:bgPr>
+    </p:bg>
+    <p:spTree>
+      <p:nvGrpSpPr>
+        <p:cNvPr id="1" name=""/>
+        <p:cNvGrpSpPr/>
+        <p:nvPr/>
+      </p:nvGrpSpPr>
+      <p:grpSpPr>
+        <a:xfrm>
+          <a:off x="0" y="0"/>
+          <a:ext cx="0" cy="0"/>
+          <a:chOff x="0" y="0"/>
+          <a:chExt cx="0" cy="0"/>
+        </a:xfrm>
+      </p:grpSpPr>
+      <p:sp>
+        <p:nvSpPr>
+          <p:cNvPr id="2" name="Text 0"/>
+          <p:cNvSpPr/>
+          <p:nvPr/>
+        </p:nvSpPr>
+        <p:spPr>
+          <a:xfrm>
+            <a:off x="822960" y="566928"/>
+            <a:ext cx="8229600" cy="274320"/>
+          </a:xfrm>
+          <a:prstGeom prst="rect">
+            <a:avLst/>
+          </a:prstGeom>
+          <a:noFill/>
+          <a:ln/>
+        </p:spPr>
+        <p:txBody>
+          <a:bodyPr wrap="square" lIns="0" tIns="0" rIns="0" bIns="0" rtlCol="0" anchor="ctr"/>
+          <a:lstStyle/>
+          <a:p>
+            <a:pPr algn="l" indent="0" marL="0">
+              <a:buNone/>
+            </a:pPr>
+            <a:r>
+              <a:rPr lang="en-US" sz="1200" b="1" spc="300" kern="0" dirty="0">
+                <a:solidFill>
+                  <a:srgbClr val="2D6CDF"/>
+                </a:solidFill>
+                <a:latin typeface="Aptos" pitchFamily="34" charset="0"/>
+                <a:ea typeface="Aptos" pitchFamily="34" charset="-122"/>
+                <a:cs typeface="Aptos" pitchFamily="34" charset="-120"/>
+              </a:rPr>
+              <a:t>YOUR CALL TO ACTION</a:t>
+            </a:r>
+            <a:endParaRPr lang="en-US" sz="1200" dirty="0"/>
+          </a:p>
+        </p:txBody>
+      </p:sp>
+      <p:sp>
+        <p:nvSpPr>
+          <p:cNvPr id="3" name="Text 1"/>
+          <p:cNvSpPr/>
+          <p:nvPr/>
+        </p:nvSpPr>
+        <p:spPr>
+          <a:xfrm>
+            <a:off x="786384" y="868680"/>
+            <a:ext cx="10972800" cy="594360"/>
+          </a:xfrm>
+          <a:prstGeom prst="rect">
+            <a:avLst/>
+          </a:prstGeom>
+          <a:noFill/>
+          <a:ln/>
+        </p:spPr>
+        <p:txBody>
+          <a:bodyPr wrap="square" lIns="0" tIns="0" rIns="0" bIns="0" rtlCol="0" anchor="ctr"/>
+          <a:lstStyle/>
+          <a:p>
+            <a:pPr indent="0" marL="0">
+              <a:buNone/>
+            </a:pPr>
+            <a:r>
+              <a:rPr lang="en-US" sz="3100" b="1" dirty="0">
+                <a:solidFill>
+                  <a:srgbClr val="0B1437"/>
+                </a:solidFill>
+                <a:latin typeface="Aptos" pitchFamily="34" charset="0"/>
+                <a:ea typeface="Aptos" pitchFamily="34" charset="-122"/>
+                <a:cs typeface="Aptos" pitchFamily="34" charset="-120"/>
+              </a:rPr>
+              <a:t>Pick your habit, and keep going</a:t>
+            </a:r>
+            <a:endParaRPr lang="en-US" sz="3100" dirty="0"/>
+          </a:p>
+        </p:txBody>
+      </p:sp>
+      <p:sp>
+        <p:nvSpPr>
+          <p:cNvPr id="4" name="Text 2"/>
+          <p:cNvSpPr/>
+          <p:nvPr/>
+        </p:nvSpPr>
+        <p:spPr>
+          <a:xfrm>
+            <a:off x="822960" y="1481328"/>
+            <a:ext cx="10607040" cy="365760"/>
+          </a:xfrm>
+          <a:prstGeom prst="rect">
+            <a:avLst/>
+          </a:prstGeom>
+          <a:noFill/>
+          <a:ln/>
+        </p:spPr>
+        <p:txBody>
+          <a:bodyPr wrap="square" lIns="0" tIns="0" rIns="0" bIns="0" rtlCol="0" anchor="ctr"/>
+          <a:lstStyle/>
+          <a:p>
+            <a:pPr indent="0" marL="0">
+              <a:buNone/>
+            </a:pPr>
+            <a:r>
+              <a:rPr lang="en-US" sz="1400" dirty="0">
+                <a:solidFill>
+                  <a:srgbClr val="43507B"/>
+                </a:solidFill>
+                <a:latin typeface="Aptos" pitchFamily="34" charset="0"/>
+                <a:ea typeface="Aptos" pitchFamily="34" charset="-122"/>
+                <a:cs typeface="Aptos" pitchFamily="34" charset="-120"/>
+              </a:rPr>
+              <a:t>The training is the start line, not the finish. Three ways to make it stick after the room clears.</a:t>
+            </a:r>
+            <a:endParaRPr lang="en-US" sz="1400" dirty="0"/>
+          </a:p>
+        </p:txBody>
+      </p:sp>
+      <p:sp>
+        <p:nvSpPr>
+          <p:cNvPr id="5" name="Shape 3"/>
+          <p:cNvSpPr/>
+          <p:nvPr/>
+        </p:nvSpPr>
+        <p:spPr>
+          <a:xfrm>
+            <a:off x="822960" y="2834640"/>
+            <a:ext cx="3529584" cy="3108960"/>
+          </a:xfrm>
+          <a:prstGeom prst="roundRect">
+            <a:avLst>
+              <a:gd name="adj" fmla="val 2941"/>
+            </a:avLst>
+          </a:prstGeom>
+          <a:solidFill>
+            <a:srgbClr val="FFFFFF"/>
+          </a:solidFill>
+          <a:ln w="12700">
+            <a:solidFill>
+              <a:srgbClr val="E4E9F7"/>
+            </a:solidFill>
+            <a:prstDash val="solid"/>
+          </a:ln>
+          <a:effectLst>
+            <a:outerShdw sx="100000" sy="100000" kx="0" ky="0" algn="bl" rotWithShape="0" blurRad="114300" dist="38100" dir="5400000">
+              <a:srgbClr val="0B1437">
+                <a:alpha val="10000"/>
+              </a:srgbClr>
+            </a:outerShdw>
+          </a:effectLst>
+        </p:spPr>
+      </p:sp>
+      <p:sp>
+        <p:nvSpPr>
+          <p:cNvPr id="6" name="Shape 4"/>
+          <p:cNvSpPr/>
+          <p:nvPr/>
+        </p:nvSpPr>
+        <p:spPr>
+          <a:xfrm>
+            <a:off x="822960" y="2834640"/>
+            <a:ext cx="3529584" cy="128016"/>
+          </a:xfrm>
+          <a:prstGeom prst="rect">
+            <a:avLst/>
+          </a:prstGeom>
+          <a:solidFill>
+            <a:srgbClr val="2D6CDF"/>
+          </a:solidFill>
+          <a:ln/>
+        </p:spPr>
+      </p:sp>
+      <p:sp>
+        <p:nvSpPr>
+          <p:cNvPr id="7" name="Shape 5"/>
+          <p:cNvSpPr/>
+          <p:nvPr/>
+        </p:nvSpPr>
+        <p:spPr>
+          <a:xfrm>
+            <a:off x="1097280" y="3200400"/>
+            <a:ext cx="658368" cy="658368"/>
+          </a:xfrm>
+          <a:prstGeom prst="ellipse">
+            <a:avLst/>
+          </a:prstGeom>
+          <a:solidFill>
+            <a:srgbClr val="2D6CDF"/>
+          </a:solidFill>
+          <a:ln/>
+        </p:spPr>
+      </p:sp>
+      <p:sp>
+        <p:nvSpPr>
+          <p:cNvPr id="8" name="Text 6"/>
+          <p:cNvSpPr/>
+          <p:nvPr/>
+        </p:nvSpPr>
+        <p:spPr>
+          <a:xfrm>
+            <a:off x="1097280" y="3200400"/>
+            <a:ext cx="658368" cy="658368"/>
+          </a:xfrm>
+          <a:prstGeom prst="rect">
+            <a:avLst/>
+          </a:prstGeom>
+          <a:noFill/>
+          <a:ln/>
+        </p:spPr>
+        <p:txBody>
+          <a:bodyPr wrap="square" lIns="0" tIns="0" rIns="0" bIns="0" rtlCol="0" anchor="ctr"/>
+          <a:lstStyle/>
+          <a:p>
+            <a:pPr algn="ctr" indent="0" marL="0">
+              <a:buNone/>
+            </a:pPr>
+            <a:r>
+              <a:rPr lang="en-US" sz="3000" b="1" dirty="0">
+                <a:solidFill>
+                  <a:srgbClr val="FFFFFF"/>
+                </a:solidFill>
+                <a:latin typeface="Aptos" pitchFamily="34" charset="0"/>
+                <a:ea typeface="Aptos" pitchFamily="34" charset="-122"/>
+                <a:cs typeface="Aptos" pitchFamily="34" charset="-120"/>
+              </a:rPr>
+              <a:t>1</a:t>
+            </a:r>
+            <a:endParaRPr lang="en-US" sz="3000" dirty="0"/>
+          </a:p>
+        </p:txBody>
+      </p:sp>
+      <p:sp>
+        <p:nvSpPr>
+          <p:cNvPr id="9" name="Text 7"/>
+          <p:cNvSpPr/>
+          <p:nvPr/>
+        </p:nvSpPr>
+        <p:spPr>
+          <a:xfrm>
+            <a:off x="1920240" y="3236976"/>
+            <a:ext cx="2249424" cy="274320"/>
+          </a:xfrm>
+          <a:prstGeom prst="rect">
+            <a:avLst/>
+          </a:prstGeom>
+          <a:noFill/>
+          <a:ln/>
+        </p:spPr>
+        <p:txBody>
+          <a:bodyPr wrap="square" lIns="0" tIns="0" rIns="0" bIns="0" rtlCol="0" anchor="ctr"/>
+          <a:lstStyle/>
+          <a:p>
+            <a:pPr indent="0" marL="0">
+              <a:buNone/>
+            </a:pPr>
+            <a:r>
+              <a:rPr lang="en-US" sz="1200" b="1" spc="200" kern="0" dirty="0">
+                <a:solidFill>
+                  <a:srgbClr val="2D6CDF"/>
+                </a:solidFill>
+                <a:latin typeface="Aptos" pitchFamily="34" charset="0"/>
+                <a:ea typeface="Aptos" pitchFamily="34" charset="-122"/>
+                <a:cs typeface="Aptos" pitchFamily="34" charset="-120"/>
+              </a:rPr>
+              <a:t>STEP 1</a:t>
+            </a:r>
+            <a:endParaRPr lang="en-US" sz="1200" dirty="0"/>
+          </a:p>
+        </p:txBody>
+      </p:sp>
+      <p:sp>
+        <p:nvSpPr>
+          <p:cNvPr id="10" name="Text 8"/>
+          <p:cNvSpPr/>
+          <p:nvPr/>
+        </p:nvSpPr>
+        <p:spPr>
+          <a:xfrm>
+            <a:off x="1920240" y="3493008"/>
+            <a:ext cx="2249424" cy="365760"/>
+          </a:xfrm>
+          <a:prstGeom prst="rect">
+            <a:avLst/>
+          </a:prstGeom>
+          <a:noFill/>
+          <a:ln/>
+        </p:spPr>
+        <p:txBody>
+          <a:bodyPr wrap="square" lIns="0" tIns="0" rIns="0" bIns="0" rtlCol="0" anchor="ctr"/>
+          <a:lstStyle/>
+          <a:p>
+            <a:pPr indent="0" marL="0">
+              <a:buNone/>
+            </a:pPr>
+            <a:r>
+              <a:rPr lang="en-US" sz="1900" b="1" dirty="0">
+                <a:solidFill>
+                  <a:srgbClr val="0B1437"/>
+                </a:solidFill>
+                <a:latin typeface="Aptos" pitchFamily="34" charset="0"/>
+                <a:ea typeface="Aptos" pitchFamily="34" charset="-122"/>
+                <a:cs typeface="Aptos" pitchFamily="34" charset="-120"/>
+              </a:rPr>
+              <a:t>Build the habit</a:t>
+            </a:r>
+            <a:endParaRPr lang="en-US" sz="1900" dirty="0"/>
+          </a:p>
+        </p:txBody>
+      </p:sp>
+      <p:sp>
+        <p:nvSpPr>
+          <p:cNvPr id="11" name="Text 9"/>
+          <p:cNvSpPr/>
+          <p:nvPr/>
+        </p:nvSpPr>
+        <p:spPr>
+          <a:xfrm>
+            <a:off x="1097280" y="4114800"/>
+            <a:ext cx="2980944" cy="292608"/>
+          </a:xfrm>
+          <a:prstGeom prst="rect">
+            <a:avLst/>
+          </a:prstGeom>
+          <a:noFill/>
+          <a:ln/>
+        </p:spPr>
+        <p:txBody>
+          <a:bodyPr wrap="square" lIns="0" tIns="0" rIns="0" bIns="0" rtlCol="0" anchor="ctr"/>
+          <a:lstStyle/>
+          <a:p>
+            <a:pPr indent="0" marL="0">
+              <a:buNone/>
+            </a:pPr>
+            <a:r>
+              <a:rPr lang="en-US" sz="1300" b="1" i="1" dirty="0">
+                <a:solidFill>
+                  <a:srgbClr val="8A93B8"/>
+                </a:solidFill>
+                <a:latin typeface="Aptos" pitchFamily="34" charset="0"/>
+                <a:ea typeface="Aptos" pitchFamily="34" charset="-122"/>
+                <a:cs typeface="Aptos" pitchFamily="34" charset="-120"/>
+              </a:rPr>
+              <a:t>Fifteen minutes a day</a:t>
+            </a:r>
+            <a:endParaRPr lang="en-US" sz="1300" dirty="0"/>
+          </a:p>
+        </p:txBody>
+      </p:sp>
+      <p:sp>
+        <p:nvSpPr>
+          <p:cNvPr id="12" name="Shape 10"/>
+          <p:cNvSpPr/>
+          <p:nvPr/>
+        </p:nvSpPr>
+        <p:spPr>
+          <a:xfrm>
+            <a:off x="1133856" y="4572000"/>
+            <a:ext cx="128016" cy="128016"/>
+          </a:xfrm>
+          <a:prstGeom prst="ellipse">
+            <a:avLst/>
+          </a:prstGeom>
+          <a:solidFill>
+            <a:srgbClr val="2D6CDF"/>
+          </a:solidFill>
+          <a:ln/>
+        </p:spPr>
+      </p:sp>
+      <p:sp>
+        <p:nvSpPr>
+          <p:cNvPr id="13" name="Text 11"/>
+          <p:cNvSpPr/>
+          <p:nvPr/>
+        </p:nvSpPr>
+        <p:spPr>
+          <a:xfrm>
+            <a:off x="1371600" y="4480560"/>
+            <a:ext cx="2724912" cy="402336"/>
+          </a:xfrm>
+          <a:prstGeom prst="rect">
+            <a:avLst/>
+          </a:prstGeom>
+          <a:noFill/>
+          <a:ln/>
+        </p:spPr>
+        <p:txBody>
+          <a:bodyPr wrap="square" lIns="0" tIns="0" rIns="0" bIns="0" rtlCol="0" anchor="t"/>
+          <a:lstStyle/>
+          <a:p>
+            <a:pPr indent="0" marL="0">
+              <a:lnSpc>
+                <a:spcPct val="104000"/>
+              </a:lnSpc>
+              <a:buNone/>
+            </a:pPr>
+            <a:r>
+              <a:rPr lang="en-US" sz="1200" dirty="0">
+                <a:solidFill>
+                  <a:srgbClr val="43507B"/>
+                </a:solidFill>
+                <a:latin typeface="Aptos" pitchFamily="34" charset="0"/>
+                <a:ea typeface="Aptos" pitchFamily="34" charset="-122"/>
+                <a:cs typeface="Aptos" pitchFamily="34" charset="-120"/>
+              </a:rPr>
+              <a:t>Ask Copilot first, every day</a:t>
+            </a:r>
+            <a:endParaRPr lang="en-US" sz="1200" dirty="0"/>
+          </a:p>
+        </p:txBody>
+      </p:sp>
+      <p:sp>
+        <p:nvSpPr>
+          <p:cNvPr id="14" name="Shape 12"/>
+          <p:cNvSpPr/>
+          <p:nvPr/>
+        </p:nvSpPr>
+        <p:spPr>
+          <a:xfrm>
+            <a:off x="1133856" y="5029200"/>
+            <a:ext cx="128016" cy="128016"/>
+          </a:xfrm>
+          <a:prstGeom prst="ellipse">
+            <a:avLst/>
+          </a:prstGeom>
+          <a:solidFill>
+            <a:srgbClr val="2D6CDF"/>
+          </a:solidFill>
+          <a:ln/>
+        </p:spPr>
+      </p:sp>
+      <p:sp>
+        <p:nvSpPr>
+          <p:cNvPr id="15" name="Text 13"/>
+          <p:cNvSpPr/>
+          <p:nvPr/>
+        </p:nvSpPr>
+        <p:spPr>
+          <a:xfrm>
+            <a:off x="1371600" y="4937760"/>
+            <a:ext cx="2724912" cy="402336"/>
+          </a:xfrm>
+          <a:prstGeom prst="rect">
+            <a:avLst/>
+          </a:prstGeom>
+          <a:noFill/>
+          <a:ln/>
+        </p:spPr>
+        <p:txBody>
+          <a:bodyPr wrap="square" lIns="0" tIns="0" rIns="0" bIns="0" rtlCol="0" anchor="t"/>
+          <a:lstStyle/>
+          <a:p>
+            <a:pPr indent="0" marL="0">
+              <a:lnSpc>
+                <a:spcPct val="104000"/>
+              </a:lnSpc>
+              <a:buNone/>
+            </a:pPr>
+            <a:r>
+              <a:rPr lang="en-US" sz="1200" dirty="0">
+                <a:solidFill>
+                  <a:srgbClr val="43507B"/>
+                </a:solidFill>
+                <a:latin typeface="Aptos" pitchFamily="34" charset="0"/>
+                <a:ea typeface="Aptos" pitchFamily="34" charset="-122"/>
+                <a:cs typeface="Aptos" pitchFamily="34" charset="-120"/>
+              </a:rPr>
+              <a:t>One real win each morning</a:t>
+            </a:r>
+            <a:endParaRPr lang="en-US" sz="1200" dirty="0"/>
+          </a:p>
+        </p:txBody>
+      </p:sp>
+      <p:sp>
+        <p:nvSpPr>
+          <p:cNvPr id="16" name="Shape 14"/>
+          <p:cNvSpPr/>
+          <p:nvPr/>
+        </p:nvSpPr>
+        <p:spPr>
+          <a:xfrm>
+            <a:off x="1133856" y="5486400"/>
+            <a:ext cx="128016" cy="128016"/>
+          </a:xfrm>
+          <a:prstGeom prst="ellipse">
+            <a:avLst/>
+          </a:prstGeom>
+          <a:solidFill>
+            <a:srgbClr val="2D6CDF"/>
+          </a:solidFill>
+          <a:ln/>
+        </p:spPr>
+      </p:sp>
+      <p:sp>
+        <p:nvSpPr>
+          <p:cNvPr id="17" name="Text 15"/>
+          <p:cNvSpPr/>
+          <p:nvPr/>
+        </p:nvSpPr>
+        <p:spPr>
+          <a:xfrm>
+            <a:off x="1371600" y="5394960"/>
+            <a:ext cx="2724912" cy="402336"/>
+          </a:xfrm>
+          <a:prstGeom prst="rect">
+            <a:avLst/>
+          </a:prstGeom>
+          <a:noFill/>
+          <a:ln/>
+        </p:spPr>
+        <p:txBody>
+          <a:bodyPr wrap="square" lIns="0" tIns="0" rIns="0" bIns="0" rtlCol="0" anchor="t"/>
+          <a:lstStyle/>
+          <a:p>
+            <a:pPr indent="0" marL="0">
+              <a:lnSpc>
+                <a:spcPct val="104000"/>
+              </a:lnSpc>
+              <a:buNone/>
+            </a:pPr>
+            <a:r>
+              <a:rPr lang="en-US" sz="1200" dirty="0">
+                <a:solidFill>
+                  <a:srgbClr val="43507B"/>
+                </a:solidFill>
+                <a:latin typeface="Aptos" pitchFamily="34" charset="0"/>
+                <a:ea typeface="Aptos" pitchFamily="34" charset="-122"/>
+                <a:cs typeface="Aptos" pitchFamily="34" charset="-120"/>
+              </a:rPr>
+              <a:t>Thirty days, one focus a week</a:t>
+            </a:r>
+            <a:endParaRPr lang="en-US" sz="1200" dirty="0"/>
+          </a:p>
+        </p:txBody>
+      </p:sp>
+      <p:sp>
+        <p:nvSpPr>
+          <p:cNvPr id="18" name="Shape 16"/>
+          <p:cNvSpPr/>
+          <p:nvPr/>
+        </p:nvSpPr>
+        <p:spPr>
+          <a:xfrm>
+            <a:off x="4517136" y="2560320"/>
+            <a:ext cx="3529584" cy="3383280"/>
+          </a:xfrm>
+          <a:prstGeom prst="roundRect">
+            <a:avLst>
+              <a:gd name="adj" fmla="val 2703"/>
+            </a:avLst>
+          </a:prstGeom>
+          <a:solidFill>
+            <a:srgbClr val="FFFFFF"/>
+          </a:solidFill>
+          <a:ln w="12700">
+            <a:solidFill>
+              <a:srgbClr val="E4E9F7"/>
+            </a:solidFill>
+            <a:prstDash val="solid"/>
+          </a:ln>
+          <a:effectLst>
+            <a:outerShdw sx="100000" sy="100000" kx="0" ky="0" algn="bl" rotWithShape="0" blurRad="114300" dist="38100" dir="5400000">
+              <a:srgbClr val="0B1437">
+                <a:alpha val="10000"/>
+              </a:srgbClr>
+            </a:outerShdw>
+          </a:effectLst>
+        </p:spPr>
+      </p:sp>
+      <p:sp>
+        <p:nvSpPr>
+          <p:cNvPr id="19" name="Shape 17"/>
+          <p:cNvSpPr/>
+          <p:nvPr/>
+        </p:nvSpPr>
+        <p:spPr>
+          <a:xfrm>
+            <a:off x="4517136" y="2560320"/>
+            <a:ext cx="3529584" cy="128016"/>
+          </a:xfrm>
+          <a:prstGeom prst="rect">
+            <a:avLst/>
+          </a:prstGeom>
+          <a:solidFill>
+            <a:srgbClr val="7C5CFC"/>
+          </a:solidFill>
+          <a:ln/>
+        </p:spPr>
+      </p:sp>
+      <p:sp>
+        <p:nvSpPr>
+          <p:cNvPr id="20" name="Shape 18"/>
+          <p:cNvSpPr/>
+          <p:nvPr/>
+        </p:nvSpPr>
+        <p:spPr>
+          <a:xfrm>
+            <a:off x="4791456" y="2926080"/>
+            <a:ext cx="658368" cy="658368"/>
+          </a:xfrm>
+          <a:prstGeom prst="ellipse">
+            <a:avLst/>
+          </a:prstGeom>
+          <a:solidFill>
+            <a:srgbClr val="7C5CFC"/>
+          </a:solidFill>
+          <a:ln/>
+        </p:spPr>
+      </p:sp>
+      <p:sp>
+        <p:nvSpPr>
+          <p:cNvPr id="21" name="Text 19"/>
+          <p:cNvSpPr/>
+          <p:nvPr/>
+        </p:nvSpPr>
+        <p:spPr>
+          <a:xfrm>
+            <a:off x="4791456" y="2926080"/>
+            <a:ext cx="658368" cy="658368"/>
+          </a:xfrm>
+          <a:prstGeom prst="rect">
+            <a:avLst/>
+          </a:prstGeom>
+          <a:noFill/>
+          <a:ln/>
+        </p:spPr>
+        <p:txBody>
+          <a:bodyPr wrap="square" lIns="0" tIns="0" rIns="0" bIns="0" rtlCol="0" anchor="ctr"/>
+          <a:lstStyle/>
+          <a:p>
+            <a:pPr algn="ctr" indent="0" marL="0">
+              <a:buNone/>
+            </a:pPr>
+            <a:r>
+              <a:rPr lang="en-US" sz="3000" b="1" dirty="0">
+                <a:solidFill>
+                  <a:srgbClr val="FFFFFF"/>
+                </a:solidFill>
+                <a:latin typeface="Aptos" pitchFamily="34" charset="0"/>
+                <a:ea typeface="Aptos" pitchFamily="34" charset="-122"/>
+                <a:cs typeface="Aptos" pitchFamily="34" charset="-120"/>
+              </a:rPr>
+              <a:t>2</a:t>
+            </a:r>
+            <a:endParaRPr lang="en-US" sz="3000" dirty="0"/>
+          </a:p>
+        </p:txBody>
+      </p:sp>
+      <p:sp>
+        <p:nvSpPr>
+          <p:cNvPr id="22" name="Text 20"/>
+          <p:cNvSpPr/>
+          <p:nvPr/>
+        </p:nvSpPr>
+        <p:spPr>
+          <a:xfrm>
+            <a:off x="5614416" y="2962656"/>
+            <a:ext cx="2249424" cy="274320"/>
+          </a:xfrm>
+          <a:prstGeom prst="rect">
+            <a:avLst/>
+          </a:prstGeom>
+          <a:noFill/>
+          <a:ln/>
+        </p:spPr>
+        <p:txBody>
+          <a:bodyPr wrap="square" lIns="0" tIns="0" rIns="0" bIns="0" rtlCol="0" anchor="ctr"/>
+          <a:lstStyle/>
+          <a:p>
+            <a:pPr indent="0" marL="0">
+              <a:buNone/>
+            </a:pPr>
+            <a:r>
+              <a:rPr lang="en-US" sz="1200" b="1" spc="200" kern="0" dirty="0">
+                <a:solidFill>
+                  <a:srgbClr val="7C5CFC"/>
+                </a:solidFill>
+                <a:latin typeface="Aptos" pitchFamily="34" charset="0"/>
+                <a:ea typeface="Aptos" pitchFamily="34" charset="-122"/>
+                <a:cs typeface="Aptos" pitchFamily="34" charset="-120"/>
+              </a:rPr>
+              <a:t>STEP 2</a:t>
+            </a:r>
+            <a:endParaRPr lang="en-US" sz="1200" dirty="0"/>
+          </a:p>
+        </p:txBody>
+      </p:sp>
+      <p:sp>
+        <p:nvSpPr>
+          <p:cNvPr id="23" name="Text 21"/>
+          <p:cNvSpPr/>
+          <p:nvPr/>
+        </p:nvSpPr>
+        <p:spPr>
+          <a:xfrm>
+            <a:off x="5614416" y="3218688"/>
+            <a:ext cx="2249424" cy="365760"/>
+          </a:xfrm>
+          <a:prstGeom prst="rect">
+            <a:avLst/>
+          </a:prstGeom>
+          <a:noFill/>
+          <a:ln/>
+        </p:spPr>
+        <p:txBody>
+          <a:bodyPr wrap="square" lIns="0" tIns="0" rIns="0" bIns="0" rtlCol="0" anchor="ctr"/>
+          <a:lstStyle/>
+          <a:p>
+            <a:pPr indent="0" marL="0">
+              <a:buNone/>
+            </a:pPr>
+            <a:r>
+              <a:rPr lang="en-US" sz="1900" b="1" dirty="0">
+                <a:solidFill>
+                  <a:srgbClr val="0B1437"/>
+                </a:solidFill>
+                <a:latin typeface="Aptos" pitchFamily="34" charset="0"/>
+                <a:ea typeface="Aptos" pitchFamily="34" charset="-122"/>
+                <a:cs typeface="Aptos" pitchFamily="34" charset="-120"/>
+              </a:rPr>
+              <a:t>Somewhere to go</a:t>
+            </a:r>
+            <a:endParaRPr lang="en-US" sz="1900" dirty="0"/>
+          </a:p>
+        </p:txBody>
+      </p:sp>
+      <p:sp>
+        <p:nvSpPr>
+          <p:cNvPr id="24" name="Text 22"/>
+          <p:cNvSpPr/>
+          <p:nvPr/>
+        </p:nvSpPr>
+        <p:spPr>
+          <a:xfrm>
+            <a:off x="4791456" y="3840480"/>
+            <a:ext cx="2980944" cy="292608"/>
+          </a:xfrm>
+          <a:prstGeom prst="rect">
+            <a:avLst/>
+          </a:prstGeom>
+          <a:noFill/>
+          <a:ln/>
+        </p:spPr>
+        <p:txBody>
+          <a:bodyPr wrap="square" lIns="0" tIns="0" rIns="0" bIns="0" rtlCol="0" anchor="ctr"/>
+          <a:lstStyle/>
+          <a:p>
+            <a:pPr indent="0" marL="0">
+              <a:buNone/>
+            </a:pPr>
+            <a:r>
+              <a:rPr lang="en-US" sz="1300" b="1" i="1" dirty="0">
+                <a:solidFill>
+                  <a:srgbClr val="8A93B8"/>
+                </a:solidFill>
+                <a:latin typeface="Aptos" pitchFamily="34" charset="0"/>
+                <a:ea typeface="Aptos" pitchFamily="34" charset="-122"/>
+                <a:cs typeface="Aptos" pitchFamily="34" charset="-120"/>
+              </a:rPr>
+              <a:t>So it does not fall flat</a:t>
+            </a:r>
+            <a:endParaRPr lang="en-US" sz="1300" dirty="0"/>
+          </a:p>
+        </p:txBody>
+      </p:sp>
+      <p:sp>
+        <p:nvSpPr>
+          <p:cNvPr id="25" name="Shape 23"/>
+          <p:cNvSpPr/>
+          <p:nvPr/>
+        </p:nvSpPr>
+        <p:spPr>
+          <a:xfrm>
+            <a:off x="4828032" y="4297680"/>
+            <a:ext cx="128016" cy="128016"/>
+          </a:xfrm>
+          <a:prstGeom prst="ellipse">
+            <a:avLst/>
+          </a:prstGeom>
+          <a:solidFill>
+            <a:srgbClr val="7C5CFC"/>
+          </a:solidFill>
+          <a:ln/>
+        </p:spPr>
+      </p:sp>
+      <p:sp>
+        <p:nvSpPr>
+          <p:cNvPr id="26" name="Text 24"/>
+          <p:cNvSpPr/>
+          <p:nvPr/>
+        </p:nvSpPr>
+        <p:spPr>
+          <a:xfrm>
+            <a:off x="5065776" y="4206240"/>
+            <a:ext cx="2724912" cy="402336"/>
+          </a:xfrm>
+          <a:prstGeom prst="rect">
+            <a:avLst/>
+          </a:prstGeom>
+          <a:noFill/>
+          <a:ln/>
+        </p:spPr>
+        <p:txBody>
+          <a:bodyPr wrap="square" lIns="0" tIns="0" rIns="0" bIns="0" rtlCol="0" anchor="t"/>
+          <a:lstStyle/>
+          <a:p>
+            <a:pPr indent="0" marL="0">
+              <a:lnSpc>
+                <a:spcPct val="104000"/>
+              </a:lnSpc>
+              <a:buNone/>
+            </a:pPr>
+            <a:r>
+              <a:rPr lang="en-US" sz="1200" dirty="0">
+                <a:solidFill>
+                  <a:srgbClr val="43507B"/>
+                </a:solidFill>
+                <a:latin typeface="Aptos" pitchFamily="34" charset="0"/>
+                <a:ea typeface="Aptos" pitchFamily="34" charset="-122"/>
+                <a:cs typeface="Aptos" pitchFamily="34" charset="-120"/>
+              </a:rPr>
+              <a:t>The Executive Playbook PDF</a:t>
+            </a:r>
+            <a:endParaRPr lang="en-US" sz="1200" dirty="0"/>
+          </a:p>
+        </p:txBody>
+      </p:sp>
+      <p:sp>
+        <p:nvSpPr>
+          <p:cNvPr id="27" name="Shape 25"/>
+          <p:cNvSpPr/>
+          <p:nvPr/>
+        </p:nvSpPr>
+        <p:spPr>
+          <a:xfrm>
+            <a:off x="4828032" y="4754880"/>
+            <a:ext cx="128016" cy="128016"/>
+          </a:xfrm>
+          <a:prstGeom prst="ellipse">
+            <a:avLst/>
+          </a:prstGeom>
+          <a:solidFill>
+            <a:srgbClr val="7C5CFC"/>
+          </a:solidFill>
+          <a:ln/>
+        </p:spPr>
+      </p:sp>
+      <p:sp>
+        <p:nvSpPr>
+          <p:cNvPr id="28" name="Text 26"/>
+          <p:cNvSpPr/>
+          <p:nvPr/>
+        </p:nvSpPr>
+        <p:spPr>
+          <a:xfrm>
+            <a:off x="5065776" y="4663440"/>
+            <a:ext cx="2724912" cy="402336"/>
+          </a:xfrm>
+          <a:prstGeom prst="rect">
+            <a:avLst/>
+          </a:prstGeom>
+          <a:noFill/>
+          <a:ln/>
+        </p:spPr>
+        <p:txBody>
+          <a:bodyPr wrap="square" lIns="0" tIns="0" rIns="0" bIns="0" rtlCol="0" anchor="t"/>
+          <a:lstStyle/>
+          <a:p>
+            <a:pPr indent="0" marL="0">
+              <a:lnSpc>
+                <a:spcPct val="104000"/>
+              </a:lnSpc>
+              <a:buNone/>
+            </a:pPr>
+            <a:r>
+              <a:rPr lang="en-US" sz="1200" dirty="0">
+                <a:solidFill>
+                  <a:srgbClr val="43507B"/>
+                </a:solidFill>
+                <a:latin typeface="Aptos" pitchFamily="34" charset="0"/>
+                <a:ea typeface="Aptos" pitchFamily="34" charset="-122"/>
+                <a:cs typeface="Aptos" pitchFamily="34" charset="-120"/>
+              </a:rPr>
+              <a:t>The Playground and Prompt Gallery</a:t>
+            </a:r>
+            <a:endParaRPr lang="en-US" sz="1200" dirty="0"/>
+          </a:p>
+        </p:txBody>
+      </p:sp>
+      <p:sp>
+        <p:nvSpPr>
+          <p:cNvPr id="29" name="Shape 27"/>
+          <p:cNvSpPr/>
+          <p:nvPr/>
+        </p:nvSpPr>
+        <p:spPr>
+          <a:xfrm>
+            <a:off x="4828032" y="5212080"/>
+            <a:ext cx="128016" cy="128016"/>
+          </a:xfrm>
+          <a:prstGeom prst="ellipse">
+            <a:avLst/>
+          </a:prstGeom>
+          <a:solidFill>
+            <a:srgbClr val="7C5CFC"/>
+          </a:solidFill>
+          <a:ln/>
+        </p:spPr>
+      </p:sp>
+      <p:sp>
+        <p:nvSpPr>
+          <p:cNvPr id="30" name="Text 28"/>
+          <p:cNvSpPr/>
+          <p:nvPr/>
+        </p:nvSpPr>
+        <p:spPr>
+          <a:xfrm>
+            <a:off x="5065776" y="5120640"/>
+            <a:ext cx="2724912" cy="402336"/>
+          </a:xfrm>
+          <a:prstGeom prst="rect">
+            <a:avLst/>
+          </a:prstGeom>
+          <a:noFill/>
+          <a:ln/>
+        </p:spPr>
+        <p:txBody>
+          <a:bodyPr wrap="square" lIns="0" tIns="0" rIns="0" bIns="0" rtlCol="0" anchor="t"/>
+          <a:lstStyle/>
+          <a:p>
+            <a:pPr indent="0" marL="0">
+              <a:lnSpc>
+                <a:spcPct val="104000"/>
+              </a:lnSpc>
+              <a:buNone/>
+            </a:pPr>
+            <a:r>
+              <a:rPr lang="en-US" sz="1200" dirty="0">
+                <a:solidFill>
+                  <a:srgbClr val="43507B"/>
+                </a:solidFill>
+                <a:latin typeface="Aptos" pitchFamily="34" charset="0"/>
+                <a:ea typeface="Aptos" pitchFamily="34" charset="-122"/>
+                <a:cs typeface="Aptos" pitchFamily="34" charset="-120"/>
+              </a:rPr>
+              <a:t>A shared team prompt library</a:t>
+            </a:r>
+            <a:endParaRPr lang="en-US" sz="1200" dirty="0"/>
+          </a:p>
+        </p:txBody>
+      </p:sp>
+      <p:sp>
+        <p:nvSpPr>
+          <p:cNvPr id="31" name="Shape 29"/>
+          <p:cNvSpPr/>
+          <p:nvPr/>
+        </p:nvSpPr>
+        <p:spPr>
+          <a:xfrm>
+            <a:off x="8211312" y="2286000"/>
+            <a:ext cx="3529584" cy="3657600"/>
+          </a:xfrm>
+          <a:prstGeom prst="roundRect">
+            <a:avLst>
+              <a:gd name="adj" fmla="val 2591"/>
+            </a:avLst>
+          </a:prstGeom>
+          <a:solidFill>
+            <a:srgbClr val="FFFFFF"/>
+          </a:solidFill>
+          <a:ln w="12700">
+            <a:solidFill>
+              <a:srgbClr val="E4E9F7"/>
+            </a:solidFill>
+            <a:prstDash val="solid"/>
+          </a:ln>
+          <a:effectLst>
+            <a:outerShdw sx="100000" sy="100000" kx="0" ky="0" algn="bl" rotWithShape="0" blurRad="114300" dist="38100" dir="5400000">
+              <a:srgbClr val="0B1437">
+                <a:alpha val="10000"/>
+              </a:srgbClr>
+            </a:outerShdw>
+          </a:effectLst>
+        </p:spPr>
+      </p:sp>
+      <p:sp>
+        <p:nvSpPr>
+          <p:cNvPr id="32" name="Shape 30"/>
+          <p:cNvSpPr/>
+          <p:nvPr/>
+        </p:nvSpPr>
+        <p:spPr>
+          <a:xfrm>
+            <a:off x="8211312" y="2286000"/>
+            <a:ext cx="3529584" cy="128016"/>
+          </a:xfrm>
+          <a:prstGeom prst="rect">
+            <a:avLst/>
+          </a:prstGeom>
+          <a:solidFill>
+            <a:srgbClr val="F0A500"/>
+          </a:solidFill>
+          <a:ln/>
+        </p:spPr>
+      </p:sp>
+      <p:sp>
+        <p:nvSpPr>
+          <p:cNvPr id="33" name="Shape 31"/>
+          <p:cNvSpPr/>
+          <p:nvPr/>
+        </p:nvSpPr>
+        <p:spPr>
+          <a:xfrm>
+            <a:off x="8485632" y="2651760"/>
+            <a:ext cx="658368" cy="658368"/>
+          </a:xfrm>
+          <a:prstGeom prst="ellipse">
+            <a:avLst/>
+          </a:prstGeom>
+          <a:solidFill>
+            <a:srgbClr val="F0A500"/>
+          </a:solidFill>
+          <a:ln/>
+        </p:spPr>
+      </p:sp>
+      <p:sp>
+        <p:nvSpPr>
+          <p:cNvPr id="34" name="Text 32"/>
+          <p:cNvSpPr/>
+          <p:nvPr/>
+        </p:nvSpPr>
+        <p:spPr>
+          <a:xfrm>
+            <a:off x="8485632" y="2651760"/>
+            <a:ext cx="658368" cy="658368"/>
+          </a:xfrm>
+          <a:prstGeom prst="rect">
+            <a:avLst/>
+          </a:prstGeom>
+          <a:noFill/>
+          <a:ln/>
+        </p:spPr>
+        <p:txBody>
+          <a:bodyPr wrap="square" lIns="0" tIns="0" rIns="0" bIns="0" rtlCol="0" anchor="ctr"/>
+          <a:lstStyle/>
+          <a:p>
+            <a:pPr algn="ctr" indent="0" marL="0">
+              <a:buNone/>
+            </a:pPr>
+            <a:r>
+              <a:rPr lang="en-US" sz="3000" b="1" dirty="0">
+                <a:solidFill>
+                  <a:srgbClr val="FFFFFF"/>
+                </a:solidFill>
+                <a:latin typeface="Aptos" pitchFamily="34" charset="0"/>
+                <a:ea typeface="Aptos" pitchFamily="34" charset="-122"/>
+                <a:cs typeface="Aptos" pitchFamily="34" charset="-120"/>
+              </a:rPr>
+              <a:t>3</a:t>
+            </a:r>
+            <a:endParaRPr lang="en-US" sz="3000" dirty="0"/>
+          </a:p>
+        </p:txBody>
+      </p:sp>
+      <p:sp>
+        <p:nvSpPr>
+          <p:cNvPr id="35" name="Text 33"/>
+          <p:cNvSpPr/>
+          <p:nvPr/>
+        </p:nvSpPr>
+        <p:spPr>
+          <a:xfrm>
+            <a:off x="9308592" y="2688336"/>
+            <a:ext cx="2249424" cy="274320"/>
+          </a:xfrm>
+          <a:prstGeom prst="rect">
+            <a:avLst/>
+          </a:prstGeom>
+          <a:noFill/>
+          <a:ln/>
+        </p:spPr>
+        <p:txBody>
+          <a:bodyPr wrap="square" lIns="0" tIns="0" rIns="0" bIns="0" rtlCol="0" anchor="ctr"/>
+          <a:lstStyle/>
+          <a:p>
+            <a:pPr indent="0" marL="0">
+              <a:buNone/>
+            </a:pPr>
+            <a:r>
+              <a:rPr lang="en-US" sz="1200" b="1" spc="200" kern="0" dirty="0">
+                <a:solidFill>
+                  <a:srgbClr val="F0A500"/>
+                </a:solidFill>
+                <a:latin typeface="Aptos" pitchFamily="34" charset="0"/>
+                <a:ea typeface="Aptos" pitchFamily="34" charset="-122"/>
+                <a:cs typeface="Aptos" pitchFamily="34" charset="-120"/>
+              </a:rPr>
+              <a:t>STEP 3</a:t>
+            </a:r>
+            <a:endParaRPr lang="en-US" sz="1200" dirty="0"/>
+          </a:p>
+        </p:txBody>
+      </p:sp>
+      <p:sp>
+        <p:nvSpPr>
+          <p:cNvPr id="36" name="Text 34"/>
+          <p:cNvSpPr/>
+          <p:nvPr/>
+        </p:nvSpPr>
+        <p:spPr>
+          <a:xfrm>
+            <a:off x="9308592" y="2944368"/>
+            <a:ext cx="2249424" cy="365760"/>
+          </a:xfrm>
+          <a:prstGeom prst="rect">
+            <a:avLst/>
+          </a:prstGeom>
+          <a:noFill/>
+          <a:ln/>
+        </p:spPr>
+        <p:txBody>
+          <a:bodyPr wrap="square" lIns="0" tIns="0" rIns="0" bIns="0" rtlCol="0" anchor="ctr"/>
+          <a:lstStyle/>
+          <a:p>
+            <a:pPr indent="0" marL="0">
+              <a:buNone/>
+            </a:pPr>
+            <a:r>
+              <a:rPr lang="en-US" sz="1900" b="1" dirty="0">
+                <a:solidFill>
+                  <a:srgbClr val="0B1437"/>
+                </a:solidFill>
+                <a:latin typeface="Aptos" pitchFamily="34" charset="0"/>
+                <a:ea typeface="Aptos" pitchFamily="34" charset="-122"/>
+                <a:cs typeface="Aptos" pitchFamily="34" charset="-120"/>
+              </a:rPr>
+              <a:t>Book the session</a:t>
+            </a:r>
+            <a:endParaRPr lang="en-US" sz="1900" dirty="0"/>
+          </a:p>
+        </p:txBody>
+      </p:sp>
+      <p:sp>
+        <p:nvSpPr>
+          <p:cNvPr id="37" name="Text 35"/>
+          <p:cNvSpPr/>
+          <p:nvPr/>
+        </p:nvSpPr>
+        <p:spPr>
+          <a:xfrm>
+            <a:off x="8485632" y="3566160"/>
+            <a:ext cx="2980944" cy="292608"/>
+          </a:xfrm>
+          <a:prstGeom prst="rect">
+            <a:avLst/>
+          </a:prstGeom>
+          <a:noFill/>
+          <a:ln/>
+        </p:spPr>
+        <p:txBody>
+          <a:bodyPr wrap="square" lIns="0" tIns="0" rIns="0" bIns="0" rtlCol="0" anchor="ctr"/>
+          <a:lstStyle/>
+          <a:p>
+            <a:pPr indent="0" marL="0">
+              <a:buNone/>
+            </a:pPr>
+            <a:r>
+              <a:rPr lang="en-US" sz="1300" b="1" i="1" dirty="0">
+                <a:solidFill>
+                  <a:srgbClr val="8A93B8"/>
+                </a:solidFill>
+                <a:latin typeface="Aptos" pitchFamily="34" charset="0"/>
+                <a:ea typeface="Aptos" pitchFamily="34" charset="-122"/>
+                <a:cs typeface="Aptos" pitchFamily="34" charset="-120"/>
+              </a:rPr>
+              <a:t>The fastest path to fluent</a:t>
+            </a:r>
+            <a:endParaRPr lang="en-US" sz="1300" dirty="0"/>
+          </a:p>
+        </p:txBody>
+      </p:sp>
+      <p:sp>
+        <p:nvSpPr>
+          <p:cNvPr id="38" name="Shape 36"/>
+          <p:cNvSpPr/>
+          <p:nvPr/>
+        </p:nvSpPr>
+        <p:spPr>
+          <a:xfrm>
+            <a:off x="8522208" y="4023360"/>
+            <a:ext cx="128016" cy="128016"/>
+          </a:xfrm>
+          <a:prstGeom prst="ellipse">
+            <a:avLst/>
+          </a:prstGeom>
+          <a:solidFill>
+            <a:srgbClr val="F0A500"/>
+          </a:solidFill>
+          <a:ln/>
+        </p:spPr>
+      </p:sp>
+      <p:sp>
+        <p:nvSpPr>
+          <p:cNvPr id="39" name="Text 37"/>
+          <p:cNvSpPr/>
+          <p:nvPr/>
+        </p:nvSpPr>
+        <p:spPr>
+          <a:xfrm>
+            <a:off x="8759952" y="3931920"/>
+            <a:ext cx="2724912" cy="402336"/>
+          </a:xfrm>
+          <a:prstGeom prst="rect">
+            <a:avLst/>
+          </a:prstGeom>
+          <a:noFill/>
+          <a:ln/>
+        </p:spPr>
+        <p:txBody>
+          <a:bodyPr wrap="square" lIns="0" tIns="0" rIns="0" bIns="0" rtlCol="0" anchor="t"/>
+          <a:lstStyle/>
+          <a:p>
+            <a:pPr indent="0" marL="0">
+              <a:lnSpc>
+                <a:spcPct val="104000"/>
+              </a:lnSpc>
+              <a:buNone/>
+            </a:pPr>
+            <a:r>
+              <a:rPr lang="en-US" sz="1200" dirty="0">
+                <a:solidFill>
+                  <a:srgbClr val="43507B"/>
+                </a:solidFill>
+                <a:latin typeface="Aptos" pitchFamily="34" charset="0"/>
+                <a:ea typeface="Aptos" pitchFamily="34" charset="-122"/>
+                <a:cs typeface="Aptos" pitchFamily="34" charset="-120"/>
+              </a:rPr>
+              <a:t>A live 45-minute working session</a:t>
+            </a:r>
+            <a:endParaRPr lang="en-US" sz="1200" dirty="0"/>
+          </a:p>
+        </p:txBody>
+      </p:sp>
+      <p:sp>
+        <p:nvSpPr>
+          <p:cNvPr id="40" name="Shape 38"/>
+          <p:cNvSpPr/>
+          <p:nvPr/>
+        </p:nvSpPr>
+        <p:spPr>
+          <a:xfrm>
+            <a:off x="8522208" y="4480560"/>
+            <a:ext cx="128016" cy="128016"/>
+          </a:xfrm>
+          <a:prstGeom prst="ellipse">
+            <a:avLst/>
+          </a:prstGeom>
+          <a:solidFill>
+            <a:srgbClr val="F0A500"/>
+          </a:solidFill>
+          <a:ln/>
+        </p:spPr>
+      </p:sp>
+      <p:sp>
+        <p:nvSpPr>
+          <p:cNvPr id="41" name="Text 39"/>
+          <p:cNvSpPr/>
+          <p:nvPr/>
+        </p:nvSpPr>
+        <p:spPr>
+          <a:xfrm>
+            <a:off x="8759952" y="4389120"/>
+            <a:ext cx="2724912" cy="402336"/>
+          </a:xfrm>
+          <a:prstGeom prst="rect">
+            <a:avLst/>
+          </a:prstGeom>
+          <a:noFill/>
+          <a:ln/>
+        </p:spPr>
+        <p:txBody>
+          <a:bodyPr wrap="square" lIns="0" tIns="0" rIns="0" bIns="0" rtlCol="0" anchor="t"/>
+          <a:lstStyle/>
+          <a:p>
+            <a:pPr indent="0" marL="0">
+              <a:lnSpc>
+                <a:spcPct val="104000"/>
+              </a:lnSpc>
+              <a:buNone/>
+            </a:pPr>
+            <a:r>
+              <a:rPr lang="en-US" sz="1200" dirty="0">
+                <a:solidFill>
+                  <a:srgbClr val="43507B"/>
+                </a:solidFill>
+                <a:latin typeface="Aptos" pitchFamily="34" charset="0"/>
+                <a:ea typeface="Aptos" pitchFamily="34" charset="-122"/>
+                <a:cs typeface="Aptos" pitchFamily="34" charset="-120"/>
+              </a:rPr>
+              <a:t>Personalization, set up with you</a:t>
+            </a:r>
+            <a:endParaRPr lang="en-US" sz="1200" dirty="0"/>
+          </a:p>
+        </p:txBody>
+      </p:sp>
+      <p:sp>
+        <p:nvSpPr>
+          <p:cNvPr id="42" name="Shape 40"/>
+          <p:cNvSpPr/>
+          <p:nvPr/>
+        </p:nvSpPr>
+        <p:spPr>
+          <a:xfrm>
+            <a:off x="8522208" y="4937760"/>
+            <a:ext cx="128016" cy="128016"/>
+          </a:xfrm>
+          <a:prstGeom prst="ellipse">
+            <a:avLst/>
+          </a:prstGeom>
+          <a:solidFill>
+            <a:srgbClr val="F0A500"/>
+          </a:solidFill>
+          <a:ln/>
+        </p:spPr>
+      </p:sp>
+      <p:sp>
+        <p:nvSpPr>
+          <p:cNvPr id="43" name="Text 41"/>
+          <p:cNvSpPr/>
+          <p:nvPr/>
+        </p:nvSpPr>
+        <p:spPr>
+          <a:xfrm>
+            <a:off x="8759952" y="4846320"/>
+            <a:ext cx="2724912" cy="402336"/>
+          </a:xfrm>
+          <a:prstGeom prst="rect">
+            <a:avLst/>
+          </a:prstGeom>
+          <a:noFill/>
+          <a:ln/>
+        </p:spPr>
+        <p:txBody>
+          <a:bodyPr wrap="square" lIns="0" tIns="0" rIns="0" bIns="0" rtlCol="0" anchor="t"/>
+          <a:lstStyle/>
+          <a:p>
+            <a:pPr indent="0" marL="0">
+              <a:lnSpc>
+                <a:spcPct val="104000"/>
+              </a:lnSpc>
+              <a:buNone/>
+            </a:pPr>
+            <a:r>
+              <a:rPr lang="en-US" sz="1200" dirty="0">
+                <a:solidFill>
+                  <a:srgbClr val="43507B"/>
+                </a:solidFill>
+                <a:latin typeface="Aptos" pitchFamily="34" charset="0"/>
+                <a:ea typeface="Aptos" pitchFamily="34" charset="-122"/>
+                <a:cs typeface="Aptos" pitchFamily="34" charset="-120"/>
+              </a:rPr>
+              <a:t>Each leader’s first real win</a:t>
+            </a:r>
+            <a:endParaRPr lang="en-US" sz="1200" dirty="0"/>
+          </a:p>
+        </p:txBody>
+      </p:sp>
+      <p:sp>
+        <p:nvSpPr>
+          <p:cNvPr id="44" name="Text 42"/>
+          <p:cNvSpPr/>
+          <p:nvPr/>
+        </p:nvSpPr>
+        <p:spPr>
+          <a:xfrm>
+            <a:off x="640080" y="6419088"/>
+            <a:ext cx="8229600" cy="274320"/>
+          </a:xfrm>
+          <a:prstGeom prst="rect">
+            <a:avLst/>
+          </a:prstGeom>
+          <a:noFill/>
+          <a:ln/>
+        </p:spPr>
+        <p:txBody>
+          <a:bodyPr wrap="square" lIns="0" tIns="0" rIns="0" bIns="0" rtlCol="0" anchor="ctr"/>
+          <a:lstStyle/>
+          <a:p>
+            <a:pPr algn="l" indent="0" marL="0">
+              <a:buNone/>
+            </a:pPr>
+            <a:r>
+              <a:rPr lang="en-US" sz="900" dirty="0">
+                <a:solidFill>
+                  <a:srgbClr val="8A93B8"/>
+                </a:solidFill>
+                <a:latin typeface="Aptos" pitchFamily="34" charset="0"/>
+                <a:ea typeface="Aptos" pitchFamily="34" charset="-122"/>
+                <a:cs typeface="Aptos" pitchFamily="34" charset="-120"/>
+              </a:rPr>
+              <a:t>Microsoft 365 Copilot Premium  ·  Executive Working Session</a:t>
+            </a:r>
+            <a:endParaRPr lang="en-US" sz="900" dirty="0"/>
+          </a:p>
+        </p:txBody>
+      </p:sp>
+      <p:sp>
+        <p:nvSpPr>
+          <p:cNvPr id="45" name="Text 43"/>
+          <p:cNvSpPr/>
+          <p:nvPr/>
+        </p:nvSpPr>
+        <p:spPr>
+          <a:xfrm>
+            <a:off x="11155680" y="6419088"/>
+            <a:ext cx="640080" cy="274320"/>
+          </a:xfrm>
+          <a:prstGeom prst="rect">
+            <a:avLst/>
+          </a:prstGeom>
+          <a:noFill/>
+          <a:ln/>
+        </p:spPr>
+        <p:txBody>
+          <a:bodyPr wrap="square" lIns="0" tIns="0" rIns="0" bIns="0" rtlCol="0" anchor="ctr"/>
+          <a:lstStyle/>
+          <a:p>
+            <a:pPr algn="r" indent="0" marL="0">
+              <a:buNone/>
+            </a:pPr>
+            <a:r>
+              <a:rPr lang="en-US" sz="900" dirty="0">
+                <a:solidFill>
+                  <a:srgbClr val="8A93B8"/>
+                </a:solidFill>
+                <a:latin typeface="Aptos" pitchFamily="34" charset="0"/>
+                <a:ea typeface="Aptos" pitchFamily="34" charset="-122"/>
+                <a:cs typeface="Aptos" pitchFamily="34" charset="-120"/>
+              </a:rPr>
+              <a:t>24</a:t>
+            </a:r>
+            <a:endParaRPr lang="en-US" sz="900" dirty="0"/>
+          </a:p>
+        </p:txBody>
+      </p:sp>
+    </p:spTree>
+  </p:cSld>
+  <p:clrMapOvr>
+    <a:masterClrMapping/>
+  </p:clrMapOvr>
+</p:sld>
+</file>
+
+<file path=ppt/slides/slide23.xml><?xml version="1.0" encoding="utf-8"?>
+<p:sld xmlns:a="http://schemas.openxmlformats.org/drawingml/2006/main" xmlns:r="http://schemas.openxmlformats.org/officeDocument/2006/relationships" xmlns:p="http://schemas.openxmlformats.org/presentationml/2006/main">
+  <p:cSld name="Slide 13">
+    <p:bg>
+      <p:bgPr>
+        <a:solidFill>
+          <a:srgbClr val="F4F7FE"/>
+        </a:solidFill>
+      </p:bgPr>
+    </p:bg>
+    <p:spTree>
+      <p:nvGrpSpPr>
+        <p:cNvPr id="1" name=""/>
+        <p:cNvGrpSpPr/>
+        <p:nvPr/>
+      </p:nvGrpSpPr>
+      <p:grpSpPr>
+        <a:xfrm>
+          <a:off x="0" y="0"/>
+          <a:ext cx="0" cy="0"/>
+          <a:chOff x="0" y="0"/>
+          <a:chExt cx="0" cy="0"/>
+        </a:xfrm>
+      </p:grpSpPr>
+      <p:sp>
+        <p:nvSpPr>
+          <p:cNvPr id="2" name="Shape 0"/>
+          <p:cNvSpPr/>
+          <p:nvPr/>
+        </p:nvSpPr>
+        <p:spPr>
+          <a:xfrm>
+            <a:off x="822960" y="566928"/>
+            <a:ext cx="1170432" cy="310896"/>
+          </a:xfrm>
+          <a:prstGeom prst="roundRect">
+            <a:avLst>
+              <a:gd name="adj" fmla="val 50000"/>
+            </a:avLst>
+          </a:prstGeom>
+          <a:solidFill>
+            <a:srgbClr val="2D6CDF"/>
+          </a:solidFill>
+          <a:ln/>
+        </p:spPr>
+      </p:sp>
+      <p:sp>
+        <p:nvSpPr>
+          <p:cNvPr id="3" name="Text 1"/>
+          <p:cNvSpPr/>
+          <p:nvPr/>
+        </p:nvSpPr>
+        <p:spPr>
+          <a:xfrm>
+            <a:off x="822960" y="566928"/>
+            <a:ext cx="1170432" cy="310896"/>
+          </a:xfrm>
+          <a:prstGeom prst="rect">
+            <a:avLst/>
+          </a:prstGeom>
+          <a:noFill/>
+          <a:ln/>
+        </p:spPr>
+        <p:txBody>
+          <a:bodyPr wrap="square" lIns="0" tIns="0" rIns="0" bIns="0" rtlCol="0" anchor="ctr"/>
+          <a:lstStyle/>
+          <a:p>
+            <a:pPr algn="ctr" indent="0" marL="0">
+              <a:buNone/>
+            </a:pPr>
+            <a:r>
+              <a:rPr lang="en-US" sz="1100" b="1" spc="100" kern="0" dirty="0">
+                <a:solidFill>
+                  <a:srgbClr val="FFFFFF"/>
+                </a:solidFill>
+                <a:latin typeface="Aptos" pitchFamily="34" charset="0"/>
+                <a:ea typeface="Aptos" pitchFamily="34" charset="-122"/>
+                <a:cs typeface="Aptos" pitchFamily="34" charset="-120"/>
+              </a:rPr>
+              <a:t>TIER 1</a:t>
+            </a:r>
+            <a:endParaRPr lang="en-US" sz="1100" dirty="0"/>
+          </a:p>
+        </p:txBody>
+      </p:sp>
+      <p:sp>
+        <p:nvSpPr>
+          <p:cNvPr id="4" name="Text 2"/>
+          <p:cNvSpPr/>
+          <p:nvPr/>
+        </p:nvSpPr>
+        <p:spPr>
+          <a:xfrm>
+            <a:off x="2121408" y="566928"/>
+            <a:ext cx="8686800" cy="310896"/>
+          </a:xfrm>
+          <a:prstGeom prst="rect">
+            <a:avLst/>
+          </a:prstGeom>
+          <a:noFill/>
+          <a:ln/>
+        </p:spPr>
+        <p:txBody>
+          <a:bodyPr wrap="square" lIns="0" tIns="0" rIns="0" bIns="0" rtlCol="0" anchor="ctr"/>
+          <a:lstStyle/>
+          <a:p>
+            <a:pPr algn="l" indent="0" marL="0">
+              <a:buNone/>
+            </a:pPr>
+            <a:r>
+              <a:rPr lang="en-US" sz="1200" b="1" spc="200" kern="0" dirty="0">
+                <a:solidFill>
+                  <a:srgbClr val="2D6CDF"/>
+                </a:solidFill>
+                <a:latin typeface="Aptos" pitchFamily="34" charset="0"/>
+                <a:ea typeface="Aptos" pitchFamily="34" charset="-122"/>
+                <a:cs typeface="Aptos" pitchFamily="34" charset="-120"/>
+              </a:rPr>
+              <a:t>MAKE IT YOURS</a:t>
+            </a:r>
+            <a:endParaRPr lang="en-US" sz="1200" dirty="0"/>
+          </a:p>
+        </p:txBody>
+      </p:sp>
+      <p:sp>
+        <p:nvSpPr>
+          <p:cNvPr id="5" name="Text 3"/>
+          <p:cNvSpPr/>
+          <p:nvPr/>
+        </p:nvSpPr>
+        <p:spPr>
+          <a:xfrm>
+            <a:off x="786384" y="914400"/>
+            <a:ext cx="11155680" cy="566928"/>
+          </a:xfrm>
+          <a:prstGeom prst="rect">
+            <a:avLst/>
+          </a:prstGeom>
+          <a:noFill/>
+          <a:ln/>
+        </p:spPr>
+        <p:txBody>
+          <a:bodyPr wrap="square" lIns="0" tIns="0" rIns="0" bIns="0" rtlCol="0" anchor="ctr"/>
+          <a:lstStyle/>
+          <a:p>
+            <a:pPr indent="0" marL="0">
+              <a:buNone/>
+            </a:pPr>
+            <a:r>
+              <a:rPr lang="en-US" sz="2700" b="1" dirty="0">
+                <a:solidFill>
+                  <a:srgbClr val="0B1437"/>
+                </a:solidFill>
+                <a:latin typeface="Aptos" pitchFamily="34" charset="0"/>
+                <a:ea typeface="Aptos" pitchFamily="34" charset="-122"/>
+                <a:cs typeface="Aptos" pitchFamily="34" charset="-120"/>
+              </a:rPr>
+              <a:t>Set it up once, and it sounds like you</a:t>
+            </a:r>
+            <a:endParaRPr lang="en-US" sz="2700" dirty="0"/>
+          </a:p>
+        </p:txBody>
+      </p:sp>
+      <p:sp>
+        <p:nvSpPr>
+          <p:cNvPr id="6" name="Text 4"/>
+          <p:cNvSpPr/>
+          <p:nvPr/>
+        </p:nvSpPr>
+        <p:spPr>
+          <a:xfrm>
+            <a:off x="822960" y="1499616"/>
+            <a:ext cx="10607040" cy="402336"/>
+          </a:xfrm>
+          <a:prstGeom prst="rect">
+            <a:avLst/>
+          </a:prstGeom>
+          <a:noFill/>
+          <a:ln/>
+        </p:spPr>
+        <p:txBody>
+          <a:bodyPr wrap="square" lIns="0" tIns="0" rIns="0" bIns="0" rtlCol="0" anchor="ctr"/>
+          <a:lstStyle/>
+          <a:p>
+            <a:pPr indent="0" marL="0">
+              <a:lnSpc>
+                <a:spcPct val="112000"/>
+              </a:lnSpc>
+              <a:buNone/>
+            </a:pPr>
+            <a:r>
+              <a:rPr lang="en-US" sz="1400" dirty="0">
+                <a:solidFill>
+                  <a:srgbClr val="43507B"/>
+                </a:solidFill>
+                <a:latin typeface="Aptos" pitchFamily="34" charset="0"/>
+                <a:ea typeface="Aptos" pitchFamily="34" charset="-122"/>
+                <a:cs typeface="Aptos" pitchFamily="34" charset="-120"/>
+              </a:rPr>
+              <a:t>A few minutes of setup, and less of what Copilot writes needs a rewrite. This is what turns a helpful tool into one that sounds like you.</a:t>
+            </a:r>
+            <a:endParaRPr lang="en-US" sz="1400" dirty="0"/>
+          </a:p>
+        </p:txBody>
+      </p:sp>
+      <p:sp>
+        <p:nvSpPr>
+          <p:cNvPr id="7" name="Shape 5"/>
+          <p:cNvSpPr/>
+          <p:nvPr/>
+        </p:nvSpPr>
+        <p:spPr>
+          <a:xfrm>
+            <a:off x="822960" y="2029968"/>
+            <a:ext cx="5175504" cy="3154680"/>
+          </a:xfrm>
+          <a:prstGeom prst="roundRect">
+            <a:avLst>
+              <a:gd name="adj" fmla="val 2899"/>
+            </a:avLst>
+          </a:prstGeom>
+          <a:solidFill>
+            <a:srgbClr val="FFFFFF"/>
+          </a:solidFill>
+          <a:ln w="12700">
+            <a:solidFill>
+              <a:srgbClr val="E4E9F7"/>
+            </a:solidFill>
+            <a:prstDash val="solid"/>
+          </a:ln>
+          <a:effectLst>
+            <a:outerShdw sx="100000" sy="100000" kx="0" ky="0" algn="bl" rotWithShape="0" blurRad="114300" dist="38100" dir="5400000">
+              <a:srgbClr val="0B1437">
+                <a:alpha val="10000"/>
+              </a:srgbClr>
+            </a:outerShdw>
+          </a:effectLst>
+        </p:spPr>
+      </p:sp>
+      <p:sp>
+        <p:nvSpPr>
+          <p:cNvPr id="8" name="Shape 6"/>
+          <p:cNvSpPr/>
+          <p:nvPr/>
+        </p:nvSpPr>
+        <p:spPr>
+          <a:xfrm>
+            <a:off x="822960" y="2029968"/>
+            <a:ext cx="5175504" cy="109728"/>
+          </a:xfrm>
+          <a:prstGeom prst="rect">
+            <a:avLst/>
+          </a:prstGeom>
+          <a:solidFill>
+            <a:srgbClr val="2D6CDF"/>
+          </a:solidFill>
+          <a:ln/>
+        </p:spPr>
+      </p:sp>
+      <p:sp>
+        <p:nvSpPr>
+          <p:cNvPr id="9" name="Shape 7"/>
+          <p:cNvSpPr/>
+          <p:nvPr/>
+        </p:nvSpPr>
+        <p:spPr>
+          <a:xfrm>
+            <a:off x="1115568" y="2340864"/>
+            <a:ext cx="749808" cy="749808"/>
+          </a:xfrm>
+          <a:prstGeom prst="ellipse">
+            <a:avLst/>
+          </a:prstGeom>
+          <a:solidFill>
+            <a:srgbClr val="2D6CDF"/>
+          </a:solidFill>
+          <a:ln/>
+          <a:effectLst>
+            <a:outerShdw sx="100000" sy="100000" kx="0" ky="0" algn="bl" rotWithShape="0" blurRad="114300" dist="38100" dir="5400000">
+              <a:srgbClr val="0B1437">
+                <a:alpha val="10000"/>
+              </a:srgbClr>
+            </a:outerShdw>
+          </a:effectLst>
+        </p:spPr>
+      </p:sp>
+      <p:pic>
+        <p:nvPicPr>
+          <p:cNvPr id="10" name="Image 0" descr="preencoded.png"/>
+          <p:cNvPicPr>
+            <a:picLocks noChangeAspect="1"/>
+          </p:cNvPicPr>
+          <p:nvPr/>
+        </p:nvPicPr>
+        <p:blipFill>
+          <a:blip r:embed="rId1"/>
+          <a:stretch>
+            <a:fillRect/>
+          </a:stretch>
+        </p:blipFill>
+        <p:spPr>
+          <a:xfrm>
+            <a:off x="1340510" y="2565806"/>
+            <a:ext cx="299923" cy="299923"/>
+          </a:xfrm>
+          <a:prstGeom prst="rect">
+            <a:avLst/>
+          </a:prstGeom>
+        </p:spPr>
+      </p:pic>
+      <p:sp>
+        <p:nvSpPr>
+          <p:cNvPr id="11" name="Text 8"/>
+          <p:cNvSpPr/>
+          <p:nvPr/>
+        </p:nvSpPr>
+        <p:spPr>
+          <a:xfrm>
+            <a:off x="2103120" y="2322576"/>
+            <a:ext cx="3712464" cy="402336"/>
+          </a:xfrm>
+          <a:prstGeom prst="rect">
+            <a:avLst/>
+          </a:prstGeom>
+          <a:noFill/>
+          <a:ln/>
+        </p:spPr>
+        <p:txBody>
+          <a:bodyPr wrap="square" lIns="0" tIns="0" rIns="0" bIns="0" rtlCol="0" anchor="ctr"/>
+          <a:lstStyle/>
+          <a:p>
+            <a:pPr indent="0" marL="0">
+              <a:buNone/>
+            </a:pPr>
+            <a:r>
+              <a:rPr lang="en-US" sz="2100" b="1" dirty="0">
+                <a:solidFill>
+                  <a:srgbClr val="2D6CDF"/>
+                </a:solidFill>
+                <a:latin typeface="Aptos" pitchFamily="34" charset="0"/>
+                <a:ea typeface="Aptos" pitchFamily="34" charset="-122"/>
+                <a:cs typeface="Aptos" pitchFamily="34" charset="-120"/>
+              </a:rPr>
+              <a:t>Tell it who you are</a:t>
+            </a:r>
+            <a:endParaRPr lang="en-US" sz="2100" dirty="0"/>
+          </a:p>
+        </p:txBody>
+      </p:sp>
+      <p:sp>
+        <p:nvSpPr>
+          <p:cNvPr id="12" name="Text 9"/>
+          <p:cNvSpPr/>
+          <p:nvPr/>
+        </p:nvSpPr>
+        <p:spPr>
+          <a:xfrm>
+            <a:off x="2103120" y="2761488"/>
+            <a:ext cx="3712464" cy="274320"/>
+          </a:xfrm>
+          <a:prstGeom prst="rect">
+            <a:avLst/>
+          </a:prstGeom>
+          <a:noFill/>
+          <a:ln/>
+        </p:spPr>
+        <p:txBody>
+          <a:bodyPr wrap="square" lIns="0" tIns="0" rIns="0" bIns="0" rtlCol="0" anchor="ctr"/>
+          <a:lstStyle/>
+          <a:p>
+            <a:pPr indent="0" marL="0">
+              <a:buNone/>
+            </a:pPr>
+            <a:r>
+              <a:rPr lang="en-US" sz="1200" b="1" dirty="0">
+                <a:solidFill>
+                  <a:srgbClr val="8A93B8"/>
+                </a:solidFill>
+                <a:latin typeface="Aptos" pitchFamily="34" charset="0"/>
+                <a:ea typeface="Aptos" pitchFamily="34" charset="-122"/>
+                <a:cs typeface="Aptos" pitchFamily="34" charset="-120"/>
+              </a:rPr>
+              <a:t>Personalization</a:t>
+            </a:r>
+            <a:endParaRPr lang="en-US" sz="1200" dirty="0"/>
+          </a:p>
+        </p:txBody>
+      </p:sp>
+      <p:sp>
+        <p:nvSpPr>
+          <p:cNvPr id="13" name="Text 10"/>
+          <p:cNvSpPr/>
+          <p:nvPr/>
+        </p:nvSpPr>
+        <p:spPr>
+          <a:xfrm>
+            <a:off x="1133856" y="3291840"/>
+            <a:ext cx="4572000" cy="914400"/>
+          </a:xfrm>
+          <a:prstGeom prst="rect">
+            <a:avLst/>
+          </a:prstGeom>
+          <a:noFill/>
+          <a:ln/>
+        </p:spPr>
+        <p:txBody>
+          <a:bodyPr wrap="square" lIns="0" tIns="0" rIns="0" bIns="0" rtlCol="0" anchor="t"/>
+          <a:lstStyle/>
+          <a:p>
+            <a:pPr indent="0" marL="0">
+              <a:lnSpc>
+                <a:spcPct val="114000"/>
+              </a:lnSpc>
+              <a:buNone/>
+            </a:pPr>
+            <a:r>
+              <a:rPr lang="en-US" sz="1250" dirty="0">
+                <a:solidFill>
+                  <a:srgbClr val="43507B"/>
+                </a:solidFill>
+                <a:latin typeface="Aptos" pitchFamily="34" charset="0"/>
+                <a:ea typeface="Aptos" pitchFamily="34" charset="-122"/>
+                <a:cs typeface="Aptos" pitchFamily="34" charset="-120"/>
+              </a:rPr>
+              <a:t>Give Copilot a short profile: your role, your priorities, and how you like things written.</a:t>
+            </a:r>
+            <a:endParaRPr lang="en-US" sz="1250" dirty="0"/>
+          </a:p>
+        </p:txBody>
+      </p:sp>
+      <p:sp>
+        <p:nvSpPr>
+          <p:cNvPr id="14" name="Shape 11"/>
+          <p:cNvSpPr/>
+          <p:nvPr/>
+        </p:nvSpPr>
+        <p:spPr>
+          <a:xfrm>
+            <a:off x="1152144" y="4361688"/>
+            <a:ext cx="137160" cy="137160"/>
+          </a:xfrm>
+          <a:prstGeom prst="ellipse">
+            <a:avLst/>
+          </a:prstGeom>
+          <a:solidFill>
+            <a:srgbClr val="2D6CDF"/>
+          </a:solidFill>
+          <a:ln/>
+        </p:spPr>
+      </p:sp>
+      <p:sp>
+        <p:nvSpPr>
+          <p:cNvPr id="15" name="Text 12"/>
+          <p:cNvSpPr/>
+          <p:nvPr/>
+        </p:nvSpPr>
+        <p:spPr>
+          <a:xfrm>
+            <a:off x="1389888" y="4270248"/>
+            <a:ext cx="4297680" cy="274320"/>
+          </a:xfrm>
+          <a:prstGeom prst="rect">
+            <a:avLst/>
+          </a:prstGeom>
+          <a:noFill/>
+          <a:ln/>
+        </p:spPr>
+        <p:txBody>
+          <a:bodyPr wrap="square" lIns="0" tIns="0" rIns="0" bIns="0" rtlCol="0" anchor="ctr"/>
+          <a:lstStyle/>
+          <a:p>
+            <a:pPr indent="0" marL="0">
+              <a:buNone/>
+            </a:pPr>
+            <a:r>
+              <a:rPr lang="en-US" sz="1150" dirty="0">
+                <a:solidFill>
+                  <a:srgbClr val="0B1437"/>
+                </a:solidFill>
+                <a:latin typeface="Aptos" pitchFamily="34" charset="0"/>
+                <a:ea typeface="Aptos" pitchFamily="34" charset="-122"/>
+                <a:cs typeface="Aptos" pitchFamily="34" charset="-120"/>
+              </a:rPr>
+              <a:t>Your role and your priorities</a:t>
+            </a:r>
+            <a:endParaRPr lang="en-US" sz="1150" dirty="0"/>
+          </a:p>
+        </p:txBody>
+      </p:sp>
+      <p:sp>
+        <p:nvSpPr>
+          <p:cNvPr id="16" name="Shape 13"/>
+          <p:cNvSpPr/>
+          <p:nvPr/>
+        </p:nvSpPr>
+        <p:spPr>
+          <a:xfrm>
+            <a:off x="1152144" y="4636008"/>
+            <a:ext cx="137160" cy="137160"/>
+          </a:xfrm>
+          <a:prstGeom prst="ellipse">
+            <a:avLst/>
+          </a:prstGeom>
+          <a:solidFill>
+            <a:srgbClr val="2D6CDF"/>
+          </a:solidFill>
+          <a:ln/>
+        </p:spPr>
+      </p:sp>
+      <p:sp>
+        <p:nvSpPr>
+          <p:cNvPr id="17" name="Text 14"/>
+          <p:cNvSpPr/>
+          <p:nvPr/>
+        </p:nvSpPr>
+        <p:spPr>
+          <a:xfrm>
+            <a:off x="1389888" y="4544568"/>
+            <a:ext cx="4297680" cy="274320"/>
+          </a:xfrm>
+          <a:prstGeom prst="rect">
+            <a:avLst/>
+          </a:prstGeom>
+          <a:noFill/>
+          <a:ln/>
+        </p:spPr>
+        <p:txBody>
+          <a:bodyPr wrap="square" lIns="0" tIns="0" rIns="0" bIns="0" rtlCol="0" anchor="ctr"/>
+          <a:lstStyle/>
+          <a:p>
+            <a:pPr indent="0" marL="0">
+              <a:buNone/>
+            </a:pPr>
+            <a:r>
+              <a:rPr lang="en-US" sz="1150" dirty="0">
+                <a:solidFill>
+                  <a:srgbClr val="0B1437"/>
+                </a:solidFill>
+                <a:latin typeface="Aptos" pitchFamily="34" charset="0"/>
+                <a:ea typeface="Aptos" pitchFamily="34" charset="-122"/>
+                <a:cs typeface="Aptos" pitchFamily="34" charset="-120"/>
+              </a:rPr>
+              <a:t>How you like things written</a:t>
+            </a:r>
+            <a:endParaRPr lang="en-US" sz="1150" dirty="0"/>
+          </a:p>
+        </p:txBody>
+      </p:sp>
+      <p:sp>
+        <p:nvSpPr>
+          <p:cNvPr id="18" name="Shape 15"/>
+          <p:cNvSpPr/>
+          <p:nvPr/>
+        </p:nvSpPr>
+        <p:spPr>
+          <a:xfrm>
+            <a:off x="1152144" y="4910328"/>
+            <a:ext cx="137160" cy="137160"/>
+          </a:xfrm>
+          <a:prstGeom prst="ellipse">
+            <a:avLst/>
+          </a:prstGeom>
+          <a:solidFill>
+            <a:srgbClr val="2D6CDF"/>
+          </a:solidFill>
+          <a:ln/>
+        </p:spPr>
+      </p:sp>
+      <p:sp>
+        <p:nvSpPr>
+          <p:cNvPr id="19" name="Text 16"/>
+          <p:cNvSpPr/>
+          <p:nvPr/>
+        </p:nvSpPr>
+        <p:spPr>
+          <a:xfrm>
+            <a:off x="1389888" y="4818888"/>
+            <a:ext cx="4297680" cy="274320"/>
+          </a:xfrm>
+          <a:prstGeom prst="rect">
+            <a:avLst/>
+          </a:prstGeom>
+          <a:noFill/>
+          <a:ln/>
+        </p:spPr>
+        <p:txBody>
+          <a:bodyPr wrap="square" lIns="0" tIns="0" rIns="0" bIns="0" rtlCol="0" anchor="ctr"/>
+          <a:lstStyle/>
+          <a:p>
+            <a:pPr indent="0" marL="0">
+              <a:buNone/>
+            </a:pPr>
+            <a:r>
+              <a:rPr lang="en-US" sz="1150" dirty="0">
+                <a:solidFill>
+                  <a:srgbClr val="0B1437"/>
+                </a:solidFill>
+                <a:latin typeface="Aptos" pitchFamily="34" charset="0"/>
+                <a:ea typeface="Aptos" pitchFamily="34" charset="-122"/>
+                <a:cs typeface="Aptos" pitchFamily="34" charset="-120"/>
+              </a:rPr>
+              <a:t>Set once, and used everywhere</a:t>
+            </a:r>
+            <a:endParaRPr lang="en-US" sz="1150" dirty="0"/>
+          </a:p>
+        </p:txBody>
+      </p:sp>
+      <p:sp>
+        <p:nvSpPr>
+          <p:cNvPr id="20" name="Shape 17"/>
+          <p:cNvSpPr/>
+          <p:nvPr/>
+        </p:nvSpPr>
+        <p:spPr>
+          <a:xfrm>
+            <a:off x="6163056" y="2029968"/>
+            <a:ext cx="5175504" cy="3154680"/>
+          </a:xfrm>
+          <a:prstGeom prst="roundRect">
+            <a:avLst>
+              <a:gd name="adj" fmla="val 2899"/>
+            </a:avLst>
+          </a:prstGeom>
+          <a:solidFill>
+            <a:srgbClr val="FFFFFF"/>
+          </a:solidFill>
+          <a:ln w="12700">
+            <a:solidFill>
+              <a:srgbClr val="E4E9F7"/>
+            </a:solidFill>
+            <a:prstDash val="solid"/>
+          </a:ln>
+          <a:effectLst>
+            <a:outerShdw sx="100000" sy="100000" kx="0" ky="0" algn="bl" rotWithShape="0" blurRad="114300" dist="38100" dir="5400000">
+              <a:srgbClr val="0B1437">
+                <a:alpha val="10000"/>
+              </a:srgbClr>
+            </a:outerShdw>
+          </a:effectLst>
+        </p:spPr>
+      </p:sp>
+      <p:sp>
+        <p:nvSpPr>
+          <p:cNvPr id="21" name="Shape 18"/>
+          <p:cNvSpPr/>
+          <p:nvPr/>
+        </p:nvSpPr>
+        <p:spPr>
+          <a:xfrm>
+            <a:off x="6163056" y="2029968"/>
+            <a:ext cx="5175504" cy="109728"/>
+          </a:xfrm>
+          <a:prstGeom prst="rect">
+            <a:avLst/>
+          </a:prstGeom>
+          <a:solidFill>
+            <a:srgbClr val="12B886"/>
+          </a:solidFill>
+          <a:ln/>
+        </p:spPr>
+      </p:sp>
+      <p:sp>
+        <p:nvSpPr>
+          <p:cNvPr id="22" name="Shape 19"/>
+          <p:cNvSpPr/>
+          <p:nvPr/>
+        </p:nvSpPr>
+        <p:spPr>
+          <a:xfrm>
+            <a:off x="6455664" y="2340864"/>
+            <a:ext cx="749808" cy="749808"/>
+          </a:xfrm>
+          <a:prstGeom prst="ellipse">
+            <a:avLst/>
+          </a:prstGeom>
+          <a:solidFill>
+            <a:srgbClr val="12B886"/>
+          </a:solidFill>
+          <a:ln/>
+          <a:effectLst>
+            <a:outerShdw sx="100000" sy="100000" kx="0" ky="0" algn="bl" rotWithShape="0" blurRad="114300" dist="38100" dir="5400000">
+              <a:srgbClr val="0B1437">
+                <a:alpha val="10000"/>
+              </a:srgbClr>
+            </a:outerShdw>
+          </a:effectLst>
+        </p:spPr>
+      </p:sp>
+      <p:pic>
+        <p:nvPicPr>
+          <p:cNvPr id="23" name="Image 1" descr="preencoded.png"/>
+          <p:cNvPicPr>
+            <a:picLocks noChangeAspect="1"/>
+          </p:cNvPicPr>
+          <p:nvPr/>
+        </p:nvPicPr>
+        <p:blipFill>
+          <a:blip r:embed="rId2"/>
+          <a:stretch>
+            <a:fillRect/>
+          </a:stretch>
+        </p:blipFill>
+        <p:spPr>
+          <a:xfrm>
+            <a:off x="6680606" y="2565806"/>
+            <a:ext cx="299923" cy="299923"/>
+          </a:xfrm>
+          <a:prstGeom prst="rect">
+            <a:avLst/>
+          </a:prstGeom>
+        </p:spPr>
+      </p:pic>
+      <p:sp>
+        <p:nvSpPr>
+          <p:cNvPr id="24" name="Text 20"/>
+          <p:cNvSpPr/>
+          <p:nvPr/>
+        </p:nvSpPr>
+        <p:spPr>
+          <a:xfrm>
+            <a:off x="7443216" y="2322576"/>
+            <a:ext cx="3712464" cy="402336"/>
+          </a:xfrm>
+          <a:prstGeom prst="rect">
+            <a:avLst/>
+          </a:prstGeom>
+          <a:noFill/>
+          <a:ln/>
+        </p:spPr>
+        <p:txBody>
+          <a:bodyPr wrap="square" lIns="0" tIns="0" rIns="0" bIns="0" rtlCol="0" anchor="ctr"/>
+          <a:lstStyle/>
+          <a:p>
+            <a:pPr indent="0" marL="0">
+              <a:buNone/>
+            </a:pPr>
+            <a:r>
+              <a:rPr lang="en-US" sz="2100" b="1" dirty="0">
+                <a:solidFill>
+                  <a:srgbClr val="12B886"/>
+                </a:solidFill>
+                <a:latin typeface="Aptos" pitchFamily="34" charset="0"/>
+                <a:ea typeface="Aptos" pitchFamily="34" charset="-122"/>
+                <a:cs typeface="Aptos" pitchFamily="34" charset="-120"/>
+              </a:rPr>
+              <a:t>Let it remember</a:t>
+            </a:r>
+            <a:endParaRPr lang="en-US" sz="2100" dirty="0"/>
+          </a:p>
+        </p:txBody>
+      </p:sp>
+      <p:sp>
+        <p:nvSpPr>
+          <p:cNvPr id="25" name="Text 21"/>
+          <p:cNvSpPr/>
+          <p:nvPr/>
+        </p:nvSpPr>
+        <p:spPr>
+          <a:xfrm>
+            <a:off x="7443216" y="2761488"/>
+            <a:ext cx="3712464" cy="274320"/>
+          </a:xfrm>
+          <a:prstGeom prst="rect">
+            <a:avLst/>
+          </a:prstGeom>
+          <a:noFill/>
+          <a:ln/>
+        </p:spPr>
+        <p:txBody>
+          <a:bodyPr wrap="square" lIns="0" tIns="0" rIns="0" bIns="0" rtlCol="0" anchor="ctr"/>
+          <a:lstStyle/>
+          <a:p>
+            <a:pPr indent="0" marL="0">
+              <a:buNone/>
+            </a:pPr>
+            <a:r>
+              <a:rPr lang="en-US" sz="1200" b="1" dirty="0">
+                <a:solidFill>
+                  <a:srgbClr val="8A93B8"/>
+                </a:solidFill>
+                <a:latin typeface="Aptos" pitchFamily="34" charset="0"/>
+                <a:ea typeface="Aptos" pitchFamily="34" charset="-122"/>
+                <a:cs typeface="Aptos" pitchFamily="34" charset="-120"/>
+              </a:rPr>
+              <a:t>Copilot Memory</a:t>
+            </a:r>
+            <a:endParaRPr lang="en-US" sz="1200" dirty="0"/>
+          </a:p>
+        </p:txBody>
+      </p:sp>
+      <p:sp>
+        <p:nvSpPr>
+          <p:cNvPr id="26" name="Text 22"/>
+          <p:cNvSpPr/>
+          <p:nvPr/>
+        </p:nvSpPr>
+        <p:spPr>
+          <a:xfrm>
+            <a:off x="6473952" y="3291840"/>
+            <a:ext cx="4572000" cy="914400"/>
+          </a:xfrm>
+          <a:prstGeom prst="rect">
+            <a:avLst/>
+          </a:prstGeom>
+          <a:noFill/>
+          <a:ln/>
+        </p:spPr>
+        <p:txBody>
+          <a:bodyPr wrap="square" lIns="0" tIns="0" rIns="0" bIns="0" rtlCol="0" anchor="t"/>
+          <a:lstStyle/>
+          <a:p>
+            <a:pPr indent="0" marL="0">
+              <a:lnSpc>
+                <a:spcPct val="114000"/>
+              </a:lnSpc>
+              <a:buNone/>
+            </a:pPr>
+            <a:r>
+              <a:rPr lang="en-US" sz="1250" dirty="0">
+                <a:solidFill>
+                  <a:srgbClr val="43507B"/>
+                </a:solidFill>
+                <a:latin typeface="Aptos" pitchFamily="34" charset="0"/>
+                <a:ea typeface="Aptos" pitchFamily="34" charset="-122"/>
+                <a:cs typeface="Aptos" pitchFamily="34" charset="-120"/>
+              </a:rPr>
+              <a:t>Copilot Memory keeps your context, so you stop re-explaining yourself every time you ask.</a:t>
+            </a:r>
+            <a:endParaRPr lang="en-US" sz="1250" dirty="0"/>
+          </a:p>
+        </p:txBody>
+      </p:sp>
+      <p:sp>
+        <p:nvSpPr>
+          <p:cNvPr id="27" name="Shape 23"/>
+          <p:cNvSpPr/>
+          <p:nvPr/>
+        </p:nvSpPr>
+        <p:spPr>
+          <a:xfrm>
+            <a:off x="6492240" y="4361688"/>
+            <a:ext cx="137160" cy="137160"/>
+          </a:xfrm>
+          <a:prstGeom prst="ellipse">
+            <a:avLst/>
+          </a:prstGeom>
+          <a:solidFill>
+            <a:srgbClr val="12B886"/>
+          </a:solidFill>
+          <a:ln/>
+        </p:spPr>
+      </p:sp>
+      <p:sp>
+        <p:nvSpPr>
+          <p:cNvPr id="28" name="Text 24"/>
+          <p:cNvSpPr/>
+          <p:nvPr/>
+        </p:nvSpPr>
+        <p:spPr>
+          <a:xfrm>
+            <a:off x="6729984" y="4270248"/>
+            <a:ext cx="4297680" cy="274320"/>
+          </a:xfrm>
+          <a:prstGeom prst="rect">
+            <a:avLst/>
+          </a:prstGeom>
+          <a:noFill/>
+          <a:ln/>
+        </p:spPr>
+        <p:txBody>
+          <a:bodyPr wrap="square" lIns="0" tIns="0" rIns="0" bIns="0" rtlCol="0" anchor="ctr"/>
+          <a:lstStyle/>
+          <a:p>
+            <a:pPr indent="0" marL="0">
+              <a:buNone/>
+            </a:pPr>
+            <a:r>
+              <a:rPr lang="en-US" sz="1150" dirty="0">
+                <a:solidFill>
+                  <a:srgbClr val="0B1437"/>
+                </a:solidFill>
+                <a:latin typeface="Aptos" pitchFamily="34" charset="0"/>
+                <a:ea typeface="Aptos" pitchFamily="34" charset="-122"/>
+                <a:cs typeface="Aptos" pitchFamily="34" charset="-120"/>
+              </a:rPr>
+              <a:t>Remembers your context and people</a:t>
+            </a:r>
+            <a:endParaRPr lang="en-US" sz="1150" dirty="0"/>
+          </a:p>
+        </p:txBody>
+      </p:sp>
+      <p:sp>
+        <p:nvSpPr>
+          <p:cNvPr id="29" name="Shape 25"/>
+          <p:cNvSpPr/>
+          <p:nvPr/>
+        </p:nvSpPr>
+        <p:spPr>
+          <a:xfrm>
+            <a:off x="6492240" y="4636008"/>
+            <a:ext cx="137160" cy="137160"/>
+          </a:xfrm>
+          <a:prstGeom prst="ellipse">
+            <a:avLst/>
+          </a:prstGeom>
+          <a:solidFill>
+            <a:srgbClr val="12B886"/>
+          </a:solidFill>
+          <a:ln/>
+        </p:spPr>
+      </p:sp>
+      <p:sp>
+        <p:nvSpPr>
+          <p:cNvPr id="30" name="Text 26"/>
+          <p:cNvSpPr/>
+          <p:nvPr/>
+        </p:nvSpPr>
+        <p:spPr>
+          <a:xfrm>
+            <a:off x="6729984" y="4544568"/>
+            <a:ext cx="4297680" cy="274320"/>
+          </a:xfrm>
+          <a:prstGeom prst="rect">
+            <a:avLst/>
+          </a:prstGeom>
+          <a:noFill/>
+          <a:ln/>
+        </p:spPr>
+        <p:txBody>
+          <a:bodyPr wrap="square" lIns="0" tIns="0" rIns="0" bIns="0" rtlCol="0" anchor="ctr"/>
+          <a:lstStyle/>
+          <a:p>
+            <a:pPr indent="0" marL="0">
+              <a:buNone/>
+            </a:pPr>
+            <a:r>
+              <a:rPr lang="en-US" sz="1150" dirty="0">
+                <a:solidFill>
+                  <a:srgbClr val="0B1437"/>
+                </a:solidFill>
+                <a:latin typeface="Aptos" pitchFamily="34" charset="0"/>
+                <a:ea typeface="Aptos" pitchFamily="34" charset="-122"/>
+                <a:cs typeface="Aptos" pitchFamily="34" charset="-120"/>
+              </a:rPr>
+              <a:t>No more repeating yourself</a:t>
+            </a:r>
+            <a:endParaRPr lang="en-US" sz="1150" dirty="0"/>
+          </a:p>
+        </p:txBody>
+      </p:sp>
+      <p:sp>
+        <p:nvSpPr>
+          <p:cNvPr id="31" name="Shape 27"/>
+          <p:cNvSpPr/>
+          <p:nvPr/>
+        </p:nvSpPr>
+        <p:spPr>
+          <a:xfrm>
+            <a:off x="6492240" y="4910328"/>
+            <a:ext cx="137160" cy="137160"/>
+          </a:xfrm>
+          <a:prstGeom prst="ellipse">
+            <a:avLst/>
+          </a:prstGeom>
+          <a:solidFill>
+            <a:srgbClr val="12B886"/>
+          </a:solidFill>
+          <a:ln/>
+        </p:spPr>
+      </p:sp>
+      <p:sp>
+        <p:nvSpPr>
+          <p:cNvPr id="32" name="Text 28"/>
+          <p:cNvSpPr/>
+          <p:nvPr/>
+        </p:nvSpPr>
+        <p:spPr>
+          <a:xfrm>
+            <a:off x="6729984" y="4818888"/>
+            <a:ext cx="4297680" cy="274320"/>
+          </a:xfrm>
+          <a:prstGeom prst="rect">
+            <a:avLst/>
+          </a:prstGeom>
+          <a:noFill/>
+          <a:ln/>
+        </p:spPr>
+        <p:txBody>
+          <a:bodyPr wrap="square" lIns="0" tIns="0" rIns="0" bIns="0" rtlCol="0" anchor="ctr"/>
+          <a:lstStyle/>
+          <a:p>
+            <a:pPr indent="0" marL="0">
+              <a:buNone/>
+            </a:pPr>
+            <a:r>
+              <a:rPr lang="en-US" sz="1150" dirty="0">
+                <a:solidFill>
+                  <a:srgbClr val="0B1437"/>
+                </a:solidFill>
+                <a:latin typeface="Aptos" pitchFamily="34" charset="0"/>
+                <a:ea typeface="Aptos" pitchFamily="34" charset="-122"/>
+                <a:cs typeface="Aptos" pitchFamily="34" charset="-120"/>
+              </a:rPr>
+              <a:t>You decide what is worth saving</a:t>
+            </a:r>
+            <a:endParaRPr lang="en-US" sz="1150" dirty="0"/>
+          </a:p>
+        </p:txBody>
+      </p:sp>
+      <p:sp>
+        <p:nvSpPr>
+          <p:cNvPr id="33" name="Shape 29"/>
+          <p:cNvSpPr/>
+          <p:nvPr/>
+        </p:nvSpPr>
+        <p:spPr>
+          <a:xfrm>
+            <a:off x="822960" y="5321808"/>
+            <a:ext cx="10515600" cy="603504"/>
+          </a:xfrm>
+          <a:prstGeom prst="roundRect">
+            <a:avLst>
+              <a:gd name="adj" fmla="val 13636"/>
+            </a:avLst>
+          </a:prstGeom>
+          <a:solidFill>
+            <a:srgbClr val="F2EEFF"/>
+          </a:solidFill>
+          <a:ln w="12700">
+            <a:solidFill>
+              <a:srgbClr val="DDD2FB"/>
+            </a:solidFill>
+            <a:prstDash val="solid"/>
+          </a:ln>
+        </p:spPr>
+      </p:sp>
+      <p:sp>
+        <p:nvSpPr>
+          <p:cNvPr id="34" name="Text 30"/>
+          <p:cNvSpPr/>
+          <p:nvPr/>
+        </p:nvSpPr>
+        <p:spPr>
+          <a:xfrm>
+            <a:off x="1143000" y="5321808"/>
+            <a:ext cx="10058400" cy="603504"/>
+          </a:xfrm>
+          <a:prstGeom prst="rect">
+            <a:avLst/>
+          </a:prstGeom>
+          <a:noFill/>
+          <a:ln/>
+        </p:spPr>
+        <p:txBody>
+          <a:bodyPr wrap="square" lIns="0" tIns="0" rIns="0" bIns="0" rtlCol="0" anchor="ctr"/>
+          <a:lstStyle/>
+          <a:p>
+            <a:pPr algn="l" indent="0" marL="0">
+              <a:buNone/>
+            </a:pPr>
+            <a:r>
+              <a:rPr lang="en-US" sz="1300" b="1" dirty="0">
+                <a:solidFill>
+                  <a:srgbClr val="5B45C8"/>
+                </a:solidFill>
+                <a:latin typeface="Aptos" pitchFamily="34" charset="0"/>
+                <a:ea typeface="Aptos" pitchFamily="34" charset="-122"/>
+                <a:cs typeface="Aptos" pitchFamily="34" charset="-120"/>
+              </a:rPr>
+              <a:t xml:space="preserve">The setup:  </a:t>
+            </a:r>
+            <a:pPr algn="l" indent="0" marL="0">
+              <a:buNone/>
+            </a:pPr>
+            <a:r>
+              <a:rPr lang="en-US" sz="1300" dirty="0">
+                <a:solidFill>
+                  <a:srgbClr val="43507B"/>
+                </a:solidFill>
+                <a:latin typeface="Aptos" pitchFamily="34" charset="0"/>
+                <a:ea typeface="Aptos" pitchFamily="34" charset="-122"/>
+                <a:cs typeface="Aptos" pitchFamily="34" charset="-120"/>
+              </a:rPr>
+              <a:t>spend a few minutes here, and everything after gets better.</a:t>
+            </a:r>
+            <a:endParaRPr lang="en-US" sz="1300" dirty="0"/>
+          </a:p>
+        </p:txBody>
+      </p:sp>
+      <p:sp>
+        <p:nvSpPr>
+          <p:cNvPr id="35" name="Text 31"/>
+          <p:cNvSpPr/>
+          <p:nvPr/>
+        </p:nvSpPr>
+        <p:spPr>
+          <a:xfrm>
+            <a:off x="640080" y="6419088"/>
+            <a:ext cx="8229600" cy="274320"/>
+          </a:xfrm>
+          <a:prstGeom prst="rect">
+            <a:avLst/>
+          </a:prstGeom>
+          <a:noFill/>
+          <a:ln/>
+        </p:spPr>
+        <p:txBody>
+          <a:bodyPr wrap="square" lIns="0" tIns="0" rIns="0" bIns="0" rtlCol="0" anchor="ctr"/>
+          <a:lstStyle/>
+          <a:p>
+            <a:pPr algn="l" indent="0" marL="0">
+              <a:buNone/>
+            </a:pPr>
+            <a:r>
+              <a:rPr lang="en-US" sz="900" dirty="0">
+                <a:solidFill>
+                  <a:srgbClr val="8A93B8"/>
+                </a:solidFill>
+                <a:latin typeface="Aptos" pitchFamily="34" charset="0"/>
+                <a:ea typeface="Aptos" pitchFamily="34" charset="-122"/>
+                <a:cs typeface="Aptos" pitchFamily="34" charset="-120"/>
+              </a:rPr>
+              <a:t>Tier 1 · Foundations</a:t>
+            </a:r>
+            <a:endParaRPr lang="en-US" sz="900" dirty="0"/>
+          </a:p>
+        </p:txBody>
+      </p:sp>
+      <p:sp>
+        <p:nvSpPr>
+          <p:cNvPr id="36" name="Text 32"/>
+          <p:cNvSpPr/>
+          <p:nvPr/>
+        </p:nvSpPr>
+        <p:spPr>
+          <a:xfrm>
+            <a:off x="11155680" y="6419088"/>
+            <a:ext cx="640080" cy="274320"/>
+          </a:xfrm>
+          <a:prstGeom prst="rect">
+            <a:avLst/>
+          </a:prstGeom>
+          <a:noFill/>
+          <a:ln/>
+        </p:spPr>
+        <p:txBody>
+          <a:bodyPr wrap="square" lIns="0" tIns="0" rIns="0" bIns="0" rtlCol="0" anchor="ctr"/>
+          <a:lstStyle/>
+          <a:p>
+            <a:pPr algn="r" indent="0" marL="0">
+              <a:buNone/>
+            </a:pPr>
+            <a:r>
+              <a:rPr lang="en-US" sz="900" dirty="0">
+                <a:solidFill>
+                  <a:srgbClr val="8A93B8"/>
+                </a:solidFill>
+                <a:latin typeface="Aptos" pitchFamily="34" charset="0"/>
+                <a:ea typeface="Aptos" pitchFamily="34" charset="-122"/>
+                <a:cs typeface="Aptos" pitchFamily="34" charset="-120"/>
+              </a:rPr>
+              <a:t>8</a:t>
+            </a:r>
+            <a:endParaRPr lang="en-US" sz="900" dirty="0"/>
+          </a:p>
+        </p:txBody>
+      </p:sp>
+    </p:spTree>
+  </p:cSld>
+  <p:clrMapOvr>
+    <a:masterClrMapping/>
+  </p:clrMapOvr>
+</p:sld>
+</file>
+
+<file path=ppt/slides/slide24.xml><?xml version="1.0" encoding="utf-8"?>
+<p:sld xmlns:a="http://schemas.openxmlformats.org/drawingml/2006/main" xmlns:r="http://schemas.openxmlformats.org/officeDocument/2006/relationships" xmlns:p="http://schemas.openxmlformats.org/presentationml/2006/main">
+  <p:cSld name="Slide 13">
+    <p:bg>
+      <p:bgPr>
+        <a:solidFill>
+          <a:srgbClr val="F4F7FE"/>
+        </a:solidFill>
+      </p:bgPr>
+    </p:bg>
+    <p:spTree>
+      <p:nvGrpSpPr>
+        <p:cNvPr id="1" name=""/>
+        <p:cNvGrpSpPr/>
+        <p:nvPr/>
+      </p:nvGrpSpPr>
+      <p:grpSpPr>
+        <a:xfrm>
+          <a:off x="0" y="0"/>
+          <a:ext cx="0" cy="0"/>
+          <a:chOff x="0" y="0"/>
+          <a:chExt cx="0" cy="0"/>
+        </a:xfrm>
+      </p:grpSpPr>
+      <p:sp>
+        <p:nvSpPr>
+          <p:cNvPr id="2" name="Shape 0"/>
+          <p:cNvSpPr/>
+          <p:nvPr/>
+        </p:nvSpPr>
+        <p:spPr>
+          <a:xfrm>
+            <a:off x="822960" y="566928"/>
+            <a:ext cx="1170432" cy="310896"/>
+          </a:xfrm>
+          <a:prstGeom prst="roundRect">
+            <a:avLst>
+              <a:gd name="adj" fmla="val 50000"/>
+            </a:avLst>
+          </a:prstGeom>
+          <a:solidFill>
+            <a:srgbClr val="7C5CFC"/>
+          </a:solidFill>
+          <a:ln/>
+        </p:spPr>
+      </p:sp>
+      <p:sp>
+        <p:nvSpPr>
+          <p:cNvPr id="3" name="Text 1"/>
+          <p:cNvSpPr/>
+          <p:nvPr/>
+        </p:nvSpPr>
+        <p:spPr>
+          <a:xfrm>
+            <a:off x="822960" y="566928"/>
+            <a:ext cx="1170432" cy="310896"/>
+          </a:xfrm>
+          <a:prstGeom prst="rect">
+            <a:avLst/>
+          </a:prstGeom>
+          <a:noFill/>
+          <a:ln/>
+        </p:spPr>
+        <p:txBody>
+          <a:bodyPr wrap="square" lIns="0" tIns="0" rIns="0" bIns="0" rtlCol="0" anchor="ctr"/>
+          <a:lstStyle/>
+          <a:p>
+            <a:pPr algn="ctr" indent="0" marL="0">
+              <a:buNone/>
+            </a:pPr>
+            <a:r>
+              <a:rPr lang="en-US" sz="1100" b="1" spc="100" kern="0" dirty="0">
+                <a:solidFill>
+                  <a:srgbClr val="FFFFFF"/>
+                </a:solidFill>
+                <a:latin typeface="Aptos" pitchFamily="34" charset="0"/>
+                <a:ea typeface="Aptos" pitchFamily="34" charset="-122"/>
+                <a:cs typeface="Aptos" pitchFamily="34" charset="-120"/>
+              </a:rPr>
+              <a:t>TIER 2</a:t>
+            </a:r>
+            <a:endParaRPr lang="en-US" sz="1100" dirty="0"/>
+          </a:p>
+        </p:txBody>
+      </p:sp>
+      <p:sp>
+        <p:nvSpPr>
+          <p:cNvPr id="4" name="Text 2"/>
+          <p:cNvSpPr/>
+          <p:nvPr/>
+        </p:nvSpPr>
+        <p:spPr>
+          <a:xfrm>
+            <a:off x="2121408" y="566928"/>
+            <a:ext cx="8686800" cy="310896"/>
+          </a:xfrm>
+          <a:prstGeom prst="rect">
+            <a:avLst/>
+          </a:prstGeom>
+          <a:noFill/>
+          <a:ln/>
+        </p:spPr>
+        <p:txBody>
+          <a:bodyPr wrap="square" lIns="0" tIns="0" rIns="0" bIns="0" rtlCol="0" anchor="ctr"/>
+          <a:lstStyle/>
+          <a:p>
+            <a:pPr algn="l" indent="0" marL="0">
+              <a:buNone/>
+            </a:pPr>
+            <a:r>
+              <a:rPr lang="en-US" sz="1200" b="1" spc="200" kern="0" dirty="0">
+                <a:solidFill>
+                  <a:srgbClr val="7C5CFC"/>
+                </a:solidFill>
+                <a:latin typeface="Aptos" pitchFamily="34" charset="0"/>
+                <a:ea typeface="Aptos" pitchFamily="34" charset="-122"/>
+                <a:cs typeface="Aptos" pitchFamily="34" charset="-120"/>
+              </a:rPr>
+              <a:t>COPILOT NOTEBOOKS · OPTIONAL</a:t>
+            </a:r>
+            <a:endParaRPr lang="en-US" sz="1200" dirty="0"/>
+          </a:p>
+        </p:txBody>
+      </p:sp>
+      <p:sp>
+        <p:nvSpPr>
+          <p:cNvPr id="5" name="Text 3"/>
+          <p:cNvSpPr/>
+          <p:nvPr/>
+        </p:nvSpPr>
+        <p:spPr>
+          <a:xfrm>
+            <a:off x="786384" y="914400"/>
+            <a:ext cx="11155680" cy="566928"/>
+          </a:xfrm>
+          <a:prstGeom prst="rect">
+            <a:avLst/>
+          </a:prstGeom>
+          <a:noFill/>
+          <a:ln/>
+        </p:spPr>
+        <p:txBody>
+          <a:bodyPr wrap="square" lIns="0" tIns="0" rIns="0" bIns="0" rtlCol="0" anchor="ctr"/>
+          <a:lstStyle/>
+          <a:p>
+            <a:pPr indent="0" marL="0">
+              <a:buNone/>
+            </a:pPr>
+            <a:r>
+              <a:rPr lang="en-US" sz="2700" b="1" dirty="0">
+                <a:solidFill>
+                  <a:srgbClr val="0B1437"/>
+                </a:solidFill>
+                <a:latin typeface="Aptos" pitchFamily="34" charset="0"/>
+                <a:ea typeface="Aptos" pitchFamily="34" charset="-122"/>
+                <a:cs typeface="Aptos" pitchFamily="34" charset="-120"/>
+              </a:rPr>
+              <a:t>One place for a big topic</a:t>
+            </a:r>
+            <a:endParaRPr lang="en-US" sz="2700" dirty="0"/>
+          </a:p>
+        </p:txBody>
+      </p:sp>
+      <p:sp>
+        <p:nvSpPr>
+          <p:cNvPr id="6" name="Text 4"/>
+          <p:cNvSpPr/>
+          <p:nvPr/>
+        </p:nvSpPr>
+        <p:spPr>
+          <a:xfrm>
+            <a:off x="822960" y="1499616"/>
+            <a:ext cx="10607040" cy="402336"/>
+          </a:xfrm>
+          <a:prstGeom prst="rect">
+            <a:avLst/>
+          </a:prstGeom>
+          <a:noFill/>
+          <a:ln/>
+        </p:spPr>
+        <p:txBody>
+          <a:bodyPr wrap="square" lIns="0" tIns="0" rIns="0" bIns="0" rtlCol="0" anchor="ctr"/>
+          <a:lstStyle/>
+          <a:p>
+            <a:pPr indent="0" marL="0">
+              <a:lnSpc>
+                <a:spcPct val="112000"/>
+              </a:lnSpc>
+              <a:buNone/>
+            </a:pPr>
+            <a:r>
+              <a:rPr lang="en-US" sz="1400" dirty="0">
+                <a:solidFill>
+                  <a:srgbClr val="43507B"/>
+                </a:solidFill>
+                <a:latin typeface="Aptos" pitchFamily="34" charset="0"/>
+                <a:ea typeface="Aptos" pitchFamily="34" charset="-122"/>
+                <a:cs typeface="Aptos" pitchFamily="34" charset="-120"/>
+              </a:rPr>
+              <a:t>When one initiative is spread across a dozen files, meetings, and threads, a Notebook pulls them into one place you can question all at once.</a:t>
+            </a:r>
+            <a:endParaRPr lang="en-US" sz="1400" dirty="0"/>
+          </a:p>
+        </p:txBody>
+      </p:sp>
+      <p:sp>
+        <p:nvSpPr>
+          <p:cNvPr id="7" name="Shape 5"/>
+          <p:cNvSpPr/>
+          <p:nvPr/>
+        </p:nvSpPr>
+        <p:spPr>
+          <a:xfrm>
+            <a:off x="822960" y="2029968"/>
+            <a:ext cx="5175504" cy="3154680"/>
+          </a:xfrm>
+          <a:prstGeom prst="roundRect">
+            <a:avLst>
+              <a:gd name="adj" fmla="val 2899"/>
+            </a:avLst>
+          </a:prstGeom>
+          <a:solidFill>
+            <a:srgbClr val="FFFFFF"/>
+          </a:solidFill>
+          <a:ln w="12700">
+            <a:solidFill>
+              <a:srgbClr val="E4E9F7"/>
+            </a:solidFill>
+            <a:prstDash val="solid"/>
+          </a:ln>
+          <a:effectLst>
+            <a:outerShdw sx="100000" sy="100000" kx="0" ky="0" algn="bl" rotWithShape="0" blurRad="114300" dist="38100" dir="5400000">
+              <a:srgbClr val="0B1437">
+                <a:alpha val="10000"/>
+              </a:srgbClr>
+            </a:outerShdw>
+          </a:effectLst>
+        </p:spPr>
+      </p:sp>
+      <p:sp>
+        <p:nvSpPr>
+          <p:cNvPr id="8" name="Shape 6"/>
+          <p:cNvSpPr/>
+          <p:nvPr/>
+        </p:nvSpPr>
+        <p:spPr>
+          <a:xfrm>
+            <a:off x="822960" y="2029968"/>
+            <a:ext cx="5175504" cy="109728"/>
+          </a:xfrm>
+          <a:prstGeom prst="rect">
+            <a:avLst/>
+          </a:prstGeom>
+          <a:solidFill>
+            <a:srgbClr val="2D6CDF"/>
+          </a:solidFill>
+          <a:ln/>
+        </p:spPr>
+      </p:sp>
+      <p:sp>
+        <p:nvSpPr>
+          <p:cNvPr id="9" name="Shape 7"/>
+          <p:cNvSpPr/>
+          <p:nvPr/>
+        </p:nvSpPr>
+        <p:spPr>
+          <a:xfrm>
+            <a:off x="1115568" y="2340864"/>
+            <a:ext cx="749808" cy="749808"/>
+          </a:xfrm>
+          <a:prstGeom prst="ellipse">
+            <a:avLst/>
+          </a:prstGeom>
+          <a:solidFill>
+            <a:srgbClr val="2D6CDF"/>
+          </a:solidFill>
+          <a:ln/>
+          <a:effectLst>
+            <a:outerShdw sx="100000" sy="100000" kx="0" ky="0" algn="bl" rotWithShape="0" blurRad="114300" dist="38100" dir="5400000">
+              <a:srgbClr val="0B1437">
+                <a:alpha val="10000"/>
+              </a:srgbClr>
+            </a:outerShdw>
+          </a:effectLst>
+        </p:spPr>
+      </p:sp>
+      <p:pic>
+        <p:nvPicPr>
+          <p:cNvPr id="10" name="Image 0" descr="preencoded.png"/>
+          <p:cNvPicPr>
+            <a:picLocks noChangeAspect="1"/>
+          </p:cNvPicPr>
+          <p:nvPr/>
+        </p:nvPicPr>
+        <p:blipFill>
+          <a:blip r:embed="rId1"/>
+          <a:stretch>
+            <a:fillRect/>
+          </a:stretch>
+        </p:blipFill>
+        <p:spPr>
+          <a:xfrm>
+            <a:off x="1340510" y="2565806"/>
+            <a:ext cx="299923" cy="299923"/>
+          </a:xfrm>
+          <a:prstGeom prst="rect">
+            <a:avLst/>
+          </a:prstGeom>
+        </p:spPr>
+      </p:pic>
+      <p:sp>
+        <p:nvSpPr>
+          <p:cNvPr id="11" name="Text 8"/>
+          <p:cNvSpPr/>
+          <p:nvPr/>
+        </p:nvSpPr>
+        <p:spPr>
+          <a:xfrm>
+            <a:off x="2103120" y="2322576"/>
+            <a:ext cx="3712464" cy="402336"/>
+          </a:xfrm>
+          <a:prstGeom prst="rect">
+            <a:avLst/>
+          </a:prstGeom>
+          <a:noFill/>
+          <a:ln/>
+        </p:spPr>
+        <p:txBody>
+          <a:bodyPr wrap="square" lIns="0" tIns="0" rIns="0" bIns="0" rtlCol="0" anchor="ctr"/>
+          <a:lstStyle/>
+          <a:p>
+            <a:pPr indent="0" marL="0">
+              <a:buNone/>
+            </a:pPr>
+            <a:r>
+              <a:rPr lang="en-US" sz="2100" b="1" dirty="0">
+                <a:solidFill>
+                  <a:srgbClr val="2D6CDF"/>
+                </a:solidFill>
+                <a:latin typeface="Aptos" pitchFamily="34" charset="0"/>
+                <a:ea typeface="Aptos" pitchFamily="34" charset="-122"/>
+                <a:cs typeface="Aptos" pitchFamily="34" charset="-120"/>
+              </a:rPr>
+              <a:t>Gather it once</a:t>
+            </a:r>
+            <a:endParaRPr lang="en-US" sz="2100" dirty="0"/>
+          </a:p>
+        </p:txBody>
+      </p:sp>
+      <p:sp>
+        <p:nvSpPr>
+          <p:cNvPr id="12" name="Text 9"/>
+          <p:cNvSpPr/>
+          <p:nvPr/>
+        </p:nvSpPr>
+        <p:spPr>
+          <a:xfrm>
+            <a:off x="2103120" y="2761488"/>
+            <a:ext cx="3712464" cy="274320"/>
+          </a:xfrm>
+          <a:prstGeom prst="rect">
+            <a:avLst/>
+          </a:prstGeom>
+          <a:noFill/>
+          <a:ln/>
+        </p:spPr>
+        <p:txBody>
+          <a:bodyPr wrap="square" lIns="0" tIns="0" rIns="0" bIns="0" rtlCol="0" anchor="ctr"/>
+          <a:lstStyle/>
+          <a:p>
+            <a:pPr indent="0" marL="0">
+              <a:buNone/>
+            </a:pPr>
+            <a:r>
+              <a:rPr lang="en-US" sz="1200" b="1" dirty="0">
+                <a:solidFill>
+                  <a:srgbClr val="8A93B8"/>
+                </a:solidFill>
+                <a:latin typeface="Aptos" pitchFamily="34" charset="0"/>
+                <a:ea typeface="Aptos" pitchFamily="34" charset="-122"/>
+                <a:cs typeface="Aptos" pitchFamily="34" charset="-120"/>
+              </a:rPr>
+              <a:t>Add all your sources</a:t>
+            </a:r>
+            <a:endParaRPr lang="en-US" sz="1200" dirty="0"/>
+          </a:p>
+        </p:txBody>
+      </p:sp>
+      <p:sp>
+        <p:nvSpPr>
+          <p:cNvPr id="13" name="Text 10"/>
+          <p:cNvSpPr/>
+          <p:nvPr/>
+        </p:nvSpPr>
+        <p:spPr>
+          <a:xfrm>
+            <a:off x="1133856" y="3291840"/>
+            <a:ext cx="4572000" cy="914400"/>
+          </a:xfrm>
+          <a:prstGeom prst="rect">
+            <a:avLst/>
+          </a:prstGeom>
+          <a:noFill/>
+          <a:ln/>
+        </p:spPr>
+        <p:txBody>
+          <a:bodyPr wrap="square" lIns="0" tIns="0" rIns="0" bIns="0" rtlCol="0" anchor="t"/>
+          <a:lstStyle/>
+          <a:p>
+            <a:pPr indent="0" marL="0">
+              <a:lnSpc>
+                <a:spcPct val="114000"/>
+              </a:lnSpc>
+              <a:buNone/>
+            </a:pPr>
+            <a:r>
+              <a:rPr lang="en-US" sz="1250" dirty="0">
+                <a:solidFill>
+                  <a:srgbClr val="43507B"/>
+                </a:solidFill>
+                <a:latin typeface="Aptos" pitchFamily="34" charset="0"/>
+                <a:ea typeface="Aptos" pitchFamily="34" charset="-122"/>
+                <a:cs typeface="Aptos" pitchFamily="34" charset="-120"/>
+              </a:rPr>
+              <a:t>Drop the documents, notes, and meeting recaps for one project or decision into a single Notebook.</a:t>
+            </a:r>
+            <a:endParaRPr lang="en-US" sz="1250" dirty="0"/>
+          </a:p>
+        </p:txBody>
+      </p:sp>
+      <p:sp>
+        <p:nvSpPr>
+          <p:cNvPr id="14" name="Shape 11"/>
+          <p:cNvSpPr/>
+          <p:nvPr/>
+        </p:nvSpPr>
+        <p:spPr>
+          <a:xfrm>
+            <a:off x="1152144" y="4361688"/>
+            <a:ext cx="137160" cy="137160"/>
+          </a:xfrm>
+          <a:prstGeom prst="ellipse">
+            <a:avLst/>
+          </a:prstGeom>
+          <a:solidFill>
+            <a:srgbClr val="2D6CDF"/>
+          </a:solidFill>
+          <a:ln/>
+        </p:spPr>
+      </p:sp>
+      <p:sp>
+        <p:nvSpPr>
+          <p:cNvPr id="15" name="Text 12"/>
+          <p:cNvSpPr/>
+          <p:nvPr/>
+        </p:nvSpPr>
+        <p:spPr>
+          <a:xfrm>
+            <a:off x="1389888" y="4270248"/>
+            <a:ext cx="4297680" cy="274320"/>
+          </a:xfrm>
+          <a:prstGeom prst="rect">
+            <a:avLst/>
+          </a:prstGeom>
+          <a:noFill/>
+          <a:ln/>
+        </p:spPr>
+        <p:txBody>
+          <a:bodyPr wrap="square" lIns="0" tIns="0" rIns="0" bIns="0" rtlCol="0" anchor="ctr"/>
+          <a:lstStyle/>
+          <a:p>
+            <a:pPr indent="0" marL="0">
+              <a:buNone/>
+            </a:pPr>
+            <a:r>
+              <a:rPr lang="en-US" sz="1150" dirty="0">
+                <a:solidFill>
+                  <a:srgbClr val="0B1437"/>
+                </a:solidFill>
+                <a:latin typeface="Aptos" pitchFamily="34" charset="0"/>
+                <a:ea typeface="Aptos" pitchFamily="34" charset="-122"/>
+                <a:cs typeface="Aptos" pitchFamily="34" charset="-120"/>
+              </a:rPr>
+              <a:t>Files, notes, and meeting recaps</a:t>
+            </a:r>
+            <a:endParaRPr lang="en-US" sz="1150" dirty="0"/>
+          </a:p>
+        </p:txBody>
+      </p:sp>
+      <p:sp>
+        <p:nvSpPr>
+          <p:cNvPr id="16" name="Shape 13"/>
+          <p:cNvSpPr/>
+          <p:nvPr/>
+        </p:nvSpPr>
+        <p:spPr>
+          <a:xfrm>
+            <a:off x="1152144" y="4636008"/>
+            <a:ext cx="137160" cy="137160"/>
+          </a:xfrm>
+          <a:prstGeom prst="ellipse">
+            <a:avLst/>
+          </a:prstGeom>
+          <a:solidFill>
+            <a:srgbClr val="2D6CDF"/>
+          </a:solidFill>
+          <a:ln/>
+        </p:spPr>
+      </p:sp>
+      <p:sp>
+        <p:nvSpPr>
+          <p:cNvPr id="17" name="Text 14"/>
+          <p:cNvSpPr/>
+          <p:nvPr/>
+        </p:nvSpPr>
+        <p:spPr>
+          <a:xfrm>
+            <a:off x="1389888" y="4544568"/>
+            <a:ext cx="4297680" cy="274320"/>
+          </a:xfrm>
+          <a:prstGeom prst="rect">
+            <a:avLst/>
+          </a:prstGeom>
+          <a:noFill/>
+          <a:ln/>
+        </p:spPr>
+        <p:txBody>
+          <a:bodyPr wrap="square" lIns="0" tIns="0" rIns="0" bIns="0" rtlCol="0" anchor="ctr"/>
+          <a:lstStyle/>
+          <a:p>
+            <a:pPr indent="0" marL="0">
+              <a:buNone/>
+            </a:pPr>
+            <a:r>
+              <a:rPr lang="en-US" sz="1150" dirty="0">
+                <a:solidFill>
+                  <a:srgbClr val="0B1437"/>
+                </a:solidFill>
+                <a:latin typeface="Aptos" pitchFamily="34" charset="0"/>
+                <a:ea typeface="Aptos" pitchFamily="34" charset="-122"/>
+                <a:cs typeface="Aptos" pitchFamily="34" charset="-120"/>
+              </a:rPr>
+              <a:t>Grounded only in what you add</a:t>
+            </a:r>
+            <a:endParaRPr lang="en-US" sz="1150" dirty="0"/>
+          </a:p>
+        </p:txBody>
+      </p:sp>
+      <p:sp>
+        <p:nvSpPr>
+          <p:cNvPr id="18" name="Shape 15"/>
+          <p:cNvSpPr/>
+          <p:nvPr/>
+        </p:nvSpPr>
+        <p:spPr>
+          <a:xfrm>
+            <a:off x="1152144" y="4910328"/>
+            <a:ext cx="137160" cy="137160"/>
+          </a:xfrm>
+          <a:prstGeom prst="ellipse">
+            <a:avLst/>
+          </a:prstGeom>
+          <a:solidFill>
+            <a:srgbClr val="2D6CDF"/>
+          </a:solidFill>
+          <a:ln/>
+        </p:spPr>
+      </p:sp>
+      <p:sp>
+        <p:nvSpPr>
+          <p:cNvPr id="19" name="Text 16"/>
+          <p:cNvSpPr/>
+          <p:nvPr/>
+        </p:nvSpPr>
+        <p:spPr>
+          <a:xfrm>
+            <a:off x="1389888" y="4818888"/>
+            <a:ext cx="4297680" cy="274320"/>
+          </a:xfrm>
+          <a:prstGeom prst="rect">
+            <a:avLst/>
+          </a:prstGeom>
+          <a:noFill/>
+          <a:ln/>
+        </p:spPr>
+        <p:txBody>
+          <a:bodyPr wrap="square" lIns="0" tIns="0" rIns="0" bIns="0" rtlCol="0" anchor="ctr"/>
+          <a:lstStyle/>
+          <a:p>
+            <a:pPr indent="0" marL="0">
+              <a:buNone/>
+            </a:pPr>
+            <a:r>
+              <a:rPr lang="en-US" sz="1150" dirty="0">
+                <a:solidFill>
+                  <a:srgbClr val="0B1437"/>
+                </a:solidFill>
+                <a:latin typeface="Aptos" pitchFamily="34" charset="0"/>
+                <a:ea typeface="Aptos" pitchFamily="34" charset="-122"/>
+                <a:cs typeface="Aptos" pitchFamily="34" charset="-120"/>
+              </a:rPr>
+              <a:t>One project, one workspace</a:t>
+            </a:r>
+            <a:endParaRPr lang="en-US" sz="1150" dirty="0"/>
+          </a:p>
+        </p:txBody>
+      </p:sp>
+      <p:sp>
+        <p:nvSpPr>
+          <p:cNvPr id="20" name="Shape 17"/>
+          <p:cNvSpPr/>
+          <p:nvPr/>
+        </p:nvSpPr>
+        <p:spPr>
+          <a:xfrm>
+            <a:off x="6163056" y="2029968"/>
+            <a:ext cx="5175504" cy="3154680"/>
+          </a:xfrm>
+          <a:prstGeom prst="roundRect">
+            <a:avLst>
+              <a:gd name="adj" fmla="val 2899"/>
+            </a:avLst>
+          </a:prstGeom>
+          <a:solidFill>
+            <a:srgbClr val="FFFFFF"/>
+          </a:solidFill>
+          <a:ln w="12700">
+            <a:solidFill>
+              <a:srgbClr val="E4E9F7"/>
+            </a:solidFill>
+            <a:prstDash val="solid"/>
+          </a:ln>
+          <a:effectLst>
+            <a:outerShdw sx="100000" sy="100000" kx="0" ky="0" algn="bl" rotWithShape="0" blurRad="114300" dist="38100" dir="5400000">
+              <a:srgbClr val="0B1437">
+                <a:alpha val="10000"/>
+              </a:srgbClr>
+            </a:outerShdw>
+          </a:effectLst>
+        </p:spPr>
+      </p:sp>
+      <p:sp>
+        <p:nvSpPr>
+          <p:cNvPr id="21" name="Shape 18"/>
+          <p:cNvSpPr/>
+          <p:nvPr/>
+        </p:nvSpPr>
+        <p:spPr>
+          <a:xfrm>
+            <a:off x="6163056" y="2029968"/>
+            <a:ext cx="5175504" cy="109728"/>
+          </a:xfrm>
+          <a:prstGeom prst="rect">
+            <a:avLst/>
+          </a:prstGeom>
+          <a:solidFill>
+            <a:srgbClr val="12B886"/>
+          </a:solidFill>
+          <a:ln/>
+        </p:spPr>
+      </p:sp>
+      <p:sp>
+        <p:nvSpPr>
+          <p:cNvPr id="22" name="Shape 19"/>
+          <p:cNvSpPr/>
+          <p:nvPr/>
+        </p:nvSpPr>
+        <p:spPr>
+          <a:xfrm>
+            <a:off x="6455664" y="2340864"/>
+            <a:ext cx="749808" cy="749808"/>
+          </a:xfrm>
+          <a:prstGeom prst="ellipse">
+            <a:avLst/>
+          </a:prstGeom>
+          <a:solidFill>
+            <a:srgbClr val="12B886"/>
+          </a:solidFill>
+          <a:ln/>
+          <a:effectLst>
+            <a:outerShdw sx="100000" sy="100000" kx="0" ky="0" algn="bl" rotWithShape="0" blurRad="114300" dist="38100" dir="5400000">
+              <a:srgbClr val="0B1437">
+                <a:alpha val="10000"/>
+              </a:srgbClr>
+            </a:outerShdw>
+          </a:effectLst>
+        </p:spPr>
+      </p:sp>
+      <p:pic>
+        <p:nvPicPr>
+          <p:cNvPr id="23" name="Image 1" descr="preencoded.png"/>
+          <p:cNvPicPr>
+            <a:picLocks noChangeAspect="1"/>
+          </p:cNvPicPr>
+          <p:nvPr/>
+        </p:nvPicPr>
+        <p:blipFill>
+          <a:blip r:embed="rId2"/>
+          <a:stretch>
+            <a:fillRect/>
+          </a:stretch>
+        </p:blipFill>
+        <p:spPr>
+          <a:xfrm>
+            <a:off x="6680606" y="2565806"/>
+            <a:ext cx="299923" cy="299923"/>
+          </a:xfrm>
+          <a:prstGeom prst="rect">
+            <a:avLst/>
+          </a:prstGeom>
+        </p:spPr>
+      </p:pic>
+      <p:sp>
+        <p:nvSpPr>
+          <p:cNvPr id="24" name="Text 20"/>
+          <p:cNvSpPr/>
+          <p:nvPr/>
+        </p:nvSpPr>
+        <p:spPr>
+          <a:xfrm>
+            <a:off x="7443216" y="2322576"/>
+            <a:ext cx="3712464" cy="402336"/>
+          </a:xfrm>
+          <a:prstGeom prst="rect">
+            <a:avLst/>
+          </a:prstGeom>
+          <a:noFill/>
+          <a:ln/>
+        </p:spPr>
+        <p:txBody>
+          <a:bodyPr wrap="square" lIns="0" tIns="0" rIns="0" bIns="0" rtlCol="0" anchor="ctr"/>
+          <a:lstStyle/>
+          <a:p>
+            <a:pPr indent="0" marL="0">
+              <a:buNone/>
+            </a:pPr>
+            <a:r>
+              <a:rPr lang="en-US" sz="2100" b="1" dirty="0">
+                <a:solidFill>
+                  <a:srgbClr val="12B886"/>
+                </a:solidFill>
+                <a:latin typeface="Aptos" pitchFamily="34" charset="0"/>
+                <a:ea typeface="Aptos" pitchFamily="34" charset="-122"/>
+                <a:cs typeface="Aptos" pitchFamily="34" charset="-120"/>
+              </a:rPr>
+              <a:t>Ask across all of it</a:t>
+            </a:r>
+            <a:endParaRPr lang="en-US" sz="2100" dirty="0"/>
+          </a:p>
+        </p:txBody>
+      </p:sp>
+      <p:sp>
+        <p:nvSpPr>
+          <p:cNvPr id="25" name="Text 21"/>
+          <p:cNvSpPr/>
+          <p:nvPr/>
+        </p:nvSpPr>
+        <p:spPr>
+          <a:xfrm>
+            <a:off x="7443216" y="2761488"/>
+            <a:ext cx="3712464" cy="274320"/>
+          </a:xfrm>
+          <a:prstGeom prst="rect">
+            <a:avLst/>
+          </a:prstGeom>
+          <a:noFill/>
+          <a:ln/>
+        </p:spPr>
+        <p:txBody>
+          <a:bodyPr wrap="square" lIns="0" tIns="0" rIns="0" bIns="0" rtlCol="0" anchor="ctr"/>
+          <a:lstStyle/>
+          <a:p>
+            <a:pPr indent="0" marL="0">
+              <a:buNone/>
+            </a:pPr>
+            <a:r>
+              <a:rPr lang="en-US" sz="1200" b="1" dirty="0">
+                <a:solidFill>
+                  <a:srgbClr val="8A93B8"/>
+                </a:solidFill>
+                <a:latin typeface="Aptos" pitchFamily="34" charset="0"/>
+                <a:ea typeface="Aptos" pitchFamily="34" charset="-122"/>
+                <a:cs typeface="Aptos" pitchFamily="34" charset="-120"/>
+              </a:rPr>
+              <a:t>Question the whole topic</a:t>
+            </a:r>
+            <a:endParaRPr lang="en-US" sz="1200" dirty="0"/>
+          </a:p>
+        </p:txBody>
+      </p:sp>
+      <p:sp>
+        <p:nvSpPr>
+          <p:cNvPr id="26" name="Text 22"/>
+          <p:cNvSpPr/>
+          <p:nvPr/>
+        </p:nvSpPr>
+        <p:spPr>
+          <a:xfrm>
+            <a:off x="6473952" y="3291840"/>
+            <a:ext cx="4572000" cy="914400"/>
+          </a:xfrm>
+          <a:prstGeom prst="rect">
+            <a:avLst/>
+          </a:prstGeom>
+          <a:noFill/>
+          <a:ln/>
+        </p:spPr>
+        <p:txBody>
+          <a:bodyPr wrap="square" lIns="0" tIns="0" rIns="0" bIns="0" rtlCol="0" anchor="t"/>
+          <a:lstStyle/>
+          <a:p>
+            <a:pPr indent="0" marL="0">
+              <a:lnSpc>
+                <a:spcPct val="114000"/>
+              </a:lnSpc>
+              <a:buNone/>
+            </a:pPr>
+            <a:r>
+              <a:rPr lang="en-US" sz="1250" dirty="0">
+                <a:solidFill>
+                  <a:srgbClr val="43507B"/>
+                </a:solidFill>
+                <a:latin typeface="Aptos" pitchFamily="34" charset="0"/>
+                <a:ea typeface="Aptos" pitchFamily="34" charset="-122"/>
+                <a:cs typeface="Aptos" pitchFamily="34" charset="-120"/>
+              </a:rPr>
+              <a:t>Ask questions across everything at once, then turn it into an audio overview for the drive home.</a:t>
+            </a:r>
+            <a:endParaRPr lang="en-US" sz="1250" dirty="0"/>
+          </a:p>
+        </p:txBody>
+      </p:sp>
+      <p:sp>
+        <p:nvSpPr>
+          <p:cNvPr id="27" name="Shape 23"/>
+          <p:cNvSpPr/>
+          <p:nvPr/>
+        </p:nvSpPr>
+        <p:spPr>
+          <a:xfrm>
+            <a:off x="6492240" y="4361688"/>
+            <a:ext cx="137160" cy="137160"/>
+          </a:xfrm>
+          <a:prstGeom prst="ellipse">
+            <a:avLst/>
+          </a:prstGeom>
+          <a:solidFill>
+            <a:srgbClr val="12B886"/>
+          </a:solidFill>
+          <a:ln/>
+        </p:spPr>
+      </p:sp>
+      <p:sp>
+        <p:nvSpPr>
+          <p:cNvPr id="28" name="Text 24"/>
+          <p:cNvSpPr/>
+          <p:nvPr/>
+        </p:nvSpPr>
+        <p:spPr>
+          <a:xfrm>
+            <a:off x="6729984" y="4270248"/>
+            <a:ext cx="4297680" cy="274320"/>
+          </a:xfrm>
+          <a:prstGeom prst="rect">
+            <a:avLst/>
+          </a:prstGeom>
+          <a:noFill/>
+          <a:ln/>
+        </p:spPr>
+        <p:txBody>
+          <a:bodyPr wrap="square" lIns="0" tIns="0" rIns="0" bIns="0" rtlCol="0" anchor="ctr"/>
+          <a:lstStyle/>
+          <a:p>
+            <a:pPr indent="0" marL="0">
+              <a:buNone/>
+            </a:pPr>
+            <a:r>
+              <a:rPr lang="en-US" sz="1150" dirty="0">
+                <a:solidFill>
+                  <a:srgbClr val="0B1437"/>
+                </a:solidFill>
+                <a:latin typeface="Aptos" pitchFamily="34" charset="0"/>
+                <a:ea typeface="Aptos" pitchFamily="34" charset="-122"/>
+                <a:cs typeface="Aptos" pitchFamily="34" charset="-120"/>
+              </a:rPr>
+              <a:t>Ask across every source at once</a:t>
+            </a:r>
+            <a:endParaRPr lang="en-US" sz="1150" dirty="0"/>
+          </a:p>
+        </p:txBody>
+      </p:sp>
+      <p:sp>
+        <p:nvSpPr>
+          <p:cNvPr id="29" name="Shape 25"/>
+          <p:cNvSpPr/>
+          <p:nvPr/>
+        </p:nvSpPr>
+        <p:spPr>
+          <a:xfrm>
+            <a:off x="6492240" y="4636008"/>
+            <a:ext cx="137160" cy="137160"/>
+          </a:xfrm>
+          <a:prstGeom prst="ellipse">
+            <a:avLst/>
+          </a:prstGeom>
+          <a:solidFill>
+            <a:srgbClr val="12B886"/>
+          </a:solidFill>
+          <a:ln/>
+        </p:spPr>
+      </p:sp>
+      <p:sp>
+        <p:nvSpPr>
+          <p:cNvPr id="30" name="Text 26"/>
+          <p:cNvSpPr/>
+          <p:nvPr/>
+        </p:nvSpPr>
+        <p:spPr>
+          <a:xfrm>
+            <a:off x="6729984" y="4544568"/>
+            <a:ext cx="4297680" cy="274320"/>
+          </a:xfrm>
+          <a:prstGeom prst="rect">
+            <a:avLst/>
+          </a:prstGeom>
+          <a:noFill/>
+          <a:ln/>
+        </p:spPr>
+        <p:txBody>
+          <a:bodyPr wrap="square" lIns="0" tIns="0" rIns="0" bIns="0" rtlCol="0" anchor="ctr"/>
+          <a:lstStyle/>
+          <a:p>
+            <a:pPr indent="0" marL="0">
+              <a:buNone/>
+            </a:pPr>
+            <a:r>
+              <a:rPr lang="en-US" sz="1150" dirty="0">
+                <a:solidFill>
+                  <a:srgbClr val="0B1437"/>
+                </a:solidFill>
+                <a:latin typeface="Aptos" pitchFamily="34" charset="0"/>
+                <a:ea typeface="Aptos" pitchFamily="34" charset="-122"/>
+                <a:cs typeface="Aptos" pitchFamily="34" charset="-120"/>
+              </a:rPr>
+              <a:t>Get the real state of the project</a:t>
+            </a:r>
+            <a:endParaRPr lang="en-US" sz="1150" dirty="0"/>
+          </a:p>
+        </p:txBody>
+      </p:sp>
+      <p:sp>
+        <p:nvSpPr>
+          <p:cNvPr id="31" name="Shape 27"/>
+          <p:cNvSpPr/>
+          <p:nvPr/>
+        </p:nvSpPr>
+        <p:spPr>
+          <a:xfrm>
+            <a:off x="6492240" y="4910328"/>
+            <a:ext cx="137160" cy="137160"/>
+          </a:xfrm>
+          <a:prstGeom prst="ellipse">
+            <a:avLst/>
+          </a:prstGeom>
+          <a:solidFill>
+            <a:srgbClr val="12B886"/>
+          </a:solidFill>
+          <a:ln/>
+        </p:spPr>
+      </p:sp>
+      <p:sp>
+        <p:nvSpPr>
+          <p:cNvPr id="32" name="Text 28"/>
+          <p:cNvSpPr/>
+          <p:nvPr/>
+        </p:nvSpPr>
+        <p:spPr>
+          <a:xfrm>
+            <a:off x="6729984" y="4818888"/>
+            <a:ext cx="4297680" cy="274320"/>
+          </a:xfrm>
+          <a:prstGeom prst="rect">
+            <a:avLst/>
+          </a:prstGeom>
+          <a:noFill/>
+          <a:ln/>
+        </p:spPr>
+        <p:txBody>
+          <a:bodyPr wrap="square" lIns="0" tIns="0" rIns="0" bIns="0" rtlCol="0" anchor="ctr"/>
+          <a:lstStyle/>
+          <a:p>
+            <a:pPr indent="0" marL="0">
+              <a:buNone/>
+            </a:pPr>
+            <a:r>
+              <a:rPr lang="en-US" sz="1150" dirty="0">
+                <a:solidFill>
+                  <a:srgbClr val="0B1437"/>
+                </a:solidFill>
+                <a:latin typeface="Aptos" pitchFamily="34" charset="0"/>
+                <a:ea typeface="Aptos" pitchFamily="34" charset="-122"/>
+                <a:cs typeface="Aptos" pitchFamily="34" charset="-120"/>
+              </a:rPr>
+              <a:t>Listen to it like a podcast</a:t>
+            </a:r>
+            <a:endParaRPr lang="en-US" sz="1150" dirty="0"/>
+          </a:p>
+        </p:txBody>
+      </p:sp>
+      <p:sp>
+        <p:nvSpPr>
+          <p:cNvPr id="33" name="Shape 29"/>
+          <p:cNvSpPr/>
+          <p:nvPr/>
+        </p:nvSpPr>
+        <p:spPr>
+          <a:xfrm>
+            <a:off x="822960" y="5321808"/>
+            <a:ext cx="10515600" cy="603504"/>
+          </a:xfrm>
+          <a:prstGeom prst="roundRect">
+            <a:avLst>
+              <a:gd name="adj" fmla="val 13636"/>
+            </a:avLst>
+          </a:prstGeom>
+          <a:solidFill>
+            <a:srgbClr val="F2EEFF"/>
+          </a:solidFill>
+          <a:ln w="12700">
+            <a:solidFill>
+              <a:srgbClr val="DDD2FB"/>
+            </a:solidFill>
+            <a:prstDash val="solid"/>
+          </a:ln>
+        </p:spPr>
+      </p:sp>
+      <p:sp>
+        <p:nvSpPr>
+          <p:cNvPr id="34" name="Text 30"/>
+          <p:cNvSpPr/>
+          <p:nvPr/>
+        </p:nvSpPr>
+        <p:spPr>
+          <a:xfrm>
+            <a:off x="1143000" y="5321808"/>
+            <a:ext cx="10058400" cy="603504"/>
+          </a:xfrm>
+          <a:prstGeom prst="rect">
+            <a:avLst/>
+          </a:prstGeom>
+          <a:noFill/>
+          <a:ln/>
+        </p:spPr>
+        <p:txBody>
+          <a:bodyPr wrap="square" lIns="0" tIns="0" rIns="0" bIns="0" rtlCol="0" anchor="ctr"/>
+          <a:lstStyle/>
+          <a:p>
+            <a:pPr algn="l" indent="0" marL="0">
+              <a:buNone/>
+            </a:pPr>
+            <a:r>
+              <a:rPr lang="en-US" sz="1300" b="1" dirty="0">
+                <a:solidFill>
+                  <a:srgbClr val="5B45C8"/>
+                </a:solidFill>
+                <a:latin typeface="Aptos" pitchFamily="34" charset="0"/>
+                <a:ea typeface="Aptos" pitchFamily="34" charset="-122"/>
+                <a:cs typeface="Aptos" pitchFamily="34" charset="-120"/>
+              </a:rPr>
+              <a:t xml:space="preserve">The move:  </a:t>
+            </a:r>
+            <a:pPr algn="l" indent="0" marL="0">
+              <a:buNone/>
+            </a:pPr>
+            <a:r>
+              <a:rPr lang="en-US" sz="1300" dirty="0">
+                <a:solidFill>
+                  <a:srgbClr val="43507B"/>
+                </a:solidFill>
+                <a:latin typeface="Aptos" pitchFamily="34" charset="0"/>
+                <a:ea typeface="Aptos" pitchFamily="34" charset="-122"/>
+                <a:cs typeface="Aptos" pitchFamily="34" charset="-120"/>
+              </a:rPr>
+              <a:t>gather it once, ask across all of it, then listen on the drive home.</a:t>
+            </a:r>
+            <a:endParaRPr lang="en-US" sz="1300" dirty="0"/>
+          </a:p>
+        </p:txBody>
+      </p:sp>
+      <p:sp>
+        <p:nvSpPr>
+          <p:cNvPr id="35" name="Text 31"/>
+          <p:cNvSpPr/>
+          <p:nvPr/>
+        </p:nvSpPr>
+        <p:spPr>
+          <a:xfrm>
+            <a:off x="640080" y="6419088"/>
+            <a:ext cx="8229600" cy="274320"/>
+          </a:xfrm>
+          <a:prstGeom prst="rect">
+            <a:avLst/>
+          </a:prstGeom>
+          <a:noFill/>
+          <a:ln/>
+        </p:spPr>
+        <p:txBody>
+          <a:bodyPr wrap="square" lIns="0" tIns="0" rIns="0" bIns="0" rtlCol="0" anchor="ctr"/>
+          <a:lstStyle/>
+          <a:p>
+            <a:pPr algn="l" indent="0" marL="0">
+              <a:buNone/>
+            </a:pPr>
+            <a:r>
+              <a:rPr lang="en-US" sz="900" dirty="0">
+                <a:solidFill>
+                  <a:srgbClr val="8A93B8"/>
+                </a:solidFill>
+                <a:latin typeface="Aptos" pitchFamily="34" charset="0"/>
+                <a:ea typeface="Aptos" pitchFamily="34" charset="-122"/>
+                <a:cs typeface="Aptos" pitchFamily="34" charset="-120"/>
+              </a:rPr>
+              <a:t>Tier 2 · Deeper value</a:t>
+            </a:r>
+            <a:endParaRPr lang="en-US" sz="900" dirty="0"/>
+          </a:p>
+        </p:txBody>
+      </p:sp>
+      <p:sp>
+        <p:nvSpPr>
+          <p:cNvPr id="36" name="Text 32"/>
+          <p:cNvSpPr/>
+          <p:nvPr/>
+        </p:nvSpPr>
+        <p:spPr>
+          <a:xfrm>
+            <a:off x="11155680" y="6419088"/>
+            <a:ext cx="640080" cy="274320"/>
+          </a:xfrm>
+          <a:prstGeom prst="rect">
+            <a:avLst/>
+          </a:prstGeom>
+          <a:noFill/>
+          <a:ln/>
+        </p:spPr>
+        <p:txBody>
+          <a:bodyPr wrap="square" lIns="0" tIns="0" rIns="0" bIns="0" rtlCol="0" anchor="ctr"/>
+          <a:lstStyle/>
+          <a:p>
+            <a:pPr algn="r" indent="0" marL="0">
+              <a:buNone/>
+            </a:pPr>
+            <a:r>
+              <a:rPr lang="en-US" sz="900" dirty="0">
+                <a:solidFill>
+                  <a:srgbClr val="8A93B8"/>
+                </a:solidFill>
+                <a:latin typeface="Aptos" pitchFamily="34" charset="0"/>
+                <a:ea typeface="Aptos" pitchFamily="34" charset="-122"/>
+                <a:cs typeface="Aptos" pitchFamily="34" charset="-120"/>
+              </a:rPr>
+              <a:t>17</a:t>
+            </a:r>
+            <a:endParaRPr lang="en-US" sz="900" dirty="0"/>
+          </a:p>
+        </p:txBody>
+      </p:sp>
+    </p:spTree>
+  </p:cSld>
+  <p:clrMapOvr>
+    <a:masterClrMapping/>
+  </p:clrMapOvr>
+</p:sld>
+</file>
+
+<file path=ppt/slides/slide25.xml><?xml version="1.0" encoding="utf-8"?>
+<p:sld xmlns:a="http://schemas.openxmlformats.org/drawingml/2006/main" xmlns:r="http://schemas.openxmlformats.org/officeDocument/2006/relationships" xmlns:p="http://schemas.openxmlformats.org/presentationml/2006/main">
+  <p:cSld name="Slide 13">
+    <p:bg>
+      <p:bgPr>
+        <a:solidFill>
+          <a:srgbClr val="F4F7FE"/>
+        </a:solidFill>
+      </p:bgPr>
+    </p:bg>
+    <p:spTree>
+      <p:nvGrpSpPr>
+        <p:cNvPr id="1" name=""/>
+        <p:cNvGrpSpPr/>
+        <p:nvPr/>
+      </p:nvGrpSpPr>
+      <p:grpSpPr>
+        <a:xfrm>
+          <a:off x="0" y="0"/>
+          <a:ext cx="0" cy="0"/>
+          <a:chOff x="0" y="0"/>
+          <a:chExt cx="0" cy="0"/>
+        </a:xfrm>
+      </p:grpSpPr>
+      <p:sp>
+        <p:nvSpPr>
+          <p:cNvPr id="2" name="Shape 0"/>
+          <p:cNvSpPr/>
+          <p:nvPr/>
+        </p:nvSpPr>
+        <p:spPr>
+          <a:xfrm>
+            <a:off x="822960" y="566928"/>
+            <a:ext cx="1170432" cy="310896"/>
+          </a:xfrm>
+          <a:prstGeom prst="roundRect">
+            <a:avLst>
+              <a:gd name="adj" fmla="val 50000"/>
+            </a:avLst>
+          </a:prstGeom>
+          <a:solidFill>
+            <a:srgbClr val="F0A500"/>
+          </a:solidFill>
+          <a:ln/>
+        </p:spPr>
+      </p:sp>
+      <p:sp>
+        <p:nvSpPr>
+          <p:cNvPr id="3" name="Text 1"/>
+          <p:cNvSpPr/>
+          <p:nvPr/>
+        </p:nvSpPr>
+        <p:spPr>
+          <a:xfrm>
+            <a:off x="822960" y="566928"/>
+            <a:ext cx="1170432" cy="310896"/>
+          </a:xfrm>
+          <a:prstGeom prst="rect">
+            <a:avLst/>
+          </a:prstGeom>
+          <a:noFill/>
+          <a:ln/>
+        </p:spPr>
+        <p:txBody>
+          <a:bodyPr wrap="square" lIns="0" tIns="0" rIns="0" bIns="0" rtlCol="0" anchor="ctr"/>
+          <a:lstStyle/>
+          <a:p>
+            <a:pPr algn="ctr" indent="0" marL="0">
+              <a:buNone/>
+            </a:pPr>
+            <a:r>
+              <a:rPr lang="en-US" sz="1100" b="1" spc="100" kern="0" dirty="0">
+                <a:solidFill>
+                  <a:srgbClr val="FFFFFF"/>
+                </a:solidFill>
+                <a:latin typeface="Aptos" pitchFamily="34" charset="0"/>
+                <a:ea typeface="Aptos" pitchFamily="34" charset="-122"/>
+                <a:cs typeface="Aptos" pitchFamily="34" charset="-120"/>
+              </a:rPr>
+              <a:t>TIER 3</a:t>
+            </a:r>
+            <a:endParaRPr lang="en-US" sz="1100" dirty="0"/>
+          </a:p>
+        </p:txBody>
+      </p:sp>
+      <p:sp>
+        <p:nvSpPr>
+          <p:cNvPr id="4" name="Text 2"/>
+          <p:cNvSpPr/>
+          <p:nvPr/>
+        </p:nvSpPr>
+        <p:spPr>
+          <a:xfrm>
+            <a:off x="2121408" y="566928"/>
+            <a:ext cx="8686800" cy="310896"/>
+          </a:xfrm>
+          <a:prstGeom prst="rect">
+            <a:avLst/>
+          </a:prstGeom>
+          <a:noFill/>
+          <a:ln/>
+        </p:spPr>
+        <p:txBody>
+          <a:bodyPr wrap="square" lIns="0" tIns="0" rIns="0" bIns="0" rtlCol="0" anchor="ctr"/>
+          <a:lstStyle/>
+          <a:p>
+            <a:pPr algn="l" indent="0" marL="0">
+              <a:buNone/>
+            </a:pPr>
+            <a:r>
+              <a:rPr lang="en-US" sz="1200" b="1" spc="200" kern="0" dirty="0">
+                <a:solidFill>
+                  <a:srgbClr val="F0A500"/>
+                </a:solidFill>
+                <a:latin typeface="Aptos" pitchFamily="34" charset="0"/>
+                <a:ea typeface="Aptos" pitchFamily="34" charset="-122"/>
+                <a:cs typeface="Aptos" pitchFamily="34" charset="-120"/>
+              </a:rPr>
+              <a:t>FOR YOUR EXECUTIVE ASSISTANT · OPTIONAL</a:t>
+            </a:r>
+            <a:endParaRPr lang="en-US" sz="1200" dirty="0"/>
+          </a:p>
+        </p:txBody>
+      </p:sp>
+      <p:sp>
+        <p:nvSpPr>
+          <p:cNvPr id="5" name="Text 3"/>
+          <p:cNvSpPr/>
+          <p:nvPr/>
+        </p:nvSpPr>
+        <p:spPr>
+          <a:xfrm>
+            <a:off x="786384" y="914400"/>
+            <a:ext cx="11155680" cy="566928"/>
+          </a:xfrm>
+          <a:prstGeom prst="rect">
+            <a:avLst/>
+          </a:prstGeom>
+          <a:noFill/>
+          <a:ln/>
+        </p:spPr>
+        <p:txBody>
+          <a:bodyPr wrap="square" lIns="0" tIns="0" rIns="0" bIns="0" rtlCol="0" anchor="ctr"/>
+          <a:lstStyle/>
+          <a:p>
+            <a:pPr indent="0" marL="0">
+              <a:buNone/>
+            </a:pPr>
+            <a:r>
+              <a:rPr lang="en-US" sz="2700" b="1" dirty="0">
+                <a:solidFill>
+                  <a:srgbClr val="0B1437"/>
+                </a:solidFill>
+                <a:latin typeface="Aptos" pitchFamily="34" charset="0"/>
+                <a:ea typeface="Aptos" pitchFamily="34" charset="-122"/>
+                <a:cs typeface="Aptos" pitchFamily="34" charset="-120"/>
+              </a:rPr>
+              <a:t>Copilot multiplies a great assistant</a:t>
+            </a:r>
+            <a:endParaRPr lang="en-US" sz="2700" dirty="0"/>
+          </a:p>
+        </p:txBody>
+      </p:sp>
+      <p:sp>
+        <p:nvSpPr>
+          <p:cNvPr id="6" name="Text 4"/>
+          <p:cNvSpPr/>
+          <p:nvPr/>
+        </p:nvSpPr>
+        <p:spPr>
+          <a:xfrm>
+            <a:off x="822960" y="1499616"/>
+            <a:ext cx="10607040" cy="402336"/>
+          </a:xfrm>
+          <a:prstGeom prst="rect">
+            <a:avLst/>
+          </a:prstGeom>
+          <a:noFill/>
+          <a:ln/>
+        </p:spPr>
+        <p:txBody>
+          <a:bodyPr wrap="square" lIns="0" tIns="0" rIns="0" bIns="0" rtlCol="0" anchor="ctr"/>
+          <a:lstStyle/>
+          <a:p>
+            <a:pPr indent="0" marL="0">
+              <a:lnSpc>
+                <a:spcPct val="112000"/>
+              </a:lnSpc>
+              <a:buNone/>
+            </a:pPr>
+            <a:r>
+              <a:rPr lang="en-US" sz="1400" dirty="0">
+                <a:solidFill>
+                  <a:srgbClr val="43507B"/>
+                </a:solidFill>
+                <a:latin typeface="Aptos" pitchFamily="34" charset="0"/>
+                <a:ea typeface="Aptos" pitchFamily="34" charset="-122"/>
+                <a:cs typeface="Aptos" pitchFamily="34" charset="-120"/>
+              </a:rPr>
+              <a:t>Most leaders do not work alone. Run this session with your assistant, then let them own the daily prep so you get the summary, not the search.</a:t>
+            </a:r>
+            <a:endParaRPr lang="en-US" sz="1400" dirty="0"/>
+          </a:p>
+        </p:txBody>
+      </p:sp>
+      <p:sp>
+        <p:nvSpPr>
+          <p:cNvPr id="7" name="Shape 5"/>
+          <p:cNvSpPr/>
+          <p:nvPr/>
+        </p:nvSpPr>
+        <p:spPr>
+          <a:xfrm>
+            <a:off x="822960" y="2029968"/>
+            <a:ext cx="5175504" cy="3154680"/>
+          </a:xfrm>
+          <a:prstGeom prst="roundRect">
+            <a:avLst>
+              <a:gd name="adj" fmla="val 2899"/>
+            </a:avLst>
+          </a:prstGeom>
+          <a:solidFill>
+            <a:srgbClr val="FFFFFF"/>
+          </a:solidFill>
+          <a:ln w="12700">
+            <a:solidFill>
+              <a:srgbClr val="E4E9F7"/>
+            </a:solidFill>
+            <a:prstDash val="solid"/>
+          </a:ln>
+          <a:effectLst>
+            <a:outerShdw sx="100000" sy="100000" kx="0" ky="0" algn="bl" rotWithShape="0" blurRad="114300" dist="38100" dir="5400000">
+              <a:srgbClr val="0B1437">
+                <a:alpha val="10000"/>
+              </a:srgbClr>
+            </a:outerShdw>
+          </a:effectLst>
+        </p:spPr>
+      </p:sp>
+      <p:sp>
+        <p:nvSpPr>
+          <p:cNvPr id="8" name="Shape 6"/>
+          <p:cNvSpPr/>
+          <p:nvPr/>
+        </p:nvSpPr>
+        <p:spPr>
+          <a:xfrm>
+            <a:off x="822960" y="2029968"/>
+            <a:ext cx="5175504" cy="109728"/>
+          </a:xfrm>
+          <a:prstGeom prst="rect">
+            <a:avLst/>
+          </a:prstGeom>
+          <a:solidFill>
+            <a:srgbClr val="2D6CDF"/>
+          </a:solidFill>
+          <a:ln/>
+        </p:spPr>
+      </p:sp>
+      <p:sp>
+        <p:nvSpPr>
+          <p:cNvPr id="9" name="Shape 7"/>
+          <p:cNvSpPr/>
+          <p:nvPr/>
+        </p:nvSpPr>
+        <p:spPr>
+          <a:xfrm>
+            <a:off x="1115568" y="2340864"/>
+            <a:ext cx="749808" cy="749808"/>
+          </a:xfrm>
+          <a:prstGeom prst="ellipse">
+            <a:avLst/>
+          </a:prstGeom>
+          <a:solidFill>
+            <a:srgbClr val="2D6CDF"/>
+          </a:solidFill>
+          <a:ln/>
+          <a:effectLst>
+            <a:outerShdw sx="100000" sy="100000" kx="0" ky="0" algn="bl" rotWithShape="0" blurRad="114300" dist="38100" dir="5400000">
+              <a:srgbClr val="0B1437">
+                <a:alpha val="10000"/>
+              </a:srgbClr>
+            </a:outerShdw>
+          </a:effectLst>
+        </p:spPr>
+      </p:sp>
+      <p:pic>
+        <p:nvPicPr>
+          <p:cNvPr id="10" name="Image 0" descr="preencoded.png"/>
+          <p:cNvPicPr>
+            <a:picLocks noChangeAspect="1"/>
+          </p:cNvPicPr>
+          <p:nvPr/>
+        </p:nvPicPr>
+        <p:blipFill>
+          <a:blip r:embed="rId1"/>
+          <a:stretch>
+            <a:fillRect/>
+          </a:stretch>
+        </p:blipFill>
+        <p:spPr>
+          <a:xfrm>
+            <a:off x="1340510" y="2565806"/>
+            <a:ext cx="299923" cy="299923"/>
+          </a:xfrm>
+          <a:prstGeom prst="rect">
+            <a:avLst/>
+          </a:prstGeom>
+        </p:spPr>
+      </p:pic>
+      <p:sp>
+        <p:nvSpPr>
+          <p:cNvPr id="11" name="Text 8"/>
+          <p:cNvSpPr/>
+          <p:nvPr/>
+        </p:nvSpPr>
+        <p:spPr>
+          <a:xfrm>
+            <a:off x="2103120" y="2322576"/>
+            <a:ext cx="3712464" cy="402336"/>
+          </a:xfrm>
+          <a:prstGeom prst="rect">
+            <a:avLst/>
+          </a:prstGeom>
+          <a:noFill/>
+          <a:ln/>
+        </p:spPr>
+        <p:txBody>
+          <a:bodyPr wrap="square" lIns="0" tIns="0" rIns="0" bIns="0" rtlCol="0" anchor="ctr"/>
+          <a:lstStyle/>
+          <a:p>
+            <a:pPr indent="0" marL="0">
+              <a:buNone/>
+            </a:pPr>
+            <a:r>
+              <a:rPr lang="en-US" sz="2100" b="1" dirty="0">
+                <a:solidFill>
+                  <a:srgbClr val="2D6CDF"/>
+                </a:solidFill>
+                <a:latin typeface="Aptos" pitchFamily="34" charset="0"/>
+                <a:ea typeface="Aptos" pitchFamily="34" charset="-122"/>
+                <a:cs typeface="Aptos" pitchFamily="34" charset="-120"/>
+              </a:rPr>
+              <a:t>Bring them in on day one</a:t>
+            </a:r>
+            <a:endParaRPr lang="en-US" sz="2100" dirty="0"/>
+          </a:p>
+        </p:txBody>
+      </p:sp>
+      <p:sp>
+        <p:nvSpPr>
+          <p:cNvPr id="12" name="Text 9"/>
+          <p:cNvSpPr/>
+          <p:nvPr/>
+        </p:nvSpPr>
+        <p:spPr>
+          <a:xfrm>
+            <a:off x="2103120" y="2761488"/>
+            <a:ext cx="3712464" cy="274320"/>
+          </a:xfrm>
+          <a:prstGeom prst="rect">
+            <a:avLst/>
+          </a:prstGeom>
+          <a:noFill/>
+          <a:ln/>
+        </p:spPr>
+        <p:txBody>
+          <a:bodyPr wrap="square" lIns="0" tIns="0" rIns="0" bIns="0" rtlCol="0" anchor="ctr"/>
+          <a:lstStyle/>
+          <a:p>
+            <a:pPr indent="0" marL="0">
+              <a:buNone/>
+            </a:pPr>
+            <a:r>
+              <a:rPr lang="en-US" sz="1200" b="1" dirty="0">
+                <a:solidFill>
+                  <a:srgbClr val="8A93B8"/>
+                </a:solidFill>
+                <a:latin typeface="Aptos" pitchFamily="34" charset="0"/>
+                <a:ea typeface="Aptos" pitchFamily="34" charset="-122"/>
+                <a:cs typeface="Aptos" pitchFamily="34" charset="-120"/>
+              </a:rPr>
+              <a:t>Share your setup</a:t>
+            </a:r>
+            <a:endParaRPr lang="en-US" sz="1200" dirty="0"/>
+          </a:p>
+        </p:txBody>
+      </p:sp>
+      <p:sp>
+        <p:nvSpPr>
+          <p:cNvPr id="13" name="Text 10"/>
+          <p:cNvSpPr/>
+          <p:nvPr/>
+        </p:nvSpPr>
+        <p:spPr>
+          <a:xfrm>
+            <a:off x="1133856" y="3291840"/>
+            <a:ext cx="4572000" cy="914400"/>
+          </a:xfrm>
+          <a:prstGeom prst="rect">
+            <a:avLst/>
+          </a:prstGeom>
+          <a:noFill/>
+          <a:ln/>
+        </p:spPr>
+        <p:txBody>
+          <a:bodyPr wrap="square" lIns="0" tIns="0" rIns="0" bIns="0" rtlCol="0" anchor="t"/>
+          <a:lstStyle/>
+          <a:p>
+            <a:pPr indent="0" marL="0">
+              <a:lnSpc>
+                <a:spcPct val="114000"/>
+              </a:lnSpc>
+              <a:buNone/>
+            </a:pPr>
+            <a:r>
+              <a:rPr lang="en-US" sz="1250" dirty="0">
+                <a:solidFill>
+                  <a:srgbClr val="43507B"/>
+                </a:solidFill>
+                <a:latin typeface="Aptos" pitchFamily="34" charset="0"/>
+                <a:ea typeface="Aptos" pitchFamily="34" charset="-122"/>
+                <a:cs typeface="Aptos" pitchFamily="34" charset="-120"/>
+              </a:rPr>
+              <a:t>Give your assistant your personalization profile, so what they produce already sounds like you.</a:t>
+            </a:r>
+            <a:endParaRPr lang="en-US" sz="1250" dirty="0"/>
+          </a:p>
+        </p:txBody>
+      </p:sp>
+      <p:sp>
+        <p:nvSpPr>
+          <p:cNvPr id="14" name="Shape 11"/>
+          <p:cNvSpPr/>
+          <p:nvPr/>
+        </p:nvSpPr>
+        <p:spPr>
+          <a:xfrm>
+            <a:off x="1152144" y="4361688"/>
+            <a:ext cx="137160" cy="137160"/>
+          </a:xfrm>
+          <a:prstGeom prst="ellipse">
+            <a:avLst/>
+          </a:prstGeom>
+          <a:solidFill>
+            <a:srgbClr val="2D6CDF"/>
+          </a:solidFill>
+          <a:ln/>
+        </p:spPr>
+      </p:sp>
+      <p:sp>
+        <p:nvSpPr>
+          <p:cNvPr id="15" name="Text 12"/>
+          <p:cNvSpPr/>
+          <p:nvPr/>
+        </p:nvSpPr>
+        <p:spPr>
+          <a:xfrm>
+            <a:off x="1389888" y="4270248"/>
+            <a:ext cx="4297680" cy="274320"/>
+          </a:xfrm>
+          <a:prstGeom prst="rect">
+            <a:avLst/>
+          </a:prstGeom>
+          <a:noFill/>
+          <a:ln/>
+        </p:spPr>
+        <p:txBody>
+          <a:bodyPr wrap="square" lIns="0" tIns="0" rIns="0" bIns="0" rtlCol="0" anchor="ctr"/>
+          <a:lstStyle/>
+          <a:p>
+            <a:pPr indent="0" marL="0">
+              <a:buNone/>
+            </a:pPr>
+            <a:r>
+              <a:rPr lang="en-US" sz="1150" dirty="0">
+                <a:solidFill>
+                  <a:srgbClr val="0B1437"/>
+                </a:solidFill>
+                <a:latin typeface="Aptos" pitchFamily="34" charset="0"/>
+                <a:ea typeface="Aptos" pitchFamily="34" charset="-122"/>
+                <a:cs typeface="Aptos" pitchFamily="34" charset="-120"/>
+              </a:rPr>
+              <a:t>They run it on your shared work</a:t>
+            </a:r>
+            <a:endParaRPr lang="en-US" sz="1150" dirty="0"/>
+          </a:p>
+        </p:txBody>
+      </p:sp>
+      <p:sp>
+        <p:nvSpPr>
+          <p:cNvPr id="16" name="Shape 13"/>
+          <p:cNvSpPr/>
+          <p:nvPr/>
+        </p:nvSpPr>
+        <p:spPr>
+          <a:xfrm>
+            <a:off x="1152144" y="4636008"/>
+            <a:ext cx="137160" cy="137160"/>
+          </a:xfrm>
+          <a:prstGeom prst="ellipse">
+            <a:avLst/>
+          </a:prstGeom>
+          <a:solidFill>
+            <a:srgbClr val="2D6CDF"/>
+          </a:solidFill>
+          <a:ln/>
+        </p:spPr>
+      </p:sp>
+      <p:sp>
+        <p:nvSpPr>
+          <p:cNvPr id="17" name="Text 14"/>
+          <p:cNvSpPr/>
+          <p:nvPr/>
+        </p:nvSpPr>
+        <p:spPr>
+          <a:xfrm>
+            <a:off x="1389888" y="4544568"/>
+            <a:ext cx="4297680" cy="274320"/>
+          </a:xfrm>
+          <a:prstGeom prst="rect">
+            <a:avLst/>
+          </a:prstGeom>
+          <a:noFill/>
+          <a:ln/>
+        </p:spPr>
+        <p:txBody>
+          <a:bodyPr wrap="square" lIns="0" tIns="0" rIns="0" bIns="0" rtlCol="0" anchor="ctr"/>
+          <a:lstStyle/>
+          <a:p>
+            <a:pPr indent="0" marL="0">
+              <a:buNone/>
+            </a:pPr>
+            <a:r>
+              <a:rPr lang="en-US" sz="1150" dirty="0">
+                <a:solidFill>
+                  <a:srgbClr val="0B1437"/>
+                </a:solidFill>
+                <a:latin typeface="Aptos" pitchFamily="34" charset="0"/>
+                <a:ea typeface="Aptos" pitchFamily="34" charset="-122"/>
+                <a:cs typeface="Aptos" pitchFamily="34" charset="-120"/>
+              </a:rPr>
+              <a:t>Drafts in a voice you agreed on</a:t>
+            </a:r>
+            <a:endParaRPr lang="en-US" sz="1150" dirty="0"/>
+          </a:p>
+        </p:txBody>
+      </p:sp>
+      <p:sp>
+        <p:nvSpPr>
+          <p:cNvPr id="18" name="Shape 15"/>
+          <p:cNvSpPr/>
+          <p:nvPr/>
+        </p:nvSpPr>
+        <p:spPr>
+          <a:xfrm>
+            <a:off x="1152144" y="4910328"/>
+            <a:ext cx="137160" cy="137160"/>
+          </a:xfrm>
+          <a:prstGeom prst="ellipse">
+            <a:avLst/>
+          </a:prstGeom>
+          <a:solidFill>
+            <a:srgbClr val="2D6CDF"/>
+          </a:solidFill>
+          <a:ln/>
+        </p:spPr>
+      </p:sp>
+      <p:sp>
+        <p:nvSpPr>
+          <p:cNvPr id="19" name="Text 16"/>
+          <p:cNvSpPr/>
+          <p:nvPr/>
+        </p:nvSpPr>
+        <p:spPr>
+          <a:xfrm>
+            <a:off x="1389888" y="4818888"/>
+            <a:ext cx="4297680" cy="274320"/>
+          </a:xfrm>
+          <a:prstGeom prst="rect">
+            <a:avLst/>
+          </a:prstGeom>
+          <a:noFill/>
+          <a:ln/>
+        </p:spPr>
+        <p:txBody>
+          <a:bodyPr wrap="square" lIns="0" tIns="0" rIns="0" bIns="0" rtlCol="0" anchor="ctr"/>
+          <a:lstStyle/>
+          <a:p>
+            <a:pPr indent="0" marL="0">
+              <a:buNone/>
+            </a:pPr>
+            <a:r>
+              <a:rPr lang="en-US" sz="1150" dirty="0">
+                <a:solidFill>
+                  <a:srgbClr val="0B1437"/>
+                </a:solidFill>
+                <a:latin typeface="Aptos" pitchFamily="34" charset="0"/>
+                <a:ea typeface="Aptos" pitchFamily="34" charset="-122"/>
+                <a:cs typeface="Aptos" pitchFamily="34" charset="-120"/>
+              </a:rPr>
+              <a:t>Inbox, briefings, and follow-ups</a:t>
+            </a:r>
+            <a:endParaRPr lang="en-US" sz="1150" dirty="0"/>
+          </a:p>
+        </p:txBody>
+      </p:sp>
+      <p:sp>
+        <p:nvSpPr>
+          <p:cNvPr id="20" name="Shape 17"/>
+          <p:cNvSpPr/>
+          <p:nvPr/>
+        </p:nvSpPr>
+        <p:spPr>
+          <a:xfrm>
+            <a:off x="6163056" y="2029968"/>
+            <a:ext cx="5175504" cy="3154680"/>
+          </a:xfrm>
+          <a:prstGeom prst="roundRect">
+            <a:avLst>
+              <a:gd name="adj" fmla="val 2899"/>
+            </a:avLst>
+          </a:prstGeom>
+          <a:solidFill>
+            <a:srgbClr val="FFFFFF"/>
+          </a:solidFill>
+          <a:ln w="12700">
+            <a:solidFill>
+              <a:srgbClr val="E4E9F7"/>
+            </a:solidFill>
+            <a:prstDash val="solid"/>
+          </a:ln>
+          <a:effectLst>
+            <a:outerShdw sx="100000" sy="100000" kx="0" ky="0" algn="bl" rotWithShape="0" blurRad="114300" dist="38100" dir="5400000">
+              <a:srgbClr val="0B1437">
+                <a:alpha val="10000"/>
+              </a:srgbClr>
+            </a:outerShdw>
+          </a:effectLst>
+        </p:spPr>
+      </p:sp>
+      <p:sp>
+        <p:nvSpPr>
+          <p:cNvPr id="21" name="Shape 18"/>
+          <p:cNvSpPr/>
+          <p:nvPr/>
+        </p:nvSpPr>
+        <p:spPr>
+          <a:xfrm>
+            <a:off x="6163056" y="2029968"/>
+            <a:ext cx="5175504" cy="109728"/>
+          </a:xfrm>
+          <a:prstGeom prst="rect">
+            <a:avLst/>
+          </a:prstGeom>
+          <a:solidFill>
+            <a:srgbClr val="12B886"/>
+          </a:solidFill>
+          <a:ln/>
+        </p:spPr>
+      </p:sp>
+      <p:sp>
+        <p:nvSpPr>
+          <p:cNvPr id="22" name="Shape 19"/>
+          <p:cNvSpPr/>
+          <p:nvPr/>
+        </p:nvSpPr>
+        <p:spPr>
+          <a:xfrm>
+            <a:off x="6455664" y="2340864"/>
+            <a:ext cx="749808" cy="749808"/>
+          </a:xfrm>
+          <a:prstGeom prst="ellipse">
+            <a:avLst/>
+          </a:prstGeom>
+          <a:solidFill>
+            <a:srgbClr val="12B886"/>
+          </a:solidFill>
+          <a:ln/>
+          <a:effectLst>
+            <a:outerShdw sx="100000" sy="100000" kx="0" ky="0" algn="bl" rotWithShape="0" blurRad="114300" dist="38100" dir="5400000">
+              <a:srgbClr val="0B1437">
+                <a:alpha val="10000"/>
+              </a:srgbClr>
+            </a:outerShdw>
+          </a:effectLst>
+        </p:spPr>
+      </p:sp>
+      <p:pic>
+        <p:nvPicPr>
+          <p:cNvPr id="23" name="Image 1" descr="preencoded.png"/>
+          <p:cNvPicPr>
+            <a:picLocks noChangeAspect="1"/>
+          </p:cNvPicPr>
+          <p:nvPr/>
+        </p:nvPicPr>
+        <p:blipFill>
+          <a:blip r:embed="rId2"/>
+          <a:stretch>
+            <a:fillRect/>
+          </a:stretch>
+        </p:blipFill>
+        <p:spPr>
+          <a:xfrm>
+            <a:off x="6680606" y="2565806"/>
+            <a:ext cx="299923" cy="299923"/>
+          </a:xfrm>
+          <a:prstGeom prst="rect">
+            <a:avLst/>
+          </a:prstGeom>
+        </p:spPr>
+      </p:pic>
+      <p:sp>
+        <p:nvSpPr>
+          <p:cNvPr id="24" name="Text 20"/>
+          <p:cNvSpPr/>
+          <p:nvPr/>
+        </p:nvSpPr>
+        <p:spPr>
+          <a:xfrm>
+            <a:off x="7443216" y="2322576"/>
+            <a:ext cx="3712464" cy="402336"/>
+          </a:xfrm>
+          <a:prstGeom prst="rect">
+            <a:avLst/>
+          </a:prstGeom>
+          <a:noFill/>
+          <a:ln/>
+        </p:spPr>
+        <p:txBody>
+          <a:bodyPr wrap="square" lIns="0" tIns="0" rIns="0" bIns="0" rtlCol="0" anchor="ctr"/>
+          <a:lstStyle/>
+          <a:p>
+            <a:pPr indent="0" marL="0">
+              <a:buNone/>
+            </a:pPr>
+            <a:r>
+              <a:rPr lang="en-US" sz="2100" b="1" dirty="0">
+                <a:solidFill>
+                  <a:srgbClr val="12B886"/>
+                </a:solidFill>
+                <a:latin typeface="Aptos" pitchFamily="34" charset="0"/>
+                <a:ea typeface="Aptos" pitchFamily="34" charset="-122"/>
+                <a:cs typeface="Aptos" pitchFamily="34" charset="-120"/>
+              </a:rPr>
+              <a:t>Let them own the prep</a:t>
+            </a:r>
+            <a:endParaRPr lang="en-US" sz="2100" dirty="0"/>
+          </a:p>
+        </p:txBody>
+      </p:sp>
+      <p:sp>
+        <p:nvSpPr>
+          <p:cNvPr id="25" name="Text 21"/>
+          <p:cNvSpPr/>
+          <p:nvPr/>
+        </p:nvSpPr>
+        <p:spPr>
+          <a:xfrm>
+            <a:off x="7443216" y="2761488"/>
+            <a:ext cx="3712464" cy="274320"/>
+          </a:xfrm>
+          <a:prstGeom prst="rect">
+            <a:avLst/>
+          </a:prstGeom>
+          <a:noFill/>
+          <a:ln/>
+        </p:spPr>
+        <p:txBody>
+          <a:bodyPr wrap="square" lIns="0" tIns="0" rIns="0" bIns="0" rtlCol="0" anchor="ctr"/>
+          <a:lstStyle/>
+          <a:p>
+            <a:pPr indent="0" marL="0">
+              <a:buNone/>
+            </a:pPr>
+            <a:r>
+              <a:rPr lang="en-US" sz="1200" b="1" dirty="0">
+                <a:solidFill>
+                  <a:srgbClr val="8A93B8"/>
+                </a:solidFill>
+                <a:latin typeface="Aptos" pitchFamily="34" charset="0"/>
+                <a:ea typeface="Aptos" pitchFamily="34" charset="-122"/>
+                <a:cs typeface="Aptos" pitchFamily="34" charset="-120"/>
+              </a:rPr>
+              <a:t>You get the summary</a:t>
+            </a:r>
+            <a:endParaRPr lang="en-US" sz="1200" dirty="0"/>
+          </a:p>
+        </p:txBody>
+      </p:sp>
+      <p:sp>
+        <p:nvSpPr>
+          <p:cNvPr id="26" name="Text 22"/>
+          <p:cNvSpPr/>
+          <p:nvPr/>
+        </p:nvSpPr>
+        <p:spPr>
+          <a:xfrm>
+            <a:off x="6473952" y="3291840"/>
+            <a:ext cx="4572000" cy="914400"/>
+          </a:xfrm>
+          <a:prstGeom prst="rect">
+            <a:avLst/>
+          </a:prstGeom>
+          <a:noFill/>
+          <a:ln/>
+        </p:spPr>
+        <p:txBody>
+          <a:bodyPr wrap="square" lIns="0" tIns="0" rIns="0" bIns="0" rtlCol="0" anchor="t"/>
+          <a:lstStyle/>
+          <a:p>
+            <a:pPr indent="0" marL="0">
+              <a:lnSpc>
+                <a:spcPct val="114000"/>
+              </a:lnSpc>
+              <a:buNone/>
+            </a:pPr>
+            <a:r>
+              <a:rPr lang="en-US" sz="1250" dirty="0">
+                <a:solidFill>
+                  <a:srgbClr val="43507B"/>
+                </a:solidFill>
+                <a:latin typeface="Aptos" pitchFamily="34" charset="0"/>
+                <a:ea typeface="Aptos" pitchFamily="34" charset="-122"/>
+                <a:cs typeface="Aptos" pitchFamily="34" charset="-120"/>
+              </a:rPr>
+              <a:t>Have them set up your morning brief and meeting-to-actions, then hand you the output each day.</a:t>
+            </a:r>
+            <a:endParaRPr lang="en-US" sz="1250" dirty="0"/>
+          </a:p>
+        </p:txBody>
+      </p:sp>
+      <p:sp>
+        <p:nvSpPr>
+          <p:cNvPr id="27" name="Shape 23"/>
+          <p:cNvSpPr/>
+          <p:nvPr/>
+        </p:nvSpPr>
+        <p:spPr>
+          <a:xfrm>
+            <a:off x="6492240" y="4361688"/>
+            <a:ext cx="137160" cy="137160"/>
+          </a:xfrm>
+          <a:prstGeom prst="ellipse">
+            <a:avLst/>
+          </a:prstGeom>
+          <a:solidFill>
+            <a:srgbClr val="12B886"/>
+          </a:solidFill>
+          <a:ln/>
+        </p:spPr>
+      </p:sp>
+      <p:sp>
+        <p:nvSpPr>
+          <p:cNvPr id="28" name="Text 24"/>
+          <p:cNvSpPr/>
+          <p:nvPr/>
+        </p:nvSpPr>
+        <p:spPr>
+          <a:xfrm>
+            <a:off x="6729984" y="4270248"/>
+            <a:ext cx="4297680" cy="274320"/>
+          </a:xfrm>
+          <a:prstGeom prst="rect">
+            <a:avLst/>
+          </a:prstGeom>
+          <a:noFill/>
+          <a:ln/>
+        </p:spPr>
+        <p:txBody>
+          <a:bodyPr wrap="square" lIns="0" tIns="0" rIns="0" bIns="0" rtlCol="0" anchor="ctr"/>
+          <a:lstStyle/>
+          <a:p>
+            <a:pPr indent="0" marL="0">
+              <a:buNone/>
+            </a:pPr>
+            <a:r>
+              <a:rPr lang="en-US" sz="1150" dirty="0">
+                <a:solidFill>
+                  <a:srgbClr val="0B1437"/>
+                </a:solidFill>
+                <a:latin typeface="Aptos" pitchFamily="34" charset="0"/>
+                <a:ea typeface="Aptos" pitchFamily="34" charset="-122"/>
+                <a:cs typeface="Aptos" pitchFamily="34" charset="-120"/>
+              </a:rPr>
+              <a:t>They own the daily prep</a:t>
+            </a:r>
+            <a:endParaRPr lang="en-US" sz="1150" dirty="0"/>
+          </a:p>
+        </p:txBody>
+      </p:sp>
+      <p:sp>
+        <p:nvSpPr>
+          <p:cNvPr id="29" name="Shape 25"/>
+          <p:cNvSpPr/>
+          <p:nvPr/>
+        </p:nvSpPr>
+        <p:spPr>
+          <a:xfrm>
+            <a:off x="6492240" y="4636008"/>
+            <a:ext cx="137160" cy="137160"/>
+          </a:xfrm>
+          <a:prstGeom prst="ellipse">
+            <a:avLst/>
+          </a:prstGeom>
+          <a:solidFill>
+            <a:srgbClr val="12B886"/>
+          </a:solidFill>
+          <a:ln/>
+        </p:spPr>
+      </p:sp>
+      <p:sp>
+        <p:nvSpPr>
+          <p:cNvPr id="30" name="Text 26"/>
+          <p:cNvSpPr/>
+          <p:nvPr/>
+        </p:nvSpPr>
+        <p:spPr>
+          <a:xfrm>
+            <a:off x="6729984" y="4544568"/>
+            <a:ext cx="4297680" cy="274320"/>
+          </a:xfrm>
+          <a:prstGeom prst="rect">
+            <a:avLst/>
+          </a:prstGeom>
+          <a:noFill/>
+          <a:ln/>
+        </p:spPr>
+        <p:txBody>
+          <a:bodyPr wrap="square" lIns="0" tIns="0" rIns="0" bIns="0" rtlCol="0" anchor="ctr"/>
+          <a:lstStyle/>
+          <a:p>
+            <a:pPr indent="0" marL="0">
+              <a:buNone/>
+            </a:pPr>
+            <a:r>
+              <a:rPr lang="en-US" sz="1150" dirty="0">
+                <a:solidFill>
+                  <a:srgbClr val="0B1437"/>
+                </a:solidFill>
+                <a:latin typeface="Aptos" pitchFamily="34" charset="0"/>
+                <a:ea typeface="Aptos" pitchFamily="34" charset="-122"/>
+                <a:cs typeface="Aptos" pitchFamily="34" charset="-120"/>
+              </a:rPr>
+              <a:t>You get the summary, not the search</a:t>
+            </a:r>
+            <a:endParaRPr lang="en-US" sz="1150" dirty="0"/>
+          </a:p>
+        </p:txBody>
+      </p:sp>
+      <p:sp>
+        <p:nvSpPr>
+          <p:cNvPr id="31" name="Shape 27"/>
+          <p:cNvSpPr/>
+          <p:nvPr/>
+        </p:nvSpPr>
+        <p:spPr>
+          <a:xfrm>
+            <a:off x="6492240" y="4910328"/>
+            <a:ext cx="137160" cy="137160"/>
+          </a:xfrm>
+          <a:prstGeom prst="ellipse">
+            <a:avLst/>
+          </a:prstGeom>
+          <a:solidFill>
+            <a:srgbClr val="12B886"/>
+          </a:solidFill>
+          <a:ln/>
+        </p:spPr>
+      </p:sp>
+      <p:sp>
+        <p:nvSpPr>
+          <p:cNvPr id="32" name="Text 28"/>
+          <p:cNvSpPr/>
+          <p:nvPr/>
+        </p:nvSpPr>
+        <p:spPr>
+          <a:xfrm>
+            <a:off x="6729984" y="4818888"/>
+            <a:ext cx="4297680" cy="274320"/>
+          </a:xfrm>
+          <a:prstGeom prst="rect">
+            <a:avLst/>
+          </a:prstGeom>
+          <a:noFill/>
+          <a:ln/>
+        </p:spPr>
+        <p:txBody>
+          <a:bodyPr wrap="square" lIns="0" tIns="0" rIns="0" bIns="0" rtlCol="0" anchor="ctr"/>
+          <a:lstStyle/>
+          <a:p>
+            <a:pPr indent="0" marL="0">
+              <a:buNone/>
+            </a:pPr>
+            <a:r>
+              <a:rPr lang="en-US" sz="1150" dirty="0">
+                <a:solidFill>
+                  <a:srgbClr val="0B1437"/>
+                </a:solidFill>
+                <a:latin typeface="Aptos" pitchFamily="34" charset="0"/>
+                <a:ea typeface="Aptos" pitchFamily="34" charset="-122"/>
+                <a:cs typeface="Aptos" pitchFamily="34" charset="-120"/>
+              </a:rPr>
+              <a:t>More leverage from a great EA</a:t>
+            </a:r>
+            <a:endParaRPr lang="en-US" sz="1150" dirty="0"/>
+          </a:p>
+        </p:txBody>
+      </p:sp>
+      <p:sp>
+        <p:nvSpPr>
+          <p:cNvPr id="33" name="Shape 29"/>
+          <p:cNvSpPr/>
+          <p:nvPr/>
+        </p:nvSpPr>
+        <p:spPr>
+          <a:xfrm>
+            <a:off x="822960" y="5321808"/>
+            <a:ext cx="10515600" cy="603504"/>
+          </a:xfrm>
+          <a:prstGeom prst="roundRect">
+            <a:avLst>
+              <a:gd name="adj" fmla="val 13636"/>
+            </a:avLst>
+          </a:prstGeom>
+          <a:solidFill>
+            <a:srgbClr val="F2EEFF"/>
+          </a:solidFill>
+          <a:ln w="12700">
+            <a:solidFill>
+              <a:srgbClr val="DDD2FB"/>
+            </a:solidFill>
+            <a:prstDash val="solid"/>
+          </a:ln>
+        </p:spPr>
+      </p:sp>
+      <p:sp>
+        <p:nvSpPr>
+          <p:cNvPr id="34" name="Text 30"/>
+          <p:cNvSpPr/>
+          <p:nvPr/>
+        </p:nvSpPr>
+        <p:spPr>
+          <a:xfrm>
+            <a:off x="1143000" y="5321808"/>
+            <a:ext cx="10058400" cy="603504"/>
+          </a:xfrm>
+          <a:prstGeom prst="rect">
+            <a:avLst/>
+          </a:prstGeom>
+          <a:noFill/>
+          <a:ln/>
+        </p:spPr>
+        <p:txBody>
+          <a:bodyPr wrap="square" lIns="0" tIns="0" rIns="0" bIns="0" rtlCol="0" anchor="ctr"/>
+          <a:lstStyle/>
+          <a:p>
+            <a:pPr algn="l" indent="0" marL="0">
+              <a:buNone/>
+            </a:pPr>
+            <a:r>
+              <a:rPr lang="en-US" sz="1300" b="1" dirty="0">
+                <a:solidFill>
+                  <a:srgbClr val="5B45C8"/>
+                </a:solidFill>
+                <a:latin typeface="Aptos" pitchFamily="34" charset="0"/>
+                <a:ea typeface="Aptos" pitchFamily="34" charset="-122"/>
+                <a:cs typeface="Aptos" pitchFamily="34" charset="-120"/>
+              </a:rPr>
+              <a:t xml:space="preserve">The move:  </a:t>
+            </a:r>
+            <a:pPr algn="l" indent="0" marL="0">
+              <a:buNone/>
+            </a:pPr>
+            <a:r>
+              <a:rPr lang="en-US" sz="1300" dirty="0">
+                <a:solidFill>
+                  <a:srgbClr val="43507B"/>
+                </a:solidFill>
+                <a:latin typeface="Aptos" pitchFamily="34" charset="0"/>
+                <a:ea typeface="Aptos" pitchFamily="34" charset="-122"/>
+                <a:cs typeface="Aptos" pitchFamily="34" charset="-120"/>
+              </a:rPr>
+              <a:t>Copilot multiplies a great assistant, it does not replace one.</a:t>
+            </a:r>
+            <a:endParaRPr lang="en-US" sz="1300" dirty="0"/>
+          </a:p>
+        </p:txBody>
+      </p:sp>
+      <p:sp>
+        <p:nvSpPr>
+          <p:cNvPr id="35" name="Text 31"/>
+          <p:cNvSpPr/>
+          <p:nvPr/>
+        </p:nvSpPr>
+        <p:spPr>
+          <a:xfrm>
+            <a:off x="640080" y="6419088"/>
+            <a:ext cx="8229600" cy="274320"/>
+          </a:xfrm>
+          <a:prstGeom prst="rect">
+            <a:avLst/>
+          </a:prstGeom>
+          <a:noFill/>
+          <a:ln/>
+        </p:spPr>
+        <p:txBody>
+          <a:bodyPr wrap="square" lIns="0" tIns="0" rIns="0" bIns="0" rtlCol="0" anchor="ctr"/>
+          <a:lstStyle/>
+          <a:p>
+            <a:pPr algn="l" indent="0" marL="0">
+              <a:buNone/>
+            </a:pPr>
+            <a:r>
+              <a:rPr lang="en-US" sz="900" dirty="0">
+                <a:solidFill>
+                  <a:srgbClr val="8A93B8"/>
+                </a:solidFill>
+                <a:latin typeface="Aptos" pitchFamily="34" charset="0"/>
+                <a:ea typeface="Aptos" pitchFamily="34" charset="-122"/>
+                <a:cs typeface="Aptos" pitchFamily="34" charset="-120"/>
+              </a:rPr>
+              <a:t>Tier 3 · Build your own</a:t>
+            </a:r>
+            <a:endParaRPr lang="en-US" sz="900" dirty="0"/>
+          </a:p>
+        </p:txBody>
+      </p:sp>
+      <p:sp>
+        <p:nvSpPr>
+          <p:cNvPr id="36" name="Text 32"/>
+          <p:cNvSpPr/>
+          <p:nvPr/>
+        </p:nvSpPr>
+        <p:spPr>
+          <a:xfrm>
+            <a:off x="11155680" y="6419088"/>
+            <a:ext cx="640080" cy="274320"/>
+          </a:xfrm>
+          <a:prstGeom prst="rect">
+            <a:avLst/>
+          </a:prstGeom>
+          <a:noFill/>
+          <a:ln/>
+        </p:spPr>
+        <p:txBody>
+          <a:bodyPr wrap="square" lIns="0" tIns="0" rIns="0" bIns="0" rtlCol="0" anchor="ctr"/>
+          <a:lstStyle/>
+          <a:p>
+            <a:pPr algn="r" indent="0" marL="0">
+              <a:buNone/>
+            </a:pPr>
+            <a:r>
+              <a:rPr lang="en-US" sz="900" dirty="0">
+                <a:solidFill>
+                  <a:srgbClr val="8A93B8"/>
+                </a:solidFill>
+                <a:latin typeface="Aptos" pitchFamily="34" charset="0"/>
+                <a:ea typeface="Aptos" pitchFamily="34" charset="-122"/>
+                <a:cs typeface="Aptos" pitchFamily="34" charset="-120"/>
+              </a:rPr>
+              <a:t>21</a:t>
+            </a:r>
+            <a:endParaRPr lang="en-US" sz="900" dirty="0"/>
+          </a:p>
+        </p:txBody>
+      </p:sp>
+    </p:spTree>
+  </p:cSld>
+  <p:clrMapOvr>
+    <a:masterClrMapping/>
+  </p:clrMapOvr>
+</p:sld>
+</file>
+
+<file path=ppt/slides/slide26.xml><?xml version="1.0" encoding="utf-8"?>
+<p:sld xmlns:a="http://schemas.openxmlformats.org/drawingml/2006/main" xmlns:r="http://schemas.openxmlformats.org/officeDocument/2006/relationships" xmlns:p="http://schemas.openxmlformats.org/presentationml/2006/main">
+  <p:cSld name="Slide 8">
+    <p:bg>
+      <p:bgPr>
+        <a:solidFill>
+          <a:srgbClr val="F4F7FE"/>
+        </a:solidFill>
+      </p:bgPr>
+    </p:bg>
+    <p:spTree>
+      <p:nvGrpSpPr>
+        <p:cNvPr id="1" name=""/>
+        <p:cNvGrpSpPr/>
+        <p:nvPr/>
+      </p:nvGrpSpPr>
+      <p:grpSpPr>
+        <a:xfrm>
+          <a:off x="0" y="0"/>
+          <a:ext cx="0" cy="0"/>
+          <a:chOff x="0" y="0"/>
+          <a:chExt cx="0" cy="0"/>
+        </a:xfrm>
+      </p:grpSpPr>
+      <p:sp>
+        <p:nvSpPr>
+          <p:cNvPr id="2" name="Shape 0"/>
+          <p:cNvSpPr/>
+          <p:nvPr/>
+        </p:nvSpPr>
+        <p:spPr>
+          <a:xfrm>
+            <a:off x="822960" y="566928"/>
+            <a:ext cx="1170432" cy="310896"/>
+          </a:xfrm>
+          <a:prstGeom prst="roundRect">
+            <a:avLst>
+              <a:gd name="adj" fmla="val 50000"/>
+            </a:avLst>
+          </a:prstGeom>
+          <a:solidFill>
+            <a:srgbClr val="2D6CDF"/>
+          </a:solidFill>
+          <a:ln/>
+        </p:spPr>
+      </p:sp>
+      <p:sp>
+        <p:nvSpPr>
+          <p:cNvPr id="3" name="Text 1"/>
+          <p:cNvSpPr/>
+          <p:nvPr/>
+        </p:nvSpPr>
+        <p:spPr>
+          <a:xfrm>
+            <a:off x="822960" y="566928"/>
+            <a:ext cx="1170432" cy="310896"/>
+          </a:xfrm>
+          <a:prstGeom prst="rect">
+            <a:avLst/>
+          </a:prstGeom>
+          <a:noFill/>
+          <a:ln/>
+        </p:spPr>
+        <p:txBody>
+          <a:bodyPr wrap="square" lIns="0" tIns="0" rIns="0" bIns="0" rtlCol="0" anchor="ctr"/>
+          <a:lstStyle/>
+          <a:p>
+            <a:pPr algn="ctr" indent="0" marL="0">
+              <a:buNone/>
+            </a:pPr>
+            <a:r>
+              <a:rPr lang="en-US" sz="1100" b="1" spc="100" kern="0" dirty="0">
+                <a:solidFill>
+                  <a:srgbClr val="FFFFFF"/>
+                </a:solidFill>
+                <a:latin typeface="Aptos" pitchFamily="34" charset="0"/>
+                <a:ea typeface="Aptos" pitchFamily="34" charset="-122"/>
+                <a:cs typeface="Aptos" pitchFamily="34" charset="-120"/>
+              </a:rPr>
+              <a:t>TIER 1</a:t>
+            </a:r>
+            <a:endParaRPr lang="en-US" sz="1100" dirty="0"/>
+          </a:p>
+        </p:txBody>
+      </p:sp>
+      <p:sp>
+        <p:nvSpPr>
+          <p:cNvPr id="4" name="Text 2"/>
+          <p:cNvSpPr/>
+          <p:nvPr/>
+        </p:nvSpPr>
+        <p:spPr>
+          <a:xfrm>
+            <a:off x="2121408" y="566928"/>
+            <a:ext cx="8686800" cy="310896"/>
+          </a:xfrm>
+          <a:prstGeom prst="rect">
+            <a:avLst/>
+          </a:prstGeom>
+          <a:noFill/>
+          <a:ln/>
+        </p:spPr>
+        <p:txBody>
+          <a:bodyPr wrap="square" lIns="0" tIns="0" rIns="0" bIns="0" rtlCol="0" anchor="ctr"/>
+          <a:lstStyle/>
+          <a:p>
+            <a:pPr algn="l" indent="0" marL="0">
+              <a:buNone/>
+            </a:pPr>
+            <a:r>
+              <a:rPr lang="en-US" sz="1200" b="1" spc="200" kern="0" dirty="0">
+                <a:solidFill>
+                  <a:srgbClr val="2D6CDF"/>
+                </a:solidFill>
+                <a:latin typeface="Aptos" pitchFamily="34" charset="0"/>
+                <a:ea typeface="Aptos" pitchFamily="34" charset="-122"/>
+                <a:cs typeface="Aptos" pitchFamily="34" charset="-120"/>
+              </a:rPr>
+              <a:t>PUT IT ON A SCHEDULE</a:t>
+            </a:r>
+            <a:endParaRPr lang="en-US" sz="1200" dirty="0"/>
+          </a:p>
+        </p:txBody>
+      </p:sp>
+      <p:sp>
+        <p:nvSpPr>
+          <p:cNvPr id="5" name="Text 3"/>
+          <p:cNvSpPr/>
+          <p:nvPr/>
+        </p:nvSpPr>
+        <p:spPr>
+          <a:xfrm>
+            <a:off x="786384" y="914400"/>
+            <a:ext cx="10972800" cy="548640"/>
+          </a:xfrm>
+          <a:prstGeom prst="rect">
+            <a:avLst/>
+          </a:prstGeom>
+          <a:noFill/>
+          <a:ln/>
+        </p:spPr>
+        <p:txBody>
+          <a:bodyPr wrap="square" lIns="0" tIns="0" rIns="0" bIns="0" rtlCol="0" anchor="ctr"/>
+          <a:lstStyle/>
+          <a:p>
+            <a:pPr indent="0" marL="0">
+              <a:buNone/>
+            </a:pPr>
+            <a:r>
+              <a:rPr lang="en-US" sz="2900" b="1" dirty="0">
+                <a:solidFill>
+                  <a:srgbClr val="0B1437"/>
+                </a:solidFill>
+                <a:latin typeface="Aptos" pitchFamily="34" charset="0"/>
+                <a:ea typeface="Aptos" pitchFamily="34" charset="-122"/>
+                <a:cs typeface="Aptos" pitchFamily="34" charset="-120"/>
+              </a:rPr>
+              <a:t>The brief that comes to you</a:t>
+            </a:r>
+            <a:endParaRPr lang="en-US" sz="2900" dirty="0"/>
+          </a:p>
+        </p:txBody>
+      </p:sp>
+      <p:sp>
+        <p:nvSpPr>
+          <p:cNvPr id="6" name="Text 4"/>
+          <p:cNvSpPr/>
+          <p:nvPr/>
+        </p:nvSpPr>
+        <p:spPr>
+          <a:xfrm>
+            <a:off x="822960" y="1481328"/>
+            <a:ext cx="10607040" cy="365760"/>
+          </a:xfrm>
+          <a:prstGeom prst="rect">
+            <a:avLst/>
+          </a:prstGeom>
+          <a:noFill/>
+          <a:ln/>
+        </p:spPr>
+        <p:txBody>
+          <a:bodyPr wrap="square" lIns="0" tIns="0" rIns="0" bIns="0" rtlCol="0" anchor="ctr"/>
+          <a:lstStyle/>
+          <a:p>
+            <a:pPr indent="0" marL="0">
+              <a:buNone/>
+            </a:pPr>
+            <a:r>
+              <a:rPr lang="en-US" sz="1400" dirty="0">
+                <a:solidFill>
+                  <a:srgbClr val="43507B"/>
+                </a:solidFill>
+                <a:latin typeface="Aptos" pitchFamily="34" charset="0"/>
+                <a:ea typeface="Aptos" pitchFamily="34" charset="-122"/>
+                <a:cs typeface="Aptos" pitchFamily="34" charset="-120"/>
+              </a:rPr>
+              <a:t>Scheduled prompts run on their own. Set one up, and a brief of what needs you lands before you open the laptop.</a:t>
+            </a:r>
+            <a:endParaRPr lang="en-US" sz="1400" dirty="0"/>
+          </a:p>
+        </p:txBody>
+      </p:sp>
+      <p:sp>
+        <p:nvSpPr>
+          <p:cNvPr id="7" name="Shape 5"/>
+          <p:cNvSpPr/>
+          <p:nvPr/>
+        </p:nvSpPr>
+        <p:spPr>
+          <a:xfrm>
+            <a:off x="822960" y="2011680"/>
+            <a:ext cx="10515600" cy="1051560"/>
+          </a:xfrm>
+          <a:prstGeom prst="roundRect">
+            <a:avLst>
+              <a:gd name="adj" fmla="val 9565"/>
+            </a:avLst>
+          </a:prstGeom>
+          <a:solidFill>
+            <a:srgbClr val="111C44"/>
+          </a:solidFill>
+          <a:ln w="12700">
+            <a:solidFill>
+              <a:srgbClr val="26326A"/>
+            </a:solidFill>
+            <a:prstDash val="solid"/>
+          </a:ln>
+          <a:effectLst>
+            <a:outerShdw sx="100000" sy="100000" kx="0" ky="0" algn="bl" rotWithShape="0" blurRad="114300" dist="38100" dir="5400000">
+              <a:srgbClr val="0B1437">
+                <a:alpha val="10000"/>
+              </a:srgbClr>
+            </a:outerShdw>
+          </a:effectLst>
+        </p:spPr>
+      </p:sp>
+      <p:sp>
+        <p:nvSpPr>
+          <p:cNvPr id="8" name="Shape 6"/>
+          <p:cNvSpPr/>
+          <p:nvPr/>
+        </p:nvSpPr>
+        <p:spPr>
+          <a:xfrm>
+            <a:off x="822960" y="2139696"/>
+            <a:ext cx="64008" cy="795528"/>
+          </a:xfrm>
+          <a:prstGeom prst="rect">
+            <a:avLst/>
+          </a:prstGeom>
+          <a:solidFill>
+            <a:srgbClr val="2D6CDF"/>
+          </a:solidFill>
+          <a:ln/>
+        </p:spPr>
+      </p:sp>
+      <p:sp>
+        <p:nvSpPr>
+          <p:cNvPr id="9" name="Text 7"/>
+          <p:cNvSpPr/>
+          <p:nvPr/>
+        </p:nvSpPr>
+        <p:spPr>
+          <a:xfrm>
+            <a:off x="1097280" y="2157984"/>
+            <a:ext cx="9966960" cy="274320"/>
+          </a:xfrm>
+          <a:prstGeom prst="rect">
+            <a:avLst/>
+          </a:prstGeom>
+          <a:noFill/>
+          <a:ln/>
+        </p:spPr>
+        <p:txBody>
+          <a:bodyPr wrap="square" lIns="0" tIns="0" rIns="0" bIns="0" rtlCol="0" anchor="ctr"/>
+          <a:lstStyle/>
+          <a:p>
+            <a:pPr algn="l" indent="0" marL="0">
+              <a:buNone/>
+            </a:pPr>
+            <a:r>
+              <a:rPr lang="en-US" sz="1100" b="1" dirty="0">
+                <a:solidFill>
+                  <a:srgbClr val="2D6CDF"/>
+                </a:solidFill>
+                <a:latin typeface="Consolas" pitchFamily="34" charset="0"/>
+                <a:ea typeface="Consolas" pitchFamily="34" charset="-122"/>
+                <a:cs typeface="Consolas" pitchFamily="34" charset="-120"/>
+              </a:rPr>
+              <a:t xml:space="preserve">›_  </a:t>
+            </a:r>
+            <a:pPr algn="l" indent="0" marL="0">
+              <a:buNone/>
+            </a:pPr>
+            <a:r>
+              <a:rPr lang="en-US" sz="1100" b="1" spc="200" kern="0" dirty="0">
+                <a:solidFill>
+                  <a:srgbClr val="2D6CDF"/>
+                </a:solidFill>
+                <a:latin typeface="Aptos" pitchFamily="34" charset="0"/>
+                <a:ea typeface="Aptos" pitchFamily="34" charset="-122"/>
+                <a:cs typeface="Aptos" pitchFamily="34" charset="-120"/>
+              </a:rPr>
+              <a:t>YOUR MORNING BRIEF</a:t>
+            </a:r>
+            <a:endParaRPr lang="en-US" sz="1100" dirty="0"/>
+          </a:p>
+        </p:txBody>
+      </p:sp>
+      <p:sp>
+        <p:nvSpPr>
+          <p:cNvPr id="10" name="Text 8"/>
+          <p:cNvSpPr/>
+          <p:nvPr/>
+        </p:nvSpPr>
+        <p:spPr>
+          <a:xfrm>
+            <a:off x="1115568" y="2487168"/>
+            <a:ext cx="9948672" cy="393192"/>
+          </a:xfrm>
+          <a:prstGeom prst="rect">
+            <a:avLst/>
+          </a:prstGeom>
+          <a:noFill/>
+          <a:ln/>
+        </p:spPr>
+        <p:txBody>
+          <a:bodyPr wrap="square" lIns="0" tIns="0" rIns="0" bIns="0" rtlCol="0" anchor="t"/>
+          <a:lstStyle/>
+          <a:p>
+            <a:pPr algn="l" indent="0" marL="0">
+              <a:lnSpc>
+                <a:spcPct val="112000"/>
+              </a:lnSpc>
+              <a:buNone/>
+            </a:pPr>
+            <a:r>
+              <a:rPr lang="en-US" sz="1400" dirty="0">
+                <a:solidFill>
+                  <a:srgbClr val="E7ECFF"/>
+                </a:solidFill>
+                <a:latin typeface="Consolas" pitchFamily="34" charset="0"/>
+                <a:ea typeface="Consolas" pitchFamily="34" charset="-122"/>
+                <a:cs typeface="Consolas" pitchFamily="34" charset="-120"/>
+              </a:rPr>
+              <a:t xml:space="preserve">Every weekday, brief me on my top emails, today’s meetings and what each needs, and what I owe a reply on. Send it at </a:t>
+            </a:r>
+            <a:pPr algn="l" indent="0" marL="0">
+              <a:lnSpc>
+                <a:spcPct val="112000"/>
+              </a:lnSpc>
+              <a:buNone/>
+            </a:pPr>
+            <a:r>
+              <a:rPr lang="en-US" sz="1400" b="1" dirty="0">
+                <a:solidFill>
+                  <a:srgbClr val="7FB0FF"/>
+                </a:solidFill>
+                <a:latin typeface="Consolas" pitchFamily="34" charset="0"/>
+                <a:ea typeface="Consolas" pitchFamily="34" charset="-122"/>
+                <a:cs typeface="Consolas" pitchFamily="34" charset="-120"/>
+              </a:rPr>
+              <a:t>[7 a.m.]</a:t>
+            </a:r>
+            <a:pPr algn="l" indent="0" marL="0">
+              <a:lnSpc>
+                <a:spcPct val="112000"/>
+              </a:lnSpc>
+              <a:buNone/>
+            </a:pPr>
+            <a:r>
+              <a:rPr lang="en-US" sz="1400" dirty="0">
+                <a:solidFill>
+                  <a:srgbClr val="E7ECFF"/>
+                </a:solidFill>
+                <a:latin typeface="Consolas" pitchFamily="34" charset="0"/>
+                <a:ea typeface="Consolas" pitchFamily="34" charset="-122"/>
+                <a:cs typeface="Consolas" pitchFamily="34" charset="-120"/>
+              </a:rPr>
+              <a:t xml:space="preserve"/>
+            </a:r>
+            <a:pPr algn="l" indent="0" marL="0">
+              <a:lnSpc>
+                <a:spcPct val="112000"/>
+              </a:lnSpc>
+              <a:buNone/>
+            </a:pPr>
+            <a:r>
+              <a:rPr lang="en-US" sz="1400" b="1" dirty="0">
+                <a:solidFill>
+                  <a:srgbClr val="7FB0FF"/>
+                </a:solidFill>
+                <a:latin typeface="Consolas" pitchFamily="34" charset="0"/>
+                <a:ea typeface="Consolas" pitchFamily="34" charset="-122"/>
+                <a:cs typeface="Consolas" pitchFamily="34" charset="-120"/>
+              </a:rPr>
+              <a:t xml:space="preserve"/>
+            </a:r>
+            <a:pPr algn="l" indent="0" marL="0">
+              <a:lnSpc>
+                <a:spcPct val="112000"/>
+              </a:lnSpc>
+              <a:buNone/>
+            </a:pPr>
+            <a:r>
+              <a:rPr lang="en-US" sz="1400" dirty="0">
+                <a:solidFill>
+                  <a:srgbClr val="E7ECFF"/>
+                </a:solidFill>
+                <a:latin typeface="Consolas" pitchFamily="34" charset="0"/>
+                <a:ea typeface="Consolas" pitchFamily="34" charset="-122"/>
+                <a:cs typeface="Consolas" pitchFamily="34" charset="-120"/>
+              </a:rPr>
+              <a:t xml:space="preserve"/>
+            </a:r>
+            <a:endParaRPr lang="en-US" sz="1400" dirty="0"/>
+          </a:p>
+        </p:txBody>
+      </p:sp>
+      <p:sp>
+        <p:nvSpPr>
+          <p:cNvPr id="11" name="Shape 9"/>
+          <p:cNvSpPr/>
+          <p:nvPr/>
+        </p:nvSpPr>
+        <p:spPr>
+          <a:xfrm>
+            <a:off x="822960" y="3209544"/>
+            <a:ext cx="10515600" cy="1051560"/>
+          </a:xfrm>
+          <a:prstGeom prst="roundRect">
+            <a:avLst>
+              <a:gd name="adj" fmla="val 9565"/>
+            </a:avLst>
+          </a:prstGeom>
+          <a:solidFill>
+            <a:srgbClr val="111C44"/>
+          </a:solidFill>
+          <a:ln w="12700">
+            <a:solidFill>
+              <a:srgbClr val="26326A"/>
+            </a:solidFill>
+            <a:prstDash val="solid"/>
+          </a:ln>
+          <a:effectLst>
+            <a:outerShdw sx="100000" sy="100000" kx="0" ky="0" algn="bl" rotWithShape="0" blurRad="114300" dist="38100" dir="5400000">
+              <a:srgbClr val="0B1437">
+                <a:alpha val="10000"/>
+              </a:srgbClr>
+            </a:outerShdw>
+          </a:effectLst>
+        </p:spPr>
+      </p:sp>
+      <p:sp>
+        <p:nvSpPr>
+          <p:cNvPr id="12" name="Shape 10"/>
+          <p:cNvSpPr/>
+          <p:nvPr/>
+        </p:nvSpPr>
+        <p:spPr>
+          <a:xfrm>
+            <a:off x="822960" y="3337560"/>
+            <a:ext cx="64008" cy="795528"/>
+          </a:xfrm>
+          <a:prstGeom prst="rect">
+            <a:avLst/>
+          </a:prstGeom>
+          <a:solidFill>
+            <a:srgbClr val="2D6CDF"/>
+          </a:solidFill>
+          <a:ln/>
+        </p:spPr>
+      </p:sp>
+      <p:sp>
+        <p:nvSpPr>
+          <p:cNvPr id="13" name="Text 11"/>
+          <p:cNvSpPr/>
+          <p:nvPr/>
+        </p:nvSpPr>
+        <p:spPr>
+          <a:xfrm>
+            <a:off x="1097280" y="3355848"/>
+            <a:ext cx="9966960" cy="274320"/>
+          </a:xfrm>
+          <a:prstGeom prst="rect">
+            <a:avLst/>
+          </a:prstGeom>
+          <a:noFill/>
+          <a:ln/>
+        </p:spPr>
+        <p:txBody>
+          <a:bodyPr wrap="square" lIns="0" tIns="0" rIns="0" bIns="0" rtlCol="0" anchor="ctr"/>
+          <a:lstStyle/>
+          <a:p>
+            <a:pPr algn="l" indent="0" marL="0">
+              <a:buNone/>
+            </a:pPr>
+            <a:r>
+              <a:rPr lang="en-US" sz="1100" b="1" dirty="0">
+                <a:solidFill>
+                  <a:srgbClr val="2D6CDF"/>
+                </a:solidFill>
+                <a:latin typeface="Consolas" pitchFamily="34" charset="0"/>
+                <a:ea typeface="Consolas" pitchFamily="34" charset="-122"/>
+                <a:cs typeface="Consolas" pitchFamily="34" charset="-120"/>
+              </a:rPr>
+              <a:t xml:space="preserve">›_  </a:t>
+            </a:r>
+            <a:pPr algn="l" indent="0" marL="0">
+              <a:buNone/>
+            </a:pPr>
+            <a:r>
+              <a:rPr lang="en-US" sz="1100" b="1" spc="200" kern="0" dirty="0">
+                <a:solidFill>
+                  <a:srgbClr val="2D6CDF"/>
+                </a:solidFill>
+                <a:latin typeface="Aptos" pitchFamily="34" charset="0"/>
+                <a:ea typeface="Aptos" pitchFamily="34" charset="-122"/>
+                <a:cs typeface="Aptos" pitchFamily="34" charset="-120"/>
+              </a:rPr>
+              <a:t>CATCH UP ANY TIME</a:t>
+            </a:r>
+            <a:endParaRPr lang="en-US" sz="1100" dirty="0"/>
+          </a:p>
+        </p:txBody>
+      </p:sp>
+      <p:sp>
+        <p:nvSpPr>
+          <p:cNvPr id="14" name="Text 12"/>
+          <p:cNvSpPr/>
+          <p:nvPr/>
+        </p:nvSpPr>
+        <p:spPr>
+          <a:xfrm>
+            <a:off x="1115568" y="3685032"/>
+            <a:ext cx="9948672" cy="393192"/>
+          </a:xfrm>
+          <a:prstGeom prst="rect">
+            <a:avLst/>
+          </a:prstGeom>
+          <a:noFill/>
+          <a:ln/>
+        </p:spPr>
+        <p:txBody>
+          <a:bodyPr wrap="square" lIns="0" tIns="0" rIns="0" bIns="0" rtlCol="0" anchor="t"/>
+          <a:lstStyle/>
+          <a:p>
+            <a:pPr algn="l" indent="0" marL="0">
+              <a:lnSpc>
+                <a:spcPct val="112000"/>
+              </a:lnSpc>
+              <a:buNone/>
+            </a:pPr>
+            <a:r>
+              <a:rPr lang="en-US" sz="1400" dirty="0">
+                <a:solidFill>
+                  <a:srgbClr val="E7ECFF"/>
+                </a:solidFill>
+                <a:latin typeface="Consolas" pitchFamily="34" charset="0"/>
+                <a:ea typeface="Consolas" pitchFamily="34" charset="-122"/>
+                <a:cs typeface="Consolas" pitchFamily="34" charset="-120"/>
+              </a:rPr>
+              <a:t>What did I miss in my Teams chats this afternoon, and what needs a reply from me?</a:t>
+            </a:r>
+            <a:endParaRPr lang="en-US" sz="1400" dirty="0"/>
+          </a:p>
+        </p:txBody>
+      </p:sp>
+      <p:sp>
+        <p:nvSpPr>
+          <p:cNvPr id="15" name="Shape 13"/>
+          <p:cNvSpPr/>
+          <p:nvPr/>
+        </p:nvSpPr>
+        <p:spPr>
+          <a:xfrm>
+            <a:off x="822960" y="4407408"/>
+            <a:ext cx="10515600" cy="1051560"/>
+          </a:xfrm>
+          <a:prstGeom prst="roundRect">
+            <a:avLst>
+              <a:gd name="adj" fmla="val 9565"/>
+            </a:avLst>
+          </a:prstGeom>
+          <a:solidFill>
+            <a:srgbClr val="111C44"/>
+          </a:solidFill>
+          <a:ln w="12700">
+            <a:solidFill>
+              <a:srgbClr val="26326A"/>
+            </a:solidFill>
+            <a:prstDash val="solid"/>
+          </a:ln>
+          <a:effectLst>
+            <a:outerShdw sx="100000" sy="100000" kx="0" ky="0" algn="bl" rotWithShape="0" blurRad="114300" dist="38100" dir="5400000">
+              <a:srgbClr val="0B1437">
+                <a:alpha val="10000"/>
+              </a:srgbClr>
+            </a:outerShdw>
+          </a:effectLst>
+        </p:spPr>
+      </p:sp>
+      <p:sp>
+        <p:nvSpPr>
+          <p:cNvPr id="16" name="Shape 14"/>
+          <p:cNvSpPr/>
+          <p:nvPr/>
+        </p:nvSpPr>
+        <p:spPr>
+          <a:xfrm>
+            <a:off x="822960" y="4535424"/>
+            <a:ext cx="64008" cy="795528"/>
+          </a:xfrm>
+          <a:prstGeom prst="rect">
+            <a:avLst/>
+          </a:prstGeom>
+          <a:solidFill>
+            <a:srgbClr val="2D6CDF"/>
+          </a:solidFill>
+          <a:ln/>
+        </p:spPr>
+      </p:sp>
+      <p:sp>
+        <p:nvSpPr>
+          <p:cNvPr id="17" name="Text 15"/>
+          <p:cNvSpPr/>
+          <p:nvPr/>
+        </p:nvSpPr>
+        <p:spPr>
+          <a:xfrm>
+            <a:off x="1097280" y="4553712"/>
+            <a:ext cx="9966960" cy="274320"/>
+          </a:xfrm>
+          <a:prstGeom prst="rect">
+            <a:avLst/>
+          </a:prstGeom>
+          <a:noFill/>
+          <a:ln/>
+        </p:spPr>
+        <p:txBody>
+          <a:bodyPr wrap="square" lIns="0" tIns="0" rIns="0" bIns="0" rtlCol="0" anchor="ctr"/>
+          <a:lstStyle/>
+          <a:p>
+            <a:pPr algn="l" indent="0" marL="0">
+              <a:buNone/>
+            </a:pPr>
+            <a:r>
+              <a:rPr lang="en-US" sz="1100" b="1" dirty="0">
+                <a:solidFill>
+                  <a:srgbClr val="2D6CDF"/>
+                </a:solidFill>
+                <a:latin typeface="Consolas" pitchFamily="34" charset="0"/>
+                <a:ea typeface="Consolas" pitchFamily="34" charset="-122"/>
+                <a:cs typeface="Consolas" pitchFamily="34" charset="-120"/>
+              </a:rPr>
+              <a:t xml:space="preserve">›_  </a:t>
+            </a:r>
+            <a:pPr algn="l" indent="0" marL="0">
+              <a:buNone/>
+            </a:pPr>
+            <a:r>
+              <a:rPr lang="en-US" sz="1100" b="1" spc="200" kern="0" dirty="0">
+                <a:solidFill>
+                  <a:srgbClr val="2D6CDF"/>
+                </a:solidFill>
+                <a:latin typeface="Aptos" pitchFamily="34" charset="0"/>
+                <a:ea typeface="Aptos" pitchFamily="34" charset="-122"/>
+                <a:cs typeface="Aptos" pitchFamily="34" charset="-120"/>
+              </a:rPr>
+              <a:t>PREP FOR TOMORROW</a:t>
+            </a:r>
+            <a:endParaRPr lang="en-US" sz="1100" dirty="0"/>
+          </a:p>
+        </p:txBody>
+      </p:sp>
+      <p:sp>
+        <p:nvSpPr>
+          <p:cNvPr id="18" name="Text 16"/>
+          <p:cNvSpPr/>
+          <p:nvPr/>
+        </p:nvSpPr>
+        <p:spPr>
+          <a:xfrm>
+            <a:off x="1115568" y="4882896"/>
+            <a:ext cx="9948672" cy="393192"/>
+          </a:xfrm>
+          <a:prstGeom prst="rect">
+            <a:avLst/>
+          </a:prstGeom>
+          <a:noFill/>
+          <a:ln/>
+        </p:spPr>
+        <p:txBody>
+          <a:bodyPr wrap="square" lIns="0" tIns="0" rIns="0" bIns="0" rtlCol="0" anchor="t"/>
+          <a:lstStyle/>
+          <a:p>
+            <a:pPr algn="l" indent="0" marL="0">
+              <a:lnSpc>
+                <a:spcPct val="112000"/>
+              </a:lnSpc>
+              <a:buNone/>
+            </a:pPr>
+            <a:r>
+              <a:rPr lang="en-US" sz="1400" dirty="0">
+                <a:solidFill>
+                  <a:srgbClr val="E7ECFF"/>
+                </a:solidFill>
+                <a:latin typeface="Consolas" pitchFamily="34" charset="0"/>
+                <a:ea typeface="Consolas" pitchFamily="34" charset="-122"/>
+                <a:cs typeface="Consolas" pitchFamily="34" charset="-120"/>
+              </a:rPr>
+              <a:t>Every evening, list tomorrow’s meetings and what I should prep for each one.</a:t>
+            </a:r>
+            <a:endParaRPr lang="en-US" sz="1400" dirty="0"/>
+          </a:p>
+        </p:txBody>
+      </p:sp>
+      <p:sp>
+        <p:nvSpPr>
+          <p:cNvPr id="19" name="Shape 17"/>
+          <p:cNvSpPr/>
+          <p:nvPr/>
+        </p:nvSpPr>
+        <p:spPr>
+          <a:xfrm>
+            <a:off x="822960" y="5623560"/>
+            <a:ext cx="10515600" cy="566928"/>
+          </a:xfrm>
+          <a:prstGeom prst="roundRect">
+            <a:avLst>
+              <a:gd name="adj" fmla="val 14516"/>
+            </a:avLst>
+          </a:prstGeom>
+          <a:solidFill>
+            <a:srgbClr val="EEF3FF"/>
+          </a:solidFill>
+          <a:ln w="12700">
+            <a:solidFill>
+              <a:srgbClr val="D5E0FB"/>
+            </a:solidFill>
+            <a:prstDash val="solid"/>
+          </a:ln>
+        </p:spPr>
+      </p:sp>
+      <p:sp>
+        <p:nvSpPr>
+          <p:cNvPr id="20" name="Text 18"/>
+          <p:cNvSpPr/>
+          <p:nvPr/>
+        </p:nvSpPr>
+        <p:spPr>
+          <a:xfrm>
+            <a:off x="1097280" y="5623560"/>
+            <a:ext cx="10058400" cy="566928"/>
+          </a:xfrm>
+          <a:prstGeom prst="rect">
+            <a:avLst/>
+          </a:prstGeom>
+          <a:noFill/>
+          <a:ln/>
+        </p:spPr>
+        <p:txBody>
+          <a:bodyPr wrap="square" lIns="0" tIns="0" rIns="0" bIns="0" rtlCol="0" anchor="ctr"/>
+          <a:lstStyle/>
+          <a:p>
+            <a:pPr algn="l" indent="0" marL="0">
+              <a:buNone/>
+            </a:pPr>
+            <a:r>
+              <a:rPr lang="en-US" sz="1400" b="1" dirty="0">
+                <a:solidFill>
+                  <a:srgbClr val="0B1437"/>
+                </a:solidFill>
+                <a:latin typeface="Aptos" pitchFamily="34" charset="0"/>
+                <a:ea typeface="Aptos" pitchFamily="34" charset="-122"/>
+                <a:cs typeface="Aptos" pitchFamily="34" charset="-120"/>
+              </a:rPr>
+              <a:t>Stop asking for the update. Have it come to you.</a:t>
+            </a:r>
+            <a:endParaRPr lang="en-US" sz="1400" dirty="0"/>
+          </a:p>
+        </p:txBody>
+      </p:sp>
+      <p:sp>
+        <p:nvSpPr>
+          <p:cNvPr id="21" name="Text 19"/>
+          <p:cNvSpPr/>
+          <p:nvPr/>
+        </p:nvSpPr>
+        <p:spPr>
+          <a:xfrm>
+            <a:off x="640080" y="6419088"/>
+            <a:ext cx="8229600" cy="274320"/>
+          </a:xfrm>
+          <a:prstGeom prst="rect">
+            <a:avLst/>
+          </a:prstGeom>
+          <a:noFill/>
+          <a:ln/>
+        </p:spPr>
+        <p:txBody>
+          <a:bodyPr wrap="square" lIns="0" tIns="0" rIns="0" bIns="0" rtlCol="0" anchor="ctr"/>
+          <a:lstStyle/>
+          <a:p>
+            <a:pPr algn="l" indent="0" marL="0">
+              <a:buNone/>
+            </a:pPr>
+            <a:r>
+              <a:rPr lang="en-US" sz="900" dirty="0">
+                <a:solidFill>
+                  <a:srgbClr val="8A93B8"/>
+                </a:solidFill>
+                <a:latin typeface="Aptos" pitchFamily="34" charset="0"/>
+                <a:ea typeface="Aptos" pitchFamily="34" charset="-122"/>
+                <a:cs typeface="Aptos" pitchFamily="34" charset="-120"/>
+              </a:rPr>
+              <a:t>Tier 1 · Foundations</a:t>
+            </a:r>
+            <a:endParaRPr lang="en-US" sz="900" dirty="0"/>
+          </a:p>
+        </p:txBody>
+      </p:sp>
+      <p:sp>
+        <p:nvSpPr>
+          <p:cNvPr id="22" name="Text 20"/>
+          <p:cNvSpPr/>
+          <p:nvPr/>
+        </p:nvSpPr>
+        <p:spPr>
+          <a:xfrm>
+            <a:off x="11155680" y="6419088"/>
+            <a:ext cx="640080" cy="274320"/>
+          </a:xfrm>
+          <a:prstGeom prst="rect">
+            <a:avLst/>
+          </a:prstGeom>
+          <a:noFill/>
+          <a:ln/>
+        </p:spPr>
+        <p:txBody>
+          <a:bodyPr wrap="square" lIns="0" tIns="0" rIns="0" bIns="0" rtlCol="0" anchor="ctr"/>
+          <a:lstStyle/>
+          <a:p>
+            <a:pPr algn="r" indent="0" marL="0">
+              <a:buNone/>
+            </a:pPr>
+            <a:r>
+              <a:rPr lang="en-US" sz="900" dirty="0">
+                <a:solidFill>
+                  <a:srgbClr val="8A93B8"/>
+                </a:solidFill>
+                <a:latin typeface="Aptos" pitchFamily="34" charset="0"/>
+                <a:ea typeface="Aptos" pitchFamily="34" charset="-122"/>
+                <a:cs typeface="Aptos" pitchFamily="34" charset="-120"/>
+              </a:rPr>
+              <a:t>13</a:t>
+            </a:r>
+            <a:endParaRPr lang="en-US" sz="900" dirty="0"/>
+          </a:p>
+        </p:txBody>
+      </p:sp>
+    </p:spTree>
+  </p:cSld>
+  <p:clrMapOvr>
+    <a:masterClrMapping/>
+  </p:clrMapOvr>
+</p:sld>
+</file>
+
+<file path=ppt/slides/slide27.xml><?xml version="1.0" encoding="utf-8"?>
+<p:sld xmlns:a="http://schemas.openxmlformats.org/drawingml/2006/main" xmlns:r="http://schemas.openxmlformats.org/officeDocument/2006/relationships" xmlns:p="http://schemas.openxmlformats.org/presentationml/2006/main">
+  <p:cSld name="Slide 10">
+    <p:bg>
+      <p:bgPr>
+        <a:solidFill>
+          <a:srgbClr val="F4F7FE"/>
+        </a:solidFill>
+      </p:bgPr>
+    </p:bg>
+    <p:spTree>
+      <p:nvGrpSpPr>
+        <p:cNvPr id="1" name=""/>
+        <p:cNvGrpSpPr/>
+        <p:nvPr/>
+      </p:nvGrpSpPr>
+      <p:grpSpPr>
+        <a:xfrm>
+          <a:off x="0" y="0"/>
+          <a:ext cx="0" cy="0"/>
+          <a:chOff x="0" y="0"/>
+          <a:chExt cx="0" cy="0"/>
+        </a:xfrm>
+      </p:grpSpPr>
+      <p:sp>
+        <p:nvSpPr>
+          <p:cNvPr id="2" name="Shape 0"/>
+          <p:cNvSpPr/>
+          <p:nvPr/>
+        </p:nvSpPr>
+        <p:spPr>
+          <a:xfrm>
+            <a:off x="822960" y="566928"/>
+            <a:ext cx="1170432" cy="310896"/>
+          </a:xfrm>
+          <a:prstGeom prst="roundRect">
+            <a:avLst>
+              <a:gd name="adj" fmla="val 50000"/>
+            </a:avLst>
+          </a:prstGeom>
+          <a:solidFill>
+            <a:srgbClr val="2D6CDF"/>
+          </a:solidFill>
+          <a:ln/>
+        </p:spPr>
+      </p:sp>
+      <p:sp>
+        <p:nvSpPr>
+          <p:cNvPr id="3" name="Text 1"/>
+          <p:cNvSpPr/>
+          <p:nvPr/>
+        </p:nvSpPr>
+        <p:spPr>
+          <a:xfrm>
+            <a:off x="822960" y="566928"/>
+            <a:ext cx="1170432" cy="310896"/>
+          </a:xfrm>
+          <a:prstGeom prst="rect">
+            <a:avLst/>
+          </a:prstGeom>
+          <a:noFill/>
+          <a:ln/>
+        </p:spPr>
+        <p:txBody>
+          <a:bodyPr wrap="square" lIns="0" tIns="0" rIns="0" bIns="0" rtlCol="0" anchor="ctr"/>
+          <a:lstStyle/>
+          <a:p>
+            <a:pPr algn="ctr" indent="0" marL="0">
+              <a:buNone/>
+            </a:pPr>
+            <a:r>
+              <a:rPr lang="en-US" sz="1100" b="1" spc="100" kern="0" dirty="0">
+                <a:solidFill>
+                  <a:srgbClr val="FFFFFF"/>
+                </a:solidFill>
+                <a:latin typeface="Aptos" pitchFamily="34" charset="0"/>
+                <a:ea typeface="Aptos" pitchFamily="34" charset="-122"/>
+                <a:cs typeface="Aptos" pitchFamily="34" charset="-120"/>
+              </a:rPr>
+              <a:t>NEXT</a:t>
+            </a:r>
+            <a:endParaRPr lang="en-US" sz="1100" dirty="0"/>
+          </a:p>
+        </p:txBody>
+      </p:sp>
+      <p:sp>
+        <p:nvSpPr>
+          <p:cNvPr id="4" name="Text 2"/>
+          <p:cNvSpPr/>
+          <p:nvPr/>
+        </p:nvSpPr>
+        <p:spPr>
+          <a:xfrm>
+            <a:off x="2121408" y="566928"/>
+            <a:ext cx="8686800" cy="310896"/>
+          </a:xfrm>
+          <a:prstGeom prst="rect">
+            <a:avLst/>
+          </a:prstGeom>
+          <a:noFill/>
+          <a:ln/>
+        </p:spPr>
+        <p:txBody>
+          <a:bodyPr wrap="square" lIns="0" tIns="0" rIns="0" bIns="0" rtlCol="0" anchor="ctr"/>
+          <a:lstStyle/>
+          <a:p>
+            <a:pPr algn="l" indent="0" marL="0">
+              <a:buNone/>
+            </a:pPr>
+            <a:r>
+              <a:rPr lang="en-US" sz="1200" b="1" spc="200" kern="0" dirty="0">
+                <a:solidFill>
+                  <a:srgbClr val="2D6CDF"/>
+                </a:solidFill>
+                <a:latin typeface="Aptos" pitchFamily="34" charset="0"/>
+                <a:ea typeface="Aptos" pitchFamily="34" charset="-122"/>
+                <a:cs typeface="Aptos" pitchFamily="34" charset="-120"/>
+              </a:rPr>
+              <a:t>AFTER THE TRAINING · FOR YOUR ADOPTION TEAM</a:t>
+            </a:r>
+            <a:endParaRPr lang="en-US" sz="1200" dirty="0"/>
+          </a:p>
+        </p:txBody>
+      </p:sp>
+      <p:sp>
+        <p:nvSpPr>
+          <p:cNvPr id="5" name="Text 3"/>
+          <p:cNvSpPr/>
+          <p:nvPr/>
+        </p:nvSpPr>
+        <p:spPr>
+          <a:xfrm>
+            <a:off x="786384" y="914400"/>
+            <a:ext cx="11155680" cy="548640"/>
+          </a:xfrm>
+          <a:prstGeom prst="rect">
+            <a:avLst/>
+          </a:prstGeom>
+          <a:noFill/>
+          <a:ln/>
+        </p:spPr>
+        <p:txBody>
+          <a:bodyPr wrap="square" lIns="0" tIns="0" rIns="0" bIns="0" rtlCol="0" anchor="ctr"/>
+          <a:lstStyle/>
+          <a:p>
+            <a:pPr indent="0" marL="0">
+              <a:buNone/>
+            </a:pPr>
+            <a:r>
+              <a:rPr lang="en-US" sz="2700" b="1" dirty="0">
+                <a:solidFill>
+                  <a:srgbClr val="0B1437"/>
+                </a:solidFill>
+                <a:latin typeface="Aptos" pitchFamily="34" charset="0"/>
+                <a:ea typeface="Aptos" pitchFamily="34" charset="-122"/>
+                <a:cs typeface="Aptos" pitchFamily="34" charset="-120"/>
+              </a:rPr>
+              <a:t>Keep the fire lit: what to do after the training</a:t>
+            </a:r>
+            <a:endParaRPr lang="en-US" sz="2700" dirty="0"/>
+          </a:p>
+        </p:txBody>
+      </p:sp>
+      <p:sp>
+        <p:nvSpPr>
+          <p:cNvPr id="6" name="Shape 4"/>
+          <p:cNvSpPr/>
+          <p:nvPr/>
+        </p:nvSpPr>
+        <p:spPr>
+          <a:xfrm>
+            <a:off x="822960" y="1572768"/>
+            <a:ext cx="5175504" cy="1298448"/>
+          </a:xfrm>
+          <a:prstGeom prst="roundRect">
+            <a:avLst>
+              <a:gd name="adj" fmla="val 5634"/>
+            </a:avLst>
+          </a:prstGeom>
+          <a:solidFill>
+            <a:srgbClr val="FFFFFF"/>
+          </a:solidFill>
+          <a:ln w="12700">
+            <a:solidFill>
+              <a:srgbClr val="E4E9F7"/>
+            </a:solidFill>
+            <a:prstDash val="solid"/>
+          </a:ln>
+          <a:effectLst>
+            <a:outerShdw sx="100000" sy="100000" kx="0" ky="0" algn="bl" rotWithShape="0" blurRad="114300" dist="38100" dir="5400000">
+              <a:srgbClr val="0B1437">
+                <a:alpha val="10000"/>
+              </a:srgbClr>
+            </a:outerShdw>
+          </a:effectLst>
+        </p:spPr>
+      </p:sp>
+      <p:sp>
+        <p:nvSpPr>
+          <p:cNvPr id="7" name="Shape 5"/>
+          <p:cNvSpPr/>
+          <p:nvPr/>
+        </p:nvSpPr>
+        <p:spPr>
+          <a:xfrm>
+            <a:off x="822960" y="1682496"/>
+            <a:ext cx="64008" cy="1078992"/>
+          </a:xfrm>
+          <a:prstGeom prst="rect">
+            <a:avLst/>
+          </a:prstGeom>
+          <a:solidFill>
+            <a:srgbClr val="2D6CDF"/>
+          </a:solidFill>
+          <a:ln/>
+        </p:spPr>
+      </p:sp>
+      <p:sp>
+        <p:nvSpPr>
+          <p:cNvPr id="8" name="Shape 6"/>
+          <p:cNvSpPr/>
+          <p:nvPr/>
+        </p:nvSpPr>
+        <p:spPr>
+          <a:xfrm>
+            <a:off x="1060704" y="1773936"/>
+            <a:ext cx="512064" cy="512064"/>
+          </a:xfrm>
+          <a:prstGeom prst="ellipse">
+            <a:avLst/>
+          </a:prstGeom>
+          <a:solidFill>
+            <a:srgbClr val="2D6CDF"/>
+          </a:solidFill>
+          <a:ln/>
+          <a:effectLst>
+            <a:outerShdw sx="100000" sy="100000" kx="0" ky="0" algn="bl" rotWithShape="0" blurRad="114300" dist="38100" dir="5400000">
+              <a:srgbClr val="0B1437">
+                <a:alpha val="10000"/>
+              </a:srgbClr>
+            </a:outerShdw>
+          </a:effectLst>
+        </p:spPr>
+      </p:sp>
+      <p:sp>
+        <p:nvSpPr>
+          <p:cNvPr id="10" name="Text 7"/>
+          <p:cNvSpPr/>
+          <p:nvPr/>
+        </p:nvSpPr>
+        <p:spPr>
+          <a:xfrm>
+            <a:off x="1719072" y="1737360"/>
+            <a:ext cx="4078224" cy="274320"/>
+          </a:xfrm>
+          <a:prstGeom prst="rect">
+            <a:avLst/>
+          </a:prstGeom>
+          <a:noFill/>
+          <a:ln/>
+        </p:spPr>
+        <p:txBody>
+          <a:bodyPr wrap="square" lIns="0" tIns="0" rIns="0" bIns="0" rtlCol="0" anchor="ctr"/>
+          <a:lstStyle/>
+          <a:p>
+            <a:pPr indent="0" marL="0">
+              <a:buNone/>
+            </a:pPr>
+            <a:r>
+              <a:rPr lang="en-US" sz="1500" b="1" dirty="0">
+                <a:solidFill>
+                  <a:srgbClr val="2D6CDF"/>
+                </a:solidFill>
+                <a:latin typeface="Aptos" pitchFamily="34" charset="0"/>
+                <a:ea typeface="Aptos" pitchFamily="34" charset="-122"/>
+                <a:cs typeface="Aptos" pitchFamily="34" charset="-120"/>
+              </a:rPr>
+              <a:t>Champions</a:t>
+            </a:r>
+            <a:endParaRPr lang="en-US" sz="1500" dirty="0"/>
+          </a:p>
+        </p:txBody>
+      </p:sp>
+      <p:sp>
+        <p:nvSpPr>
+          <p:cNvPr id="11" name="Text 8"/>
+          <p:cNvSpPr/>
+          <p:nvPr/>
+        </p:nvSpPr>
+        <p:spPr>
+          <a:xfrm>
+            <a:off x="1719072" y="2011680"/>
+            <a:ext cx="4078224" cy="384048"/>
+          </a:xfrm>
+          <a:prstGeom prst="rect">
+            <a:avLst/>
+          </a:prstGeom>
+          <a:noFill/>
+          <a:ln/>
+        </p:spPr>
+        <p:txBody>
+          <a:bodyPr wrap="square" lIns="0" tIns="0" rIns="0" bIns="0" rtlCol="0" anchor="t"/>
+          <a:lstStyle/>
+          <a:p>
+            <a:pPr indent="0" marL="0">
+              <a:lnSpc>
+                <a:spcPct val="104000"/>
+              </a:lnSpc>
+              <a:buNone/>
+            </a:pPr>
+            <a:r>
+              <a:rPr lang="en-US" sz="1100" dirty="0">
+                <a:solidFill>
+                  <a:srgbClr val="43507B"/>
+                </a:solidFill>
+                <a:latin typeface="Aptos" pitchFamily="34" charset="0"/>
+                <a:ea typeface="Aptos" pitchFamily="34" charset="-122"/>
+                <a:cs typeface="Aptos" pitchFamily="34" charset="-120"/>
+              </a:rPr>
+              <a:t>Volunteers in each team who help their peers and keep momentum alive.</a:t>
+            </a:r>
+            <a:endParaRPr lang="en-US" sz="1100" dirty="0"/>
+          </a:p>
+        </p:txBody>
+      </p:sp>
+      <p:sp>
+        <p:nvSpPr>
+          <p:cNvPr id="12" name="Shape 9"/>
+          <p:cNvSpPr/>
+          <p:nvPr/>
+        </p:nvSpPr>
+        <p:spPr>
+          <a:xfrm>
+            <a:off x="1060704" y="2432304"/>
+            <a:ext cx="4700016" cy="329184"/>
+          </a:xfrm>
+          <a:prstGeom prst="roundRect">
+            <a:avLst>
+              <a:gd name="adj" fmla="val 13889"/>
+            </a:avLst>
+          </a:prstGeom>
+          <a:solidFill>
+            <a:srgbClr val="EEF2FB"/>
+          </a:solidFill>
+          <a:ln/>
+        </p:spPr>
+      </p:sp>
+      <p:sp>
+        <p:nvSpPr>
+          <p:cNvPr id="13" name="Text 10"/>
+          <p:cNvSpPr/>
+          <p:nvPr/>
+        </p:nvSpPr>
+        <p:spPr>
+          <a:xfrm>
+            <a:off x="1188720" y="2432304"/>
+            <a:ext cx="4517136" cy="329184"/>
+          </a:xfrm>
+          <a:prstGeom prst="rect">
+            <a:avLst/>
+          </a:prstGeom>
+          <a:noFill/>
+          <a:ln/>
+        </p:spPr>
+        <p:txBody>
+          <a:bodyPr wrap="square" lIns="0" tIns="0" rIns="0" bIns="0" rtlCol="0" anchor="ctr"/>
+          <a:lstStyle/>
+          <a:p>
+            <a:pPr algn="l" indent="0" marL="0">
+              <a:buNone/>
+            </a:pPr>
+            <a:r>
+              <a:rPr lang="en-US" sz="950" b="1" dirty="0">
+                <a:solidFill>
+                  <a:srgbClr val="2D6CDF"/>
+                </a:solidFill>
+                <a:latin typeface="Consolas" pitchFamily="34" charset="0"/>
+                <a:ea typeface="Consolas" pitchFamily="34" charset="-122"/>
+                <a:cs typeface="Consolas" pitchFamily="34" charset="-120"/>
+              </a:rPr>
+              <a:t xml:space="preserve">› </a:t>
+            </a:r>
+            <a:pPr algn="l" indent="0" marL="0">
+              <a:buNone/>
+            </a:pPr>
+            <a:r>
+              <a:rPr lang="en-US" sz="950" dirty="0">
+                <a:solidFill>
+                  <a:srgbClr val="43507B"/>
+                </a:solidFill>
+                <a:latin typeface="Consolas" pitchFamily="34" charset="0"/>
+                <a:ea typeface="Consolas" pitchFamily="34" charset="-122"/>
+                <a:cs typeface="Consolas" pitchFamily="34" charset="-120"/>
+              </a:rPr>
+              <a:t>One trainer does not scale. A champion in every department does.</a:t>
+            </a:r>
+            <a:endParaRPr lang="en-US" sz="950" dirty="0"/>
+          </a:p>
+        </p:txBody>
+      </p:sp>
+      <p:sp>
+        <p:nvSpPr>
+          <p:cNvPr id="14" name="Shape 11"/>
+          <p:cNvSpPr/>
+          <p:nvPr/>
+        </p:nvSpPr>
+        <p:spPr>
+          <a:xfrm>
+            <a:off x="6163056" y="1572768"/>
+            <a:ext cx="5175504" cy="1298448"/>
+          </a:xfrm>
+          <a:prstGeom prst="roundRect">
+            <a:avLst>
+              <a:gd name="adj" fmla="val 5634"/>
+            </a:avLst>
+          </a:prstGeom>
+          <a:solidFill>
+            <a:srgbClr val="FFFFFF"/>
+          </a:solidFill>
+          <a:ln w="12700">
+            <a:solidFill>
+              <a:srgbClr val="E4E9F7"/>
+            </a:solidFill>
+            <a:prstDash val="solid"/>
+          </a:ln>
+          <a:effectLst>
+            <a:outerShdw sx="100000" sy="100000" kx="0" ky="0" algn="bl" rotWithShape="0" blurRad="114300" dist="38100" dir="5400000">
+              <a:srgbClr val="0B1437">
+                <a:alpha val="10000"/>
+              </a:srgbClr>
+            </a:outerShdw>
+          </a:effectLst>
+        </p:spPr>
+      </p:sp>
+      <p:sp>
+        <p:nvSpPr>
+          <p:cNvPr id="15" name="Shape 12"/>
+          <p:cNvSpPr/>
+          <p:nvPr/>
+        </p:nvSpPr>
+        <p:spPr>
+          <a:xfrm>
+            <a:off x="6163056" y="1682496"/>
+            <a:ext cx="64008" cy="1078992"/>
+          </a:xfrm>
+          <a:prstGeom prst="rect">
+            <a:avLst/>
+          </a:prstGeom>
+          <a:solidFill>
+            <a:srgbClr val="12B5BC"/>
+          </a:solidFill>
+          <a:ln/>
+        </p:spPr>
+      </p:sp>
+      <p:sp>
+        <p:nvSpPr>
+          <p:cNvPr id="16" name="Shape 13"/>
+          <p:cNvSpPr/>
+          <p:nvPr/>
+        </p:nvSpPr>
+        <p:spPr>
+          <a:xfrm>
+            <a:off x="6400800" y="1773936"/>
+            <a:ext cx="512064" cy="512064"/>
+          </a:xfrm>
+          <a:prstGeom prst="ellipse">
+            <a:avLst/>
+          </a:prstGeom>
+          <a:solidFill>
+            <a:srgbClr val="12B5BC"/>
+          </a:solidFill>
+          <a:ln/>
+          <a:effectLst>
+            <a:outerShdw sx="100000" sy="100000" kx="0" ky="0" algn="bl" rotWithShape="0" blurRad="114300" dist="38100" dir="5400000">
+              <a:srgbClr val="0B1437">
+                <a:alpha val="10000"/>
+              </a:srgbClr>
+            </a:outerShdw>
+          </a:effectLst>
+        </p:spPr>
+      </p:sp>
+      <p:sp>
+        <p:nvSpPr>
+          <p:cNvPr id="18" name="Text 14"/>
+          <p:cNvSpPr/>
+          <p:nvPr/>
+        </p:nvSpPr>
+        <p:spPr>
+          <a:xfrm>
+            <a:off x="7059168" y="1737360"/>
+            <a:ext cx="4078224" cy="274320"/>
+          </a:xfrm>
+          <a:prstGeom prst="rect">
+            <a:avLst/>
+          </a:prstGeom>
+          <a:noFill/>
+          <a:ln/>
+        </p:spPr>
+        <p:txBody>
+          <a:bodyPr wrap="square" lIns="0" tIns="0" rIns="0" bIns="0" rtlCol="0" anchor="ctr"/>
+          <a:lstStyle/>
+          <a:p>
+            <a:pPr indent="0" marL="0">
+              <a:buNone/>
+            </a:pPr>
+            <a:r>
+              <a:rPr lang="en-US" sz="1500" b="1" dirty="0">
+                <a:solidFill>
+                  <a:srgbClr val="12B5BC"/>
+                </a:solidFill>
+                <a:latin typeface="Aptos" pitchFamily="34" charset="0"/>
+                <a:ea typeface="Aptos" pitchFamily="34" charset="-122"/>
+                <a:cs typeface="Aptos" pitchFamily="34" charset="-120"/>
+              </a:rPr>
+              <a:t>Governance</a:t>
+            </a:r>
+            <a:endParaRPr lang="en-US" sz="1500" dirty="0"/>
+          </a:p>
+        </p:txBody>
+      </p:sp>
+      <p:sp>
+        <p:nvSpPr>
+          <p:cNvPr id="19" name="Text 15"/>
+          <p:cNvSpPr/>
+          <p:nvPr/>
+        </p:nvSpPr>
+        <p:spPr>
+          <a:xfrm>
+            <a:off x="7059168" y="2011680"/>
+            <a:ext cx="4078224" cy="384048"/>
+          </a:xfrm>
+          <a:prstGeom prst="rect">
+            <a:avLst/>
+          </a:prstGeom>
+          <a:noFill/>
+          <a:ln/>
+        </p:spPr>
+        <p:txBody>
+          <a:bodyPr wrap="square" lIns="0" tIns="0" rIns="0" bIns="0" rtlCol="0" anchor="t"/>
+          <a:lstStyle/>
+          <a:p>
+            <a:pPr indent="0" marL="0">
+              <a:lnSpc>
+                <a:spcPct val="104000"/>
+              </a:lnSpc>
+              <a:buNone/>
+            </a:pPr>
+            <a:r>
+              <a:rPr lang="en-US" sz="1100" dirty="0">
+                <a:solidFill>
+                  <a:srgbClr val="43507B"/>
+                </a:solidFill>
+                <a:latin typeface="Aptos" pitchFamily="34" charset="0"/>
+                <a:ea typeface="Aptos" pitchFamily="34" charset="-122"/>
+                <a:cs typeface="Aptos" pitchFamily="34" charset="-120"/>
+              </a:rPr>
+              <a:t>Copilot only surfaces what a person can already see. Fix permissions before you go wide.</a:t>
+            </a:r>
+            <a:endParaRPr lang="en-US" sz="1100" dirty="0"/>
+          </a:p>
+        </p:txBody>
+      </p:sp>
+      <p:sp>
+        <p:nvSpPr>
+          <p:cNvPr id="20" name="Shape 16"/>
+          <p:cNvSpPr/>
+          <p:nvPr/>
+        </p:nvSpPr>
+        <p:spPr>
+          <a:xfrm>
+            <a:off x="6400800" y="2432304"/>
+            <a:ext cx="4700016" cy="329184"/>
+          </a:xfrm>
+          <a:prstGeom prst="roundRect">
+            <a:avLst>
+              <a:gd name="adj" fmla="val 13889"/>
+            </a:avLst>
+          </a:prstGeom>
+          <a:solidFill>
+            <a:srgbClr val="EEF2FB"/>
+          </a:solidFill>
+          <a:ln/>
+        </p:spPr>
+      </p:sp>
+      <p:sp>
+        <p:nvSpPr>
+          <p:cNvPr id="21" name="Text 17"/>
+          <p:cNvSpPr/>
+          <p:nvPr/>
+        </p:nvSpPr>
+        <p:spPr>
+          <a:xfrm>
+            <a:off x="6528816" y="2432304"/>
+            <a:ext cx="4517136" cy="329184"/>
+          </a:xfrm>
+          <a:prstGeom prst="rect">
+            <a:avLst/>
+          </a:prstGeom>
+          <a:noFill/>
+          <a:ln/>
+        </p:spPr>
+        <p:txBody>
+          <a:bodyPr wrap="square" lIns="0" tIns="0" rIns="0" bIns="0" rtlCol="0" anchor="ctr"/>
+          <a:lstStyle/>
+          <a:p>
+            <a:pPr algn="l" indent="0" marL="0">
+              <a:buNone/>
+            </a:pPr>
+            <a:r>
+              <a:rPr lang="en-US" sz="950" b="1" dirty="0">
+                <a:solidFill>
+                  <a:srgbClr val="12B5BC"/>
+                </a:solidFill>
+                <a:latin typeface="Consolas" pitchFamily="34" charset="0"/>
+                <a:ea typeface="Consolas" pitchFamily="34" charset="-122"/>
+                <a:cs typeface="Consolas" pitchFamily="34" charset="-120"/>
+              </a:rPr>
+              <a:t xml:space="preserve">› </a:t>
+            </a:r>
+            <a:pPr algn="l" indent="0" marL="0">
+              <a:buNone/>
+            </a:pPr>
+            <a:r>
+              <a:rPr lang="en-US" sz="950" dirty="0">
+                <a:solidFill>
+                  <a:srgbClr val="43507B"/>
+                </a:solidFill>
+                <a:latin typeface="Consolas" pitchFamily="34" charset="0"/>
+                <a:ea typeface="Consolas" pitchFamily="34" charset="-122"/>
+                <a:cs typeface="Consolas" pitchFamily="34" charset="-120"/>
+              </a:rPr>
+              <a:t>Clean permissions are a patient-safety issue, not an IT chore.</a:t>
+            </a:r>
+            <a:endParaRPr lang="en-US" sz="950" dirty="0"/>
+          </a:p>
+        </p:txBody>
+      </p:sp>
+      <p:sp>
+        <p:nvSpPr>
+          <p:cNvPr id="22" name="Shape 18"/>
+          <p:cNvSpPr/>
+          <p:nvPr/>
+        </p:nvSpPr>
+        <p:spPr>
+          <a:xfrm>
+            <a:off x="822960" y="2999232"/>
+            <a:ext cx="5175504" cy="1298448"/>
+          </a:xfrm>
+          <a:prstGeom prst="roundRect">
+            <a:avLst>
+              <a:gd name="adj" fmla="val 5634"/>
+            </a:avLst>
+          </a:prstGeom>
+          <a:solidFill>
+            <a:srgbClr val="FFFFFF"/>
+          </a:solidFill>
+          <a:ln w="12700">
+            <a:solidFill>
+              <a:srgbClr val="E4E9F7"/>
+            </a:solidFill>
+            <a:prstDash val="solid"/>
+          </a:ln>
+          <a:effectLst>
+            <a:outerShdw sx="100000" sy="100000" kx="0" ky="0" algn="bl" rotWithShape="0" blurRad="114300" dist="38100" dir="5400000">
+              <a:srgbClr val="0B1437">
+                <a:alpha val="10000"/>
+              </a:srgbClr>
+            </a:outerShdw>
+          </a:effectLst>
+        </p:spPr>
+      </p:sp>
+      <p:sp>
+        <p:nvSpPr>
+          <p:cNvPr id="23" name="Shape 19"/>
+          <p:cNvSpPr/>
+          <p:nvPr/>
+        </p:nvSpPr>
+        <p:spPr>
+          <a:xfrm>
+            <a:off x="822960" y="3108960"/>
+            <a:ext cx="64008" cy="1078992"/>
+          </a:xfrm>
+          <a:prstGeom prst="rect">
+            <a:avLst/>
+          </a:prstGeom>
+          <a:solidFill>
+            <a:srgbClr val="12B886"/>
+          </a:solidFill>
+          <a:ln/>
+        </p:spPr>
+      </p:sp>
+      <p:sp>
+        <p:nvSpPr>
+          <p:cNvPr id="24" name="Shape 20"/>
+          <p:cNvSpPr/>
+          <p:nvPr/>
+        </p:nvSpPr>
+        <p:spPr>
+          <a:xfrm>
+            <a:off x="1060704" y="3200400"/>
+            <a:ext cx="512064" cy="512064"/>
+          </a:xfrm>
+          <a:prstGeom prst="ellipse">
+            <a:avLst/>
+          </a:prstGeom>
+          <a:solidFill>
+            <a:srgbClr val="12B886"/>
+          </a:solidFill>
+          <a:ln/>
+          <a:effectLst>
+            <a:outerShdw sx="100000" sy="100000" kx="0" ky="0" algn="bl" rotWithShape="0" blurRad="114300" dist="38100" dir="5400000">
+              <a:srgbClr val="0B1437">
+                <a:alpha val="10000"/>
+              </a:srgbClr>
+            </a:outerShdw>
+          </a:effectLst>
+        </p:spPr>
+      </p:sp>
+      <p:sp>
+        <p:nvSpPr>
+          <p:cNvPr id="26" name="Text 21"/>
+          <p:cNvSpPr/>
+          <p:nvPr/>
+        </p:nvSpPr>
+        <p:spPr>
+          <a:xfrm>
+            <a:off x="1719072" y="3163824"/>
+            <a:ext cx="4078224" cy="274320"/>
+          </a:xfrm>
+          <a:prstGeom prst="rect">
+            <a:avLst/>
+          </a:prstGeom>
+          <a:noFill/>
+          <a:ln/>
+        </p:spPr>
+        <p:txBody>
+          <a:bodyPr wrap="square" lIns="0" tIns="0" rIns="0" bIns="0" rtlCol="0" anchor="ctr"/>
+          <a:lstStyle/>
+          <a:p>
+            <a:pPr indent="0" marL="0">
+              <a:buNone/>
+            </a:pPr>
+            <a:r>
+              <a:rPr lang="en-US" sz="1500" b="1" dirty="0">
+                <a:solidFill>
+                  <a:srgbClr val="12B886"/>
+                </a:solidFill>
+                <a:latin typeface="Aptos" pitchFamily="34" charset="0"/>
+                <a:ea typeface="Aptos" pitchFamily="34" charset="-122"/>
+                <a:cs typeface="Aptos" pitchFamily="34" charset="-120"/>
+              </a:rPr>
+              <a:t>Measure it</a:t>
+            </a:r>
+            <a:endParaRPr lang="en-US" sz="1500" dirty="0"/>
+          </a:p>
+        </p:txBody>
+      </p:sp>
+      <p:sp>
+        <p:nvSpPr>
+          <p:cNvPr id="27" name="Text 22"/>
+          <p:cNvSpPr/>
+          <p:nvPr/>
+        </p:nvSpPr>
+        <p:spPr>
+          <a:xfrm>
+            <a:off x="1719072" y="3438144"/>
+            <a:ext cx="4078224" cy="384048"/>
+          </a:xfrm>
+          <a:prstGeom prst="rect">
+            <a:avLst/>
+          </a:prstGeom>
+          <a:noFill/>
+          <a:ln/>
+        </p:spPr>
+        <p:txBody>
+          <a:bodyPr wrap="square" lIns="0" tIns="0" rIns="0" bIns="0" rtlCol="0" anchor="t"/>
+          <a:lstStyle/>
+          <a:p>
+            <a:pPr indent="0" marL="0">
+              <a:lnSpc>
+                <a:spcPct val="104000"/>
+              </a:lnSpc>
+              <a:buNone/>
+            </a:pPr>
+            <a:r>
+              <a:rPr lang="en-US" sz="1100" dirty="0">
+                <a:solidFill>
+                  <a:srgbClr val="43507B"/>
+                </a:solidFill>
+                <a:latin typeface="Aptos" pitchFamily="34" charset="0"/>
+                <a:ea typeface="Aptos" pitchFamily="34" charset="-122"/>
+                <a:cs typeface="Aptos" pitchFamily="34" charset="-120"/>
+              </a:rPr>
+              <a:t>The Copilot Dashboard shows who uses it, who returns, and the hours saved.</a:t>
+            </a:r>
+            <a:endParaRPr lang="en-US" sz="1100" dirty="0"/>
+          </a:p>
+        </p:txBody>
+      </p:sp>
+      <p:sp>
+        <p:nvSpPr>
+          <p:cNvPr id="28" name="Shape 23"/>
+          <p:cNvSpPr/>
+          <p:nvPr/>
+        </p:nvSpPr>
+        <p:spPr>
+          <a:xfrm>
+            <a:off x="1060704" y="3858768"/>
+            <a:ext cx="4700016" cy="329184"/>
+          </a:xfrm>
+          <a:prstGeom prst="roundRect">
+            <a:avLst>
+              <a:gd name="adj" fmla="val 13889"/>
+            </a:avLst>
+          </a:prstGeom>
+          <a:solidFill>
+            <a:srgbClr val="EEF2FB"/>
+          </a:solidFill>
+          <a:ln/>
+        </p:spPr>
+      </p:sp>
+      <p:sp>
+        <p:nvSpPr>
+          <p:cNvPr id="29" name="Text 24"/>
+          <p:cNvSpPr/>
+          <p:nvPr/>
+        </p:nvSpPr>
+        <p:spPr>
+          <a:xfrm>
+            <a:off x="1188720" y="3858768"/>
+            <a:ext cx="4517136" cy="329184"/>
+          </a:xfrm>
+          <a:prstGeom prst="rect">
+            <a:avLst/>
+          </a:prstGeom>
+          <a:noFill/>
+          <a:ln/>
+        </p:spPr>
+        <p:txBody>
+          <a:bodyPr wrap="square" lIns="0" tIns="0" rIns="0" bIns="0" rtlCol="0" anchor="ctr"/>
+          <a:lstStyle/>
+          <a:p>
+            <a:pPr algn="l" indent="0" marL="0">
+              <a:buNone/>
+            </a:pPr>
+            <a:r>
+              <a:rPr lang="en-US" sz="950" b="1" dirty="0">
+                <a:solidFill>
+                  <a:srgbClr val="12B886"/>
+                </a:solidFill>
+                <a:latin typeface="Consolas" pitchFamily="34" charset="0"/>
+                <a:ea typeface="Consolas" pitchFamily="34" charset="-122"/>
+                <a:cs typeface="Consolas" pitchFamily="34" charset="-120"/>
+              </a:rPr>
+              <a:t xml:space="preserve">› </a:t>
+            </a:r>
+            <a:pPr algn="l" indent="0" marL="0">
+              <a:buNone/>
+            </a:pPr>
+            <a:r>
+              <a:rPr lang="en-US" sz="950" dirty="0">
+                <a:solidFill>
+                  <a:srgbClr val="43507B"/>
+                </a:solidFill>
+                <a:latin typeface="Consolas" pitchFamily="34" charset="0"/>
+                <a:ea typeface="Consolas" pitchFamily="34" charset="-122"/>
+                <a:cs typeface="Consolas" pitchFamily="34" charset="-120"/>
+              </a:rPr>
+              <a:t>Watch the returning users, not the sign-ups. The habit is the ROI.</a:t>
+            </a:r>
+            <a:endParaRPr lang="en-US" sz="950" dirty="0"/>
+          </a:p>
+        </p:txBody>
+      </p:sp>
+      <p:sp>
+        <p:nvSpPr>
+          <p:cNvPr id="30" name="Shape 25"/>
+          <p:cNvSpPr/>
+          <p:nvPr/>
+        </p:nvSpPr>
+        <p:spPr>
+          <a:xfrm>
+            <a:off x="6163056" y="2999232"/>
+            <a:ext cx="5175504" cy="1298448"/>
+          </a:xfrm>
+          <a:prstGeom prst="roundRect">
+            <a:avLst>
+              <a:gd name="adj" fmla="val 5634"/>
+            </a:avLst>
+          </a:prstGeom>
+          <a:solidFill>
+            <a:srgbClr val="FFFFFF"/>
+          </a:solidFill>
+          <a:ln w="12700">
+            <a:solidFill>
+              <a:srgbClr val="E4E9F7"/>
+            </a:solidFill>
+            <a:prstDash val="solid"/>
+          </a:ln>
+          <a:effectLst>
+            <a:outerShdw sx="100000" sy="100000" kx="0" ky="0" algn="bl" rotWithShape="0" blurRad="114300" dist="38100" dir="5400000">
+              <a:srgbClr val="0B1437">
+                <a:alpha val="10000"/>
+              </a:srgbClr>
+            </a:outerShdw>
+          </a:effectLst>
+        </p:spPr>
+      </p:sp>
+      <p:sp>
+        <p:nvSpPr>
+          <p:cNvPr id="31" name="Shape 26"/>
+          <p:cNvSpPr/>
+          <p:nvPr/>
+        </p:nvSpPr>
+        <p:spPr>
+          <a:xfrm>
+            <a:off x="6163056" y="3108960"/>
+            <a:ext cx="64008" cy="1078992"/>
+          </a:xfrm>
+          <a:prstGeom prst="rect">
+            <a:avLst/>
+          </a:prstGeom>
+          <a:solidFill>
+            <a:srgbClr val="F0A500"/>
+          </a:solidFill>
+          <a:ln/>
+        </p:spPr>
+      </p:sp>
+      <p:sp>
+        <p:nvSpPr>
+          <p:cNvPr id="32" name="Shape 27"/>
+          <p:cNvSpPr/>
+          <p:nvPr/>
+        </p:nvSpPr>
+        <p:spPr>
+          <a:xfrm>
+            <a:off x="6400800" y="3200400"/>
+            <a:ext cx="512064" cy="512064"/>
+          </a:xfrm>
+          <a:prstGeom prst="ellipse">
+            <a:avLst/>
+          </a:prstGeom>
+          <a:solidFill>
+            <a:srgbClr val="F0A500"/>
+          </a:solidFill>
+          <a:ln/>
+          <a:effectLst>
+            <a:outerShdw sx="100000" sy="100000" kx="0" ky="0" algn="bl" rotWithShape="0" blurRad="114300" dist="38100" dir="5400000">
+              <a:srgbClr val="0B1437">
+                <a:alpha val="10000"/>
+              </a:srgbClr>
+            </a:outerShdw>
+          </a:effectLst>
+        </p:spPr>
+      </p:sp>
+      <p:sp>
+        <p:nvSpPr>
+          <p:cNvPr id="34" name="Text 28"/>
+          <p:cNvSpPr/>
+          <p:nvPr/>
+        </p:nvSpPr>
+        <p:spPr>
+          <a:xfrm>
+            <a:off x="7059168" y="3163824"/>
+            <a:ext cx="4078224" cy="274320"/>
+          </a:xfrm>
+          <a:prstGeom prst="rect">
+            <a:avLst/>
+          </a:prstGeom>
+          <a:noFill/>
+          <a:ln/>
+        </p:spPr>
+        <p:txBody>
+          <a:bodyPr wrap="square" lIns="0" tIns="0" rIns="0" bIns="0" rtlCol="0" anchor="ctr"/>
+          <a:lstStyle/>
+          <a:p>
+            <a:pPr indent="0" marL="0">
+              <a:buNone/>
+            </a:pPr>
+            <a:r>
+              <a:rPr lang="en-US" sz="1500" b="1" dirty="0">
+                <a:solidFill>
+                  <a:srgbClr val="F0A500"/>
+                </a:solidFill>
+                <a:latin typeface="Aptos" pitchFamily="34" charset="0"/>
+                <a:ea typeface="Aptos" pitchFamily="34" charset="-122"/>
+                <a:cs typeface="Aptos" pitchFamily="34" charset="-120"/>
+              </a:rPr>
+              <a:t>Scenario library</a:t>
+            </a:r>
+            <a:endParaRPr lang="en-US" sz="1500" dirty="0"/>
+          </a:p>
+        </p:txBody>
+      </p:sp>
+      <p:sp>
+        <p:nvSpPr>
+          <p:cNvPr id="35" name="Text 29"/>
+          <p:cNvSpPr/>
+          <p:nvPr/>
+        </p:nvSpPr>
+        <p:spPr>
+          <a:xfrm>
+            <a:off x="7059168" y="3438144"/>
+            <a:ext cx="4078224" cy="384048"/>
+          </a:xfrm>
+          <a:prstGeom prst="rect">
+            <a:avLst/>
+          </a:prstGeom>
+          <a:noFill/>
+          <a:ln/>
+        </p:spPr>
+        <p:txBody>
+          <a:bodyPr wrap="square" lIns="0" tIns="0" rIns="0" bIns="0" rtlCol="0" anchor="t"/>
+          <a:lstStyle/>
+          <a:p>
+            <a:pPr indent="0" marL="0">
+              <a:lnSpc>
+                <a:spcPct val="104000"/>
+              </a:lnSpc>
+              <a:buNone/>
+            </a:pPr>
+            <a:r>
+              <a:rPr lang="en-US" sz="1100" dirty="0">
+                <a:solidFill>
+                  <a:srgbClr val="43507B"/>
+                </a:solidFill>
+                <a:latin typeface="Aptos" pitchFamily="34" charset="0"/>
+                <a:ea typeface="Aptos" pitchFamily="34" charset="-122"/>
+                <a:cs typeface="Aptos" pitchFamily="34" charset="-120"/>
+              </a:rPr>
+              <a:t>Proven use cases by team, so you start where the value is, not everywhere.</a:t>
+            </a:r>
+            <a:endParaRPr lang="en-US" sz="1100" dirty="0"/>
+          </a:p>
+        </p:txBody>
+      </p:sp>
+      <p:sp>
+        <p:nvSpPr>
+          <p:cNvPr id="36" name="Shape 30"/>
+          <p:cNvSpPr/>
+          <p:nvPr/>
+        </p:nvSpPr>
+        <p:spPr>
+          <a:xfrm>
+            <a:off x="6400800" y="3858768"/>
+            <a:ext cx="4700016" cy="329184"/>
+          </a:xfrm>
+          <a:prstGeom prst="roundRect">
+            <a:avLst>
+              <a:gd name="adj" fmla="val 13889"/>
+            </a:avLst>
+          </a:prstGeom>
+          <a:solidFill>
+            <a:srgbClr val="EEF2FB"/>
+          </a:solidFill>
+          <a:ln/>
+        </p:spPr>
+      </p:sp>
+      <p:sp>
+        <p:nvSpPr>
+          <p:cNvPr id="37" name="Text 31"/>
+          <p:cNvSpPr/>
+          <p:nvPr/>
+        </p:nvSpPr>
+        <p:spPr>
+          <a:xfrm>
+            <a:off x="6528816" y="3858768"/>
+            <a:ext cx="4517136" cy="329184"/>
+          </a:xfrm>
+          <a:prstGeom prst="rect">
+            <a:avLst/>
+          </a:prstGeom>
+          <a:noFill/>
+          <a:ln/>
+        </p:spPr>
+        <p:txBody>
+          <a:bodyPr wrap="square" lIns="0" tIns="0" rIns="0" bIns="0" rtlCol="0" anchor="ctr"/>
+          <a:lstStyle/>
+          <a:p>
+            <a:pPr algn="l" indent="0" marL="0">
+              <a:buNone/>
+            </a:pPr>
+            <a:r>
+              <a:rPr lang="en-US" sz="950" b="1" dirty="0">
+                <a:solidFill>
+                  <a:srgbClr val="F0A500"/>
+                </a:solidFill>
+                <a:latin typeface="Consolas" pitchFamily="34" charset="0"/>
+                <a:ea typeface="Consolas" pitchFamily="34" charset="-122"/>
+                <a:cs typeface="Consolas" pitchFamily="34" charset="-120"/>
+              </a:rPr>
+              <a:t xml:space="preserve">› </a:t>
+            </a:r>
+            <a:pPr algn="l" indent="0" marL="0">
+              <a:buNone/>
+            </a:pPr>
+            <a:r>
+              <a:rPr lang="en-US" sz="950" dirty="0">
+                <a:solidFill>
+                  <a:srgbClr val="43507B"/>
+                </a:solidFill>
+                <a:latin typeface="Consolas" pitchFamily="34" charset="0"/>
+                <a:ea typeface="Consolas" pitchFamily="34" charset="-122"/>
+                <a:cs typeface="Consolas" pitchFamily="34" charset="-120"/>
+              </a:rPr>
+              <a:t>Use it for everything is how adoption dies. Pick two wins per team.</a:t>
+            </a:r>
+            <a:endParaRPr lang="en-US" sz="950" dirty="0"/>
+          </a:p>
+        </p:txBody>
+      </p:sp>
+      <p:sp>
+        <p:nvSpPr>
+          <p:cNvPr id="38" name="Shape 32"/>
+          <p:cNvSpPr/>
+          <p:nvPr/>
+        </p:nvSpPr>
+        <p:spPr>
+          <a:xfrm>
+            <a:off x="822960" y="4425696"/>
+            <a:ext cx="5175504" cy="1298448"/>
+          </a:xfrm>
+          <a:prstGeom prst="roundRect">
+            <a:avLst>
+              <a:gd name="adj" fmla="val 5634"/>
+            </a:avLst>
+          </a:prstGeom>
+          <a:solidFill>
+            <a:srgbClr val="FFFFFF"/>
+          </a:solidFill>
+          <a:ln w="12700">
+            <a:solidFill>
+              <a:srgbClr val="E4E9F7"/>
+            </a:solidFill>
+            <a:prstDash val="solid"/>
+          </a:ln>
+          <a:effectLst>
+            <a:outerShdw sx="100000" sy="100000" kx="0" ky="0" algn="bl" rotWithShape="0" blurRad="114300" dist="38100" dir="5400000">
+              <a:srgbClr val="0B1437">
+                <a:alpha val="10000"/>
+              </a:srgbClr>
+            </a:outerShdw>
+          </a:effectLst>
+        </p:spPr>
+      </p:sp>
+      <p:sp>
+        <p:nvSpPr>
+          <p:cNvPr id="39" name="Shape 33"/>
+          <p:cNvSpPr/>
+          <p:nvPr/>
+        </p:nvSpPr>
+        <p:spPr>
+          <a:xfrm>
+            <a:off x="822960" y="4535424"/>
+            <a:ext cx="64008" cy="1078992"/>
+          </a:xfrm>
+          <a:prstGeom prst="rect">
+            <a:avLst/>
+          </a:prstGeom>
+          <a:solidFill>
+            <a:srgbClr val="7C5CFC"/>
+          </a:solidFill>
+          <a:ln/>
+        </p:spPr>
+      </p:sp>
+      <p:sp>
+        <p:nvSpPr>
+          <p:cNvPr id="40" name="Shape 34"/>
+          <p:cNvSpPr/>
+          <p:nvPr/>
+        </p:nvSpPr>
+        <p:spPr>
+          <a:xfrm>
+            <a:off x="1060704" y="4626864"/>
+            <a:ext cx="512064" cy="512064"/>
+          </a:xfrm>
+          <a:prstGeom prst="ellipse">
+            <a:avLst/>
+          </a:prstGeom>
+          <a:solidFill>
+            <a:srgbClr val="7C5CFC"/>
+          </a:solidFill>
+          <a:ln/>
+          <a:effectLst>
+            <a:outerShdw sx="100000" sy="100000" kx="0" ky="0" algn="bl" rotWithShape="0" blurRad="114300" dist="38100" dir="5400000">
+              <a:srgbClr val="0B1437">
+                <a:alpha val="10000"/>
+              </a:srgbClr>
+            </a:outerShdw>
+          </a:effectLst>
+        </p:spPr>
+      </p:sp>
+      <p:sp>
+        <p:nvSpPr>
+          <p:cNvPr id="42" name="Text 35"/>
+          <p:cNvSpPr/>
+          <p:nvPr/>
+        </p:nvSpPr>
+        <p:spPr>
+          <a:xfrm>
+            <a:off x="1719072" y="4590288"/>
+            <a:ext cx="4078224" cy="274320"/>
+          </a:xfrm>
+          <a:prstGeom prst="rect">
+            <a:avLst/>
+          </a:prstGeom>
+          <a:noFill/>
+          <a:ln/>
+        </p:spPr>
+        <p:txBody>
+          <a:bodyPr wrap="square" lIns="0" tIns="0" rIns="0" bIns="0" rtlCol="0" anchor="ctr"/>
+          <a:lstStyle/>
+          <a:p>
+            <a:pPr indent="0" marL="0">
+              <a:buNone/>
+            </a:pPr>
+            <a:r>
+              <a:rPr lang="en-US" sz="1500" b="1" dirty="0">
+                <a:solidFill>
+                  <a:srgbClr val="7C5CFC"/>
+                </a:solidFill>
+                <a:latin typeface="Aptos" pitchFamily="34" charset="0"/>
+                <a:ea typeface="Aptos" pitchFamily="34" charset="-122"/>
+                <a:cs typeface="Aptos" pitchFamily="34" charset="-120"/>
+              </a:rPr>
+              <a:t>Community of practice</a:t>
+            </a:r>
+            <a:endParaRPr lang="en-US" sz="1500" dirty="0"/>
+          </a:p>
+        </p:txBody>
+      </p:sp>
+      <p:sp>
+        <p:nvSpPr>
+          <p:cNvPr id="43" name="Text 36"/>
+          <p:cNvSpPr/>
+          <p:nvPr/>
+        </p:nvSpPr>
+        <p:spPr>
+          <a:xfrm>
+            <a:off x="1719072" y="4864608"/>
+            <a:ext cx="4078224" cy="384048"/>
+          </a:xfrm>
+          <a:prstGeom prst="rect">
+            <a:avLst/>
+          </a:prstGeom>
+          <a:noFill/>
+          <a:ln/>
+        </p:spPr>
+        <p:txBody>
+          <a:bodyPr wrap="square" lIns="0" tIns="0" rIns="0" bIns="0" rtlCol="0" anchor="t"/>
+          <a:lstStyle/>
+          <a:p>
+            <a:pPr indent="0" marL="0">
+              <a:lnSpc>
+                <a:spcPct val="104000"/>
+              </a:lnSpc>
+              <a:buNone/>
+            </a:pPr>
+            <a:r>
+              <a:rPr lang="en-US" sz="1100" dirty="0">
+                <a:solidFill>
+                  <a:srgbClr val="43507B"/>
+                </a:solidFill>
+                <a:latin typeface="Aptos" pitchFamily="34" charset="0"/>
+                <a:ea typeface="Aptos" pitchFamily="34" charset="-122"/>
+                <a:cs typeface="Aptos" pitchFamily="34" charset="-120"/>
+              </a:rPr>
+              <a:t>A place to share prompts and get peer help after the training ends.</a:t>
+            </a:r>
+            <a:endParaRPr lang="en-US" sz="1100" dirty="0"/>
+          </a:p>
+        </p:txBody>
+      </p:sp>
+      <p:sp>
+        <p:nvSpPr>
+          <p:cNvPr id="44" name="Shape 37"/>
+          <p:cNvSpPr/>
+          <p:nvPr/>
+        </p:nvSpPr>
+        <p:spPr>
+          <a:xfrm>
+            <a:off x="1060704" y="5285232"/>
+            <a:ext cx="4700016" cy="329184"/>
+          </a:xfrm>
+          <a:prstGeom prst="roundRect">
+            <a:avLst>
+              <a:gd name="adj" fmla="val 13889"/>
+            </a:avLst>
+          </a:prstGeom>
+          <a:solidFill>
+            <a:srgbClr val="EEF2FB"/>
+          </a:solidFill>
+          <a:ln/>
+        </p:spPr>
+      </p:sp>
+      <p:sp>
+        <p:nvSpPr>
+          <p:cNvPr id="45" name="Text 38"/>
+          <p:cNvSpPr/>
+          <p:nvPr/>
+        </p:nvSpPr>
+        <p:spPr>
+          <a:xfrm>
+            <a:off x="1188720" y="5285232"/>
+            <a:ext cx="4517136" cy="329184"/>
+          </a:xfrm>
+          <a:prstGeom prst="rect">
+            <a:avLst/>
+          </a:prstGeom>
+          <a:noFill/>
+          <a:ln/>
+        </p:spPr>
+        <p:txBody>
+          <a:bodyPr wrap="square" lIns="0" tIns="0" rIns="0" bIns="0" rtlCol="0" anchor="ctr"/>
+          <a:lstStyle/>
+          <a:p>
+            <a:pPr algn="l" indent="0" marL="0">
+              <a:buNone/>
+            </a:pPr>
+            <a:r>
+              <a:rPr lang="en-US" sz="950" b="1" dirty="0">
+                <a:solidFill>
+                  <a:srgbClr val="7C5CFC"/>
+                </a:solidFill>
+                <a:latin typeface="Consolas" pitchFamily="34" charset="0"/>
+                <a:ea typeface="Consolas" pitchFamily="34" charset="-122"/>
+                <a:cs typeface="Consolas" pitchFamily="34" charset="-120"/>
+              </a:rPr>
+              <a:t xml:space="preserve">› </a:t>
+            </a:r>
+            <a:pPr algn="l" indent="0" marL="0">
+              <a:buNone/>
+            </a:pPr>
+            <a:r>
+              <a:rPr lang="en-US" sz="950" dirty="0">
+                <a:solidFill>
+                  <a:srgbClr val="43507B"/>
+                </a:solidFill>
+                <a:latin typeface="Consolas" pitchFamily="34" charset="0"/>
+                <a:ea typeface="Consolas" pitchFamily="34" charset="-122"/>
+                <a:cs typeface="Consolas" pitchFamily="34" charset="-120"/>
+              </a:rPr>
+              <a:t>The session teaches it. The community is what makes it stick.</a:t>
+            </a:r>
+            <a:endParaRPr lang="en-US" sz="950" dirty="0"/>
+          </a:p>
+        </p:txBody>
+      </p:sp>
+      <p:sp>
+        <p:nvSpPr>
+          <p:cNvPr id="46" name="Shape 39"/>
+          <p:cNvSpPr/>
+          <p:nvPr/>
+        </p:nvSpPr>
+        <p:spPr>
+          <a:xfrm>
+            <a:off x="6163056" y="4425696"/>
+            <a:ext cx="5175504" cy="1298448"/>
+          </a:xfrm>
+          <a:prstGeom prst="roundRect">
+            <a:avLst>
+              <a:gd name="adj" fmla="val 5634"/>
+            </a:avLst>
+          </a:prstGeom>
+          <a:solidFill>
+            <a:srgbClr val="FFFFFF"/>
+          </a:solidFill>
+          <a:ln w="12700">
+            <a:solidFill>
+              <a:srgbClr val="E4E9F7"/>
+            </a:solidFill>
+            <a:prstDash val="solid"/>
+          </a:ln>
+          <a:effectLst>
+            <a:outerShdw sx="100000" sy="100000" kx="0" ky="0" algn="bl" rotWithShape="0" blurRad="114300" dist="38100" dir="5400000">
+              <a:srgbClr val="0B1437">
+                <a:alpha val="10000"/>
+              </a:srgbClr>
+            </a:outerShdw>
+          </a:effectLst>
+        </p:spPr>
+      </p:sp>
+      <p:sp>
+        <p:nvSpPr>
+          <p:cNvPr id="47" name="Shape 40"/>
+          <p:cNvSpPr/>
+          <p:nvPr/>
+        </p:nvSpPr>
+        <p:spPr>
+          <a:xfrm>
+            <a:off x="6163056" y="4535424"/>
+            <a:ext cx="64008" cy="1078992"/>
+          </a:xfrm>
+          <a:prstGeom prst="rect">
+            <a:avLst/>
+          </a:prstGeom>
+          <a:solidFill>
+            <a:srgbClr val="2D6CDF"/>
+          </a:solidFill>
+          <a:ln/>
+        </p:spPr>
+      </p:sp>
+      <p:sp>
+        <p:nvSpPr>
+          <p:cNvPr id="48" name="Shape 41"/>
+          <p:cNvSpPr/>
+          <p:nvPr/>
+        </p:nvSpPr>
+        <p:spPr>
+          <a:xfrm>
+            <a:off x="6400800" y="4626864"/>
+            <a:ext cx="512064" cy="512064"/>
+          </a:xfrm>
+          <a:prstGeom prst="ellipse">
+            <a:avLst/>
+          </a:prstGeom>
+          <a:solidFill>
+            <a:srgbClr val="2D6CDF"/>
+          </a:solidFill>
+          <a:ln/>
+          <a:effectLst>
+            <a:outerShdw sx="100000" sy="100000" kx="0" ky="0" algn="bl" rotWithShape="0" blurRad="114300" dist="38100" dir="5400000">
+              <a:srgbClr val="0B1437">
+                <a:alpha val="10000"/>
+              </a:srgbClr>
+            </a:outerShdw>
+          </a:effectLst>
+        </p:spPr>
+      </p:sp>
+      <p:sp>
+        <p:nvSpPr>
+          <p:cNvPr id="50" name="Text 42"/>
+          <p:cNvSpPr/>
+          <p:nvPr/>
+        </p:nvSpPr>
+        <p:spPr>
+          <a:xfrm>
+            <a:off x="7059168" y="4590288"/>
+            <a:ext cx="4078224" cy="274320"/>
+          </a:xfrm>
+          <a:prstGeom prst="rect">
+            <a:avLst/>
+          </a:prstGeom>
+          <a:noFill/>
+          <a:ln/>
+        </p:spPr>
+        <p:txBody>
+          <a:bodyPr wrap="square" lIns="0" tIns="0" rIns="0" bIns="0" rtlCol="0" anchor="ctr"/>
+          <a:lstStyle/>
+          <a:p>
+            <a:pPr indent="0" marL="0">
+              <a:buNone/>
+            </a:pPr>
+            <a:r>
+              <a:rPr lang="en-US" sz="1500" b="1" dirty="0">
+                <a:solidFill>
+                  <a:srgbClr val="2D6CDF"/>
+                </a:solidFill>
+                <a:latin typeface="Aptos" pitchFamily="34" charset="0"/>
+                <a:ea typeface="Aptos" pitchFamily="34" charset="-122"/>
+                <a:cs typeface="Aptos" pitchFamily="34" charset="-120"/>
+              </a:rPr>
+              <a:t>Center of Excellence</a:t>
+            </a:r>
+            <a:endParaRPr lang="en-US" sz="1500" dirty="0"/>
+          </a:p>
+        </p:txBody>
+      </p:sp>
+      <p:sp>
+        <p:nvSpPr>
+          <p:cNvPr id="51" name="Text 43"/>
+          <p:cNvSpPr/>
+          <p:nvPr/>
+        </p:nvSpPr>
+        <p:spPr>
+          <a:xfrm>
+            <a:off x="7059168" y="4864608"/>
+            <a:ext cx="4078224" cy="384048"/>
+          </a:xfrm>
+          <a:prstGeom prst="rect">
+            <a:avLst/>
+          </a:prstGeom>
+          <a:noFill/>
+          <a:ln/>
+        </p:spPr>
+        <p:txBody>
+          <a:bodyPr wrap="square" lIns="0" tIns="0" rIns="0" bIns="0" rtlCol="0" anchor="t"/>
+          <a:lstStyle/>
+          <a:p>
+            <a:pPr indent="0" marL="0">
+              <a:lnSpc>
+                <a:spcPct val="104000"/>
+              </a:lnSpc>
+              <a:buNone/>
+            </a:pPr>
+            <a:r>
+              <a:rPr lang="en-US" sz="1100" dirty="0">
+                <a:solidFill>
+                  <a:srgbClr val="43507B"/>
+                </a:solidFill>
+                <a:latin typeface="Aptos" pitchFamily="34" charset="0"/>
+                <a:ea typeface="Aptos" pitchFamily="34" charset="-122"/>
+                <a:cs typeface="Aptos" pitchFamily="34" charset="-120"/>
+              </a:rPr>
+              <a:t>A small cross-functional team that owns the guardrails, scenarios, and numbers.</a:t>
+            </a:r>
+            <a:endParaRPr lang="en-US" sz="1100" dirty="0"/>
+          </a:p>
+        </p:txBody>
+      </p:sp>
+      <p:sp>
+        <p:nvSpPr>
+          <p:cNvPr id="52" name="Shape 44"/>
+          <p:cNvSpPr/>
+          <p:nvPr/>
+        </p:nvSpPr>
+        <p:spPr>
+          <a:xfrm>
+            <a:off x="6400800" y="5285232"/>
+            <a:ext cx="4700016" cy="329184"/>
+          </a:xfrm>
+          <a:prstGeom prst="roundRect">
+            <a:avLst>
+              <a:gd name="adj" fmla="val 13889"/>
+            </a:avLst>
+          </a:prstGeom>
+          <a:solidFill>
+            <a:srgbClr val="EEF2FB"/>
+          </a:solidFill>
+          <a:ln/>
+        </p:spPr>
+      </p:sp>
+      <p:sp>
+        <p:nvSpPr>
+          <p:cNvPr id="53" name="Text 45"/>
+          <p:cNvSpPr/>
+          <p:nvPr/>
+        </p:nvSpPr>
+        <p:spPr>
+          <a:xfrm>
+            <a:off x="6528816" y="5285232"/>
+            <a:ext cx="4517136" cy="329184"/>
+          </a:xfrm>
+          <a:prstGeom prst="rect">
+            <a:avLst/>
+          </a:prstGeom>
+          <a:noFill/>
+          <a:ln/>
+        </p:spPr>
+        <p:txBody>
+          <a:bodyPr wrap="square" lIns="0" tIns="0" rIns="0" bIns="0" rtlCol="0" anchor="ctr"/>
+          <a:lstStyle/>
+          <a:p>
+            <a:pPr algn="l" indent="0" marL="0">
+              <a:buNone/>
+            </a:pPr>
+            <a:r>
+              <a:rPr lang="en-US" sz="950" b="1" dirty="0">
+                <a:solidFill>
+                  <a:srgbClr val="2D6CDF"/>
+                </a:solidFill>
+                <a:latin typeface="Consolas" pitchFamily="34" charset="0"/>
+                <a:ea typeface="Consolas" pitchFamily="34" charset="-122"/>
+                <a:cs typeface="Consolas" pitchFamily="34" charset="-120"/>
+              </a:rPr>
+              <a:t xml:space="preserve">› </a:t>
+            </a:r>
+            <a:pPr algn="l" indent="0" marL="0">
+              <a:buNone/>
+            </a:pPr>
+            <a:r>
+              <a:rPr lang="en-US" sz="950" dirty="0">
+                <a:solidFill>
+                  <a:srgbClr val="43507B"/>
+                </a:solidFill>
+                <a:latin typeface="Consolas" pitchFamily="34" charset="0"/>
+                <a:ea typeface="Consolas" pitchFamily="34" charset="-122"/>
+                <a:cs typeface="Consolas" pitchFamily="34" charset="-120"/>
+              </a:rPr>
+              <a:t>Give adoption a team and a name, or it stalls in week six.</a:t>
+            </a:r>
+            <a:endParaRPr lang="en-US" sz="950" dirty="0"/>
+          </a:p>
+        </p:txBody>
+      </p:sp>
+      <p:sp>
+        <p:nvSpPr>
+          <p:cNvPr id="54" name="Text 46"/>
+          <p:cNvSpPr/>
+          <p:nvPr/>
+        </p:nvSpPr>
+        <p:spPr>
+          <a:xfrm>
+            <a:off x="640080" y="6419088"/>
+            <a:ext cx="8229600" cy="274320"/>
+          </a:xfrm>
+          <a:prstGeom prst="rect">
+            <a:avLst/>
+          </a:prstGeom>
+          <a:noFill/>
+          <a:ln/>
+        </p:spPr>
+        <p:txBody>
+          <a:bodyPr wrap="square" lIns="0" tIns="0" rIns="0" bIns="0" rtlCol="0" anchor="ctr"/>
+          <a:lstStyle/>
+          <a:p>
+            <a:pPr algn="l" indent="0" marL="0">
+              <a:buNone/>
+            </a:pPr>
+            <a:r>
+              <a:rPr lang="en-US" sz="900" dirty="0">
+                <a:solidFill>
+                  <a:srgbClr val="8A93B8"/>
+                </a:solidFill>
+                <a:latin typeface="Aptos" pitchFamily="34" charset="0"/>
+                <a:ea typeface="Aptos" pitchFamily="34" charset="-122"/>
+                <a:cs typeface="Aptos" pitchFamily="34" charset="-120"/>
+              </a:rPr>
+              <a:t>The Golden Nuggets</a:t>
+            </a:r>
+            <a:endParaRPr lang="en-US" sz="900" dirty="0"/>
+          </a:p>
+        </p:txBody>
+      </p:sp>
+      <p:sp>
+        <p:nvSpPr>
+          <p:cNvPr id="55" name="Text 47"/>
+          <p:cNvSpPr/>
+          <p:nvPr/>
+        </p:nvSpPr>
+        <p:spPr>
+          <a:xfrm>
+            <a:off x="11155680" y="6419088"/>
+            <a:ext cx="640080" cy="274320"/>
+          </a:xfrm>
+          <a:prstGeom prst="rect">
+            <a:avLst/>
+          </a:prstGeom>
+          <a:noFill/>
+          <a:ln/>
+        </p:spPr>
+        <p:txBody>
+          <a:bodyPr wrap="square" lIns="0" tIns="0" rIns="0" bIns="0" rtlCol="0" anchor="ctr"/>
+          <a:lstStyle/>
+          <a:p>
+            <a:pPr algn="r" indent="0" marL="0">
+              <a:buNone/>
+            </a:pPr>
+            <a:r>
+              <a:rPr lang="en-US" sz="900" dirty="0">
+                <a:solidFill>
+                  <a:srgbClr val="8A93B8"/>
+                </a:solidFill>
+                <a:latin typeface="Aptos" pitchFamily="34" charset="0"/>
+                <a:ea typeface="Aptos" pitchFamily="34" charset="-122"/>
+                <a:cs typeface="Aptos" pitchFamily="34" charset="-120"/>
+              </a:rPr>
+              <a:t>25</a:t>
+            </a:r>
+            <a:endParaRPr lang="en-US" sz="900" dirty="0"/>
+          </a:p>
+        </p:txBody>
+      </p:sp>
+      <p:sp>
+        <p:nvSpPr>
+          <p:cNvPr id="56" name="Num1"/>
+          <p:cNvSpPr/>
+          <p:nvPr/>
+        </p:nvSpPr>
+        <p:spPr>
+          <a:xfrm>
+            <a:off x="1060704" y="1773936"/>
+            <a:ext cx="512064" cy="512064"/>
+          </a:xfrm>
+          <a:prstGeom prst="rect">
+            <a:avLst/>
+          </a:prstGeom>
+          <a:noFill/>
+          <a:ln/>
+        </p:spPr>
+        <p:txBody>
+          <a:bodyPr wrap="square" lIns="0" tIns="0" rIns="0" bIns="0" rtlCol="0" anchor="ctr"/>
+          <a:lstStyle/>
+          <a:p>
+            <a:pPr algn="ctr">
+              <a:buNone/>
+            </a:pPr>
+            <a:r>
+              <a:rPr lang="en-US" sz="1800" b="1" dirty="0">
+                <a:solidFill>
+                  <a:srgbClr val="FFFFFF"/>
+                </a:solidFill>
+                <a:latin typeface="Aptos" pitchFamily="34" charset="0"/>
+              </a:rPr>
+              <a:t>1</a:t>
+            </a:r>
+          </a:p>
+        </p:txBody>
+      </p:sp>
+      <p:sp>
+        <p:nvSpPr>
+          <p:cNvPr id="57" name="Num2"/>
+          <p:cNvSpPr/>
+          <p:nvPr/>
+        </p:nvSpPr>
+        <p:spPr>
+          <a:xfrm>
+            <a:off x="6400800" y="1773936"/>
+            <a:ext cx="512064" cy="512064"/>
+          </a:xfrm>
+          <a:prstGeom prst="rect">
+            <a:avLst/>
+          </a:prstGeom>
+          <a:noFill/>
+          <a:ln/>
+        </p:spPr>
+        <p:txBody>
+          <a:bodyPr wrap="square" lIns="0" tIns="0" rIns="0" bIns="0" rtlCol="0" anchor="ctr"/>
+          <a:lstStyle/>
+          <a:p>
+            <a:pPr algn="ctr">
+              <a:buNone/>
+            </a:pPr>
+            <a:r>
+              <a:rPr lang="en-US" sz="1800" b="1" dirty="0">
+                <a:solidFill>
+                  <a:srgbClr val="FFFFFF"/>
+                </a:solidFill>
+                <a:latin typeface="Aptos" pitchFamily="34" charset="0"/>
+              </a:rPr>
+              <a:t>2</a:t>
+            </a:r>
+          </a:p>
+        </p:txBody>
+      </p:sp>
+      <p:sp>
+        <p:nvSpPr>
+          <p:cNvPr id="58" name="Num3"/>
+          <p:cNvSpPr/>
+          <p:nvPr/>
+        </p:nvSpPr>
+        <p:spPr>
+          <a:xfrm>
+            <a:off x="1060704" y="3200400"/>
+            <a:ext cx="512064" cy="512064"/>
+          </a:xfrm>
+          <a:prstGeom prst="rect">
+            <a:avLst/>
+          </a:prstGeom>
+          <a:noFill/>
+          <a:ln/>
+        </p:spPr>
+        <p:txBody>
+          <a:bodyPr wrap="square" lIns="0" tIns="0" rIns="0" bIns="0" rtlCol="0" anchor="ctr"/>
+          <a:lstStyle/>
+          <a:p>
+            <a:pPr algn="ctr">
+              <a:buNone/>
+            </a:pPr>
+            <a:r>
+              <a:rPr lang="en-US" sz="1800" b="1" dirty="0">
+                <a:solidFill>
+                  <a:srgbClr val="FFFFFF"/>
+                </a:solidFill>
+                <a:latin typeface="Aptos" pitchFamily="34" charset="0"/>
+              </a:rPr>
+              <a:t>3</a:t>
+            </a:r>
+          </a:p>
+        </p:txBody>
+      </p:sp>
+      <p:sp>
+        <p:nvSpPr>
+          <p:cNvPr id="59" name="Num4"/>
+          <p:cNvSpPr/>
+          <p:nvPr/>
+        </p:nvSpPr>
+        <p:spPr>
+          <a:xfrm>
+            <a:off x="6400800" y="3200400"/>
+            <a:ext cx="512064" cy="512064"/>
+          </a:xfrm>
+          <a:prstGeom prst="rect">
+            <a:avLst/>
+          </a:prstGeom>
+          <a:noFill/>
+          <a:ln/>
+        </p:spPr>
+        <p:txBody>
+          <a:bodyPr wrap="square" lIns="0" tIns="0" rIns="0" bIns="0" rtlCol="0" anchor="ctr"/>
+          <a:lstStyle/>
+          <a:p>
+            <a:pPr algn="ctr">
+              <a:buNone/>
+            </a:pPr>
+            <a:r>
+              <a:rPr lang="en-US" sz="1800" b="1" dirty="0">
+                <a:solidFill>
+                  <a:srgbClr val="FFFFFF"/>
+                </a:solidFill>
+                <a:latin typeface="Aptos" pitchFamily="34" charset="0"/>
+              </a:rPr>
+              <a:t>4</a:t>
+            </a:r>
+          </a:p>
+        </p:txBody>
+      </p:sp>
+      <p:sp>
+        <p:nvSpPr>
+          <p:cNvPr id="60" name="Num5"/>
+          <p:cNvSpPr/>
+          <p:nvPr/>
+        </p:nvSpPr>
+        <p:spPr>
+          <a:xfrm>
+            <a:off x="1060704" y="4626864"/>
+            <a:ext cx="512064" cy="512064"/>
+          </a:xfrm>
+          <a:prstGeom prst="rect">
+            <a:avLst/>
+          </a:prstGeom>
+          <a:noFill/>
+          <a:ln/>
+        </p:spPr>
+        <p:txBody>
+          <a:bodyPr wrap="square" lIns="0" tIns="0" rIns="0" bIns="0" rtlCol="0" anchor="ctr"/>
+          <a:lstStyle/>
+          <a:p>
+            <a:pPr algn="ctr">
+              <a:buNone/>
+            </a:pPr>
+            <a:r>
+              <a:rPr lang="en-US" sz="1800" b="1" dirty="0">
+                <a:solidFill>
+                  <a:srgbClr val="FFFFFF"/>
+                </a:solidFill>
+                <a:latin typeface="Aptos" pitchFamily="34" charset="0"/>
+              </a:rPr>
+              <a:t>5</a:t>
+            </a:r>
+          </a:p>
+        </p:txBody>
+      </p:sp>
+      <p:sp>
+        <p:nvSpPr>
+          <p:cNvPr id="61" name="Num6"/>
+          <p:cNvSpPr/>
+          <p:nvPr/>
+        </p:nvSpPr>
+        <p:spPr>
+          <a:xfrm>
+            <a:off x="6400800" y="4626864"/>
+            <a:ext cx="512064" cy="512064"/>
+          </a:xfrm>
+          <a:prstGeom prst="rect">
+            <a:avLst/>
+          </a:prstGeom>
+          <a:noFill/>
+          <a:ln/>
+        </p:spPr>
+        <p:txBody>
+          <a:bodyPr wrap="square" lIns="0" tIns="0" rIns="0" bIns="0" rtlCol="0" anchor="ctr"/>
+          <a:lstStyle/>
+          <a:p>
+            <a:pPr algn="ctr">
+              <a:buNone/>
+            </a:pPr>
+            <a:r>
+              <a:rPr lang="en-US" sz="1800" b="1" dirty="0">
+                <a:solidFill>
+                  <a:srgbClr val="FFFFFF"/>
+                </a:solidFill>
+                <a:latin typeface="Aptos" pitchFamily="34" charset="0"/>
+              </a:rPr>
+              <a:t>6</a:t>
+            </a:r>
           </a:p>
         </p:txBody>
       </p:sp>
@@ -15301,7 +23035,7 @@
                 <a:ea typeface="Aptos" pitchFamily="34" charset="-122"/>
                 <a:cs typeface="Aptos" pitchFamily="34" charset="-120"/>
               </a:rPr>
-              <a:t>HOW TODAY WORKS</a:t>
+              <a:t>THE PROGRAM</a:t>
             </a:r>
             <a:endParaRPr lang="en-US" sz="1200" dirty="0"/>
           </a:p>
@@ -15340,7 +23074,7 @@
                 <a:ea typeface="Aptos" pitchFamily="34" charset="-122"/>
                 <a:cs typeface="Aptos" pitchFamily="34" charset="-120"/>
               </a:rPr>
-              <a:t>Three tiers, each one builds on the last</a:t>
+              <a:t>Three tiers, nine short sessions</a:t>
             </a:r>
             <a:endParaRPr lang="en-US" sz="3100" dirty="0"/>
           </a:p>
@@ -15379,7 +23113,7 @@
                 <a:ea typeface="Aptos" pitchFamily="34" charset="-122"/>
                 <a:cs typeface="Aptos" pitchFamily="34" charset="-120"/>
               </a:rPr>
-              <a:t>Start at the bottom. Every tier is useful on its own, and each one adds more leverage than the last.</a:t>
+              <a:t>Each tier builds on the last, and every session stands on its own. Thirty or sixty minutes each.</a:t>
             </a:r>
             <a:endParaRPr lang="en-US" sz="1400" dirty="0"/>
           </a:p>
@@ -15609,7 +23343,7 @@
                 <a:ea typeface="Aptos" pitchFamily="34" charset="-122"/>
                 <a:cs typeface="Aptos" pitchFamily="34" charset="-120"/>
               </a:rPr>
-              <a:t>Use it and prompt well</a:t>
+              <a:t>Four sessions · about 3.5 hours</a:t>
             </a:r>
             <a:endParaRPr lang="en-US" sz="1300" dirty="0"/>
           </a:p>
@@ -15671,7 +23405,7 @@
                 <a:ea typeface="Aptos" pitchFamily="34" charset="-122"/>
                 <a:cs typeface="Aptos" pitchFamily="34" charset="-120"/>
               </a:rPr>
-              <a:t>Where to find Copilot, and is it safe</a:t>
+              <a:t>1.1  Meet, find, make yours · 60m</a:t>
             </a:r>
             <a:endParaRPr lang="en-US" sz="1200" dirty="0"/>
           </a:p>
@@ -15685,7 +23419,7 @@
         </p:nvSpPr>
         <p:spPr>
           <a:xfrm>
-            <a:off x="1133856" y="5029200"/>
+            <a:off x="1133856" y="4877000"/>
             <a:ext cx="128016" cy="128016"/>
           </a:xfrm>
           <a:prstGeom prst="ellipse">
@@ -15705,7 +23439,7 @@
         </p:nvSpPr>
         <p:spPr>
           <a:xfrm>
-            <a:off x="1371600" y="4937760"/>
+            <a:off x="1371600" y="4785560"/>
             <a:ext cx="2724912" cy="402336"/>
           </a:xfrm>
           <a:prstGeom prst="rect">
@@ -15733,7 +23467,7 @@
                 <a:ea typeface="Aptos" pitchFamily="34" charset="-122"/>
                 <a:cs typeface="Aptos" pitchFamily="34" charset="-120"/>
               </a:rPr>
-              <a:t>Your first 5-minute win, then by app</a:t>
+              <a:t>1.2  Prompt + first win · 60m</a:t>
             </a:r>
             <a:endParaRPr lang="en-US" sz="1200" dirty="0"/>
           </a:p>
@@ -15747,7 +23481,7 @@
         </p:nvSpPr>
         <p:spPr>
           <a:xfrm>
-            <a:off x="1133856" y="5486400"/>
+            <a:off x="1133856" y="5182000"/>
             <a:ext cx="128016" cy="128016"/>
           </a:xfrm>
           <a:prstGeom prst="ellipse">
@@ -15767,7 +23501,7 @@
         </p:nvSpPr>
         <p:spPr>
           <a:xfrm>
-            <a:off x="1371600" y="5394960"/>
+            <a:off x="1371600" y="5090560"/>
             <a:ext cx="2724912" cy="402336"/>
           </a:xfrm>
           <a:prstGeom prst="rect">
@@ -15795,7 +23529,69 @@
                 <a:ea typeface="Aptos" pitchFamily="34" charset="-122"/>
                 <a:cs typeface="Aptos" pitchFamily="34" charset="-120"/>
               </a:rPr>
-              <a:t>A second set of eyes on your work</a:t>
+              <a:t>1.3  By app · 60m</a:t>
+            </a:r>
+            <a:endParaRPr lang="en-US" sz="1200" dirty="0"/>
+          </a:p>
+        </p:txBody>
+      </p:sp>
+      <p:sp>
+        <p:nvSpPr>
+          <p:cNvPr id="46" name="Shape 14"/>
+          <p:cNvSpPr/>
+          <p:nvPr/>
+        </p:nvSpPr>
+        <p:spPr>
+          <a:xfrm>
+            <a:off x="1133856" y="5487000"/>
+            <a:ext cx="128016" cy="128016"/>
+          </a:xfrm>
+          <a:prstGeom prst="ellipse">
+            <a:avLst/>
+          </a:prstGeom>
+          <a:solidFill>
+            <a:srgbClr val="2D6CDF"/>
+          </a:solidFill>
+          <a:ln/>
+        </p:spPr>
+      </p:sp>
+      <p:sp>
+        <p:nvSpPr>
+          <p:cNvPr id="47" name="Text 15"/>
+          <p:cNvSpPr/>
+          <p:nvPr/>
+        </p:nvSpPr>
+        <p:spPr>
+          <a:xfrm>
+            <a:off x="1371600" y="5395560"/>
+            <a:ext cx="2724912" cy="402336"/>
+          </a:xfrm>
+          <a:prstGeom prst="rect">
+            <a:avLst/>
+          </a:prstGeom>
+          <a:noFill/>
+          <a:ln/>
+        </p:spPr>
+        <p:txBody>
+          <a:bodyPr wrap="square" lIns="0" tIns="0" rIns="0" bIns="0" rtlCol="0" anchor="t"/>
+          <a:lstStyle/>
+          <a:p>
+            <a:pPr indent="0" marL="0">
+              <a:lnSpc>
+                <a:spcPct val="104000"/>
+              </a:lnSpc>
+              <a:buNone/>
+            </a:pPr>
+            <a:r>
+              <a:rPr lang="en-US" sz="1200" dirty="0">
+                <a:solidFill>
+                  <a:srgbClr val="43507B"/>
+                </a:solidFill>
+                <a:latin typeface="Aptos" pitchFamily="34" charset="0"/>
+                <a:ea typeface="Aptos" pitchFamily="34" charset="-122"/>
+                <a:cs typeface="Aptos" pitchFamily="34" charset="-120"/>
+              </a:rPr>
+              <a:t>1.4  Morning brief · 30m</a:t>
             </a:r>
             <a:endParaRPr lang="en-US" sz="1200" dirty="0"/>
           </a:p>
@@ -16025,7 +23821,7 @@
                 <a:ea typeface="Aptos" pitchFamily="34" charset="-122"/>
                 <a:cs typeface="Aptos" pitchFamily="34" charset="-120"/>
               </a:rPr>
-              <a:t>Premium reasoning agents</a:t>
+              <a:t>One core session · one optional</a:t>
             </a:r>
             <a:endParaRPr lang="en-US" sz="1300" dirty="0"/>
           </a:p>
@@ -16087,7 +23883,7 @@
                 <a:ea typeface="Aptos" pitchFamily="34" charset="-122"/>
                 <a:cs typeface="Aptos" pitchFamily="34" charset="-120"/>
               </a:rPr>
-              <a:t>Researcher: your strategy analyst</a:t>
+              <a:t>2.1  Researcher + Analyst · 60m</a:t>
             </a:r>
             <a:endParaRPr lang="en-US" sz="1200" dirty="0"/>
           </a:p>
@@ -16149,69 +23945,7 @@
                 <a:ea typeface="Aptos" pitchFamily="34" charset="-122"/>
                 <a:cs typeface="Aptos" pitchFamily="34" charset="-120"/>
               </a:rPr>
-              <a:t>Analyst: your data scientist</a:t>
-            </a:r>
-            <a:endParaRPr lang="en-US" sz="1200" dirty="0"/>
-          </a:p>
-        </p:txBody>
-      </p:sp>
-      <p:sp>
-        <p:nvSpPr>
-          <p:cNvPr id="29" name="Shape 27"/>
-          <p:cNvSpPr/>
-          <p:nvPr/>
-        </p:nvSpPr>
-        <p:spPr>
-          <a:xfrm>
-            <a:off x="4828032" y="5212080"/>
-            <a:ext cx="128016" cy="128016"/>
-          </a:xfrm>
-          <a:prstGeom prst="ellipse">
-            <a:avLst/>
-          </a:prstGeom>
-          <a:solidFill>
-            <a:srgbClr val="7C5CFC"/>
-          </a:solidFill>
-          <a:ln/>
-        </p:spPr>
-      </p:sp>
-      <p:sp>
-        <p:nvSpPr>
-          <p:cNvPr id="30" name="Text 28"/>
-          <p:cNvSpPr/>
-          <p:nvPr/>
-        </p:nvSpPr>
-        <p:spPr>
-          <a:xfrm>
-            <a:off x="5065776" y="5120640"/>
-            <a:ext cx="2724912" cy="402336"/>
-          </a:xfrm>
-          <a:prstGeom prst="rect">
-            <a:avLst/>
-          </a:prstGeom>
-          <a:noFill/>
-          <a:ln/>
-        </p:spPr>
-        <p:txBody>
-          <a:bodyPr wrap="square" lIns="0" tIns="0" rIns="0" bIns="0" rtlCol="0" anchor="t"/>
-          <a:lstStyle/>
-          <a:p>
-            <a:pPr indent="0" marL="0">
-              <a:lnSpc>
-                <a:spcPct val="104000"/>
-              </a:lnSpc>
-              <a:buNone/>
-            </a:pPr>
-            <a:r>
-              <a:rPr lang="en-US" sz="1200" dirty="0">
-                <a:solidFill>
-                  <a:srgbClr val="43507B"/>
-                </a:solidFill>
-                <a:latin typeface="Aptos" pitchFamily="34" charset="0"/>
-                <a:ea typeface="Aptos" pitchFamily="34" charset="-122"/>
-                <a:cs typeface="Aptos" pitchFamily="34" charset="-120"/>
-              </a:rPr>
-              <a:t>Board-ready thinking in minutes</a:t>
+              <a:t>2.2  Copilot Notebooks · 30m</a:t>
             </a:r>
             <a:endParaRPr lang="en-US" sz="1200" dirty="0"/>
           </a:p>
@@ -16441,7 +24175,7 @@
                 <a:ea typeface="Aptos" pitchFamily="34" charset="-122"/>
                 <a:cs typeface="Aptos" pitchFamily="34" charset="-120"/>
               </a:rPr>
-              <a:t>Copilot that comes to you</a:t>
+              <a:t>Two core sessions · one optional</a:t>
             </a:r>
             <a:endParaRPr lang="en-US" sz="1300" dirty="0"/>
           </a:p>
@@ -16503,7 +24237,7 @@
                 <a:ea typeface="Aptos" pitchFamily="34" charset="-122"/>
                 <a:cs typeface="Aptos" pitchFamily="34" charset="-120"/>
               </a:rPr>
-              <a:t>Personalize it to sound like you</a:t>
+              <a:t>3.1  Chief of Staff agent · 60m</a:t>
             </a:r>
             <a:endParaRPr lang="en-US" sz="1200" dirty="0"/>
           </a:p>
@@ -16565,7 +24299,7 @@
                 <a:ea typeface="Aptos" pitchFamily="34" charset="-122"/>
                 <a:cs typeface="Aptos" pitchFamily="34" charset="-120"/>
               </a:rPr>
-              <a:t>Build a Chief of Staff agent</a:t>
+              <a:t>3.2  More agents · 30m</a:t>
             </a:r>
             <a:endParaRPr lang="en-US" sz="1200" dirty="0"/>
           </a:p>
@@ -16627,7 +24361,7 @@
                 <a:ea typeface="Aptos" pitchFamily="34" charset="-122"/>
                 <a:cs typeface="Aptos" pitchFamily="34" charset="-120"/>
               </a:rPr>
-              <a:t>Put a morning brief on a schedule</a:t>
+              <a:t>3.3  Your assistant · 30m</a:t>
             </a:r>
             <a:endParaRPr lang="en-US" sz="1200" dirty="0"/>
           </a:p>
@@ -17311,7 +25045,7 @@
       </p:sp>
       <p:pic>
         <p:nvPicPr>
-          <p:cNvPr id="9" name="Image 0" descr="preencoded.png">    </p:cNvPr>
+          <p:cNvPr id="9" name="Image 0" descr="preencoded.png"/>
           <p:cNvPicPr>
             <a:picLocks noChangeAspect="1"/>
           </p:cNvPicPr>
@@ -17477,7 +25211,7 @@
       </p:sp>
       <p:pic>
         <p:nvPicPr>
-          <p:cNvPr id="14" name="Image 1" descr="preencoded.png">    </p:cNvPr>
+          <p:cNvPr id="14" name="Image 1" descr="preencoded.png"/>
           <p:cNvPicPr>
             <a:picLocks noChangeAspect="1"/>
           </p:cNvPicPr>
@@ -17643,7 +25377,7 @@
       </p:sp>
       <p:pic>
         <p:nvPicPr>
-          <p:cNvPr id="19" name="Image 2" descr="preencoded.png">    </p:cNvPr>
+          <p:cNvPr id="19" name="Image 2" descr="preencoded.png"/>
           <p:cNvPicPr>
             <a:picLocks noChangeAspect="1"/>
           </p:cNvPicPr>
@@ -17809,7 +25543,7 @@
       </p:sp>
       <p:pic>
         <p:nvPicPr>
-          <p:cNvPr id="24" name="Image 3" descr="preencoded.png">    </p:cNvPr>
+          <p:cNvPr id="24" name="Image 3" descr="preencoded.png"/>
           <p:cNvPicPr>
             <a:picLocks noChangeAspect="1"/>
           </p:cNvPicPr>
@@ -17984,7 +25718,7 @@
                 <a:ea typeface="Aptos" pitchFamily="34" charset="-122"/>
                 <a:cs typeface="Aptos" pitchFamily="34" charset="-120"/>
               </a:rPr>
-              <a:t>4</a:t>
+              <a:t>5</a:t>
             </a:r>
             <a:endParaRPr lang="en-US" sz="900" dirty="0"/>
           </a:p>
@@ -18224,7 +25958,7 @@
       </p:sp>
       <p:pic>
         <p:nvPicPr>
-          <p:cNvPr id="8" name="Image 0" descr="preencoded.png">    </p:cNvPr>
+          <p:cNvPr id="8" name="Image 0" descr="preencoded.png"/>
           <p:cNvPicPr>
             <a:picLocks noChangeAspect="1"/>
           </p:cNvPicPr>
@@ -18390,7 +26124,7 @@
       </p:sp>
       <p:pic>
         <p:nvPicPr>
-          <p:cNvPr id="13" name="Image 1" descr="preencoded.png">    </p:cNvPr>
+          <p:cNvPr id="13" name="Image 1" descr="preencoded.png"/>
           <p:cNvPicPr>
             <a:picLocks noChangeAspect="1"/>
           </p:cNvPicPr>
@@ -18556,7 +26290,7 @@
       </p:sp>
       <p:pic>
         <p:nvPicPr>
-          <p:cNvPr id="18" name="Image 2" descr="preencoded.png">    </p:cNvPr>
+          <p:cNvPr id="18" name="Image 2" descr="preencoded.png"/>
           <p:cNvPicPr>
             <a:picLocks noChangeAspect="1"/>
           </p:cNvPicPr>
@@ -18722,7 +26456,7 @@
       </p:sp>
       <p:pic>
         <p:nvPicPr>
-          <p:cNvPr id="23" name="Image 3" descr="preencoded.png">    </p:cNvPr>
+          <p:cNvPr id="23" name="Image 3" descr="preencoded.png"/>
           <p:cNvPicPr>
             <a:picLocks noChangeAspect="1"/>
           </p:cNvPicPr>
@@ -18983,7 +26717,7 @@
                 <a:ea typeface="Aptos" pitchFamily="34" charset="-122"/>
                 <a:cs typeface="Aptos" pitchFamily="34" charset="-120"/>
               </a:rPr>
-              <a:t>5</a:t>
+              <a:t>6</a:t>
             </a:r>
             <a:endParaRPr lang="en-US" sz="900" dirty="0"/>
           </a:p>
@@ -19262,7 +26996,7 @@
       </p:sp>
       <p:pic>
         <p:nvPicPr>
-          <p:cNvPr id="9" name="Image 0" descr="preencoded.png">    </p:cNvPr>
+          <p:cNvPr id="9" name="Image 0" descr="preencoded.png"/>
           <p:cNvPicPr>
             <a:picLocks noChangeAspect="1"/>
           </p:cNvPicPr>
@@ -19428,7 +27162,7 @@
       </p:sp>
       <p:pic>
         <p:nvPicPr>
-          <p:cNvPr id="14" name="Image 1" descr="preencoded.png">    </p:cNvPr>
+          <p:cNvPr id="14" name="Image 1" descr="preencoded.png"/>
           <p:cNvPicPr>
             <a:picLocks noChangeAspect="1"/>
           </p:cNvPicPr>
@@ -19594,7 +27328,7 @@
       </p:sp>
       <p:pic>
         <p:nvPicPr>
-          <p:cNvPr id="19" name="Image 2" descr="preencoded.png">    </p:cNvPr>
+          <p:cNvPr id="19" name="Image 2" descr="preencoded.png"/>
           <p:cNvPicPr>
             <a:picLocks noChangeAspect="1"/>
           </p:cNvPicPr>
@@ -19760,7 +27494,7 @@
       </p:sp>
       <p:pic>
         <p:nvPicPr>
-          <p:cNvPr id="24" name="Image 3" descr="preencoded.png">    </p:cNvPr>
+          <p:cNvPr id="24" name="Image 3" descr="preencoded.png"/>
           <p:cNvPicPr>
             <a:picLocks noChangeAspect="1"/>
           </p:cNvPicPr>
@@ -19896,7 +27630,7 @@
                 <a:ea typeface="Aptos" pitchFamily="34" charset="-122"/>
                 <a:cs typeface="Aptos" pitchFamily="34" charset="-120"/>
               </a:rPr>
-              <a:t>Practical move:  </a:t>
+              <a:t xml:space="preserve">Practical move:  </a:t>
             </a:r>
             <a:pPr algn="l" indent="0" marL="0">
               <a:buNone/>
@@ -19910,7 +27644,7 @@
                 <a:ea typeface="Aptos" pitchFamily="34" charset="-122"/>
                 <a:cs typeface="Aptos" pitchFamily="34" charset="-120"/>
               </a:rPr>
-              <a:t>pin the </a:t>
+              <a:t xml:space="preserve">pin the </a:t>
             </a:r>
             <a:pPr algn="l" indent="0" marL="0">
               <a:buNone/>
@@ -19945,7 +27679,7 @@
                 <a:ea typeface="Aptos" pitchFamily="34" charset="-122"/>
                 <a:cs typeface="Aptos" pitchFamily="34" charset="-120"/>
               </a:rPr>
-              <a:t> so it is one click away, and bookmark the </a:t>
+              <a:t xml:space="preserve"> so it is one click away, and bookmark the </a:t>
             </a:r>
             <a:pPr algn="l" indent="0" marL="0">
               <a:buNone/>
@@ -19980,7 +27714,7 @@
                 <a:ea typeface="Aptos" pitchFamily="34" charset="-122"/>
                 <a:cs typeface="Aptos" pitchFamily="34" charset="-120"/>
               </a:rPr>
-              <a:t> for ready-made prompts by role.</a:t>
+              <a:t xml:space="preserve"> for ready-made prompts by role.</a:t>
             </a:r>
             <a:endParaRPr lang="en-US" sz="1250" dirty="0"/>
           </a:p>
@@ -20058,7 +27792,7 @@
                 <a:ea typeface="Aptos" pitchFamily="34" charset="-122"/>
                 <a:cs typeface="Aptos" pitchFamily="34" charset="-120"/>
               </a:rPr>
-              <a:t>6</a:t>
+              <a:t>7</a:t>
             </a:r>
             <a:endParaRPr lang="en-US" sz="900" dirty="0"/>
           </a:p>
@@ -20361,7 +28095,7 @@
                 <a:ea typeface="Consolas" pitchFamily="34" charset="-122"/>
                 <a:cs typeface="Consolas" pitchFamily="34" charset="-120"/>
               </a:rPr>
-              <a:t>›_  </a:t>
+              <a:t xml:space="preserve">›_  </a:t>
             </a:r>
             <a:pPr algn="l" indent="0" marL="0">
               <a:buNone/>
@@ -20417,7 +28151,7 @@
                 <a:ea typeface="Consolas" pitchFamily="34" charset="-122"/>
                 <a:cs typeface="Consolas" pitchFamily="34" charset="-120"/>
               </a:rPr>
-              <a:t>Catch me up on my email thread with </a:t>
+              <a:t xml:space="preserve">Catch me up on my email thread with </a:t>
             </a:r>
             <a:pPr algn="l" indent="0" marL="0">
               <a:lnSpc>
@@ -20451,7 +28185,7 @@
                 <a:ea typeface="Consolas" pitchFamily="34" charset="-122"/>
                 <a:cs typeface="Consolas" pitchFamily="34" charset="-120"/>
               </a:rPr>
-              <a:t> about </a:t>
+              <a:t xml:space="preserve"> about </a:t>
             </a:r>
             <a:pPr algn="l" indent="0" marL="0">
               <a:lnSpc>
@@ -20578,7 +28312,7 @@
                 <a:ea typeface="Consolas" pitchFamily="34" charset="-122"/>
                 <a:cs typeface="Consolas" pitchFamily="34" charset="-120"/>
               </a:rPr>
-              <a:t>›_  </a:t>
+              <a:t xml:space="preserve">›_  </a:t>
             </a:r>
             <a:pPr algn="l" indent="0" marL="0">
               <a:buNone/>
@@ -20727,7 +28461,7 @@
                 <a:ea typeface="Consolas" pitchFamily="34" charset="-122"/>
                 <a:cs typeface="Consolas" pitchFamily="34" charset="-120"/>
               </a:rPr>
-              <a:t>›_  </a:t>
+              <a:t xml:space="preserve">›_  </a:t>
             </a:r>
             <a:pPr algn="l" indent="0" marL="0">
               <a:buNone/>
@@ -20927,7 +28661,7 @@
                 <a:ea typeface="Aptos" pitchFamily="34" charset="-122"/>
                 <a:cs typeface="Aptos" pitchFamily="34" charset="-120"/>
               </a:rPr>
-              <a:t>7</a:t>
+              <a:t>9</a:t>
             </a:r>
             <a:endParaRPr lang="en-US" sz="900" dirty="0"/>
           </a:p>
@@ -21226,7 +28960,7 @@
       </p:sp>
       <p:pic>
         <p:nvPicPr>
-          <p:cNvPr id="10" name="Image 0" descr="preencoded.png">    </p:cNvPr>
+          <p:cNvPr id="10" name="Image 0" descr="preencoded.png"/>
           <p:cNvPicPr>
             <a:picLocks noChangeAspect="1"/>
           </p:cNvPicPr>
@@ -21448,7 +29182,7 @@
       </p:sp>
       <p:pic>
         <p:nvPicPr>
-          <p:cNvPr id="17" name="Image 1" descr="preencoded.png">    </p:cNvPr>
+          <p:cNvPr id="17" name="Image 1" descr="preencoded.png"/>
           <p:cNvPicPr>
             <a:picLocks noChangeAspect="1"/>
           </p:cNvPicPr>
@@ -21670,7 +29404,7 @@
       </p:sp>
       <p:pic>
         <p:nvPicPr>
-          <p:cNvPr id="24" name="Image 2" descr="preencoded.png">    </p:cNvPr>
+          <p:cNvPr id="24" name="Image 2" descr="preencoded.png"/>
           <p:cNvPicPr>
             <a:picLocks noChangeAspect="1"/>
           </p:cNvPicPr>
@@ -21892,7 +29626,7 @@
       </p:sp>
       <p:pic>
         <p:nvPicPr>
-          <p:cNvPr id="31" name="Image 3" descr="preencoded.png">    </p:cNvPr>
+          <p:cNvPr id="31" name="Image 3" descr="preencoded.png"/>
           <p:cNvPicPr>
             <a:picLocks noChangeAspect="1"/>
           </p:cNvPicPr>
@@ -22121,7 +29855,7 @@
                 <a:ea typeface="Consolas" pitchFamily="34" charset="-122"/>
                 <a:cs typeface="Consolas" pitchFamily="34" charset="-120"/>
               </a:rPr>
-              <a:t>Better:  </a:t>
+              <a:t xml:space="preserve">Better:  </a:t>
             </a:r>
             <a:pPr algn="l" indent="0" marL="0">
               <a:lnSpc>
@@ -22138,7 +29872,7 @@
                 <a:ea typeface="Consolas" pitchFamily="34" charset="-122"/>
                 <a:cs typeface="Consolas" pitchFamily="34" charset="-120"/>
               </a:rPr>
-              <a:t>Draft a short update for my leadership team </a:t>
+              <a:t xml:space="preserve">Draft a short update for my leadership team </a:t>
             </a:r>
             <a:pPr algn="l" indent="0" marL="0">
               <a:lnSpc>
@@ -22172,7 +29906,7 @@
                 <a:ea typeface="Consolas" pitchFamily="34" charset="-122"/>
                 <a:cs typeface="Consolas" pitchFamily="34" charset="-120"/>
               </a:rPr>
-              <a:t> from the notes of yesterday's vendor meeting </a:t>
+              <a:t xml:space="preserve"> from the notes of yesterday's vendor meeting </a:t>
             </a:r>
             <a:pPr algn="l" indent="0" marL="0">
               <a:lnSpc>
@@ -22206,7 +29940,7 @@
                 <a:ea typeface="Consolas" pitchFamily="34" charset="-122"/>
                 <a:cs typeface="Consolas" pitchFamily="34" charset="-120"/>
               </a:rPr>
-              <a:t>. Plain language, five bullets, decisions and next steps only </a:t>
+              <a:t xml:space="preserve">. Plain language, five bullets, decisions and next steps only </a:t>
             </a:r>
             <a:pPr algn="l" indent="0" marL="0">
               <a:lnSpc>
@@ -22318,7 +30052,7 @@
                 <a:ea typeface="Aptos" pitchFamily="34" charset="-122"/>
                 <a:cs typeface="Aptos" pitchFamily="34" charset="-120"/>
               </a:rPr>
-              <a:t>8</a:t>
+              <a:t>10</a:t>
             </a:r>
             <a:endParaRPr lang="en-US" sz="900" dirty="0"/>
           </a:p>

--- a/education playground/assets/executive copilot playbook/Copilot-Premium-Executive-Training.pptx
+++ b/education playground/assets/executive copilot playbook/Copilot-Premium-Executive-Training.pptx
@@ -30,6 +30,7 @@
     <p:sldId id="274" r:id="rId20"/>
     <p:sldId id="281" r:id="rId28"/>
     <p:sldId id="282" r:id="rId33"/>
+    <p:sldId id="283" r:id="rId34"/>
     <p:sldId id="275" r:id="rId21"/>
   </p:sldIdLst>
   <p:notesMasterIdLst>
@@ -22967,6 +22968,1543 @@
               </a:rPr>
               <a:t>6</a:t>
             </a:r>
+          </a:p>
+        </p:txBody>
+      </p:sp>
+    </p:spTree>
+  </p:cSld>
+  <p:clrMapOvr>
+    <a:masterClrMapping/>
+  </p:clrMapOvr>
+</p:sld>
+</file>
+
+<file path=ppt/slides/slide28.xml><?xml version="1.0" encoding="utf-8"?>
+<p:sld xmlns:a="http://schemas.openxmlformats.org/drawingml/2006/main" xmlns:r="http://schemas.openxmlformats.org/officeDocument/2006/relationships" xmlns:p="http://schemas.openxmlformats.org/presentationml/2006/main">
+  <p:cSld name="Slide 3">
+    <p:bg>
+      <p:bgPr>
+        <a:solidFill>
+          <a:srgbClr val="F4F7FE"/>
+        </a:solidFill>
+      </p:bgPr>
+    </p:bg>
+    <p:spTree>
+      <p:nvGrpSpPr>
+        <p:cNvPr id="1" name=""/>
+        <p:cNvGrpSpPr/>
+        <p:nvPr/>
+      </p:nvGrpSpPr>
+      <p:grpSpPr>
+        <a:xfrm>
+          <a:off x="0" y="0"/>
+          <a:ext cx="0" cy="0"/>
+          <a:chOff x="0" y="0"/>
+          <a:chExt cx="0" cy="0"/>
+        </a:xfrm>
+      </p:grpSpPr>
+      <p:sp>
+        <p:nvSpPr>
+          <p:cNvPr id="2" name="Text 0"/>
+          <p:cNvSpPr/>
+          <p:nvPr/>
+        </p:nvSpPr>
+        <p:spPr>
+          <a:xfrm>
+            <a:off x="822960" y="566928"/>
+            <a:ext cx="8229600" cy="274320"/>
+          </a:xfrm>
+          <a:prstGeom prst="rect">
+            <a:avLst/>
+          </a:prstGeom>
+          <a:noFill/>
+          <a:ln/>
+        </p:spPr>
+        <p:txBody>
+          <a:bodyPr wrap="square" lIns="0" tIns="0" rIns="0" bIns="0" rtlCol="0" anchor="ctr"/>
+          <a:lstStyle/>
+          <a:p>
+            <a:pPr algn="l" indent="0" marL="0">
+              <a:buNone/>
+            </a:pPr>
+            <a:r>
+              <a:rPr lang="en-US" sz="1200" b="1" spc="300" kern="0" dirty="0">
+                <a:solidFill>
+                  <a:srgbClr val="2D6CDF"/>
+                </a:solidFill>
+                <a:latin typeface="Aptos" pitchFamily="34" charset="0"/>
+                <a:ea typeface="Aptos" pitchFamily="34" charset="-122"/>
+                <a:cs typeface="Aptos" pitchFamily="34" charset="-120"/>
+              </a:rPr>
+              <a:t>HOW TO BRING THIS TO YOUR LEADERS</a:t>
+            </a:r>
+            <a:endParaRPr lang="en-US" sz="1200" dirty="0"/>
+          </a:p>
+        </p:txBody>
+      </p:sp>
+      <p:sp>
+        <p:nvSpPr>
+          <p:cNvPr id="3" name="Text 1"/>
+          <p:cNvSpPr/>
+          <p:nvPr/>
+        </p:nvSpPr>
+        <p:spPr>
+          <a:xfrm>
+            <a:off x="786384" y="868680"/>
+            <a:ext cx="10972800" cy="594360"/>
+          </a:xfrm>
+          <a:prstGeom prst="rect">
+            <a:avLst/>
+          </a:prstGeom>
+          <a:noFill/>
+          <a:ln/>
+        </p:spPr>
+        <p:txBody>
+          <a:bodyPr wrap="square" lIns="0" tIns="0" rIns="0" bIns="0" rtlCol="0" anchor="ctr"/>
+          <a:lstStyle/>
+          <a:p>
+            <a:pPr indent="0" marL="0">
+              <a:buNone/>
+            </a:pPr>
+            <a:r>
+              <a:rPr lang="en-US" sz="3100" b="1" dirty="0">
+                <a:solidFill>
+                  <a:srgbClr val="0B1437"/>
+                </a:solidFill>
+                <a:latin typeface="Aptos" pitchFamily="34" charset="0"/>
+                <a:ea typeface="Aptos" pitchFamily="34" charset="-122"/>
+                <a:cs typeface="Aptos" pitchFamily="34" charset="-120"/>
+              </a:rPr>
+              <a:t>Three ways to run this</a:t>
+            </a:r>
+            <a:endParaRPr lang="en-US" sz="3100" dirty="0"/>
+          </a:p>
+        </p:txBody>
+      </p:sp>
+      <p:sp>
+        <p:nvSpPr>
+          <p:cNvPr id="4" name="Text 2"/>
+          <p:cNvSpPr/>
+          <p:nvPr/>
+        </p:nvSpPr>
+        <p:spPr>
+          <a:xfrm>
+            <a:off x="822960" y="1481328"/>
+            <a:ext cx="10607040" cy="365760"/>
+          </a:xfrm>
+          <a:prstGeom prst="rect">
+            <a:avLst/>
+          </a:prstGeom>
+          <a:noFill/>
+          <a:ln/>
+        </p:spPr>
+        <p:txBody>
+          <a:bodyPr wrap="square" lIns="0" tIns="0" rIns="0" bIns="0" rtlCol="0" anchor="ctr"/>
+          <a:lstStyle/>
+          <a:p>
+            <a:pPr indent="0" marL="0">
+              <a:buNone/>
+            </a:pPr>
+            <a:r>
+              <a:rPr lang="en-US" sz="1400" dirty="0">
+                <a:solidFill>
+                  <a:srgbClr val="43507B"/>
+                </a:solidFill>
+                <a:latin typeface="Aptos" pitchFamily="34" charset="0"/>
+                <a:ea typeface="Aptos" pitchFamily="34" charset="-122"/>
+                <a:cs typeface="Aptos" pitchFamily="34" charset="-120"/>
+              </a:rPr>
+              <a:t>Same framework, three speeds. You decide who carries it, and every asset is yours to download.</a:t>
+            </a:r>
+            <a:endParaRPr lang="en-US" sz="1400" dirty="0"/>
+          </a:p>
+        </p:txBody>
+      </p:sp>
+      <p:sp>
+        <p:nvSpPr>
+          <p:cNvPr id="5" name="Shape 3"/>
+          <p:cNvSpPr/>
+          <p:nvPr/>
+        </p:nvSpPr>
+        <p:spPr>
+          <a:xfrm>
+            <a:off x="822960" y="2834640"/>
+            <a:ext cx="3529584" cy="3108960"/>
+          </a:xfrm>
+          <a:prstGeom prst="roundRect">
+            <a:avLst>
+              <a:gd name="adj" fmla="val 2941"/>
+            </a:avLst>
+          </a:prstGeom>
+          <a:solidFill>
+            <a:srgbClr val="FFFFFF"/>
+          </a:solidFill>
+          <a:ln w="12700">
+            <a:solidFill>
+              <a:srgbClr val="E4E9F7"/>
+            </a:solidFill>
+            <a:prstDash val="solid"/>
+          </a:ln>
+          <a:effectLst>
+            <a:outerShdw sx="100000" sy="100000" kx="0" ky="0" algn="bl" rotWithShape="0" blurRad="114300" dist="38100" dir="5400000">
+              <a:srgbClr val="0B1437">
+                <a:alpha val="10000"/>
+              </a:srgbClr>
+            </a:outerShdw>
+          </a:effectLst>
+        </p:spPr>
+      </p:sp>
+      <p:sp>
+        <p:nvSpPr>
+          <p:cNvPr id="6" name="Shape 4"/>
+          <p:cNvSpPr/>
+          <p:nvPr/>
+        </p:nvSpPr>
+        <p:spPr>
+          <a:xfrm>
+            <a:off x="822960" y="2834640"/>
+            <a:ext cx="3529584" cy="128016"/>
+          </a:xfrm>
+          <a:prstGeom prst="rect">
+            <a:avLst/>
+          </a:prstGeom>
+          <a:solidFill>
+            <a:srgbClr val="2D6CDF"/>
+          </a:solidFill>
+          <a:ln/>
+        </p:spPr>
+      </p:sp>
+      <p:sp>
+        <p:nvSpPr>
+          <p:cNvPr id="7" name="Shape 5"/>
+          <p:cNvSpPr/>
+          <p:nvPr/>
+        </p:nvSpPr>
+        <p:spPr>
+          <a:xfrm>
+            <a:off x="1097280" y="3200400"/>
+            <a:ext cx="658368" cy="658368"/>
+          </a:xfrm>
+          <a:prstGeom prst="ellipse">
+            <a:avLst/>
+          </a:prstGeom>
+          <a:solidFill>
+            <a:srgbClr val="2D6CDF"/>
+          </a:solidFill>
+          <a:ln/>
+        </p:spPr>
+      </p:sp>
+      <p:sp>
+        <p:nvSpPr>
+          <p:cNvPr id="8" name="Text 6"/>
+          <p:cNvSpPr/>
+          <p:nvPr/>
+        </p:nvSpPr>
+        <p:spPr>
+          <a:xfrm>
+            <a:off x="1097280" y="3200400"/>
+            <a:ext cx="658368" cy="658368"/>
+          </a:xfrm>
+          <a:prstGeom prst="rect">
+            <a:avLst/>
+          </a:prstGeom>
+          <a:noFill/>
+          <a:ln/>
+        </p:spPr>
+        <p:txBody>
+          <a:bodyPr wrap="square" lIns="0" tIns="0" rIns="0" bIns="0" rtlCol="0" anchor="ctr"/>
+          <a:lstStyle/>
+          <a:p>
+            <a:pPr algn="ctr" indent="0" marL="0">
+              <a:buNone/>
+            </a:pPr>
+            <a:r>
+              <a:rPr lang="en-US" sz="3000" b="1" dirty="0">
+                <a:solidFill>
+                  <a:srgbClr val="FFFFFF"/>
+                </a:solidFill>
+                <a:latin typeface="Aptos" pitchFamily="34" charset="0"/>
+                <a:ea typeface="Aptos" pitchFamily="34" charset="-122"/>
+                <a:cs typeface="Aptos" pitchFamily="34" charset="-120"/>
+              </a:rPr>
+              <a:t>1</a:t>
+            </a:r>
+            <a:endParaRPr lang="en-US" sz="3000" dirty="0"/>
+          </a:p>
+        </p:txBody>
+      </p:sp>
+      <p:sp>
+        <p:nvSpPr>
+          <p:cNvPr id="9" name="Text 7"/>
+          <p:cNvSpPr/>
+          <p:nvPr/>
+        </p:nvSpPr>
+        <p:spPr>
+          <a:xfrm>
+            <a:off x="1920240" y="3236976"/>
+            <a:ext cx="2249424" cy="274320"/>
+          </a:xfrm>
+          <a:prstGeom prst="rect">
+            <a:avLst/>
+          </a:prstGeom>
+          <a:noFill/>
+          <a:ln/>
+        </p:spPr>
+        <p:txBody>
+          <a:bodyPr wrap="square" lIns="0" tIns="0" rIns="0" bIns="0" rtlCol="0" anchor="ctr"/>
+          <a:lstStyle/>
+          <a:p>
+            <a:pPr indent="0" marL="0">
+              <a:buNone/>
+            </a:pPr>
+            <a:r>
+              <a:rPr lang="en-US" sz="1200" b="1" spc="200" kern="0" dirty="0">
+                <a:solidFill>
+                  <a:srgbClr val="2D6CDF"/>
+                </a:solidFill>
+                <a:latin typeface="Aptos" pitchFamily="34" charset="0"/>
+                <a:ea typeface="Aptos" pitchFamily="34" charset="-122"/>
+                <a:cs typeface="Aptos" pitchFamily="34" charset="-120"/>
+              </a:rPr>
+              <a:t>MODEL 1</a:t>
+            </a:r>
+            <a:endParaRPr lang="en-US" sz="1200" dirty="0"/>
+          </a:p>
+        </p:txBody>
+      </p:sp>
+      <p:sp>
+        <p:nvSpPr>
+          <p:cNvPr id="10" name="Text 8"/>
+          <p:cNvSpPr/>
+          <p:nvPr/>
+        </p:nvSpPr>
+        <p:spPr>
+          <a:xfrm>
+            <a:off x="1920240" y="3493008"/>
+            <a:ext cx="2249424" cy="365760"/>
+          </a:xfrm>
+          <a:prstGeom prst="rect">
+            <a:avLst/>
+          </a:prstGeom>
+          <a:noFill/>
+          <a:ln/>
+        </p:spPr>
+        <p:txBody>
+          <a:bodyPr wrap="square" lIns="0" tIns="0" rIns="0" bIns="0" rtlCol="0" anchor="ctr"/>
+          <a:lstStyle/>
+          <a:p>
+            <a:pPr indent="0" marL="0">
+              <a:buNone/>
+            </a:pPr>
+            <a:r>
+              <a:rPr lang="en-US" sz="1900" b="1" dirty="0">
+                <a:solidFill>
+                  <a:srgbClr val="0B1437"/>
+                </a:solidFill>
+                <a:latin typeface="Aptos" pitchFamily="34" charset="0"/>
+                <a:ea typeface="Aptos" pitchFamily="34" charset="-122"/>
+                <a:cs typeface="Aptos" pitchFamily="34" charset="-120"/>
+              </a:rPr>
+              <a:t>Microsoft-led</a:t>
+            </a:r>
+            <a:endParaRPr lang="en-US" sz="1900" dirty="0"/>
+          </a:p>
+        </p:txBody>
+      </p:sp>
+      <p:sp>
+        <p:nvSpPr>
+          <p:cNvPr id="11" name="Text 9"/>
+          <p:cNvSpPr/>
+          <p:nvPr/>
+        </p:nvSpPr>
+        <p:spPr>
+          <a:xfrm>
+            <a:off x="1097280" y="4114800"/>
+            <a:ext cx="2980944" cy="292608"/>
+          </a:xfrm>
+          <a:prstGeom prst="rect">
+            <a:avLst/>
+          </a:prstGeom>
+          <a:noFill/>
+          <a:ln/>
+        </p:spPr>
+        <p:txBody>
+          <a:bodyPr wrap="square" lIns="0" tIns="0" rIns="0" bIns="0" rtlCol="0" anchor="ctr"/>
+          <a:lstStyle/>
+          <a:p>
+            <a:pPr indent="0" marL="0">
+              <a:buNone/>
+            </a:pPr>
+            <a:r>
+              <a:rPr lang="en-US" sz="1300" b="1" i="1" dirty="0">
+                <a:solidFill>
+                  <a:srgbClr val="8A93B8"/>
+                </a:solidFill>
+                <a:latin typeface="Aptos" pitchFamily="34" charset="0"/>
+                <a:ea typeface="Aptos" pitchFamily="34" charset="-122"/>
+                <a:cs typeface="Aptos" pitchFamily="34" charset="-120"/>
+              </a:rPr>
+              <a:t>The fastest, most guided path</a:t>
+            </a:r>
+            <a:endParaRPr lang="en-US" sz="1300" dirty="0"/>
+          </a:p>
+        </p:txBody>
+      </p:sp>
+      <p:sp>
+        <p:nvSpPr>
+          <p:cNvPr id="12" name="Shape 10"/>
+          <p:cNvSpPr/>
+          <p:nvPr/>
+        </p:nvSpPr>
+        <p:spPr>
+          <a:xfrm>
+            <a:off x="1133856" y="4572000"/>
+            <a:ext cx="128016" cy="128016"/>
+          </a:xfrm>
+          <a:prstGeom prst="ellipse">
+            <a:avLst/>
+          </a:prstGeom>
+          <a:solidFill>
+            <a:srgbClr val="2D6CDF"/>
+          </a:solidFill>
+          <a:ln/>
+        </p:spPr>
+      </p:sp>
+      <p:sp>
+        <p:nvSpPr>
+          <p:cNvPr id="13" name="Text 11"/>
+          <p:cNvSpPr/>
+          <p:nvPr/>
+        </p:nvSpPr>
+        <p:spPr>
+          <a:xfrm>
+            <a:off x="1371600" y="4480560"/>
+            <a:ext cx="2724912" cy="402336"/>
+          </a:xfrm>
+          <a:prstGeom prst="rect">
+            <a:avLst/>
+          </a:prstGeom>
+          <a:noFill/>
+          <a:ln/>
+        </p:spPr>
+        <p:txBody>
+          <a:bodyPr wrap="square" lIns="0" tIns="0" rIns="0" bIns="0" rtlCol="0" anchor="t"/>
+          <a:lstStyle/>
+          <a:p>
+            <a:pPr indent="0" marL="0">
+              <a:lnSpc>
+                <a:spcPct val="104000"/>
+              </a:lnSpc>
+              <a:buNone/>
+            </a:pPr>
+            <a:r>
+              <a:rPr lang="en-US" sz="1200" dirty="0">
+                <a:solidFill>
+                  <a:srgbClr val="43507B"/>
+                </a:solidFill>
+                <a:latin typeface="Aptos" pitchFamily="34" charset="0"/>
+                <a:ea typeface="Aptos" pitchFamily="34" charset="-122"/>
+                <a:cs typeface="Aptos" pitchFamily="34" charset="-120"/>
+              </a:rPr>
+              <a:t>Microsoft runs every session</a:t>
+            </a:r>
+            <a:endParaRPr lang="en-US" sz="1200" dirty="0"/>
+          </a:p>
+        </p:txBody>
+      </p:sp>
+      <p:sp>
+        <p:nvSpPr>
+          <p:cNvPr id="14" name="Shape 12"/>
+          <p:cNvSpPr/>
+          <p:nvPr/>
+        </p:nvSpPr>
+        <p:spPr>
+          <a:xfrm>
+            <a:off x="1133856" y="4877000"/>
+            <a:ext cx="128016" cy="128016"/>
+          </a:xfrm>
+          <a:prstGeom prst="ellipse">
+            <a:avLst/>
+          </a:prstGeom>
+          <a:solidFill>
+            <a:srgbClr val="2D6CDF"/>
+          </a:solidFill>
+          <a:ln/>
+        </p:spPr>
+      </p:sp>
+      <p:sp>
+        <p:nvSpPr>
+          <p:cNvPr id="15" name="Text 13"/>
+          <p:cNvSpPr/>
+          <p:nvPr/>
+        </p:nvSpPr>
+        <p:spPr>
+          <a:xfrm>
+            <a:off x="1371600" y="4785560"/>
+            <a:ext cx="2724912" cy="402336"/>
+          </a:xfrm>
+          <a:prstGeom prst="rect">
+            <a:avLst/>
+          </a:prstGeom>
+          <a:noFill/>
+          <a:ln/>
+        </p:spPr>
+        <p:txBody>
+          <a:bodyPr wrap="square" lIns="0" tIns="0" rIns="0" bIns="0" rtlCol="0" anchor="t"/>
+          <a:lstStyle/>
+          <a:p>
+            <a:pPr indent="0" marL="0">
+              <a:lnSpc>
+                <a:spcPct val="104000"/>
+              </a:lnSpc>
+              <a:buNone/>
+            </a:pPr>
+            <a:r>
+              <a:rPr lang="en-US" sz="1200" dirty="0">
+                <a:solidFill>
+                  <a:srgbClr val="43507B"/>
+                </a:solidFill>
+                <a:latin typeface="Aptos" pitchFamily="34" charset="0"/>
+                <a:ea typeface="Aptos" pitchFamily="34" charset="-122"/>
+                <a:cs typeface="Aptos" pitchFamily="34" charset="-120"/>
+              </a:rPr>
+              <a:t>With your leaders, start to finish</a:t>
+            </a:r>
+            <a:endParaRPr lang="en-US" sz="1200" dirty="0"/>
+          </a:p>
+        </p:txBody>
+      </p:sp>
+      <p:sp>
+        <p:nvSpPr>
+          <p:cNvPr id="16" name="Shape 14"/>
+          <p:cNvSpPr/>
+          <p:nvPr/>
+        </p:nvSpPr>
+        <p:spPr>
+          <a:xfrm>
+            <a:off x="1133856" y="5182000"/>
+            <a:ext cx="128016" cy="128016"/>
+          </a:xfrm>
+          <a:prstGeom prst="ellipse">
+            <a:avLst/>
+          </a:prstGeom>
+          <a:solidFill>
+            <a:srgbClr val="2D6CDF"/>
+          </a:solidFill>
+          <a:ln/>
+        </p:spPr>
+      </p:sp>
+      <p:sp>
+        <p:nvSpPr>
+          <p:cNvPr id="17" name="Text 15"/>
+          <p:cNvSpPr/>
+          <p:nvPr/>
+        </p:nvSpPr>
+        <p:spPr>
+          <a:xfrm>
+            <a:off x="1371600" y="5090560"/>
+            <a:ext cx="2724912" cy="402336"/>
+          </a:xfrm>
+          <a:prstGeom prst="rect">
+            <a:avLst/>
+          </a:prstGeom>
+          <a:noFill/>
+          <a:ln/>
+        </p:spPr>
+        <p:txBody>
+          <a:bodyPr wrap="square" lIns="0" tIns="0" rIns="0" bIns="0" rtlCol="0" anchor="t"/>
+          <a:lstStyle/>
+          <a:p>
+            <a:pPr indent="0" marL="0">
+              <a:lnSpc>
+                <a:spcPct val="104000"/>
+              </a:lnSpc>
+              <a:buNone/>
+            </a:pPr>
+            <a:r>
+              <a:rPr lang="en-US" sz="1200" dirty="0">
+                <a:solidFill>
+                  <a:srgbClr val="43507B"/>
+                </a:solidFill>
+                <a:latin typeface="Aptos" pitchFamily="34" charset="0"/>
+                <a:ea typeface="Aptos" pitchFamily="34" charset="-122"/>
+                <a:cs typeface="Aptos" pitchFamily="34" charset="-120"/>
+              </a:rPr>
+              <a:t>You host the room, we run it</a:t>
+            </a:r>
+            <a:endParaRPr lang="en-US" sz="1200" dirty="0"/>
+          </a:p>
+        </p:txBody>
+      </p:sp>
+      <p:sp>
+        <p:nvSpPr>
+          <p:cNvPr id="46" name="Shape 14"/>
+          <p:cNvSpPr/>
+          <p:nvPr/>
+        </p:nvSpPr>
+        <p:spPr>
+          <a:xfrm>
+            <a:off x="1133856" y="5487000"/>
+            <a:ext cx="128016" cy="128016"/>
+          </a:xfrm>
+          <a:prstGeom prst="ellipse">
+            <a:avLst/>
+          </a:prstGeom>
+          <a:solidFill>
+            <a:srgbClr val="2D6CDF"/>
+          </a:solidFill>
+          <a:ln/>
+        </p:spPr>
+      </p:sp>
+      <p:sp>
+        <p:nvSpPr>
+          <p:cNvPr id="47" name="Text 15"/>
+          <p:cNvSpPr/>
+          <p:nvPr/>
+        </p:nvSpPr>
+        <p:spPr>
+          <a:xfrm>
+            <a:off x="1371600" y="5395560"/>
+            <a:ext cx="2724912" cy="402336"/>
+          </a:xfrm>
+          <a:prstGeom prst="rect">
+            <a:avLst/>
+          </a:prstGeom>
+          <a:noFill/>
+          <a:ln/>
+        </p:spPr>
+        <p:txBody>
+          <a:bodyPr wrap="square" lIns="0" tIns="0" rIns="0" bIns="0" rtlCol="0" anchor="t"/>
+          <a:lstStyle/>
+          <a:p>
+            <a:pPr indent="0" marL="0">
+              <a:lnSpc>
+                <a:spcPct val="104000"/>
+              </a:lnSpc>
+              <a:buNone/>
+            </a:pPr>
+            <a:r>
+              <a:rPr lang="en-US" sz="1200" dirty="0">
+                <a:solidFill>
+                  <a:srgbClr val="43507B"/>
+                </a:solidFill>
+                <a:latin typeface="Aptos" pitchFamily="34" charset="0"/>
+                <a:ea typeface="Aptos" pitchFamily="34" charset="-122"/>
+                <a:cs typeface="Aptos" pitchFamily="34" charset="-120"/>
+              </a:rPr>
+              <a:t>Expert-led, lowest lift on you</a:t>
+            </a:r>
+            <a:endParaRPr lang="en-US" sz="1200" dirty="0"/>
+          </a:p>
+        </p:txBody>
+      </p:sp>
+      <p:sp>
+        <p:nvSpPr>
+          <p:cNvPr id="18" name="Shape 16"/>
+          <p:cNvSpPr/>
+          <p:nvPr/>
+        </p:nvSpPr>
+        <p:spPr>
+          <a:xfrm>
+            <a:off x="4517136" y="2560320"/>
+            <a:ext cx="3529584" cy="3383280"/>
+          </a:xfrm>
+          <a:prstGeom prst="roundRect">
+            <a:avLst>
+              <a:gd name="adj" fmla="val 2703"/>
+            </a:avLst>
+          </a:prstGeom>
+          <a:solidFill>
+            <a:srgbClr val="FFFFFF"/>
+          </a:solidFill>
+          <a:ln w="12700">
+            <a:solidFill>
+              <a:srgbClr val="E4E9F7"/>
+            </a:solidFill>
+            <a:prstDash val="solid"/>
+          </a:ln>
+          <a:effectLst>
+            <a:outerShdw sx="100000" sy="100000" kx="0" ky="0" algn="bl" rotWithShape="0" blurRad="114300" dist="38100" dir="5400000">
+              <a:srgbClr val="0B1437">
+                <a:alpha val="10000"/>
+              </a:srgbClr>
+            </a:outerShdw>
+          </a:effectLst>
+        </p:spPr>
+      </p:sp>
+      <p:sp>
+        <p:nvSpPr>
+          <p:cNvPr id="19" name="Shape 17"/>
+          <p:cNvSpPr/>
+          <p:nvPr/>
+        </p:nvSpPr>
+        <p:spPr>
+          <a:xfrm>
+            <a:off x="4517136" y="2560320"/>
+            <a:ext cx="3529584" cy="128016"/>
+          </a:xfrm>
+          <a:prstGeom prst="rect">
+            <a:avLst/>
+          </a:prstGeom>
+          <a:solidFill>
+            <a:srgbClr val="7C5CFC"/>
+          </a:solidFill>
+          <a:ln/>
+        </p:spPr>
+      </p:sp>
+      <p:sp>
+        <p:nvSpPr>
+          <p:cNvPr id="20" name="Shape 18"/>
+          <p:cNvSpPr/>
+          <p:nvPr/>
+        </p:nvSpPr>
+        <p:spPr>
+          <a:xfrm>
+            <a:off x="4791456" y="2926080"/>
+            <a:ext cx="658368" cy="658368"/>
+          </a:xfrm>
+          <a:prstGeom prst="ellipse">
+            <a:avLst/>
+          </a:prstGeom>
+          <a:solidFill>
+            <a:srgbClr val="7C5CFC"/>
+          </a:solidFill>
+          <a:ln/>
+        </p:spPr>
+      </p:sp>
+      <p:sp>
+        <p:nvSpPr>
+          <p:cNvPr id="21" name="Text 19"/>
+          <p:cNvSpPr/>
+          <p:nvPr/>
+        </p:nvSpPr>
+        <p:spPr>
+          <a:xfrm>
+            <a:off x="4791456" y="2926080"/>
+            <a:ext cx="658368" cy="658368"/>
+          </a:xfrm>
+          <a:prstGeom prst="rect">
+            <a:avLst/>
+          </a:prstGeom>
+          <a:noFill/>
+          <a:ln/>
+        </p:spPr>
+        <p:txBody>
+          <a:bodyPr wrap="square" lIns="0" tIns="0" rIns="0" bIns="0" rtlCol="0" anchor="ctr"/>
+          <a:lstStyle/>
+          <a:p>
+            <a:pPr algn="ctr" indent="0" marL="0">
+              <a:buNone/>
+            </a:pPr>
+            <a:r>
+              <a:rPr lang="en-US" sz="3000" b="1" dirty="0">
+                <a:solidFill>
+                  <a:srgbClr val="FFFFFF"/>
+                </a:solidFill>
+                <a:latin typeface="Aptos" pitchFamily="34" charset="0"/>
+                <a:ea typeface="Aptos" pitchFamily="34" charset="-122"/>
+                <a:cs typeface="Aptos" pitchFamily="34" charset="-120"/>
+              </a:rPr>
+              <a:t>2</a:t>
+            </a:r>
+            <a:endParaRPr lang="en-US" sz="3000" dirty="0"/>
+          </a:p>
+        </p:txBody>
+      </p:sp>
+      <p:sp>
+        <p:nvSpPr>
+          <p:cNvPr id="22" name="Text 20"/>
+          <p:cNvSpPr/>
+          <p:nvPr/>
+        </p:nvSpPr>
+        <p:spPr>
+          <a:xfrm>
+            <a:off x="5614416" y="2962656"/>
+            <a:ext cx="2249424" cy="274320"/>
+          </a:xfrm>
+          <a:prstGeom prst="rect">
+            <a:avLst/>
+          </a:prstGeom>
+          <a:noFill/>
+          <a:ln/>
+        </p:spPr>
+        <p:txBody>
+          <a:bodyPr wrap="square" lIns="0" tIns="0" rIns="0" bIns="0" rtlCol="0" anchor="ctr"/>
+          <a:lstStyle/>
+          <a:p>
+            <a:pPr indent="0" marL="0">
+              <a:buNone/>
+            </a:pPr>
+            <a:r>
+              <a:rPr lang="en-US" sz="1200" b="1" spc="200" kern="0" dirty="0">
+                <a:solidFill>
+                  <a:srgbClr val="7C5CFC"/>
+                </a:solidFill>
+                <a:latin typeface="Aptos" pitchFamily="34" charset="0"/>
+                <a:ea typeface="Aptos" pitchFamily="34" charset="-122"/>
+                <a:cs typeface="Aptos" pitchFamily="34" charset="-120"/>
+              </a:rPr>
+              <a:t>MODEL 2</a:t>
+            </a:r>
+            <a:endParaRPr lang="en-US" sz="1200" dirty="0"/>
+          </a:p>
+        </p:txBody>
+      </p:sp>
+      <p:sp>
+        <p:nvSpPr>
+          <p:cNvPr id="23" name="Text 21"/>
+          <p:cNvSpPr/>
+          <p:nvPr/>
+        </p:nvSpPr>
+        <p:spPr>
+          <a:xfrm>
+            <a:off x="5614416" y="3218688"/>
+            <a:ext cx="2249424" cy="365760"/>
+          </a:xfrm>
+          <a:prstGeom prst="rect">
+            <a:avLst/>
+          </a:prstGeom>
+          <a:noFill/>
+          <a:ln/>
+        </p:spPr>
+        <p:txBody>
+          <a:bodyPr wrap="square" lIns="0" tIns="0" rIns="0" bIns="0" rtlCol="0" anchor="ctr"/>
+          <a:lstStyle/>
+          <a:p>
+            <a:pPr indent="0" marL="0">
+              <a:buNone/>
+            </a:pPr>
+            <a:r>
+              <a:rPr lang="en-US" sz="1900" b="1" dirty="0">
+                <a:solidFill>
+                  <a:srgbClr val="0B1437"/>
+                </a:solidFill>
+                <a:latin typeface="Aptos" pitchFamily="34" charset="0"/>
+                <a:ea typeface="Aptos" pitchFamily="34" charset="-122"/>
+                <a:cs typeface="Aptos" pitchFamily="34" charset="-120"/>
+              </a:rPr>
+              <a:t>We start, you scale</a:t>
+            </a:r>
+            <a:endParaRPr lang="en-US" sz="1900" dirty="0"/>
+          </a:p>
+        </p:txBody>
+      </p:sp>
+      <p:sp>
+        <p:nvSpPr>
+          <p:cNvPr id="24" name="Text 22"/>
+          <p:cNvSpPr/>
+          <p:nvPr/>
+        </p:nvSpPr>
+        <p:spPr>
+          <a:xfrm>
+            <a:off x="4791456" y="3840480"/>
+            <a:ext cx="2980944" cy="292608"/>
+          </a:xfrm>
+          <a:prstGeom prst="rect">
+            <a:avLst/>
+          </a:prstGeom>
+          <a:noFill/>
+          <a:ln/>
+        </p:spPr>
+        <p:txBody>
+          <a:bodyPr wrap="square" lIns="0" tIns="0" rIns="0" bIns="0" rtlCol="0" anchor="ctr"/>
+          <a:lstStyle/>
+          <a:p>
+            <a:pPr indent="0" marL="0">
+              <a:buNone/>
+            </a:pPr>
+            <a:r>
+              <a:rPr lang="en-US" sz="1300" b="1" i="1" dirty="0">
+                <a:solidFill>
+                  <a:srgbClr val="8A93B8"/>
+                </a:solidFill>
+                <a:latin typeface="Aptos" pitchFamily="34" charset="0"/>
+                <a:ea typeface="Aptos" pitchFamily="34" charset="-122"/>
+                <a:cs typeface="Aptos" pitchFamily="34" charset="-120"/>
+              </a:rPr>
+              <a:t>When leader time is limited</a:t>
+            </a:r>
+            <a:endParaRPr lang="en-US" sz="1300" dirty="0"/>
+          </a:p>
+        </p:txBody>
+      </p:sp>
+      <p:sp>
+        <p:nvSpPr>
+          <p:cNvPr id="25" name="Shape 23"/>
+          <p:cNvSpPr/>
+          <p:nvPr/>
+        </p:nvSpPr>
+        <p:spPr>
+          <a:xfrm>
+            <a:off x="4828032" y="4297680"/>
+            <a:ext cx="128016" cy="128016"/>
+          </a:xfrm>
+          <a:prstGeom prst="ellipse">
+            <a:avLst/>
+          </a:prstGeom>
+          <a:solidFill>
+            <a:srgbClr val="7C5CFC"/>
+          </a:solidFill>
+          <a:ln/>
+        </p:spPr>
+      </p:sp>
+      <p:sp>
+        <p:nvSpPr>
+          <p:cNvPr id="26" name="Text 24"/>
+          <p:cNvSpPr/>
+          <p:nvPr/>
+        </p:nvSpPr>
+        <p:spPr>
+          <a:xfrm>
+            <a:off x="5065776" y="4206240"/>
+            <a:ext cx="2724912" cy="402336"/>
+          </a:xfrm>
+          <a:prstGeom prst="rect">
+            <a:avLst/>
+          </a:prstGeom>
+          <a:noFill/>
+          <a:ln/>
+        </p:spPr>
+        <p:txBody>
+          <a:bodyPr wrap="square" lIns="0" tIns="0" rIns="0" bIns="0" rtlCol="0" anchor="t"/>
+          <a:lstStyle/>
+          <a:p>
+            <a:pPr indent="0" marL="0">
+              <a:lnSpc>
+                <a:spcPct val="104000"/>
+              </a:lnSpc>
+              <a:buNone/>
+            </a:pPr>
+            <a:r>
+              <a:rPr lang="en-US" sz="1200" dirty="0">
+                <a:solidFill>
+                  <a:srgbClr val="43507B"/>
+                </a:solidFill>
+                <a:latin typeface="Aptos" pitchFamily="34" charset="0"/>
+                <a:ea typeface="Aptos" pitchFamily="34" charset="-122"/>
+                <a:cs typeface="Aptos" pitchFamily="34" charset="-120"/>
+              </a:rPr>
+              <a:t>We run the foundation live</a:t>
+            </a:r>
+            <a:endParaRPr lang="en-US" sz="1200" dirty="0"/>
+          </a:p>
+        </p:txBody>
+      </p:sp>
+      <p:sp>
+        <p:nvSpPr>
+          <p:cNvPr id="27" name="Shape 25"/>
+          <p:cNvSpPr/>
+          <p:nvPr/>
+        </p:nvSpPr>
+        <p:spPr>
+          <a:xfrm>
+            <a:off x="4828032" y="4754880"/>
+            <a:ext cx="128016" cy="128016"/>
+          </a:xfrm>
+          <a:prstGeom prst="ellipse">
+            <a:avLst/>
+          </a:prstGeom>
+          <a:solidFill>
+            <a:srgbClr val="7C5CFC"/>
+          </a:solidFill>
+          <a:ln/>
+        </p:spPr>
+      </p:sp>
+      <p:sp>
+        <p:nvSpPr>
+          <p:cNvPr id="28" name="Text 26"/>
+          <p:cNvSpPr/>
+          <p:nvPr/>
+        </p:nvSpPr>
+        <p:spPr>
+          <a:xfrm>
+            <a:off x="5065776" y="4663440"/>
+            <a:ext cx="2724912" cy="402336"/>
+          </a:xfrm>
+          <a:prstGeom prst="rect">
+            <a:avLst/>
+          </a:prstGeom>
+          <a:noFill/>
+          <a:ln/>
+        </p:spPr>
+        <p:txBody>
+          <a:bodyPr wrap="square" lIns="0" tIns="0" rIns="0" bIns="0" rtlCol="0" anchor="t"/>
+          <a:lstStyle/>
+          <a:p>
+            <a:pPr indent="0" marL="0">
+              <a:lnSpc>
+                <a:spcPct val="104000"/>
+              </a:lnSpc>
+              <a:buNone/>
+            </a:pPr>
+            <a:r>
+              <a:rPr lang="en-US" sz="1200" dirty="0">
+                <a:solidFill>
+                  <a:srgbClr val="43507B"/>
+                </a:solidFill>
+                <a:latin typeface="Aptos" pitchFamily="34" charset="0"/>
+                <a:ea typeface="Aptos" pitchFamily="34" charset="-122"/>
+                <a:cs typeface="Aptos" pitchFamily="34" charset="-120"/>
+              </a:rPr>
+              <a:t>Plus tailored exec one-on-ones</a:t>
+            </a:r>
+            <a:endParaRPr lang="en-US" sz="1200" dirty="0"/>
+          </a:p>
+        </p:txBody>
+      </p:sp>
+      <p:sp>
+        <p:nvSpPr>
+          <p:cNvPr id="90001" name="Text 26c"/>
+          <p:cNvSpPr/>
+          <p:nvPr/>
+        </p:nvSpPr>
+        <p:spPr>
+          <a:xfrm>
+            <a:off x="5065776" y="5120640"/>
+            <a:ext cx="2724912" cy="402336"/>
+          </a:xfrm>
+          <a:prstGeom prst="rect">
+            <a:avLst/>
+          </a:prstGeom>
+          <a:noFill/>
+          <a:ln/>
+        </p:spPr>
+        <p:txBody>
+          <a:bodyPr wrap="square" lIns="0" tIns="0" rIns="0" bIns="0" rtlCol="0" anchor="t"/>
+          <a:lstStyle/>
+          <a:p>
+            <a:pPr indent="0" marL="0">
+              <a:lnSpc>
+                <a:spcPct val="104000"/>
+              </a:lnSpc>
+              <a:buNone/>
+            </a:pPr>
+            <a:r>
+              <a:rPr lang="en-US" sz="1200" dirty="0">
+                <a:solidFill>
+                  <a:srgbClr val="43507B"/>
+                </a:solidFill>
+                <a:latin typeface="Aptos" pitchFamily="34" charset="0"/>
+                <a:ea typeface="Aptos" pitchFamily="34" charset="-122"/>
+                <a:cs typeface="Aptos" pitchFamily="34" charset="-120"/>
+              </a:rPr>
+              <a:t>We train your trainers on the rest</a:t>
+            </a:r>
+            <a:endParaRPr lang="en-US" sz="1200" dirty="0"/>
+          </a:p>
+        </p:txBody>
+      </p:sp>
+      <p:sp>
+        <p:nvSpPr>
+          <p:cNvPr id="90002" name="Shape 25c"/>
+          <p:cNvSpPr/>
+          <p:nvPr/>
+        </p:nvSpPr>
+        <p:spPr>
+          <a:xfrm>
+            <a:off x="4828032" y="5212080"/>
+            <a:ext cx="128016" cy="128016"/>
+          </a:xfrm>
+          <a:prstGeom prst="ellipse">
+            <a:avLst/>
+          </a:prstGeom>
+          <a:solidFill>
+            <a:srgbClr val="7C5CFC"/>
+          </a:solidFill>
+          <a:ln/>
+        </p:spPr>
+      </p:sp>
+      <p:sp>
+        <p:nvSpPr>
+          <p:cNvPr id="31" name="Shape 29"/>
+          <p:cNvSpPr/>
+          <p:nvPr/>
+        </p:nvSpPr>
+        <p:spPr>
+          <a:xfrm>
+            <a:off x="8211312" y="2286000"/>
+            <a:ext cx="3529584" cy="3657600"/>
+          </a:xfrm>
+          <a:prstGeom prst="roundRect">
+            <a:avLst>
+              <a:gd name="adj" fmla="val 2591"/>
+            </a:avLst>
+          </a:prstGeom>
+          <a:solidFill>
+            <a:srgbClr val="FFFFFF"/>
+          </a:solidFill>
+          <a:ln w="12700">
+            <a:solidFill>
+              <a:srgbClr val="E4E9F7"/>
+            </a:solidFill>
+            <a:prstDash val="solid"/>
+          </a:ln>
+          <a:effectLst>
+            <a:outerShdw sx="100000" sy="100000" kx="0" ky="0" algn="bl" rotWithShape="0" blurRad="114300" dist="38100" dir="5400000">
+              <a:srgbClr val="0B1437">
+                <a:alpha val="10000"/>
+              </a:srgbClr>
+            </a:outerShdw>
+          </a:effectLst>
+        </p:spPr>
+      </p:sp>
+      <p:sp>
+        <p:nvSpPr>
+          <p:cNvPr id="32" name="Shape 30"/>
+          <p:cNvSpPr/>
+          <p:nvPr/>
+        </p:nvSpPr>
+        <p:spPr>
+          <a:xfrm>
+            <a:off x="8211312" y="2286000"/>
+            <a:ext cx="3529584" cy="128016"/>
+          </a:xfrm>
+          <a:prstGeom prst="rect">
+            <a:avLst/>
+          </a:prstGeom>
+          <a:solidFill>
+            <a:srgbClr val="F0A500"/>
+          </a:solidFill>
+          <a:ln/>
+        </p:spPr>
+      </p:sp>
+      <p:sp>
+        <p:nvSpPr>
+          <p:cNvPr id="33" name="Shape 31"/>
+          <p:cNvSpPr/>
+          <p:nvPr/>
+        </p:nvSpPr>
+        <p:spPr>
+          <a:xfrm>
+            <a:off x="8485632" y="2651760"/>
+            <a:ext cx="658368" cy="658368"/>
+          </a:xfrm>
+          <a:prstGeom prst="ellipse">
+            <a:avLst/>
+          </a:prstGeom>
+          <a:solidFill>
+            <a:srgbClr val="F0A500"/>
+          </a:solidFill>
+          <a:ln/>
+        </p:spPr>
+      </p:sp>
+      <p:sp>
+        <p:nvSpPr>
+          <p:cNvPr id="34" name="Text 32"/>
+          <p:cNvSpPr/>
+          <p:nvPr/>
+        </p:nvSpPr>
+        <p:spPr>
+          <a:xfrm>
+            <a:off x="8485632" y="2651760"/>
+            <a:ext cx="658368" cy="658368"/>
+          </a:xfrm>
+          <a:prstGeom prst="rect">
+            <a:avLst/>
+          </a:prstGeom>
+          <a:noFill/>
+          <a:ln/>
+        </p:spPr>
+        <p:txBody>
+          <a:bodyPr wrap="square" lIns="0" tIns="0" rIns="0" bIns="0" rtlCol="0" anchor="ctr"/>
+          <a:lstStyle/>
+          <a:p>
+            <a:pPr algn="ctr" indent="0" marL="0">
+              <a:buNone/>
+            </a:pPr>
+            <a:r>
+              <a:rPr lang="en-US" sz="3000" b="1" dirty="0">
+                <a:solidFill>
+                  <a:srgbClr val="FFFFFF"/>
+                </a:solidFill>
+                <a:latin typeface="Aptos" pitchFamily="34" charset="0"/>
+                <a:ea typeface="Aptos" pitchFamily="34" charset="-122"/>
+                <a:cs typeface="Aptos" pitchFamily="34" charset="-120"/>
+              </a:rPr>
+              <a:t>3</a:t>
+            </a:r>
+            <a:endParaRPr lang="en-US" sz="3000" dirty="0"/>
+          </a:p>
+        </p:txBody>
+      </p:sp>
+      <p:sp>
+        <p:nvSpPr>
+          <p:cNvPr id="35" name="Text 33"/>
+          <p:cNvSpPr/>
+          <p:nvPr/>
+        </p:nvSpPr>
+        <p:spPr>
+          <a:xfrm>
+            <a:off x="9308592" y="2688336"/>
+            <a:ext cx="2249424" cy="274320"/>
+          </a:xfrm>
+          <a:prstGeom prst="rect">
+            <a:avLst/>
+          </a:prstGeom>
+          <a:noFill/>
+          <a:ln/>
+        </p:spPr>
+        <p:txBody>
+          <a:bodyPr wrap="square" lIns="0" tIns="0" rIns="0" bIns="0" rtlCol="0" anchor="ctr"/>
+          <a:lstStyle/>
+          <a:p>
+            <a:pPr indent="0" marL="0">
+              <a:buNone/>
+            </a:pPr>
+            <a:r>
+              <a:rPr lang="en-US" sz="1200" b="1" spc="200" kern="0" dirty="0">
+                <a:solidFill>
+                  <a:srgbClr val="F0A500"/>
+                </a:solidFill>
+                <a:latin typeface="Aptos" pitchFamily="34" charset="0"/>
+                <a:ea typeface="Aptos" pitchFamily="34" charset="-122"/>
+                <a:cs typeface="Aptos" pitchFamily="34" charset="-120"/>
+              </a:rPr>
+              <a:t>MODEL 3</a:t>
+            </a:r>
+            <a:endParaRPr lang="en-US" sz="1200" dirty="0"/>
+          </a:p>
+        </p:txBody>
+      </p:sp>
+      <p:sp>
+        <p:nvSpPr>
+          <p:cNvPr id="36" name="Text 34"/>
+          <p:cNvSpPr/>
+          <p:nvPr/>
+        </p:nvSpPr>
+        <p:spPr>
+          <a:xfrm>
+            <a:off x="9308592" y="2944368"/>
+            <a:ext cx="2249424" cy="365760"/>
+          </a:xfrm>
+          <a:prstGeom prst="rect">
+            <a:avLst/>
+          </a:prstGeom>
+          <a:noFill/>
+          <a:ln/>
+        </p:spPr>
+        <p:txBody>
+          <a:bodyPr wrap="square" lIns="0" tIns="0" rIns="0" bIns="0" rtlCol="0" anchor="ctr"/>
+          <a:lstStyle/>
+          <a:p>
+            <a:pPr indent="0" marL="0">
+              <a:buNone/>
+            </a:pPr>
+            <a:r>
+              <a:rPr lang="en-US" sz="1900" b="1" dirty="0">
+                <a:solidFill>
+                  <a:srgbClr val="0B1437"/>
+                </a:solidFill>
+                <a:latin typeface="Aptos" pitchFamily="34" charset="0"/>
+                <a:ea typeface="Aptos" pitchFamily="34" charset="-122"/>
+                <a:cs typeface="Aptos" pitchFamily="34" charset="-120"/>
+              </a:rPr>
+              <a:t>Partner-led</a:t>
+            </a:r>
+            <a:endParaRPr lang="en-US" sz="1900" dirty="0"/>
+          </a:p>
+        </p:txBody>
+      </p:sp>
+      <p:sp>
+        <p:nvSpPr>
+          <p:cNvPr id="37" name="Text 35"/>
+          <p:cNvSpPr/>
+          <p:nvPr/>
+        </p:nvSpPr>
+        <p:spPr>
+          <a:xfrm>
+            <a:off x="8485632" y="3566160"/>
+            <a:ext cx="2980944" cy="292608"/>
+          </a:xfrm>
+          <a:prstGeom prst="rect">
+            <a:avLst/>
+          </a:prstGeom>
+          <a:noFill/>
+          <a:ln/>
+        </p:spPr>
+        <p:txBody>
+          <a:bodyPr wrap="square" lIns="0" tIns="0" rIns="0" bIns="0" rtlCol="0" anchor="ctr"/>
+          <a:lstStyle/>
+          <a:p>
+            <a:pPr indent="0" marL="0">
+              <a:buNone/>
+            </a:pPr>
+            <a:r>
+              <a:rPr lang="en-US" sz="1300" b="1" i="1" dirty="0">
+                <a:solidFill>
+                  <a:srgbClr val="8A93B8"/>
+                </a:solidFill>
+                <a:latin typeface="Aptos" pitchFamily="34" charset="0"/>
+                <a:ea typeface="Aptos" pitchFamily="34" charset="-122"/>
+                <a:cs typeface="Aptos" pitchFamily="34" charset="-120"/>
+              </a:rPr>
+              <a:t>When you want a team to own it</a:t>
+            </a:r>
+            <a:endParaRPr lang="en-US" sz="1300" dirty="0"/>
+          </a:p>
+        </p:txBody>
+      </p:sp>
+      <p:sp>
+        <p:nvSpPr>
+          <p:cNvPr id="38" name="Shape 36"/>
+          <p:cNvSpPr/>
+          <p:nvPr/>
+        </p:nvSpPr>
+        <p:spPr>
+          <a:xfrm>
+            <a:off x="8522208" y="4023360"/>
+            <a:ext cx="128016" cy="128016"/>
+          </a:xfrm>
+          <a:prstGeom prst="ellipse">
+            <a:avLst/>
+          </a:prstGeom>
+          <a:solidFill>
+            <a:srgbClr val="F0A500"/>
+          </a:solidFill>
+          <a:ln/>
+        </p:spPr>
+      </p:sp>
+      <p:sp>
+        <p:nvSpPr>
+          <p:cNvPr id="39" name="Text 37"/>
+          <p:cNvSpPr/>
+          <p:nvPr/>
+        </p:nvSpPr>
+        <p:spPr>
+          <a:xfrm>
+            <a:off x="8759952" y="3931920"/>
+            <a:ext cx="2724912" cy="402336"/>
+          </a:xfrm>
+          <a:prstGeom prst="rect">
+            <a:avLst/>
+          </a:prstGeom>
+          <a:noFill/>
+          <a:ln/>
+        </p:spPr>
+        <p:txBody>
+          <a:bodyPr wrap="square" lIns="0" tIns="0" rIns="0" bIns="0" rtlCol="0" anchor="t"/>
+          <a:lstStyle/>
+          <a:p>
+            <a:pPr indent="0" marL="0">
+              <a:lnSpc>
+                <a:spcPct val="104000"/>
+              </a:lnSpc>
+              <a:buNone/>
+            </a:pPr>
+            <a:r>
+              <a:rPr lang="en-US" sz="1200" dirty="0">
+                <a:solidFill>
+                  <a:srgbClr val="43507B"/>
+                </a:solidFill>
+                <a:latin typeface="Aptos" pitchFamily="34" charset="0"/>
+                <a:ea typeface="Aptos" pitchFamily="34" charset="-122"/>
+                <a:cs typeface="Aptos" pitchFamily="34" charset="-120"/>
+              </a:rPr>
+              <a:t>A Microsoft partner runs it</a:t>
+            </a:r>
+            <a:endParaRPr lang="en-US" sz="1200" dirty="0"/>
+          </a:p>
+        </p:txBody>
+      </p:sp>
+      <p:sp>
+        <p:nvSpPr>
+          <p:cNvPr id="40" name="Shape 38"/>
+          <p:cNvSpPr/>
+          <p:nvPr/>
+        </p:nvSpPr>
+        <p:spPr>
+          <a:xfrm>
+            <a:off x="8522208" y="4480560"/>
+            <a:ext cx="128016" cy="128016"/>
+          </a:xfrm>
+          <a:prstGeom prst="ellipse">
+            <a:avLst/>
+          </a:prstGeom>
+          <a:solidFill>
+            <a:srgbClr val="F0A500"/>
+          </a:solidFill>
+          <a:ln/>
+        </p:spPr>
+      </p:sp>
+      <p:sp>
+        <p:nvSpPr>
+          <p:cNvPr id="41" name="Text 39"/>
+          <p:cNvSpPr/>
+          <p:nvPr/>
+        </p:nvSpPr>
+        <p:spPr>
+          <a:xfrm>
+            <a:off x="8759952" y="4389120"/>
+            <a:ext cx="2724912" cy="402336"/>
+          </a:xfrm>
+          <a:prstGeom prst="rect">
+            <a:avLst/>
+          </a:prstGeom>
+          <a:noFill/>
+          <a:ln/>
+        </p:spPr>
+        <p:txBody>
+          <a:bodyPr wrap="square" lIns="0" tIns="0" rIns="0" bIns="0" rtlCol="0" anchor="t"/>
+          <a:lstStyle/>
+          <a:p>
+            <a:pPr indent="0" marL="0">
+              <a:lnSpc>
+                <a:spcPct val="104000"/>
+              </a:lnSpc>
+              <a:buNone/>
+            </a:pPr>
+            <a:r>
+              <a:rPr lang="en-US" sz="1200" dirty="0">
+                <a:solidFill>
+                  <a:srgbClr val="43507B"/>
+                </a:solidFill>
+                <a:latin typeface="Aptos" pitchFamily="34" charset="0"/>
+                <a:ea typeface="Aptos" pitchFamily="34" charset="-122"/>
+                <a:cs typeface="Aptos" pitchFamily="34" charset="-120"/>
+              </a:rPr>
+              <a:t>Delivered and customized for you</a:t>
+            </a:r>
+            <a:endParaRPr lang="en-US" sz="1200" dirty="0"/>
+          </a:p>
+        </p:txBody>
+      </p:sp>
+      <p:sp>
+        <p:nvSpPr>
+          <p:cNvPr id="42" name="Shape 40"/>
+          <p:cNvSpPr/>
+          <p:nvPr/>
+        </p:nvSpPr>
+        <p:spPr>
+          <a:xfrm>
+            <a:off x="8522208" y="4937760"/>
+            <a:ext cx="128016" cy="128016"/>
+          </a:xfrm>
+          <a:prstGeom prst="ellipse">
+            <a:avLst/>
+          </a:prstGeom>
+          <a:solidFill>
+            <a:srgbClr val="F0A500"/>
+          </a:solidFill>
+          <a:ln/>
+        </p:spPr>
+      </p:sp>
+      <p:sp>
+        <p:nvSpPr>
+          <p:cNvPr id="43" name="Text 41"/>
+          <p:cNvSpPr/>
+          <p:nvPr/>
+        </p:nvSpPr>
+        <p:spPr>
+          <a:xfrm>
+            <a:off x="8759952" y="4846320"/>
+            <a:ext cx="2724912" cy="402336"/>
+          </a:xfrm>
+          <a:prstGeom prst="rect">
+            <a:avLst/>
+          </a:prstGeom>
+          <a:noFill/>
+          <a:ln/>
+        </p:spPr>
+        <p:txBody>
+          <a:bodyPr wrap="square" lIns="0" tIns="0" rIns="0" bIns="0" rtlCol="0" anchor="t"/>
+          <a:lstStyle/>
+          <a:p>
+            <a:pPr indent="0" marL="0">
+              <a:lnSpc>
+                <a:spcPct val="104000"/>
+              </a:lnSpc>
+              <a:buNone/>
+            </a:pPr>
+            <a:r>
+              <a:rPr lang="en-US" sz="1200" dirty="0">
+                <a:solidFill>
+                  <a:srgbClr val="43507B"/>
+                </a:solidFill>
+                <a:latin typeface="Aptos" pitchFamily="34" charset="0"/>
+                <a:ea typeface="Aptos" pitchFamily="34" charset="-122"/>
+                <a:cs typeface="Aptos" pitchFamily="34" charset="-120"/>
+              </a:rPr>
+              <a:t>They own rollout and adoption</a:t>
+            </a:r>
+            <a:endParaRPr lang="en-US" sz="1200" dirty="0"/>
+          </a:p>
+        </p:txBody>
+      </p:sp>
+      <p:sp>
+        <p:nvSpPr>
+          <p:cNvPr id="44" name="Text 42"/>
+          <p:cNvSpPr/>
+          <p:nvPr/>
+        </p:nvSpPr>
+        <p:spPr>
+          <a:xfrm>
+            <a:off x="640080" y="6419088"/>
+            <a:ext cx="8229600" cy="274320"/>
+          </a:xfrm>
+          <a:prstGeom prst="rect">
+            <a:avLst/>
+          </a:prstGeom>
+          <a:noFill/>
+          <a:ln/>
+        </p:spPr>
+        <p:txBody>
+          <a:bodyPr wrap="square" lIns="0" tIns="0" rIns="0" bIns="0" rtlCol="0" anchor="ctr"/>
+          <a:lstStyle/>
+          <a:p>
+            <a:pPr algn="l" indent="0" marL="0">
+              <a:buNone/>
+            </a:pPr>
+            <a:r>
+              <a:rPr lang="en-US" sz="900" dirty="0">
+                <a:solidFill>
+                  <a:srgbClr val="8A93B8"/>
+                </a:solidFill>
+                <a:latin typeface="Aptos" pitchFamily="34" charset="0"/>
+                <a:ea typeface="Aptos" pitchFamily="34" charset="-122"/>
+                <a:cs typeface="Aptos" pitchFamily="34" charset="-120"/>
+              </a:rPr>
+              <a:t>Microsoft 365 Copilot Premium  ·  Executive Working Session</a:t>
+            </a:r>
+            <a:endParaRPr lang="en-US" sz="900" dirty="0"/>
+          </a:p>
+        </p:txBody>
+      </p:sp>
+      <p:sp>
+        <p:nvSpPr>
+          <p:cNvPr id="45" name="Text 43"/>
+          <p:cNvSpPr/>
+          <p:nvPr/>
+        </p:nvSpPr>
+        <p:spPr>
+          <a:xfrm>
+            <a:off x="11155680" y="6419088"/>
+            <a:ext cx="640080" cy="274320"/>
+          </a:xfrm>
+          <a:prstGeom prst="rect">
+            <a:avLst/>
+          </a:prstGeom>
+          <a:noFill/>
+          <a:ln/>
+        </p:spPr>
+        <p:txBody>
+          <a:bodyPr wrap="square" lIns="0" tIns="0" rIns="0" bIns="0" rtlCol="0" anchor="ctr"/>
+          <a:lstStyle/>
+          <a:p>
+            <a:pPr algn="r" indent="0" marL="0">
+              <a:buNone/>
+            </a:pPr>
+            <a:r>
+              <a:rPr lang="en-US" sz="900" dirty="0">
+                <a:solidFill>
+                  <a:srgbClr val="8A93B8"/>
+                </a:solidFill>
+                <a:latin typeface="Aptos" pitchFamily="34" charset="0"/>
+                <a:ea typeface="Aptos" pitchFamily="34" charset="-122"/>
+                <a:cs typeface="Aptos" pitchFamily="34" charset="-120"/>
+              </a:rPr>
+              <a:t>26</a:t>
+            </a:r>
+            <a:endParaRPr lang="en-US" sz="900" dirty="0"/>
           </a:p>
         </p:txBody>
       </p:sp>
